--- a/docs/pptx/auc3/jx-auc3-linsubhr-ratio-hosp6.pptx
+++ b/docs/pptx/auc3/jx-auc3-linsubhr-ratio-hosp6.pptx
@@ -2271,7 +2271,7 @@
           </p:nvSpPr>
           <p:spPr>
             <a:xfrm>
-              <a:off x="817517" y="5114368"/>
+              <a:off x="817517" y="5142518"/>
               <a:ext cx="7799693" cy="0"/>
             </a:xfrm>
             <a:custGeom>
@@ -2314,7 +2314,7 @@
           </p:nvSpPr>
           <p:spPr>
             <a:xfrm>
-              <a:off x="817517" y="4244691"/>
+              <a:off x="817517" y="4313054"/>
               <a:ext cx="7799693" cy="0"/>
             </a:xfrm>
             <a:custGeom>
@@ -2357,7 +2357,7 @@
           </p:nvSpPr>
           <p:spPr>
             <a:xfrm>
-              <a:off x="817517" y="3375014"/>
+              <a:off x="817517" y="3483591"/>
               <a:ext cx="7799693" cy="0"/>
             </a:xfrm>
             <a:custGeom>
@@ -2400,7 +2400,7 @@
           </p:nvSpPr>
           <p:spPr>
             <a:xfrm>
-              <a:off x="817517" y="2505337"/>
+              <a:off x="817517" y="2654127"/>
               <a:ext cx="7799693" cy="0"/>
             </a:xfrm>
             <a:custGeom>
@@ -2443,15 +2443,15 @@
           </p:nvSpPr>
           <p:spPr>
             <a:xfrm>
-              <a:off x="1615213" y="1896563"/>
-              <a:ext cx="0" cy="3826579"/>
+              <a:off x="1615213" y="2073503"/>
+              <a:ext cx="0" cy="3649639"/>
             </a:xfrm>
             <a:custGeom>
               <a:avLst/>
               <a:pathLst>
-                <a:path w="0" h="3826579">
+                <a:path w="0" h="3649639">
                   <a:moveTo>
-                    <a:pt x="0" y="3826579"/>
+                    <a:pt x="0" y="3649639"/>
                   </a:moveTo>
                   <a:lnTo>
                     <a:pt x="0" y="0"/>
@@ -2486,15 +2486,15 @@
           </p:nvSpPr>
           <p:spPr>
             <a:xfrm>
-              <a:off x="3387871" y="1896563"/>
-              <a:ext cx="0" cy="3826579"/>
+              <a:off x="3387871" y="2073503"/>
+              <a:ext cx="0" cy="3649639"/>
             </a:xfrm>
             <a:custGeom>
               <a:avLst/>
               <a:pathLst>
-                <a:path w="0" h="3826579">
+                <a:path w="0" h="3649639">
                   <a:moveTo>
-                    <a:pt x="0" y="3826579"/>
+                    <a:pt x="0" y="3649639"/>
                   </a:moveTo>
                   <a:lnTo>
                     <a:pt x="0" y="0"/>
@@ -2529,15 +2529,15 @@
           </p:nvSpPr>
           <p:spPr>
             <a:xfrm>
-              <a:off x="5160528" y="1896563"/>
-              <a:ext cx="0" cy="3826579"/>
+              <a:off x="5160528" y="2073503"/>
+              <a:ext cx="0" cy="3649639"/>
             </a:xfrm>
             <a:custGeom>
               <a:avLst/>
               <a:pathLst>
-                <a:path w="0" h="3826579">
+                <a:path w="0" h="3649639">
                   <a:moveTo>
-                    <a:pt x="0" y="3826579"/>
+                    <a:pt x="0" y="3649639"/>
                   </a:moveTo>
                   <a:lnTo>
                     <a:pt x="0" y="0"/>
@@ -2572,15 +2572,15 @@
           </p:nvSpPr>
           <p:spPr>
             <a:xfrm>
-              <a:off x="6933186" y="1896563"/>
-              <a:ext cx="0" cy="3826579"/>
+              <a:off x="6933186" y="2073503"/>
+              <a:ext cx="0" cy="3649639"/>
             </a:xfrm>
             <a:custGeom>
               <a:avLst/>
               <a:pathLst>
-                <a:path w="0" h="3826579">
+                <a:path w="0" h="3649639">
                   <a:moveTo>
-                    <a:pt x="0" y="3826579"/>
+                    <a:pt x="0" y="3649639"/>
                   </a:moveTo>
                   <a:lnTo>
                     <a:pt x="0" y="0"/>
@@ -2615,7 +2615,7 @@
           </p:nvSpPr>
           <p:spPr>
             <a:xfrm>
-              <a:off x="817517" y="5549207"/>
+              <a:off x="817517" y="5557249"/>
               <a:ext cx="7799693" cy="0"/>
             </a:xfrm>
             <a:custGeom>
@@ -2658,7 +2658,7 @@
           </p:nvSpPr>
           <p:spPr>
             <a:xfrm>
-              <a:off x="817517" y="4679530"/>
+              <a:off x="817517" y="4727786"/>
               <a:ext cx="7799693" cy="0"/>
             </a:xfrm>
             <a:custGeom>
@@ -2701,7 +2701,7 @@
           </p:nvSpPr>
           <p:spPr>
             <a:xfrm>
-              <a:off x="817517" y="3809853"/>
+              <a:off x="817517" y="3898322"/>
               <a:ext cx="7799693" cy="0"/>
             </a:xfrm>
             <a:custGeom>
@@ -2744,7 +2744,7 @@
           </p:nvSpPr>
           <p:spPr>
             <a:xfrm>
-              <a:off x="817517" y="2940175"/>
+              <a:off x="817517" y="3068859"/>
               <a:ext cx="7799693" cy="0"/>
             </a:xfrm>
             <a:custGeom>
@@ -2787,7 +2787,7 @@
           </p:nvSpPr>
           <p:spPr>
             <a:xfrm>
-              <a:off x="817517" y="2070498"/>
+              <a:off x="817517" y="2239395"/>
               <a:ext cx="7799693" cy="0"/>
             </a:xfrm>
             <a:custGeom>
@@ -2830,15 +2830,15 @@
           </p:nvSpPr>
           <p:spPr>
             <a:xfrm>
-              <a:off x="2501542" y="1896563"/>
-              <a:ext cx="0" cy="3826579"/>
+              <a:off x="2501542" y="2073503"/>
+              <a:ext cx="0" cy="3649639"/>
             </a:xfrm>
             <a:custGeom>
               <a:avLst/>
               <a:pathLst>
-                <a:path w="0" h="3826579">
+                <a:path w="0" h="3649639">
                   <a:moveTo>
-                    <a:pt x="0" y="3826579"/>
+                    <a:pt x="0" y="3649639"/>
                   </a:moveTo>
                   <a:lnTo>
                     <a:pt x="0" y="0"/>
@@ -2873,15 +2873,15 @@
           </p:nvSpPr>
           <p:spPr>
             <a:xfrm>
-              <a:off x="4274200" y="1896563"/>
-              <a:ext cx="0" cy="3826579"/>
+              <a:off x="4274200" y="2073503"/>
+              <a:ext cx="0" cy="3649639"/>
             </a:xfrm>
             <a:custGeom>
               <a:avLst/>
               <a:pathLst>
-                <a:path w="0" h="3826579">
+                <a:path w="0" h="3649639">
                   <a:moveTo>
-                    <a:pt x="0" y="3826579"/>
+                    <a:pt x="0" y="3649639"/>
                   </a:moveTo>
                   <a:lnTo>
                     <a:pt x="0" y="0"/>
@@ -2916,15 +2916,15 @@
           </p:nvSpPr>
           <p:spPr>
             <a:xfrm>
-              <a:off x="6046857" y="1896563"/>
-              <a:ext cx="0" cy="3826579"/>
+              <a:off x="6046857" y="2073503"/>
+              <a:ext cx="0" cy="3649639"/>
             </a:xfrm>
             <a:custGeom>
               <a:avLst/>
               <a:pathLst>
-                <a:path w="0" h="3826579">
+                <a:path w="0" h="3649639">
                   <a:moveTo>
-                    <a:pt x="0" y="3826579"/>
+                    <a:pt x="0" y="3649639"/>
                   </a:moveTo>
                   <a:lnTo>
                     <a:pt x="0" y="0"/>
@@ -2959,15 +2959,15 @@
           </p:nvSpPr>
           <p:spPr>
             <a:xfrm>
-              <a:off x="7819515" y="1896563"/>
-              <a:ext cx="0" cy="3826579"/>
+              <a:off x="7819515" y="2073503"/>
+              <a:ext cx="0" cy="3649639"/>
             </a:xfrm>
             <a:custGeom>
               <a:avLst/>
               <a:pathLst>
-                <a:path w="0" h="3826579">
+                <a:path w="0" h="3649639">
                   <a:moveTo>
-                    <a:pt x="0" y="3826579"/>
+                    <a:pt x="0" y="3649639"/>
                   </a:moveTo>
                   <a:lnTo>
                     <a:pt x="0" y="0"/>
@@ -3002,531 +3002,531 @@
           </p:nvSpPr>
           <p:spPr>
             <a:xfrm>
-              <a:off x="817517" y="1896563"/>
-              <a:ext cx="7392041" cy="3628388"/>
+              <a:off x="817517" y="2073503"/>
+              <a:ext cx="7392041" cy="3460613"/>
             </a:xfrm>
             <a:custGeom>
               <a:avLst/>
               <a:pathLst>
-                <a:path w="7392041" h="3628388">
+                <a:path w="7392041" h="3460613">
                   <a:moveTo>
                     <a:pt x="1659812" y="0"/>
                   </a:moveTo>
                   <a:lnTo>
-                    <a:pt x="1676016" y="52788"/>
-                  </a:lnTo>
-                  <a:lnTo>
-                    <a:pt x="1753260" y="287986"/>
-                  </a:lnTo>
-                  <a:lnTo>
-                    <a:pt x="1830504" y="507818"/>
-                  </a:lnTo>
-                  <a:lnTo>
-                    <a:pt x="1907747" y="713287"/>
-                  </a:lnTo>
-                  <a:lnTo>
-                    <a:pt x="1984991" y="905332"/>
-                  </a:lnTo>
-                  <a:lnTo>
-                    <a:pt x="2062234" y="1084829"/>
-                  </a:lnTo>
-                  <a:lnTo>
-                    <a:pt x="2139478" y="1252599"/>
-                  </a:lnTo>
-                  <a:lnTo>
-                    <a:pt x="2216721" y="1409407"/>
-                  </a:lnTo>
-                  <a:lnTo>
-                    <a:pt x="2293965" y="1555970"/>
-                  </a:lnTo>
-                  <a:lnTo>
-                    <a:pt x="2371209" y="1692957"/>
-                  </a:lnTo>
-                  <a:lnTo>
-                    <a:pt x="2448452" y="1820995"/>
-                  </a:lnTo>
-                  <a:lnTo>
-                    <a:pt x="2525696" y="1940666"/>
-                  </a:lnTo>
-                  <a:lnTo>
-                    <a:pt x="2602939" y="2052519"/>
-                  </a:lnTo>
-                  <a:lnTo>
-                    <a:pt x="2680183" y="2157064"/>
-                  </a:lnTo>
-                  <a:lnTo>
-                    <a:pt x="2757426" y="2254779"/>
-                  </a:lnTo>
-                  <a:lnTo>
-                    <a:pt x="2834670" y="2346109"/>
-                  </a:lnTo>
-                  <a:lnTo>
-                    <a:pt x="2911914" y="2431472"/>
-                  </a:lnTo>
-                  <a:lnTo>
-                    <a:pt x="2989157" y="2511258"/>
-                  </a:lnTo>
-                  <a:lnTo>
-                    <a:pt x="3066401" y="2585831"/>
-                  </a:lnTo>
-                  <a:lnTo>
-                    <a:pt x="3143644" y="2655532"/>
-                  </a:lnTo>
-                  <a:lnTo>
-                    <a:pt x="3220888" y="2720679"/>
-                  </a:lnTo>
-                  <a:lnTo>
-                    <a:pt x="3298131" y="2781569"/>
-                  </a:lnTo>
-                  <a:lnTo>
-                    <a:pt x="3375375" y="2770293"/>
-                  </a:lnTo>
-                  <a:lnTo>
-                    <a:pt x="3452619" y="2757119"/>
-                  </a:lnTo>
-                  <a:lnTo>
-                    <a:pt x="3529862" y="2743749"/>
-                  </a:lnTo>
-                  <a:lnTo>
-                    <a:pt x="3607106" y="2730180"/>
-                  </a:lnTo>
-                  <a:lnTo>
-                    <a:pt x="3684349" y="2716408"/>
-                  </a:lnTo>
-                  <a:lnTo>
-                    <a:pt x="3761593" y="2702430"/>
-                  </a:lnTo>
-                  <a:lnTo>
-                    <a:pt x="3838836" y="2688243"/>
-                  </a:lnTo>
-                  <a:lnTo>
-                    <a:pt x="3916080" y="2673845"/>
-                  </a:lnTo>
-                  <a:lnTo>
-                    <a:pt x="3993324" y="2659232"/>
-                  </a:lnTo>
-                  <a:lnTo>
-                    <a:pt x="4070567" y="2644401"/>
-                  </a:lnTo>
-                  <a:lnTo>
-                    <a:pt x="4147811" y="2629348"/>
-                  </a:lnTo>
-                  <a:lnTo>
-                    <a:pt x="4225054" y="2614070"/>
-                  </a:lnTo>
-                  <a:lnTo>
-                    <a:pt x="4302298" y="2598564"/>
-                  </a:lnTo>
-                  <a:lnTo>
-                    <a:pt x="4379541" y="2582827"/>
-                  </a:lnTo>
-                  <a:lnTo>
-                    <a:pt x="4456785" y="2566855"/>
-                  </a:lnTo>
-                  <a:lnTo>
-                    <a:pt x="4534029" y="2550645"/>
-                  </a:lnTo>
-                  <a:lnTo>
-                    <a:pt x="4611272" y="2534192"/>
-                  </a:lnTo>
-                  <a:lnTo>
-                    <a:pt x="4688516" y="2517494"/>
-                  </a:lnTo>
-                  <a:lnTo>
-                    <a:pt x="4765759" y="2500546"/>
-                  </a:lnTo>
-                  <a:lnTo>
-                    <a:pt x="4843003" y="2483346"/>
-                  </a:lnTo>
-                  <a:lnTo>
-                    <a:pt x="4920246" y="2465888"/>
-                  </a:lnTo>
-                  <a:lnTo>
-                    <a:pt x="4997490" y="2448170"/>
-                  </a:lnTo>
-                  <a:lnTo>
-                    <a:pt x="5074734" y="2430188"/>
-                  </a:lnTo>
-                  <a:lnTo>
-                    <a:pt x="5151977" y="2411937"/>
-                  </a:lnTo>
-                  <a:lnTo>
-                    <a:pt x="5229221" y="2393413"/>
-                  </a:lnTo>
-                  <a:lnTo>
-                    <a:pt x="5306464" y="2374613"/>
-                  </a:lnTo>
-                  <a:lnTo>
-                    <a:pt x="5383708" y="2355533"/>
-                  </a:lnTo>
-                  <a:lnTo>
-                    <a:pt x="5460951" y="2336167"/>
-                  </a:lnTo>
-                  <a:lnTo>
-                    <a:pt x="5538195" y="2316512"/>
-                  </a:lnTo>
-                  <a:lnTo>
-                    <a:pt x="5615439" y="2296564"/>
-                  </a:lnTo>
-                  <a:lnTo>
-                    <a:pt x="5692682" y="2276318"/>
-                  </a:lnTo>
-                  <a:lnTo>
-                    <a:pt x="5769926" y="2255770"/>
-                  </a:lnTo>
-                  <a:lnTo>
-                    <a:pt x="5847169" y="2234915"/>
-                  </a:lnTo>
-                  <a:lnTo>
-                    <a:pt x="5924413" y="2213749"/>
-                  </a:lnTo>
-                  <a:lnTo>
-                    <a:pt x="6001656" y="2192266"/>
-                  </a:lnTo>
-                  <a:lnTo>
-                    <a:pt x="6078900" y="2170463"/>
-                  </a:lnTo>
-                  <a:lnTo>
-                    <a:pt x="6156144" y="2148334"/>
-                  </a:lnTo>
-                  <a:lnTo>
-                    <a:pt x="6233387" y="2125875"/>
-                  </a:lnTo>
-                  <a:lnTo>
-                    <a:pt x="6310631" y="2103081"/>
-                  </a:lnTo>
-                  <a:lnTo>
-                    <a:pt x="6387874" y="2079947"/>
-                  </a:lnTo>
-                  <a:lnTo>
-                    <a:pt x="6465118" y="2056466"/>
-                  </a:lnTo>
-                  <a:lnTo>
-                    <a:pt x="6542361" y="2032636"/>
-                  </a:lnTo>
-                  <a:lnTo>
-                    <a:pt x="6619605" y="2008450"/>
-                  </a:lnTo>
-                  <a:lnTo>
-                    <a:pt x="6696849" y="1983902"/>
-                  </a:lnTo>
-                  <a:lnTo>
-                    <a:pt x="6774092" y="1958988"/>
-                  </a:lnTo>
-                  <a:lnTo>
-                    <a:pt x="6851336" y="1933702"/>
-                  </a:lnTo>
-                  <a:lnTo>
-                    <a:pt x="6928579" y="1908039"/>
-                  </a:lnTo>
-                  <a:lnTo>
-                    <a:pt x="7005823" y="1881992"/>
-                  </a:lnTo>
-                  <a:lnTo>
-                    <a:pt x="7083066" y="1855557"/>
-                  </a:lnTo>
-                  <a:lnTo>
-                    <a:pt x="7160310" y="1828727"/>
-                  </a:lnTo>
-                  <a:lnTo>
-                    <a:pt x="7237554" y="1801496"/>
-                  </a:lnTo>
-                  <a:lnTo>
-                    <a:pt x="7314797" y="1773859"/>
-                  </a:lnTo>
-                  <a:lnTo>
-                    <a:pt x="7392041" y="1745809"/>
-                  </a:lnTo>
-                  <a:lnTo>
-                    <a:pt x="7392041" y="3628388"/>
-                  </a:lnTo>
-                  <a:lnTo>
-                    <a:pt x="7314797" y="3626692"/>
-                  </a:lnTo>
-                  <a:lnTo>
-                    <a:pt x="7237554" y="3624878"/>
-                  </a:lnTo>
-                  <a:lnTo>
-                    <a:pt x="7160310" y="3622938"/>
-                  </a:lnTo>
-                  <a:lnTo>
-                    <a:pt x="7083066" y="3620861"/>
-                  </a:lnTo>
-                  <a:lnTo>
-                    <a:pt x="7005823" y="3618639"/>
-                  </a:lnTo>
-                  <a:lnTo>
-                    <a:pt x="6928579" y="3616262"/>
-                  </a:lnTo>
-                  <a:lnTo>
-                    <a:pt x="6851336" y="3613719"/>
-                  </a:lnTo>
-                  <a:lnTo>
-                    <a:pt x="6774092" y="3610998"/>
-                  </a:lnTo>
-                  <a:lnTo>
-                    <a:pt x="6696849" y="3608087"/>
-                  </a:lnTo>
-                  <a:lnTo>
-                    <a:pt x="6619605" y="3604973"/>
-                  </a:lnTo>
-                  <a:lnTo>
-                    <a:pt x="6542361" y="3601640"/>
-                  </a:lnTo>
-                  <a:lnTo>
-                    <a:pt x="6465118" y="3598075"/>
-                  </a:lnTo>
-                  <a:lnTo>
-                    <a:pt x="6387874" y="3594261"/>
-                  </a:lnTo>
-                  <a:lnTo>
-                    <a:pt x="6310631" y="3590180"/>
-                  </a:lnTo>
-                  <a:lnTo>
-                    <a:pt x="6233387" y="3585813"/>
-                  </a:lnTo>
-                  <a:lnTo>
-                    <a:pt x="6156144" y="3581142"/>
-                  </a:lnTo>
-                  <a:lnTo>
-                    <a:pt x="6078900" y="3576143"/>
-                  </a:lnTo>
-                  <a:lnTo>
-                    <a:pt x="6001656" y="3570796"/>
-                  </a:lnTo>
-                  <a:lnTo>
-                    <a:pt x="5924413" y="3565075"/>
-                  </a:lnTo>
-                  <a:lnTo>
-                    <a:pt x="5847169" y="3558953"/>
-                  </a:lnTo>
-                  <a:lnTo>
-                    <a:pt x="5769926" y="3552404"/>
-                  </a:lnTo>
-                  <a:lnTo>
-                    <a:pt x="5692682" y="3545397"/>
-                  </a:lnTo>
-                  <a:lnTo>
-                    <a:pt x="5615439" y="3537900"/>
-                  </a:lnTo>
-                  <a:lnTo>
-                    <a:pt x="5538195" y="3529879"/>
-                  </a:lnTo>
-                  <a:lnTo>
-                    <a:pt x="5460951" y="3521298"/>
-                  </a:lnTo>
-                  <a:lnTo>
-                    <a:pt x="5383708" y="3512116"/>
-                  </a:lnTo>
-                  <a:lnTo>
-                    <a:pt x="5306464" y="3502293"/>
-                  </a:lnTo>
-                  <a:lnTo>
-                    <a:pt x="5229221" y="3491783"/>
-                  </a:lnTo>
-                  <a:lnTo>
-                    <a:pt x="5151977" y="3480539"/>
-                  </a:lnTo>
-                  <a:lnTo>
-                    <a:pt x="5074734" y="3468508"/>
-                  </a:lnTo>
-                  <a:lnTo>
-                    <a:pt x="4997490" y="3455637"/>
-                  </a:lnTo>
-                  <a:lnTo>
-                    <a:pt x="4920246" y="3441865"/>
-                  </a:lnTo>
-                  <a:lnTo>
-                    <a:pt x="4843003" y="3427131"/>
-                  </a:lnTo>
-                  <a:lnTo>
-                    <a:pt x="4765759" y="3411368"/>
-                  </a:lnTo>
-                  <a:lnTo>
-                    <a:pt x="4688516" y="3394502"/>
-                  </a:lnTo>
-                  <a:lnTo>
-                    <a:pt x="4611272" y="3376457"/>
-                  </a:lnTo>
-                  <a:lnTo>
-                    <a:pt x="4534029" y="3357151"/>
-                  </a:lnTo>
-                  <a:lnTo>
-                    <a:pt x="4456785" y="3336495"/>
-                  </a:lnTo>
-                  <a:lnTo>
-                    <a:pt x="4379541" y="3314395"/>
-                  </a:lnTo>
-                  <a:lnTo>
-                    <a:pt x="4302298" y="3290751"/>
-                  </a:lnTo>
-                  <a:lnTo>
-                    <a:pt x="4225054" y="3265454"/>
-                  </a:lnTo>
-                  <a:lnTo>
-                    <a:pt x="4147811" y="3238388"/>
-                  </a:lnTo>
-                  <a:lnTo>
-                    <a:pt x="4070567" y="3209431"/>
-                  </a:lnTo>
-                  <a:lnTo>
-                    <a:pt x="3993324" y="3178449"/>
-                  </a:lnTo>
-                  <a:lnTo>
-                    <a:pt x="3916080" y="3145301"/>
-                  </a:lnTo>
-                  <a:lnTo>
-                    <a:pt x="3838836" y="3109837"/>
-                  </a:lnTo>
-                  <a:lnTo>
-                    <a:pt x="3761593" y="3071893"/>
-                  </a:lnTo>
-                  <a:lnTo>
-                    <a:pt x="3684349" y="3031297"/>
-                  </a:lnTo>
-                  <a:lnTo>
-                    <a:pt x="3607106" y="2987863"/>
-                  </a:lnTo>
-                  <a:lnTo>
-                    <a:pt x="3529862" y="2941393"/>
-                  </a:lnTo>
-                  <a:lnTo>
-                    <a:pt x="3452619" y="2891675"/>
-                  </a:lnTo>
-                  <a:lnTo>
-                    <a:pt x="3375375" y="2838481"/>
-                  </a:lnTo>
-                  <a:lnTo>
-                    <a:pt x="3298131" y="2783272"/>
-                  </a:lnTo>
-                  <a:lnTo>
-                    <a:pt x="3220888" y="2796061"/>
-                  </a:lnTo>
-                  <a:lnTo>
-                    <a:pt x="3143644" y="2808661"/>
-                  </a:lnTo>
-                  <a:lnTo>
-                    <a:pt x="3066401" y="2821076"/>
-                  </a:lnTo>
-                  <a:lnTo>
-                    <a:pt x="2989157" y="2833309"/>
-                  </a:lnTo>
-                  <a:lnTo>
-                    <a:pt x="2911914" y="2845361"/>
-                  </a:lnTo>
-                  <a:lnTo>
-                    <a:pt x="2834670" y="2857237"/>
-                  </a:lnTo>
-                  <a:lnTo>
-                    <a:pt x="2757426" y="2868937"/>
-                  </a:lnTo>
-                  <a:lnTo>
-                    <a:pt x="2680183" y="2880466"/>
-                  </a:lnTo>
-                  <a:lnTo>
-                    <a:pt x="2602939" y="2891825"/>
-                  </a:lnTo>
-                  <a:lnTo>
-                    <a:pt x="2525696" y="2903016"/>
-                  </a:lnTo>
-                  <a:lnTo>
-                    <a:pt x="2448452" y="2914043"/>
-                  </a:lnTo>
-                  <a:lnTo>
-                    <a:pt x="2371209" y="2924908"/>
-                  </a:lnTo>
-                  <a:lnTo>
-                    <a:pt x="2293965" y="2935613"/>
-                  </a:lnTo>
-                  <a:lnTo>
-                    <a:pt x="2216721" y="2946161"/>
-                  </a:lnTo>
-                  <a:lnTo>
-                    <a:pt x="2139478" y="2956554"/>
-                  </a:lnTo>
-                  <a:lnTo>
-                    <a:pt x="2062234" y="2966793"/>
-                  </a:lnTo>
-                  <a:lnTo>
-                    <a:pt x="1984991" y="2976882"/>
-                  </a:lnTo>
-                  <a:lnTo>
-                    <a:pt x="1907747" y="2986823"/>
-                  </a:lnTo>
-                  <a:lnTo>
-                    <a:pt x="1830504" y="2996617"/>
-                  </a:lnTo>
-                  <a:lnTo>
-                    <a:pt x="1753260" y="3006267"/>
-                  </a:lnTo>
-                  <a:lnTo>
-                    <a:pt x="1676016" y="3015776"/>
-                  </a:lnTo>
-                  <a:lnTo>
-                    <a:pt x="1598773" y="3025144"/>
-                  </a:lnTo>
-                  <a:lnTo>
-                    <a:pt x="1521529" y="3034375"/>
-                  </a:lnTo>
-                  <a:lnTo>
-                    <a:pt x="1444286" y="3043469"/>
-                  </a:lnTo>
-                  <a:lnTo>
-                    <a:pt x="1367042" y="3052430"/>
-                  </a:lnTo>
-                  <a:lnTo>
-                    <a:pt x="1289799" y="3061260"/>
-                  </a:lnTo>
-                  <a:lnTo>
-                    <a:pt x="1212555" y="3069959"/>
-                  </a:lnTo>
-                  <a:lnTo>
-                    <a:pt x="1135311" y="3078530"/>
-                  </a:lnTo>
-                  <a:lnTo>
-                    <a:pt x="1058068" y="3086976"/>
-                  </a:lnTo>
-                  <a:lnTo>
-                    <a:pt x="980824" y="3095297"/>
-                  </a:lnTo>
-                  <a:lnTo>
-                    <a:pt x="903581" y="3103495"/>
-                  </a:lnTo>
-                  <a:lnTo>
-                    <a:pt x="826337" y="3111574"/>
-                  </a:lnTo>
-                  <a:lnTo>
-                    <a:pt x="749094" y="3119533"/>
-                  </a:lnTo>
-                  <a:lnTo>
-                    <a:pt x="671850" y="3127375"/>
-                  </a:lnTo>
-                  <a:lnTo>
-                    <a:pt x="594606" y="3135102"/>
-                  </a:lnTo>
-                  <a:lnTo>
-                    <a:pt x="517363" y="3142715"/>
-                  </a:lnTo>
-                  <a:lnTo>
-                    <a:pt x="440119" y="3150216"/>
-                  </a:lnTo>
-                  <a:lnTo>
-                    <a:pt x="362876" y="3157607"/>
-                  </a:lnTo>
-                  <a:lnTo>
-                    <a:pt x="285632" y="3164889"/>
-                  </a:lnTo>
-                  <a:lnTo>
-                    <a:pt x="208389" y="3172064"/>
-                  </a:lnTo>
-                  <a:lnTo>
-                    <a:pt x="131145" y="3179133"/>
-                  </a:lnTo>
-                  <a:lnTo>
-                    <a:pt x="53901" y="3186099"/>
-                  </a:lnTo>
-                  <a:lnTo>
-                    <a:pt x="0" y="3190888"/>
+                    <a:pt x="1676016" y="50347"/>
+                  </a:lnTo>
+                  <a:lnTo>
+                    <a:pt x="1753260" y="274670"/>
+                  </a:lnTo>
+                  <a:lnTo>
+                    <a:pt x="1830504" y="484337"/>
+                  </a:lnTo>
+                  <a:lnTo>
+                    <a:pt x="1907747" y="680305"/>
+                  </a:lnTo>
+                  <a:lnTo>
+                    <a:pt x="1984991" y="863470"/>
+                  </a:lnTo>
+                  <a:lnTo>
+                    <a:pt x="2062234" y="1034667"/>
+                  </a:lnTo>
+                  <a:lnTo>
+                    <a:pt x="2139478" y="1194679"/>
+                  </a:lnTo>
+                  <a:lnTo>
+                    <a:pt x="2216721" y="1344236"/>
+                  </a:lnTo>
+                  <a:lnTo>
+                    <a:pt x="2293965" y="1484023"/>
+                  </a:lnTo>
+                  <a:lnTo>
+                    <a:pt x="2371209" y="1614676"/>
+                  </a:lnTo>
+                  <a:lnTo>
+                    <a:pt x="2448452" y="1736792"/>
+                  </a:lnTo>
+                  <a:lnTo>
+                    <a:pt x="2525696" y="1850931"/>
+                  </a:lnTo>
+                  <a:lnTo>
+                    <a:pt x="2602939" y="1957612"/>
+                  </a:lnTo>
+                  <a:lnTo>
+                    <a:pt x="2680183" y="2057323"/>
+                  </a:lnTo>
+                  <a:lnTo>
+                    <a:pt x="2757426" y="2150519"/>
+                  </a:lnTo>
+                  <a:lnTo>
+                    <a:pt x="2834670" y="2237626"/>
+                  </a:lnTo>
+                  <a:lnTo>
+                    <a:pt x="2911914" y="2319042"/>
+                  </a:lnTo>
+                  <a:lnTo>
+                    <a:pt x="2989157" y="2395139"/>
+                  </a:lnTo>
+                  <a:lnTo>
+                    <a:pt x="3066401" y="2466263"/>
+                  </a:lnTo>
+                  <a:lnTo>
+                    <a:pt x="3143644" y="2532741"/>
+                  </a:lnTo>
+                  <a:lnTo>
+                    <a:pt x="3220888" y="2594876"/>
+                  </a:lnTo>
+                  <a:lnTo>
+                    <a:pt x="3298131" y="2652951"/>
+                  </a:lnTo>
+                  <a:lnTo>
+                    <a:pt x="3375375" y="2642195"/>
+                  </a:lnTo>
+                  <a:lnTo>
+                    <a:pt x="3452619" y="2629631"/>
+                  </a:lnTo>
+                  <a:lnTo>
+                    <a:pt x="3529862" y="2616879"/>
+                  </a:lnTo>
+                  <a:lnTo>
+                    <a:pt x="3607106" y="2603937"/>
+                  </a:lnTo>
+                  <a:lnTo>
+                    <a:pt x="3684349" y="2590802"/>
+                  </a:lnTo>
+                  <a:lnTo>
+                    <a:pt x="3761593" y="2577471"/>
+                  </a:lnTo>
+                  <a:lnTo>
+                    <a:pt x="3838836" y="2563940"/>
+                  </a:lnTo>
+                  <a:lnTo>
+                    <a:pt x="3916080" y="2550208"/>
+                  </a:lnTo>
+                  <a:lnTo>
+                    <a:pt x="3993324" y="2536270"/>
+                  </a:lnTo>
+                  <a:lnTo>
+                    <a:pt x="4070567" y="2522124"/>
+                  </a:lnTo>
+                  <a:lnTo>
+                    <a:pt x="4147811" y="2507768"/>
+                  </a:lnTo>
+                  <a:lnTo>
+                    <a:pt x="4225054" y="2493196"/>
+                  </a:lnTo>
+                  <a:lnTo>
+                    <a:pt x="4302298" y="2478408"/>
+                  </a:lnTo>
+                  <a:lnTo>
+                    <a:pt x="4379541" y="2463398"/>
+                  </a:lnTo>
+                  <a:lnTo>
+                    <a:pt x="4456785" y="2448165"/>
+                  </a:lnTo>
+                  <a:lnTo>
+                    <a:pt x="4534029" y="2432704"/>
+                  </a:lnTo>
+                  <a:lnTo>
+                    <a:pt x="4611272" y="2417012"/>
+                  </a:lnTo>
+                  <a:lnTo>
+                    <a:pt x="4688516" y="2401086"/>
+                  </a:lnTo>
+                  <a:lnTo>
+                    <a:pt x="4765759" y="2384922"/>
+                  </a:lnTo>
+                  <a:lnTo>
+                    <a:pt x="4843003" y="2368517"/>
+                  </a:lnTo>
+                  <a:lnTo>
+                    <a:pt x="4920246" y="2351866"/>
+                  </a:lnTo>
+                  <a:lnTo>
+                    <a:pt x="4997490" y="2334968"/>
+                  </a:lnTo>
+                  <a:lnTo>
+                    <a:pt x="5074734" y="2317817"/>
+                  </a:lnTo>
+                  <a:lnTo>
+                    <a:pt x="5151977" y="2300410"/>
+                  </a:lnTo>
+                  <a:lnTo>
+                    <a:pt x="5229221" y="2282743"/>
+                  </a:lnTo>
+                  <a:lnTo>
+                    <a:pt x="5306464" y="2264812"/>
+                  </a:lnTo>
+                  <a:lnTo>
+                    <a:pt x="5383708" y="2246614"/>
+                  </a:lnTo>
+                  <a:lnTo>
+                    <a:pt x="5460951" y="2228143"/>
+                  </a:lnTo>
+                  <a:lnTo>
+                    <a:pt x="5538195" y="2209398"/>
+                  </a:lnTo>
+                  <a:lnTo>
+                    <a:pt x="5615439" y="2190372"/>
+                  </a:lnTo>
+                  <a:lnTo>
+                    <a:pt x="5692682" y="2171062"/>
+                  </a:lnTo>
+                  <a:lnTo>
+                    <a:pt x="5769926" y="2151464"/>
+                  </a:lnTo>
+                  <a:lnTo>
+                    <a:pt x="5847169" y="2131573"/>
+                  </a:lnTo>
+                  <a:lnTo>
+                    <a:pt x="5924413" y="2111386"/>
+                  </a:lnTo>
+                  <a:lnTo>
+                    <a:pt x="6001656" y="2090897"/>
+                  </a:lnTo>
+                  <a:lnTo>
+                    <a:pt x="6078900" y="2070102"/>
+                  </a:lnTo>
+                  <a:lnTo>
+                    <a:pt x="6156144" y="2048996"/>
+                  </a:lnTo>
+                  <a:lnTo>
+                    <a:pt x="6233387" y="2027576"/>
+                  </a:lnTo>
+                  <a:lnTo>
+                    <a:pt x="6310631" y="2005835"/>
+                  </a:lnTo>
+                  <a:lnTo>
+                    <a:pt x="6387874" y="1983771"/>
+                  </a:lnTo>
+                  <a:lnTo>
+                    <a:pt x="6465118" y="1961376"/>
+                  </a:lnTo>
+                  <a:lnTo>
+                    <a:pt x="6542361" y="1938648"/>
+                  </a:lnTo>
+                  <a:lnTo>
+                    <a:pt x="6619605" y="1915580"/>
+                  </a:lnTo>
+                  <a:lnTo>
+                    <a:pt x="6696849" y="1892167"/>
+                  </a:lnTo>
+                  <a:lnTo>
+                    <a:pt x="6774092" y="1868405"/>
+                  </a:lnTo>
+                  <a:lnTo>
+                    <a:pt x="6851336" y="1844289"/>
+                  </a:lnTo>
+                  <a:lnTo>
+                    <a:pt x="6928579" y="1819812"/>
+                  </a:lnTo>
+                  <a:lnTo>
+                    <a:pt x="7005823" y="1794970"/>
+                  </a:lnTo>
+                  <a:lnTo>
+                    <a:pt x="7083066" y="1769757"/>
+                  </a:lnTo>
+                  <a:lnTo>
+                    <a:pt x="7160310" y="1744167"/>
+                  </a:lnTo>
+                  <a:lnTo>
+                    <a:pt x="7237554" y="1718196"/>
+                  </a:lnTo>
+                  <a:lnTo>
+                    <a:pt x="7314797" y="1691836"/>
+                  </a:lnTo>
+                  <a:lnTo>
+                    <a:pt x="7392041" y="1665083"/>
+                  </a:lnTo>
+                  <a:lnTo>
+                    <a:pt x="7392041" y="3460613"/>
+                  </a:lnTo>
+                  <a:lnTo>
+                    <a:pt x="7314797" y="3458995"/>
+                  </a:lnTo>
+                  <a:lnTo>
+                    <a:pt x="7237554" y="3457265"/>
+                  </a:lnTo>
+                  <a:lnTo>
+                    <a:pt x="7160310" y="3455414"/>
+                  </a:lnTo>
+                  <a:lnTo>
+                    <a:pt x="7083066" y="3453434"/>
+                  </a:lnTo>
+                  <a:lnTo>
+                    <a:pt x="7005823" y="3451315"/>
+                  </a:lnTo>
+                  <a:lnTo>
+                    <a:pt x="6928579" y="3449048"/>
+                  </a:lnTo>
+                  <a:lnTo>
+                    <a:pt x="6851336" y="3446622"/>
+                  </a:lnTo>
+                  <a:lnTo>
+                    <a:pt x="6774092" y="3444027"/>
+                  </a:lnTo>
+                  <a:lnTo>
+                    <a:pt x="6696849" y="3441251"/>
+                  </a:lnTo>
+                  <a:lnTo>
+                    <a:pt x="6619605" y="3438280"/>
+                  </a:lnTo>
+                  <a:lnTo>
+                    <a:pt x="6542361" y="3435102"/>
+                  </a:lnTo>
+                  <a:lnTo>
+                    <a:pt x="6465118" y="3431701"/>
+                  </a:lnTo>
+                  <a:lnTo>
+                    <a:pt x="6387874" y="3428063"/>
+                  </a:lnTo>
+                  <a:lnTo>
+                    <a:pt x="6310631" y="3424171"/>
+                  </a:lnTo>
+                  <a:lnTo>
+                    <a:pt x="6233387" y="3420007"/>
+                  </a:lnTo>
+                  <a:lnTo>
+                    <a:pt x="6156144" y="3415551"/>
+                  </a:lnTo>
+                  <a:lnTo>
+                    <a:pt x="6078900" y="3410784"/>
+                  </a:lnTo>
+                  <a:lnTo>
+                    <a:pt x="6001656" y="3405684"/>
+                  </a:lnTo>
+                  <a:lnTo>
+                    <a:pt x="5924413" y="3400227"/>
+                  </a:lnTo>
+                  <a:lnTo>
+                    <a:pt x="5847169" y="3394389"/>
+                  </a:lnTo>
+                  <a:lnTo>
+                    <a:pt x="5769926" y="3388142"/>
+                  </a:lnTo>
+                  <a:lnTo>
+                    <a:pt x="5692682" y="3381459"/>
+                  </a:lnTo>
+                  <a:lnTo>
+                    <a:pt x="5615439" y="3374309"/>
+                  </a:lnTo>
+                  <a:lnTo>
+                    <a:pt x="5538195" y="3366659"/>
+                  </a:lnTo>
+                  <a:lnTo>
+                    <a:pt x="5460951" y="3358474"/>
+                  </a:lnTo>
+                  <a:lnTo>
+                    <a:pt x="5383708" y="3349717"/>
+                  </a:lnTo>
+                  <a:lnTo>
+                    <a:pt x="5306464" y="3340348"/>
+                  </a:lnTo>
+                  <a:lnTo>
+                    <a:pt x="5229221" y="3330325"/>
+                  </a:lnTo>
+                  <a:lnTo>
+                    <a:pt x="5151977" y="3319600"/>
+                  </a:lnTo>
+                  <a:lnTo>
+                    <a:pt x="5074734" y="3308126"/>
+                  </a:lnTo>
+                  <a:lnTo>
+                    <a:pt x="4997490" y="3295849"/>
+                  </a:lnTo>
+                  <a:lnTo>
+                    <a:pt x="4920246" y="3282715"/>
+                  </a:lnTo>
+                  <a:lnTo>
+                    <a:pt x="4843003" y="3268662"/>
+                  </a:lnTo>
+                  <a:lnTo>
+                    <a:pt x="4765759" y="3253627"/>
+                  </a:lnTo>
+                  <a:lnTo>
+                    <a:pt x="4688516" y="3237541"/>
+                  </a:lnTo>
+                  <a:lnTo>
+                    <a:pt x="4611272" y="3220331"/>
+                  </a:lnTo>
+                  <a:lnTo>
+                    <a:pt x="4534029" y="3201917"/>
+                  </a:lnTo>
+                  <a:lnTo>
+                    <a:pt x="4456785" y="3182217"/>
+                  </a:lnTo>
+                  <a:lnTo>
+                    <a:pt x="4379541" y="3161139"/>
+                  </a:lnTo>
+                  <a:lnTo>
+                    <a:pt x="4302298" y="3138588"/>
+                  </a:lnTo>
+                  <a:lnTo>
+                    <a:pt x="4225054" y="3114460"/>
+                  </a:lnTo>
+                  <a:lnTo>
+                    <a:pt x="4147811" y="3088646"/>
+                  </a:lnTo>
+                  <a:lnTo>
+                    <a:pt x="4070567" y="3061028"/>
+                  </a:lnTo>
+                  <a:lnTo>
+                    <a:pt x="3993324" y="3031479"/>
+                  </a:lnTo>
+                  <a:lnTo>
+                    <a:pt x="3916080" y="2999864"/>
+                  </a:lnTo>
+                  <a:lnTo>
+                    <a:pt x="3838836" y="2966039"/>
+                  </a:lnTo>
+                  <a:lnTo>
+                    <a:pt x="3761593" y="2929850"/>
+                  </a:lnTo>
+                  <a:lnTo>
+                    <a:pt x="3684349" y="2891131"/>
+                  </a:lnTo>
+                  <a:lnTo>
+                    <a:pt x="3607106" y="2849706"/>
+                  </a:lnTo>
+                  <a:lnTo>
+                    <a:pt x="3529862" y="2805385"/>
+                  </a:lnTo>
+                  <a:lnTo>
+                    <a:pt x="3452619" y="2757965"/>
+                  </a:lnTo>
+                  <a:lnTo>
+                    <a:pt x="3375375" y="2707231"/>
+                  </a:lnTo>
+                  <a:lnTo>
+                    <a:pt x="3298131" y="2654575"/>
+                  </a:lnTo>
+                  <a:lnTo>
+                    <a:pt x="3220888" y="2666772"/>
+                  </a:lnTo>
+                  <a:lnTo>
+                    <a:pt x="3143644" y="2678790"/>
+                  </a:lnTo>
+                  <a:lnTo>
+                    <a:pt x="3066401" y="2690631"/>
+                  </a:lnTo>
+                  <a:lnTo>
+                    <a:pt x="2989157" y="2702298"/>
+                  </a:lnTo>
+                  <a:lnTo>
+                    <a:pt x="2911914" y="2713793"/>
+                  </a:lnTo>
+                  <a:lnTo>
+                    <a:pt x="2834670" y="2725119"/>
+                  </a:lnTo>
+                  <a:lnTo>
+                    <a:pt x="2757426" y="2736279"/>
+                  </a:lnTo>
+                  <a:lnTo>
+                    <a:pt x="2680183" y="2747274"/>
+                  </a:lnTo>
+                  <a:lnTo>
+                    <a:pt x="2602939" y="2758108"/>
+                  </a:lnTo>
+                  <a:lnTo>
+                    <a:pt x="2525696" y="2768782"/>
+                  </a:lnTo>
+                  <a:lnTo>
+                    <a:pt x="2448452" y="2779299"/>
+                  </a:lnTo>
+                  <a:lnTo>
+                    <a:pt x="2371209" y="2789662"/>
+                  </a:lnTo>
+                  <a:lnTo>
+                    <a:pt x="2293965" y="2799872"/>
+                  </a:lnTo>
+                  <a:lnTo>
+                    <a:pt x="2216721" y="2809932"/>
+                  </a:lnTo>
+                  <a:lnTo>
+                    <a:pt x="2139478" y="2819844"/>
+                  </a:lnTo>
+                  <a:lnTo>
+                    <a:pt x="2062234" y="2829610"/>
+                  </a:lnTo>
+                  <a:lnTo>
+                    <a:pt x="1984991" y="2839232"/>
+                  </a:lnTo>
+                  <a:lnTo>
+                    <a:pt x="1907747" y="2848713"/>
+                  </a:lnTo>
+                  <a:lnTo>
+                    <a:pt x="1830504" y="2858055"/>
+                  </a:lnTo>
+                  <a:lnTo>
+                    <a:pt x="1753260" y="2867259"/>
+                  </a:lnTo>
+                  <a:lnTo>
+                    <a:pt x="1676016" y="2876327"/>
+                  </a:lnTo>
+                  <a:lnTo>
+                    <a:pt x="1598773" y="2885262"/>
+                  </a:lnTo>
+                  <a:lnTo>
+                    <a:pt x="1521529" y="2894066"/>
+                  </a:lnTo>
+                  <a:lnTo>
+                    <a:pt x="1444286" y="2902741"/>
+                  </a:lnTo>
+                  <a:lnTo>
+                    <a:pt x="1367042" y="2911287"/>
+                  </a:lnTo>
+                  <a:lnTo>
+                    <a:pt x="1289799" y="2919708"/>
+                  </a:lnTo>
+                  <a:lnTo>
+                    <a:pt x="1212555" y="2928005"/>
+                  </a:lnTo>
+                  <a:lnTo>
+                    <a:pt x="1135311" y="2936180"/>
+                  </a:lnTo>
+                  <a:lnTo>
+                    <a:pt x="1058068" y="2944235"/>
+                  </a:lnTo>
+                  <a:lnTo>
+                    <a:pt x="980824" y="2952171"/>
+                  </a:lnTo>
+                  <a:lnTo>
+                    <a:pt x="903581" y="2959991"/>
+                  </a:lnTo>
+                  <a:lnTo>
+                    <a:pt x="826337" y="2967695"/>
+                  </a:lnTo>
+                  <a:lnTo>
+                    <a:pt x="749094" y="2975287"/>
+                  </a:lnTo>
+                  <a:lnTo>
+                    <a:pt x="671850" y="2982766"/>
+                  </a:lnTo>
+                  <a:lnTo>
+                    <a:pt x="594606" y="2990136"/>
+                  </a:lnTo>
+                  <a:lnTo>
+                    <a:pt x="517363" y="2997397"/>
+                  </a:lnTo>
+                  <a:lnTo>
+                    <a:pt x="440119" y="3004551"/>
+                  </a:lnTo>
+                  <a:lnTo>
+                    <a:pt x="362876" y="3011600"/>
+                  </a:lnTo>
+                  <a:lnTo>
+                    <a:pt x="285632" y="3018545"/>
+                  </a:lnTo>
+                  <a:lnTo>
+                    <a:pt x="208389" y="3025389"/>
+                  </a:lnTo>
+                  <a:lnTo>
+                    <a:pt x="131145" y="3032131"/>
+                  </a:lnTo>
+                  <a:lnTo>
+                    <a:pt x="53901" y="3038774"/>
+                  </a:lnTo>
+                  <a:lnTo>
+                    <a:pt x="0" y="3043342"/>
                   </a:lnTo>
                   <a:close/>
                 </a:path>
@@ -3552,240 +3552,240 @@
           </p:nvSpPr>
           <p:spPr>
             <a:xfrm>
-              <a:off x="2477330" y="1896563"/>
-              <a:ext cx="5732228" cy="2781569"/>
+              <a:off x="2477330" y="2073503"/>
+              <a:ext cx="5732228" cy="2652951"/>
             </a:xfrm>
             <a:custGeom>
               <a:avLst/>
               <a:pathLst>
-                <a:path w="5732228" h="2781569">
+                <a:path w="5732228" h="2652951">
                   <a:moveTo>
                     <a:pt x="0" y="0"/>
                   </a:moveTo>
                   <a:lnTo>
-                    <a:pt x="16203" y="52788"/>
-                  </a:lnTo>
-                  <a:lnTo>
-                    <a:pt x="93447" y="287986"/>
-                  </a:lnTo>
-                  <a:lnTo>
-                    <a:pt x="170691" y="507818"/>
-                  </a:lnTo>
-                  <a:lnTo>
-                    <a:pt x="247934" y="713287"/>
-                  </a:lnTo>
-                  <a:lnTo>
-                    <a:pt x="325178" y="905332"/>
-                  </a:lnTo>
-                  <a:lnTo>
-                    <a:pt x="402421" y="1084829"/>
-                  </a:lnTo>
-                  <a:lnTo>
-                    <a:pt x="479665" y="1252599"/>
-                  </a:lnTo>
-                  <a:lnTo>
-                    <a:pt x="556908" y="1409407"/>
-                  </a:lnTo>
-                  <a:lnTo>
-                    <a:pt x="634152" y="1555970"/>
-                  </a:lnTo>
-                  <a:lnTo>
-                    <a:pt x="711396" y="1692957"/>
-                  </a:lnTo>
-                  <a:lnTo>
-                    <a:pt x="788639" y="1820995"/>
-                  </a:lnTo>
-                  <a:lnTo>
-                    <a:pt x="865883" y="1940666"/>
-                  </a:lnTo>
-                  <a:lnTo>
-                    <a:pt x="943126" y="2052519"/>
-                  </a:lnTo>
-                  <a:lnTo>
-                    <a:pt x="1020370" y="2157064"/>
-                  </a:lnTo>
-                  <a:lnTo>
-                    <a:pt x="1097613" y="2254779"/>
-                  </a:lnTo>
-                  <a:lnTo>
-                    <a:pt x="1174857" y="2346109"/>
-                  </a:lnTo>
-                  <a:lnTo>
-                    <a:pt x="1252101" y="2431472"/>
-                  </a:lnTo>
-                  <a:lnTo>
-                    <a:pt x="1329344" y="2511258"/>
-                  </a:lnTo>
-                  <a:lnTo>
-                    <a:pt x="1406588" y="2585831"/>
-                  </a:lnTo>
-                  <a:lnTo>
-                    <a:pt x="1483831" y="2655532"/>
-                  </a:lnTo>
-                  <a:lnTo>
-                    <a:pt x="1561075" y="2720679"/>
-                  </a:lnTo>
-                  <a:lnTo>
-                    <a:pt x="1638318" y="2781569"/>
-                  </a:lnTo>
-                  <a:lnTo>
-                    <a:pt x="1715562" y="2770293"/>
-                  </a:lnTo>
-                  <a:lnTo>
-                    <a:pt x="1792806" y="2757119"/>
-                  </a:lnTo>
-                  <a:lnTo>
-                    <a:pt x="1870049" y="2743749"/>
-                  </a:lnTo>
-                  <a:lnTo>
-                    <a:pt x="1947293" y="2730180"/>
-                  </a:lnTo>
-                  <a:lnTo>
-                    <a:pt x="2024536" y="2716408"/>
-                  </a:lnTo>
-                  <a:lnTo>
-                    <a:pt x="2101780" y="2702430"/>
-                  </a:lnTo>
-                  <a:lnTo>
-                    <a:pt x="2179023" y="2688243"/>
-                  </a:lnTo>
-                  <a:lnTo>
-                    <a:pt x="2256267" y="2673845"/>
-                  </a:lnTo>
-                  <a:lnTo>
-                    <a:pt x="2333511" y="2659232"/>
-                  </a:lnTo>
-                  <a:lnTo>
-                    <a:pt x="2410754" y="2644401"/>
-                  </a:lnTo>
-                  <a:lnTo>
-                    <a:pt x="2487998" y="2629348"/>
-                  </a:lnTo>
-                  <a:lnTo>
-                    <a:pt x="2565241" y="2614070"/>
-                  </a:lnTo>
-                  <a:lnTo>
-                    <a:pt x="2642485" y="2598564"/>
-                  </a:lnTo>
-                  <a:lnTo>
-                    <a:pt x="2719728" y="2582827"/>
-                  </a:lnTo>
-                  <a:lnTo>
-                    <a:pt x="2796972" y="2566855"/>
-                  </a:lnTo>
-                  <a:lnTo>
-                    <a:pt x="2874216" y="2550645"/>
-                  </a:lnTo>
-                  <a:lnTo>
-                    <a:pt x="2951459" y="2534192"/>
-                  </a:lnTo>
-                  <a:lnTo>
-                    <a:pt x="3028703" y="2517494"/>
-                  </a:lnTo>
-                  <a:lnTo>
-                    <a:pt x="3105946" y="2500546"/>
-                  </a:lnTo>
-                  <a:lnTo>
-                    <a:pt x="3183190" y="2483346"/>
-                  </a:lnTo>
-                  <a:lnTo>
-                    <a:pt x="3260433" y="2465888"/>
-                  </a:lnTo>
-                  <a:lnTo>
-                    <a:pt x="3337677" y="2448170"/>
-                  </a:lnTo>
-                  <a:lnTo>
-                    <a:pt x="3414921" y="2430188"/>
-                  </a:lnTo>
-                  <a:lnTo>
-                    <a:pt x="3492164" y="2411937"/>
-                  </a:lnTo>
-                  <a:lnTo>
-                    <a:pt x="3569408" y="2393413"/>
-                  </a:lnTo>
-                  <a:lnTo>
-                    <a:pt x="3646651" y="2374613"/>
-                  </a:lnTo>
-                  <a:lnTo>
-                    <a:pt x="3723895" y="2355533"/>
-                  </a:lnTo>
-                  <a:lnTo>
-                    <a:pt x="3801138" y="2336167"/>
-                  </a:lnTo>
-                  <a:lnTo>
-                    <a:pt x="3878382" y="2316512"/>
-                  </a:lnTo>
-                  <a:lnTo>
-                    <a:pt x="3955626" y="2296564"/>
-                  </a:lnTo>
-                  <a:lnTo>
-                    <a:pt x="4032869" y="2276318"/>
-                  </a:lnTo>
-                  <a:lnTo>
-                    <a:pt x="4110113" y="2255770"/>
-                  </a:lnTo>
-                  <a:lnTo>
-                    <a:pt x="4187356" y="2234915"/>
-                  </a:lnTo>
-                  <a:lnTo>
-                    <a:pt x="4264600" y="2213749"/>
-                  </a:lnTo>
-                  <a:lnTo>
-                    <a:pt x="4341844" y="2192266"/>
-                  </a:lnTo>
-                  <a:lnTo>
-                    <a:pt x="4419087" y="2170463"/>
-                  </a:lnTo>
-                  <a:lnTo>
-                    <a:pt x="4496331" y="2148334"/>
-                  </a:lnTo>
-                  <a:lnTo>
-                    <a:pt x="4573574" y="2125875"/>
-                  </a:lnTo>
-                  <a:lnTo>
-                    <a:pt x="4650818" y="2103081"/>
-                  </a:lnTo>
-                  <a:lnTo>
-                    <a:pt x="4728061" y="2079947"/>
-                  </a:lnTo>
-                  <a:lnTo>
-                    <a:pt x="4805305" y="2056466"/>
-                  </a:lnTo>
-                  <a:lnTo>
-                    <a:pt x="4882549" y="2032636"/>
-                  </a:lnTo>
-                  <a:lnTo>
-                    <a:pt x="4959792" y="2008450"/>
-                  </a:lnTo>
-                  <a:lnTo>
-                    <a:pt x="5037036" y="1983902"/>
-                  </a:lnTo>
-                  <a:lnTo>
-                    <a:pt x="5114279" y="1958988"/>
-                  </a:lnTo>
-                  <a:lnTo>
-                    <a:pt x="5191523" y="1933702"/>
-                  </a:lnTo>
-                  <a:lnTo>
-                    <a:pt x="5268766" y="1908039"/>
-                  </a:lnTo>
-                  <a:lnTo>
-                    <a:pt x="5346010" y="1881992"/>
-                  </a:lnTo>
-                  <a:lnTo>
-                    <a:pt x="5423254" y="1855557"/>
-                  </a:lnTo>
-                  <a:lnTo>
-                    <a:pt x="5500497" y="1828727"/>
-                  </a:lnTo>
-                  <a:lnTo>
-                    <a:pt x="5577741" y="1801496"/>
-                  </a:lnTo>
-                  <a:lnTo>
-                    <a:pt x="5654984" y="1773859"/>
-                  </a:lnTo>
-                  <a:lnTo>
-                    <a:pt x="5732228" y="1745809"/>
+                    <a:pt x="16203" y="50347"/>
+                  </a:lnTo>
+                  <a:lnTo>
+                    <a:pt x="93447" y="274670"/>
+                  </a:lnTo>
+                  <a:lnTo>
+                    <a:pt x="170691" y="484337"/>
+                  </a:lnTo>
+                  <a:lnTo>
+                    <a:pt x="247934" y="680305"/>
+                  </a:lnTo>
+                  <a:lnTo>
+                    <a:pt x="325178" y="863470"/>
+                  </a:lnTo>
+                  <a:lnTo>
+                    <a:pt x="402421" y="1034667"/>
+                  </a:lnTo>
+                  <a:lnTo>
+                    <a:pt x="479665" y="1194679"/>
+                  </a:lnTo>
+                  <a:lnTo>
+                    <a:pt x="556908" y="1344236"/>
+                  </a:lnTo>
+                  <a:lnTo>
+                    <a:pt x="634152" y="1484023"/>
+                  </a:lnTo>
+                  <a:lnTo>
+                    <a:pt x="711396" y="1614676"/>
+                  </a:lnTo>
+                  <a:lnTo>
+                    <a:pt x="788639" y="1736792"/>
+                  </a:lnTo>
+                  <a:lnTo>
+                    <a:pt x="865883" y="1850931"/>
+                  </a:lnTo>
+                  <a:lnTo>
+                    <a:pt x="943126" y="1957612"/>
+                  </a:lnTo>
+                  <a:lnTo>
+                    <a:pt x="1020370" y="2057323"/>
+                  </a:lnTo>
+                  <a:lnTo>
+                    <a:pt x="1097613" y="2150519"/>
+                  </a:lnTo>
+                  <a:lnTo>
+                    <a:pt x="1174857" y="2237626"/>
+                  </a:lnTo>
+                  <a:lnTo>
+                    <a:pt x="1252101" y="2319042"/>
+                  </a:lnTo>
+                  <a:lnTo>
+                    <a:pt x="1329344" y="2395139"/>
+                  </a:lnTo>
+                  <a:lnTo>
+                    <a:pt x="1406588" y="2466263"/>
+                  </a:lnTo>
+                  <a:lnTo>
+                    <a:pt x="1483831" y="2532741"/>
+                  </a:lnTo>
+                  <a:lnTo>
+                    <a:pt x="1561075" y="2594876"/>
+                  </a:lnTo>
+                  <a:lnTo>
+                    <a:pt x="1638318" y="2652951"/>
+                  </a:lnTo>
+                  <a:lnTo>
+                    <a:pt x="1715562" y="2642195"/>
+                  </a:lnTo>
+                  <a:lnTo>
+                    <a:pt x="1792806" y="2629631"/>
+                  </a:lnTo>
+                  <a:lnTo>
+                    <a:pt x="1870049" y="2616879"/>
+                  </a:lnTo>
+                  <a:lnTo>
+                    <a:pt x="1947293" y="2603937"/>
+                  </a:lnTo>
+                  <a:lnTo>
+                    <a:pt x="2024536" y="2590802"/>
+                  </a:lnTo>
+                  <a:lnTo>
+                    <a:pt x="2101780" y="2577471"/>
+                  </a:lnTo>
+                  <a:lnTo>
+                    <a:pt x="2179023" y="2563940"/>
+                  </a:lnTo>
+                  <a:lnTo>
+                    <a:pt x="2256267" y="2550208"/>
+                  </a:lnTo>
+                  <a:lnTo>
+                    <a:pt x="2333511" y="2536270"/>
+                  </a:lnTo>
+                  <a:lnTo>
+                    <a:pt x="2410754" y="2522124"/>
+                  </a:lnTo>
+                  <a:lnTo>
+                    <a:pt x="2487998" y="2507768"/>
+                  </a:lnTo>
+                  <a:lnTo>
+                    <a:pt x="2565241" y="2493196"/>
+                  </a:lnTo>
+                  <a:lnTo>
+                    <a:pt x="2642485" y="2478408"/>
+                  </a:lnTo>
+                  <a:lnTo>
+                    <a:pt x="2719728" y="2463398"/>
+                  </a:lnTo>
+                  <a:lnTo>
+                    <a:pt x="2796972" y="2448165"/>
+                  </a:lnTo>
+                  <a:lnTo>
+                    <a:pt x="2874216" y="2432704"/>
+                  </a:lnTo>
+                  <a:lnTo>
+                    <a:pt x="2951459" y="2417012"/>
+                  </a:lnTo>
+                  <a:lnTo>
+                    <a:pt x="3028703" y="2401086"/>
+                  </a:lnTo>
+                  <a:lnTo>
+                    <a:pt x="3105946" y="2384922"/>
+                  </a:lnTo>
+                  <a:lnTo>
+                    <a:pt x="3183190" y="2368517"/>
+                  </a:lnTo>
+                  <a:lnTo>
+                    <a:pt x="3260433" y="2351866"/>
+                  </a:lnTo>
+                  <a:lnTo>
+                    <a:pt x="3337677" y="2334968"/>
+                  </a:lnTo>
+                  <a:lnTo>
+                    <a:pt x="3414921" y="2317817"/>
+                  </a:lnTo>
+                  <a:lnTo>
+                    <a:pt x="3492164" y="2300410"/>
+                  </a:lnTo>
+                  <a:lnTo>
+                    <a:pt x="3569408" y="2282743"/>
+                  </a:lnTo>
+                  <a:lnTo>
+                    <a:pt x="3646651" y="2264812"/>
+                  </a:lnTo>
+                  <a:lnTo>
+                    <a:pt x="3723895" y="2246614"/>
+                  </a:lnTo>
+                  <a:lnTo>
+                    <a:pt x="3801138" y="2228143"/>
+                  </a:lnTo>
+                  <a:lnTo>
+                    <a:pt x="3878382" y="2209398"/>
+                  </a:lnTo>
+                  <a:lnTo>
+                    <a:pt x="3955626" y="2190372"/>
+                  </a:lnTo>
+                  <a:lnTo>
+                    <a:pt x="4032869" y="2171062"/>
+                  </a:lnTo>
+                  <a:lnTo>
+                    <a:pt x="4110113" y="2151464"/>
+                  </a:lnTo>
+                  <a:lnTo>
+                    <a:pt x="4187356" y="2131573"/>
+                  </a:lnTo>
+                  <a:lnTo>
+                    <a:pt x="4264600" y="2111386"/>
+                  </a:lnTo>
+                  <a:lnTo>
+                    <a:pt x="4341844" y="2090897"/>
+                  </a:lnTo>
+                  <a:lnTo>
+                    <a:pt x="4419087" y="2070102"/>
+                  </a:lnTo>
+                  <a:lnTo>
+                    <a:pt x="4496331" y="2048996"/>
+                  </a:lnTo>
+                  <a:lnTo>
+                    <a:pt x="4573574" y="2027576"/>
+                  </a:lnTo>
+                  <a:lnTo>
+                    <a:pt x="4650818" y="2005835"/>
+                  </a:lnTo>
+                  <a:lnTo>
+                    <a:pt x="4728061" y="1983771"/>
+                  </a:lnTo>
+                  <a:lnTo>
+                    <a:pt x="4805305" y="1961376"/>
+                  </a:lnTo>
+                  <a:lnTo>
+                    <a:pt x="4882549" y="1938648"/>
+                  </a:lnTo>
+                  <a:lnTo>
+                    <a:pt x="4959792" y="1915580"/>
+                  </a:lnTo>
+                  <a:lnTo>
+                    <a:pt x="5037036" y="1892167"/>
+                  </a:lnTo>
+                  <a:lnTo>
+                    <a:pt x="5114279" y="1868405"/>
+                  </a:lnTo>
+                  <a:lnTo>
+                    <a:pt x="5191523" y="1844289"/>
+                  </a:lnTo>
+                  <a:lnTo>
+                    <a:pt x="5268766" y="1819812"/>
+                  </a:lnTo>
+                  <a:lnTo>
+                    <a:pt x="5346010" y="1794970"/>
+                  </a:lnTo>
+                  <a:lnTo>
+                    <a:pt x="5423254" y="1769757"/>
+                  </a:lnTo>
+                  <a:lnTo>
+                    <a:pt x="5500497" y="1744167"/>
+                  </a:lnTo>
+                  <a:lnTo>
+                    <a:pt x="5577741" y="1718196"/>
+                  </a:lnTo>
+                  <a:lnTo>
+                    <a:pt x="5654984" y="1691836"/>
+                  </a:lnTo>
+                  <a:lnTo>
+                    <a:pt x="5732228" y="1665083"/>
                   </a:lnTo>
                 </a:path>
               </a:pathLst>
@@ -3805,303 +3805,303 @@
           </p:nvSpPr>
           <p:spPr>
             <a:xfrm>
-              <a:off x="817517" y="4679836"/>
-              <a:ext cx="7392041" cy="845115"/>
+              <a:off x="817517" y="4728078"/>
+              <a:ext cx="7392041" cy="806037"/>
             </a:xfrm>
             <a:custGeom>
               <a:avLst/>
               <a:pathLst>
-                <a:path w="7392041" h="845115">
+                <a:path w="7392041" h="806037">
                   <a:moveTo>
-                    <a:pt x="7392041" y="845115"/>
+                    <a:pt x="7392041" y="806037"/>
                   </a:moveTo>
                   <a:lnTo>
-                    <a:pt x="7314797" y="843420"/>
-                  </a:lnTo>
-                  <a:lnTo>
-                    <a:pt x="7237554" y="841606"/>
-                  </a:lnTo>
-                  <a:lnTo>
-                    <a:pt x="7160310" y="839665"/>
-                  </a:lnTo>
-                  <a:lnTo>
-                    <a:pt x="7083066" y="837588"/>
-                  </a:lnTo>
-                  <a:lnTo>
-                    <a:pt x="7005823" y="835367"/>
-                  </a:lnTo>
-                  <a:lnTo>
-                    <a:pt x="6928579" y="832990"/>
-                  </a:lnTo>
-                  <a:lnTo>
-                    <a:pt x="6851336" y="830446"/>
-                  </a:lnTo>
-                  <a:lnTo>
-                    <a:pt x="6774092" y="827726"/>
-                  </a:lnTo>
-                  <a:lnTo>
-                    <a:pt x="6696849" y="824815"/>
-                  </a:lnTo>
-                  <a:lnTo>
-                    <a:pt x="6619605" y="821700"/>
-                  </a:lnTo>
-                  <a:lnTo>
-                    <a:pt x="6542361" y="818368"/>
-                  </a:lnTo>
-                  <a:lnTo>
-                    <a:pt x="6465118" y="814802"/>
-                  </a:lnTo>
-                  <a:lnTo>
-                    <a:pt x="6387874" y="810988"/>
-                  </a:lnTo>
-                  <a:lnTo>
-                    <a:pt x="6310631" y="806907"/>
-                  </a:lnTo>
-                  <a:lnTo>
-                    <a:pt x="6233387" y="802540"/>
-                  </a:lnTo>
-                  <a:lnTo>
-                    <a:pt x="6156144" y="797869"/>
-                  </a:lnTo>
-                  <a:lnTo>
-                    <a:pt x="6078900" y="792871"/>
-                  </a:lnTo>
-                  <a:lnTo>
-                    <a:pt x="6001656" y="787523"/>
-                  </a:lnTo>
-                  <a:lnTo>
-                    <a:pt x="5924413" y="781802"/>
-                  </a:lnTo>
-                  <a:lnTo>
-                    <a:pt x="5847169" y="775680"/>
-                  </a:lnTo>
-                  <a:lnTo>
-                    <a:pt x="5769926" y="769131"/>
-                  </a:lnTo>
-                  <a:lnTo>
-                    <a:pt x="5692682" y="762124"/>
-                  </a:lnTo>
-                  <a:lnTo>
-                    <a:pt x="5615439" y="754627"/>
-                  </a:lnTo>
-                  <a:lnTo>
-                    <a:pt x="5538195" y="746607"/>
-                  </a:lnTo>
-                  <a:lnTo>
-                    <a:pt x="5460951" y="738025"/>
-                  </a:lnTo>
-                  <a:lnTo>
-                    <a:pt x="5383708" y="728844"/>
-                  </a:lnTo>
-                  <a:lnTo>
-                    <a:pt x="5306464" y="719020"/>
-                  </a:lnTo>
-                  <a:lnTo>
-                    <a:pt x="5229221" y="708511"/>
-                  </a:lnTo>
-                  <a:lnTo>
-                    <a:pt x="5151977" y="697266"/>
-                  </a:lnTo>
-                  <a:lnTo>
-                    <a:pt x="5074734" y="685236"/>
-                  </a:lnTo>
-                  <a:lnTo>
-                    <a:pt x="4997490" y="672364"/>
-                  </a:lnTo>
-                  <a:lnTo>
-                    <a:pt x="4920246" y="658593"/>
-                  </a:lnTo>
-                  <a:lnTo>
-                    <a:pt x="4843003" y="643859"/>
-                  </a:lnTo>
-                  <a:lnTo>
-                    <a:pt x="4765759" y="628095"/>
-                  </a:lnTo>
-                  <a:lnTo>
-                    <a:pt x="4688516" y="611229"/>
-                  </a:lnTo>
-                  <a:lnTo>
-                    <a:pt x="4611272" y="593184"/>
-                  </a:lnTo>
-                  <a:lnTo>
-                    <a:pt x="4534029" y="573878"/>
-                  </a:lnTo>
-                  <a:lnTo>
-                    <a:pt x="4456785" y="553222"/>
-                  </a:lnTo>
-                  <a:lnTo>
-                    <a:pt x="4379541" y="531123"/>
-                  </a:lnTo>
-                  <a:lnTo>
-                    <a:pt x="4302298" y="507478"/>
-                  </a:lnTo>
-                  <a:lnTo>
-                    <a:pt x="4225054" y="482181"/>
-                  </a:lnTo>
-                  <a:lnTo>
-                    <a:pt x="4147811" y="455115"/>
-                  </a:lnTo>
-                  <a:lnTo>
-                    <a:pt x="4070567" y="426158"/>
-                  </a:lnTo>
-                  <a:lnTo>
-                    <a:pt x="3993324" y="395176"/>
-                  </a:lnTo>
-                  <a:lnTo>
-                    <a:pt x="3916080" y="362029"/>
-                  </a:lnTo>
-                  <a:lnTo>
-                    <a:pt x="3838836" y="326564"/>
-                  </a:lnTo>
-                  <a:lnTo>
-                    <a:pt x="3761593" y="288620"/>
-                  </a:lnTo>
-                  <a:lnTo>
-                    <a:pt x="3684349" y="248024"/>
-                  </a:lnTo>
-                  <a:lnTo>
-                    <a:pt x="3607106" y="204591"/>
-                  </a:lnTo>
-                  <a:lnTo>
-                    <a:pt x="3529862" y="158121"/>
-                  </a:lnTo>
-                  <a:lnTo>
-                    <a:pt x="3452619" y="108402"/>
-                  </a:lnTo>
-                  <a:lnTo>
-                    <a:pt x="3375375" y="55209"/>
+                    <a:pt x="7314797" y="804420"/>
+                  </a:lnTo>
+                  <a:lnTo>
+                    <a:pt x="7237554" y="802690"/>
+                  </a:lnTo>
+                  <a:lnTo>
+                    <a:pt x="7160310" y="800839"/>
+                  </a:lnTo>
+                  <a:lnTo>
+                    <a:pt x="7083066" y="798858"/>
+                  </a:lnTo>
+                  <a:lnTo>
+                    <a:pt x="7005823" y="796740"/>
+                  </a:lnTo>
+                  <a:lnTo>
+                    <a:pt x="6928579" y="794472"/>
+                  </a:lnTo>
+                  <a:lnTo>
+                    <a:pt x="6851336" y="792047"/>
+                  </a:lnTo>
+                  <a:lnTo>
+                    <a:pt x="6774092" y="789452"/>
+                  </a:lnTo>
+                  <a:lnTo>
+                    <a:pt x="6696849" y="786675"/>
+                  </a:lnTo>
+                  <a:lnTo>
+                    <a:pt x="6619605" y="783705"/>
+                  </a:lnTo>
+                  <a:lnTo>
+                    <a:pt x="6542361" y="780527"/>
+                  </a:lnTo>
+                  <a:lnTo>
+                    <a:pt x="6465118" y="777126"/>
+                  </a:lnTo>
+                  <a:lnTo>
+                    <a:pt x="6387874" y="773488"/>
+                  </a:lnTo>
+                  <a:lnTo>
+                    <a:pt x="6310631" y="769596"/>
+                  </a:lnTo>
+                  <a:lnTo>
+                    <a:pt x="6233387" y="765431"/>
+                  </a:lnTo>
+                  <a:lnTo>
+                    <a:pt x="6156144" y="760976"/>
+                  </a:lnTo>
+                  <a:lnTo>
+                    <a:pt x="6078900" y="756209"/>
+                  </a:lnTo>
+                  <a:lnTo>
+                    <a:pt x="6001656" y="751108"/>
+                  </a:lnTo>
+                  <a:lnTo>
+                    <a:pt x="5924413" y="745652"/>
+                  </a:lnTo>
+                  <a:lnTo>
+                    <a:pt x="5847169" y="739813"/>
+                  </a:lnTo>
+                  <a:lnTo>
+                    <a:pt x="5769926" y="733567"/>
+                  </a:lnTo>
+                  <a:lnTo>
+                    <a:pt x="5692682" y="726884"/>
+                  </a:lnTo>
+                  <a:lnTo>
+                    <a:pt x="5615439" y="719734"/>
+                  </a:lnTo>
+                  <a:lnTo>
+                    <a:pt x="5538195" y="712084"/>
+                  </a:lnTo>
+                  <a:lnTo>
+                    <a:pt x="5460951" y="703899"/>
+                  </a:lnTo>
+                  <a:lnTo>
+                    <a:pt x="5383708" y="695142"/>
+                  </a:lnTo>
+                  <a:lnTo>
+                    <a:pt x="5306464" y="685773"/>
+                  </a:lnTo>
+                  <a:lnTo>
+                    <a:pt x="5229221" y="675749"/>
+                  </a:lnTo>
+                  <a:lnTo>
+                    <a:pt x="5151977" y="665025"/>
+                  </a:lnTo>
+                  <a:lnTo>
+                    <a:pt x="5074734" y="653550"/>
+                  </a:lnTo>
+                  <a:lnTo>
+                    <a:pt x="4997490" y="641274"/>
+                  </a:lnTo>
+                  <a:lnTo>
+                    <a:pt x="4920246" y="628140"/>
+                  </a:lnTo>
+                  <a:lnTo>
+                    <a:pt x="4843003" y="614087"/>
+                  </a:lnTo>
+                  <a:lnTo>
+                    <a:pt x="4765759" y="599052"/>
+                  </a:lnTo>
+                  <a:lnTo>
+                    <a:pt x="4688516" y="582966"/>
+                  </a:lnTo>
+                  <a:lnTo>
+                    <a:pt x="4611272" y="565756"/>
+                  </a:lnTo>
+                  <a:lnTo>
+                    <a:pt x="4534029" y="547342"/>
+                  </a:lnTo>
+                  <a:lnTo>
+                    <a:pt x="4456785" y="527642"/>
+                  </a:lnTo>
+                  <a:lnTo>
+                    <a:pt x="4379541" y="506564"/>
+                  </a:lnTo>
+                  <a:lnTo>
+                    <a:pt x="4302298" y="484013"/>
+                  </a:lnTo>
+                  <a:lnTo>
+                    <a:pt x="4225054" y="459885"/>
+                  </a:lnTo>
+                  <a:lnTo>
+                    <a:pt x="4147811" y="434071"/>
+                  </a:lnTo>
+                  <a:lnTo>
+                    <a:pt x="4070567" y="406452"/>
+                  </a:lnTo>
+                  <a:lnTo>
+                    <a:pt x="3993324" y="376903"/>
+                  </a:lnTo>
+                  <a:lnTo>
+                    <a:pt x="3916080" y="345289"/>
+                  </a:lnTo>
+                  <a:lnTo>
+                    <a:pt x="3838836" y="311464"/>
+                  </a:lnTo>
+                  <a:lnTo>
+                    <a:pt x="3761593" y="275275"/>
+                  </a:lnTo>
+                  <a:lnTo>
+                    <a:pt x="3684349" y="236556"/>
+                  </a:lnTo>
+                  <a:lnTo>
+                    <a:pt x="3607106" y="195130"/>
+                  </a:lnTo>
+                  <a:lnTo>
+                    <a:pt x="3529862" y="150809"/>
+                  </a:lnTo>
+                  <a:lnTo>
+                    <a:pt x="3452619" y="103390"/>
+                  </a:lnTo>
+                  <a:lnTo>
+                    <a:pt x="3375375" y="52656"/>
                   </a:lnTo>
                   <a:lnTo>
                     <a:pt x="3298131" y="0"/>
                   </a:lnTo>
                   <a:lnTo>
-                    <a:pt x="3220888" y="12788"/>
-                  </a:lnTo>
-                  <a:lnTo>
-                    <a:pt x="3143644" y="25389"/>
-                  </a:lnTo>
-                  <a:lnTo>
-                    <a:pt x="3066401" y="37804"/>
-                  </a:lnTo>
-                  <a:lnTo>
-                    <a:pt x="2989157" y="50036"/>
-                  </a:lnTo>
-                  <a:lnTo>
-                    <a:pt x="2911914" y="62089"/>
-                  </a:lnTo>
-                  <a:lnTo>
-                    <a:pt x="2834670" y="73964"/>
-                  </a:lnTo>
-                  <a:lnTo>
-                    <a:pt x="2757426" y="85664"/>
-                  </a:lnTo>
-                  <a:lnTo>
-                    <a:pt x="2680183" y="97193"/>
-                  </a:lnTo>
-                  <a:lnTo>
-                    <a:pt x="2602939" y="108552"/>
-                  </a:lnTo>
-                  <a:lnTo>
-                    <a:pt x="2525696" y="119744"/>
-                  </a:lnTo>
-                  <a:lnTo>
-                    <a:pt x="2448452" y="130771"/>
-                  </a:lnTo>
-                  <a:lnTo>
-                    <a:pt x="2371209" y="141636"/>
-                  </a:lnTo>
-                  <a:lnTo>
-                    <a:pt x="2293965" y="152341"/>
-                  </a:lnTo>
-                  <a:lnTo>
-                    <a:pt x="2216721" y="162888"/>
-                  </a:lnTo>
-                  <a:lnTo>
-                    <a:pt x="2139478" y="173281"/>
-                  </a:lnTo>
-                  <a:lnTo>
-                    <a:pt x="2062234" y="183520"/>
-                  </a:lnTo>
-                  <a:lnTo>
-                    <a:pt x="1984991" y="193609"/>
-                  </a:lnTo>
-                  <a:lnTo>
-                    <a:pt x="1907747" y="203550"/>
-                  </a:lnTo>
-                  <a:lnTo>
-                    <a:pt x="1830504" y="213344"/>
-                  </a:lnTo>
-                  <a:lnTo>
-                    <a:pt x="1753260" y="222994"/>
-                  </a:lnTo>
-                  <a:lnTo>
-                    <a:pt x="1676016" y="232503"/>
-                  </a:lnTo>
-                  <a:lnTo>
-                    <a:pt x="1598773" y="241871"/>
-                  </a:lnTo>
-                  <a:lnTo>
-                    <a:pt x="1521529" y="251102"/>
-                  </a:lnTo>
-                  <a:lnTo>
-                    <a:pt x="1444286" y="260197"/>
-                  </a:lnTo>
-                  <a:lnTo>
-                    <a:pt x="1367042" y="269158"/>
-                  </a:lnTo>
-                  <a:lnTo>
-                    <a:pt x="1289799" y="277987"/>
-                  </a:lnTo>
-                  <a:lnTo>
-                    <a:pt x="1212555" y="286686"/>
-                  </a:lnTo>
-                  <a:lnTo>
-                    <a:pt x="1135311" y="295258"/>
-                  </a:lnTo>
-                  <a:lnTo>
-                    <a:pt x="1058068" y="303703"/>
-                  </a:lnTo>
-                  <a:lnTo>
-                    <a:pt x="980824" y="312024"/>
-                  </a:lnTo>
-                  <a:lnTo>
-                    <a:pt x="903581" y="320223"/>
-                  </a:lnTo>
-                  <a:lnTo>
-                    <a:pt x="826337" y="328301"/>
-                  </a:lnTo>
-                  <a:lnTo>
-                    <a:pt x="749094" y="336260"/>
-                  </a:lnTo>
-                  <a:lnTo>
-                    <a:pt x="671850" y="344102"/>
-                  </a:lnTo>
-                  <a:lnTo>
-                    <a:pt x="594606" y="351829"/>
-                  </a:lnTo>
-                  <a:lnTo>
-                    <a:pt x="517363" y="359442"/>
-                  </a:lnTo>
-                  <a:lnTo>
-                    <a:pt x="440119" y="366943"/>
-                  </a:lnTo>
-                  <a:lnTo>
-                    <a:pt x="362876" y="374334"/>
-                  </a:lnTo>
-                  <a:lnTo>
-                    <a:pt x="285632" y="381616"/>
-                  </a:lnTo>
-                  <a:lnTo>
-                    <a:pt x="208389" y="388791"/>
-                  </a:lnTo>
-                  <a:lnTo>
-                    <a:pt x="131145" y="395860"/>
-                  </a:lnTo>
-                  <a:lnTo>
-                    <a:pt x="53901" y="402826"/>
-                  </a:lnTo>
-                  <a:lnTo>
-                    <a:pt x="0" y="407615"/>
+                    <a:pt x="3220888" y="12197"/>
+                  </a:lnTo>
+                  <a:lnTo>
+                    <a:pt x="3143644" y="24215"/>
+                  </a:lnTo>
+                  <a:lnTo>
+                    <a:pt x="3066401" y="36056"/>
+                  </a:lnTo>
+                  <a:lnTo>
+                    <a:pt x="2989157" y="47722"/>
+                  </a:lnTo>
+                  <a:lnTo>
+                    <a:pt x="2911914" y="59218"/>
+                  </a:lnTo>
+                  <a:lnTo>
+                    <a:pt x="2834670" y="70544"/>
+                  </a:lnTo>
+                  <a:lnTo>
+                    <a:pt x="2757426" y="81703"/>
+                  </a:lnTo>
+                  <a:lnTo>
+                    <a:pt x="2680183" y="92699"/>
+                  </a:lnTo>
+                  <a:lnTo>
+                    <a:pt x="2602939" y="103532"/>
+                  </a:lnTo>
+                  <a:lnTo>
+                    <a:pt x="2525696" y="114207"/>
+                  </a:lnTo>
+                  <a:lnTo>
+                    <a:pt x="2448452" y="124724"/>
+                  </a:lnTo>
+                  <a:lnTo>
+                    <a:pt x="2371209" y="135086"/>
+                  </a:lnTo>
+                  <a:lnTo>
+                    <a:pt x="2293965" y="145297"/>
+                  </a:lnTo>
+                  <a:lnTo>
+                    <a:pt x="2216721" y="155356"/>
+                  </a:lnTo>
+                  <a:lnTo>
+                    <a:pt x="2139478" y="165268"/>
+                  </a:lnTo>
+                  <a:lnTo>
+                    <a:pt x="2062234" y="175034"/>
+                  </a:lnTo>
+                  <a:lnTo>
+                    <a:pt x="1984991" y="184657"/>
+                  </a:lnTo>
+                  <a:lnTo>
+                    <a:pt x="1907747" y="194138"/>
+                  </a:lnTo>
+                  <a:lnTo>
+                    <a:pt x="1830504" y="203479"/>
+                  </a:lnTo>
+                  <a:lnTo>
+                    <a:pt x="1753260" y="212683"/>
+                  </a:lnTo>
+                  <a:lnTo>
+                    <a:pt x="1676016" y="221752"/>
+                  </a:lnTo>
+                  <a:lnTo>
+                    <a:pt x="1598773" y="230687"/>
+                  </a:lnTo>
+                  <a:lnTo>
+                    <a:pt x="1521529" y="239491"/>
+                  </a:lnTo>
+                  <a:lnTo>
+                    <a:pt x="1444286" y="248165"/>
+                  </a:lnTo>
+                  <a:lnTo>
+                    <a:pt x="1367042" y="256712"/>
+                  </a:lnTo>
+                  <a:lnTo>
+                    <a:pt x="1289799" y="265133"/>
+                  </a:lnTo>
+                  <a:lnTo>
+                    <a:pt x="1212555" y="273430"/>
+                  </a:lnTo>
+                  <a:lnTo>
+                    <a:pt x="1135311" y="281605"/>
+                  </a:lnTo>
+                  <a:lnTo>
+                    <a:pt x="1058068" y="289660"/>
+                  </a:lnTo>
+                  <a:lnTo>
+                    <a:pt x="980824" y="297596"/>
+                  </a:lnTo>
+                  <a:lnTo>
+                    <a:pt x="903581" y="305416"/>
+                  </a:lnTo>
+                  <a:lnTo>
+                    <a:pt x="826337" y="313120"/>
+                  </a:lnTo>
+                  <a:lnTo>
+                    <a:pt x="749094" y="320711"/>
+                  </a:lnTo>
+                  <a:lnTo>
+                    <a:pt x="671850" y="328191"/>
+                  </a:lnTo>
+                  <a:lnTo>
+                    <a:pt x="594606" y="335560"/>
+                  </a:lnTo>
+                  <a:lnTo>
+                    <a:pt x="517363" y="342822"/>
+                  </a:lnTo>
+                  <a:lnTo>
+                    <a:pt x="440119" y="349976"/>
+                  </a:lnTo>
+                  <a:lnTo>
+                    <a:pt x="362876" y="357025"/>
+                  </a:lnTo>
+                  <a:lnTo>
+                    <a:pt x="285632" y="363970"/>
+                  </a:lnTo>
+                  <a:lnTo>
+                    <a:pt x="208389" y="370813"/>
+                  </a:lnTo>
+                  <a:lnTo>
+                    <a:pt x="131145" y="377556"/>
+                  </a:lnTo>
+                  <a:lnTo>
+                    <a:pt x="53901" y="384199"/>
+                  </a:lnTo>
+                  <a:lnTo>
+                    <a:pt x="0" y="388767"/>
                   </a:lnTo>
                 </a:path>
               </a:pathLst>
@@ -4121,303 +4121,303 @@
           </p:nvSpPr>
           <p:spPr>
             <a:xfrm>
-              <a:off x="817517" y="2865538"/>
-              <a:ext cx="7392041" cy="2468608"/>
+              <a:off x="817517" y="2997673"/>
+              <a:ext cx="7392041" cy="2354460"/>
             </a:xfrm>
             <a:custGeom>
               <a:avLst/>
               <a:pathLst>
-                <a:path w="7392041" h="2468608">
+                <a:path w="7392041" h="2354460">
                   <a:moveTo>
                     <a:pt x="0" y="0"/>
                   </a:moveTo>
                   <a:lnTo>
-                    <a:pt x="53901" y="49131"/>
-                  </a:lnTo>
-                  <a:lnTo>
-                    <a:pt x="131145" y="117707"/>
-                  </a:lnTo>
-                  <a:lnTo>
-                    <a:pt x="208389" y="184497"/>
-                  </a:lnTo>
-                  <a:lnTo>
-                    <a:pt x="285632" y="249549"/>
-                  </a:lnTo>
-                  <a:lnTo>
-                    <a:pt x="362876" y="312908"/>
-                  </a:lnTo>
-                  <a:lnTo>
-                    <a:pt x="440119" y="374617"/>
-                  </a:lnTo>
-                  <a:lnTo>
-                    <a:pt x="517363" y="434720"/>
-                  </a:lnTo>
-                  <a:lnTo>
-                    <a:pt x="594606" y="493259"/>
-                  </a:lnTo>
-                  <a:lnTo>
-                    <a:pt x="671850" y="550274"/>
-                  </a:lnTo>
-                  <a:lnTo>
-                    <a:pt x="749094" y="605805"/>
-                  </a:lnTo>
-                  <a:lnTo>
-                    <a:pt x="826337" y="659890"/>
-                  </a:lnTo>
-                  <a:lnTo>
-                    <a:pt x="903581" y="712568"/>
-                  </a:lnTo>
-                  <a:lnTo>
-                    <a:pt x="980824" y="763875"/>
-                  </a:lnTo>
-                  <a:lnTo>
-                    <a:pt x="1058068" y="813846"/>
-                  </a:lnTo>
-                  <a:lnTo>
-                    <a:pt x="1135311" y="862516"/>
-                  </a:lnTo>
-                  <a:lnTo>
-                    <a:pt x="1212555" y="909920"/>
-                  </a:lnTo>
-                  <a:lnTo>
-                    <a:pt x="1289799" y="956089"/>
-                  </a:lnTo>
-                  <a:lnTo>
-                    <a:pt x="1367042" y="1001057"/>
-                  </a:lnTo>
-                  <a:lnTo>
-                    <a:pt x="1444286" y="1044854"/>
-                  </a:lnTo>
-                  <a:lnTo>
-                    <a:pt x="1521529" y="1087512"/>
-                  </a:lnTo>
-                  <a:lnTo>
-                    <a:pt x="1598773" y="1129059"/>
-                  </a:lnTo>
-                  <a:lnTo>
-                    <a:pt x="1676016" y="1169524"/>
-                  </a:lnTo>
-                  <a:lnTo>
-                    <a:pt x="1753260" y="1208936"/>
-                  </a:lnTo>
-                  <a:lnTo>
-                    <a:pt x="1830504" y="1247323"/>
-                  </a:lnTo>
-                  <a:lnTo>
-                    <a:pt x="1907747" y="1284710"/>
-                  </a:lnTo>
-                  <a:lnTo>
-                    <a:pt x="1984991" y="1321124"/>
-                  </a:lnTo>
-                  <a:lnTo>
-                    <a:pt x="2062234" y="1356590"/>
-                  </a:lnTo>
-                  <a:lnTo>
-                    <a:pt x="2139478" y="1391133"/>
-                  </a:lnTo>
-                  <a:lnTo>
-                    <a:pt x="2216721" y="1424777"/>
-                  </a:lnTo>
-                  <a:lnTo>
-                    <a:pt x="2293965" y="1457545"/>
-                  </a:lnTo>
-                  <a:lnTo>
-                    <a:pt x="2371209" y="1489460"/>
-                  </a:lnTo>
-                  <a:lnTo>
-                    <a:pt x="2448452" y="1520545"/>
-                  </a:lnTo>
-                  <a:lnTo>
-                    <a:pt x="2525696" y="1550820"/>
-                  </a:lnTo>
-                  <a:lnTo>
-                    <a:pt x="2602939" y="1580308"/>
-                  </a:lnTo>
-                  <a:lnTo>
-                    <a:pt x="2680183" y="1609027"/>
-                  </a:lnTo>
-                  <a:lnTo>
-                    <a:pt x="2757426" y="1637000"/>
-                  </a:lnTo>
-                  <a:lnTo>
-                    <a:pt x="2834670" y="1664244"/>
-                  </a:lnTo>
-                  <a:lnTo>
-                    <a:pt x="2911914" y="1690779"/>
-                  </a:lnTo>
-                  <a:lnTo>
-                    <a:pt x="2989157" y="1716623"/>
-                  </a:lnTo>
-                  <a:lnTo>
-                    <a:pt x="3066401" y="1741795"/>
-                  </a:lnTo>
-                  <a:lnTo>
-                    <a:pt x="3143644" y="1766311"/>
-                  </a:lnTo>
-                  <a:lnTo>
-                    <a:pt x="3220888" y="1790189"/>
-                  </a:lnTo>
-                  <a:lnTo>
-                    <a:pt x="3298131" y="1813446"/>
-                  </a:lnTo>
-                  <a:lnTo>
-                    <a:pt x="3375375" y="1836097"/>
-                  </a:lnTo>
-                  <a:lnTo>
-                    <a:pt x="3452619" y="1858159"/>
-                  </a:lnTo>
-                  <a:lnTo>
-                    <a:pt x="3529862" y="1879646"/>
-                  </a:lnTo>
-                  <a:lnTo>
-                    <a:pt x="3607106" y="1900575"/>
-                  </a:lnTo>
-                  <a:lnTo>
-                    <a:pt x="3684349" y="1920958"/>
-                  </a:lnTo>
-                  <a:lnTo>
-                    <a:pt x="3761593" y="1940811"/>
-                  </a:lnTo>
-                  <a:lnTo>
-                    <a:pt x="3838836" y="1960147"/>
-                  </a:lnTo>
-                  <a:lnTo>
-                    <a:pt x="3916080" y="1978980"/>
-                  </a:lnTo>
-                  <a:lnTo>
-                    <a:pt x="3993324" y="1997322"/>
-                  </a:lnTo>
-                  <a:lnTo>
-                    <a:pt x="4070567" y="2015188"/>
-                  </a:lnTo>
-                  <a:lnTo>
-                    <a:pt x="4147811" y="2032588"/>
-                  </a:lnTo>
-                  <a:lnTo>
-                    <a:pt x="4225054" y="2049535"/>
-                  </a:lnTo>
-                  <a:lnTo>
-                    <a:pt x="4302298" y="2066041"/>
-                  </a:lnTo>
-                  <a:lnTo>
-                    <a:pt x="4379541" y="2082118"/>
-                  </a:lnTo>
-                  <a:lnTo>
-                    <a:pt x="4456785" y="2097776"/>
-                  </a:lnTo>
-                  <a:lnTo>
-                    <a:pt x="4534029" y="2113026"/>
-                  </a:lnTo>
-                  <a:lnTo>
-                    <a:pt x="4611272" y="2127879"/>
-                  </a:lnTo>
-                  <a:lnTo>
-                    <a:pt x="4688516" y="2142346"/>
-                  </a:lnTo>
-                  <a:lnTo>
-                    <a:pt x="4765759" y="2156436"/>
-                  </a:lnTo>
-                  <a:lnTo>
-                    <a:pt x="4843003" y="2170160"/>
-                  </a:lnTo>
-                  <a:lnTo>
-                    <a:pt x="4920246" y="2183526"/>
-                  </a:lnTo>
-                  <a:lnTo>
-                    <a:pt x="4997490" y="2196545"/>
-                  </a:lnTo>
-                  <a:lnTo>
-                    <a:pt x="5074734" y="2209224"/>
-                  </a:lnTo>
-                  <a:lnTo>
-                    <a:pt x="5151977" y="2221574"/>
-                  </a:lnTo>
-                  <a:lnTo>
-                    <a:pt x="5229221" y="2233602"/>
-                  </a:lnTo>
-                  <a:lnTo>
-                    <a:pt x="5306464" y="2245317"/>
-                  </a:lnTo>
-                  <a:lnTo>
-                    <a:pt x="5383708" y="2256727"/>
-                  </a:lnTo>
-                  <a:lnTo>
-                    <a:pt x="5460951" y="2267840"/>
-                  </a:lnTo>
-                  <a:lnTo>
-                    <a:pt x="5538195" y="2278663"/>
-                  </a:lnTo>
-                  <a:lnTo>
-                    <a:pt x="5615439" y="2289205"/>
-                  </a:lnTo>
-                  <a:lnTo>
-                    <a:pt x="5692682" y="2299473"/>
-                  </a:lnTo>
-                  <a:lnTo>
-                    <a:pt x="5769926" y="2309473"/>
-                  </a:lnTo>
-                  <a:lnTo>
-                    <a:pt x="5847169" y="2319213"/>
-                  </a:lnTo>
-                  <a:lnTo>
-                    <a:pt x="5924413" y="2328700"/>
-                  </a:lnTo>
-                  <a:lnTo>
-                    <a:pt x="6001656" y="2337940"/>
-                  </a:lnTo>
-                  <a:lnTo>
-                    <a:pt x="6078900" y="2346939"/>
-                  </a:lnTo>
-                  <a:lnTo>
-                    <a:pt x="6156144" y="2355704"/>
-                  </a:lnTo>
-                  <a:lnTo>
-                    <a:pt x="6233387" y="2364240"/>
-                  </a:lnTo>
-                  <a:lnTo>
-                    <a:pt x="6310631" y="2372555"/>
-                  </a:lnTo>
-                  <a:lnTo>
-                    <a:pt x="6387874" y="2380653"/>
-                  </a:lnTo>
-                  <a:lnTo>
-                    <a:pt x="6465118" y="2388540"/>
-                  </a:lnTo>
-                  <a:lnTo>
-                    <a:pt x="6542361" y="2396222"/>
-                  </a:lnTo>
-                  <a:lnTo>
-                    <a:pt x="6619605" y="2403704"/>
-                  </a:lnTo>
-                  <a:lnTo>
-                    <a:pt x="6696849" y="2410991"/>
-                  </a:lnTo>
-                  <a:lnTo>
-                    <a:pt x="6774092" y="2418089"/>
-                  </a:lnTo>
-                  <a:lnTo>
-                    <a:pt x="6851336" y="2425002"/>
-                  </a:lnTo>
-                  <a:lnTo>
-                    <a:pt x="6928579" y="2431735"/>
-                  </a:lnTo>
-                  <a:lnTo>
-                    <a:pt x="7005823" y="2438293"/>
-                  </a:lnTo>
-                  <a:lnTo>
-                    <a:pt x="7083066" y="2444679"/>
-                  </a:lnTo>
-                  <a:lnTo>
-                    <a:pt x="7160310" y="2450900"/>
-                  </a:lnTo>
-                  <a:lnTo>
-                    <a:pt x="7237554" y="2456959"/>
-                  </a:lnTo>
-                  <a:lnTo>
-                    <a:pt x="7314797" y="2462860"/>
-                  </a:lnTo>
-                  <a:lnTo>
-                    <a:pt x="7392041" y="2468608"/>
+                    <a:pt x="53901" y="46860"/>
+                  </a:lnTo>
+                  <a:lnTo>
+                    <a:pt x="131145" y="112264"/>
+                  </a:lnTo>
+                  <a:lnTo>
+                    <a:pt x="208389" y="175966"/>
+                  </a:lnTo>
+                  <a:lnTo>
+                    <a:pt x="285632" y="238010"/>
+                  </a:lnTo>
+                  <a:lnTo>
+                    <a:pt x="362876" y="298439"/>
+                  </a:lnTo>
+                  <a:lnTo>
+                    <a:pt x="440119" y="357295"/>
+                  </a:lnTo>
+                  <a:lnTo>
+                    <a:pt x="517363" y="414619"/>
+                  </a:lnTo>
+                  <a:lnTo>
+                    <a:pt x="594606" y="470451"/>
+                  </a:lnTo>
+                  <a:lnTo>
+                    <a:pt x="671850" y="524830"/>
+                  </a:lnTo>
+                  <a:lnTo>
+                    <a:pt x="749094" y="577793"/>
+                  </a:lnTo>
+                  <a:lnTo>
+                    <a:pt x="826337" y="629377"/>
+                  </a:lnTo>
+                  <a:lnTo>
+                    <a:pt x="903581" y="679619"/>
+                  </a:lnTo>
+                  <a:lnTo>
+                    <a:pt x="980824" y="728553"/>
+                  </a:lnTo>
+                  <a:lnTo>
+                    <a:pt x="1058068" y="776214"/>
+                  </a:lnTo>
+                  <a:lnTo>
+                    <a:pt x="1135311" y="822634"/>
+                  </a:lnTo>
+                  <a:lnTo>
+                    <a:pt x="1212555" y="867845"/>
+                  </a:lnTo>
+                  <a:lnTo>
+                    <a:pt x="1289799" y="911880"/>
+                  </a:lnTo>
+                  <a:lnTo>
+                    <a:pt x="1367042" y="954768"/>
+                  </a:lnTo>
+                  <a:lnTo>
+                    <a:pt x="1444286" y="996541"/>
+                  </a:lnTo>
+                  <a:lnTo>
+                    <a:pt x="1521529" y="1037225"/>
+                  </a:lnTo>
+                  <a:lnTo>
+                    <a:pt x="1598773" y="1076851"/>
+                  </a:lnTo>
+                  <a:lnTo>
+                    <a:pt x="1676016" y="1115446"/>
+                  </a:lnTo>
+                  <a:lnTo>
+                    <a:pt x="1753260" y="1153035"/>
+                  </a:lnTo>
+                  <a:lnTo>
+                    <a:pt x="1830504" y="1189647"/>
+                  </a:lnTo>
+                  <a:lnTo>
+                    <a:pt x="1907747" y="1225305"/>
+                  </a:lnTo>
+                  <a:lnTo>
+                    <a:pt x="1984991" y="1260036"/>
+                  </a:lnTo>
+                  <a:lnTo>
+                    <a:pt x="2062234" y="1293862"/>
+                  </a:lnTo>
+                  <a:lnTo>
+                    <a:pt x="2139478" y="1326808"/>
+                  </a:lnTo>
+                  <a:lnTo>
+                    <a:pt x="2216721" y="1358896"/>
+                  </a:lnTo>
+                  <a:lnTo>
+                    <a:pt x="2293965" y="1390149"/>
+                  </a:lnTo>
+                  <a:lnTo>
+                    <a:pt x="2371209" y="1420588"/>
+                  </a:lnTo>
+                  <a:lnTo>
+                    <a:pt x="2448452" y="1450235"/>
+                  </a:lnTo>
+                  <a:lnTo>
+                    <a:pt x="2525696" y="1479111"/>
+                  </a:lnTo>
+                  <a:lnTo>
+                    <a:pt x="2602939" y="1507235"/>
+                  </a:lnTo>
+                  <a:lnTo>
+                    <a:pt x="2680183" y="1534626"/>
+                  </a:lnTo>
+                  <a:lnTo>
+                    <a:pt x="2757426" y="1561305"/>
+                  </a:lnTo>
+                  <a:lnTo>
+                    <a:pt x="2834670" y="1587290"/>
+                  </a:lnTo>
+                  <a:lnTo>
+                    <a:pt x="2911914" y="1612598"/>
+                  </a:lnTo>
+                  <a:lnTo>
+                    <a:pt x="2989157" y="1637247"/>
+                  </a:lnTo>
+                  <a:lnTo>
+                    <a:pt x="3066401" y="1661255"/>
+                  </a:lnTo>
+                  <a:lnTo>
+                    <a:pt x="3143644" y="1684637"/>
+                  </a:lnTo>
+                  <a:lnTo>
+                    <a:pt x="3220888" y="1707411"/>
+                  </a:lnTo>
+                  <a:lnTo>
+                    <a:pt x="3298131" y="1729593"/>
+                  </a:lnTo>
+                  <a:lnTo>
+                    <a:pt x="3375375" y="1751197"/>
+                  </a:lnTo>
+                  <a:lnTo>
+                    <a:pt x="3452619" y="1772238"/>
+                  </a:lnTo>
+                  <a:lnTo>
+                    <a:pt x="3529862" y="1792732"/>
+                  </a:lnTo>
+                  <a:lnTo>
+                    <a:pt x="3607106" y="1812693"/>
+                  </a:lnTo>
+                  <a:lnTo>
+                    <a:pt x="3684349" y="1832134"/>
+                  </a:lnTo>
+                  <a:lnTo>
+                    <a:pt x="3761593" y="1851069"/>
+                  </a:lnTo>
+                  <a:lnTo>
+                    <a:pt x="3838836" y="1869511"/>
+                  </a:lnTo>
+                  <a:lnTo>
+                    <a:pt x="3916080" y="1887473"/>
+                  </a:lnTo>
+                  <a:lnTo>
+                    <a:pt x="3993324" y="1904967"/>
+                  </a:lnTo>
+                  <a:lnTo>
+                    <a:pt x="4070567" y="1922006"/>
+                  </a:lnTo>
+                  <a:lnTo>
+                    <a:pt x="4147811" y="1938602"/>
+                  </a:lnTo>
+                  <a:lnTo>
+                    <a:pt x="4225054" y="1954765"/>
+                  </a:lnTo>
+                  <a:lnTo>
+                    <a:pt x="4302298" y="1970508"/>
+                  </a:lnTo>
+                  <a:lnTo>
+                    <a:pt x="4379541" y="1985841"/>
+                  </a:lnTo>
+                  <a:lnTo>
+                    <a:pt x="4456785" y="2000775"/>
+                  </a:lnTo>
+                  <a:lnTo>
+                    <a:pt x="4534029" y="2015320"/>
+                  </a:lnTo>
+                  <a:lnTo>
+                    <a:pt x="4611272" y="2029487"/>
+                  </a:lnTo>
+                  <a:lnTo>
+                    <a:pt x="4688516" y="2043285"/>
+                  </a:lnTo>
+                  <a:lnTo>
+                    <a:pt x="4765759" y="2056724"/>
+                  </a:lnTo>
+                  <a:lnTo>
+                    <a:pt x="4843003" y="2069813"/>
+                  </a:lnTo>
+                  <a:lnTo>
+                    <a:pt x="4920246" y="2082561"/>
+                  </a:lnTo>
+                  <a:lnTo>
+                    <a:pt x="4997490" y="2094977"/>
+                  </a:lnTo>
+                  <a:lnTo>
+                    <a:pt x="5074734" y="2107070"/>
+                  </a:lnTo>
+                  <a:lnTo>
+                    <a:pt x="5151977" y="2118849"/>
+                  </a:lnTo>
+                  <a:lnTo>
+                    <a:pt x="5229221" y="2130321"/>
+                  </a:lnTo>
+                  <a:lnTo>
+                    <a:pt x="5306464" y="2141494"/>
+                  </a:lnTo>
+                  <a:lnTo>
+                    <a:pt x="5383708" y="2152376"/>
+                  </a:lnTo>
+                  <a:lnTo>
+                    <a:pt x="5460951" y="2162976"/>
+                  </a:lnTo>
+                  <a:lnTo>
+                    <a:pt x="5538195" y="2173299"/>
+                  </a:lnTo>
+                  <a:lnTo>
+                    <a:pt x="5615439" y="2183353"/>
+                  </a:lnTo>
+                  <a:lnTo>
+                    <a:pt x="5692682" y="2193146"/>
+                  </a:lnTo>
+                  <a:lnTo>
+                    <a:pt x="5769926" y="2202684"/>
+                  </a:lnTo>
+                  <a:lnTo>
+                    <a:pt x="5847169" y="2211974"/>
+                  </a:lnTo>
+                  <a:lnTo>
+                    <a:pt x="5924413" y="2221022"/>
+                  </a:lnTo>
+                  <a:lnTo>
+                    <a:pt x="6001656" y="2229834"/>
+                  </a:lnTo>
+                  <a:lnTo>
+                    <a:pt x="6078900" y="2238417"/>
+                  </a:lnTo>
+                  <a:lnTo>
+                    <a:pt x="6156144" y="2246777"/>
+                  </a:lnTo>
+                  <a:lnTo>
+                    <a:pt x="6233387" y="2254919"/>
+                  </a:lnTo>
+                  <a:lnTo>
+                    <a:pt x="6310631" y="2262849"/>
+                  </a:lnTo>
+                  <a:lnTo>
+                    <a:pt x="6387874" y="2270572"/>
+                  </a:lnTo>
+                  <a:lnTo>
+                    <a:pt x="6465118" y="2278095"/>
+                  </a:lnTo>
+                  <a:lnTo>
+                    <a:pt x="6542361" y="2285422"/>
+                  </a:lnTo>
+                  <a:lnTo>
+                    <a:pt x="6619605" y="2292558"/>
+                  </a:lnTo>
+                  <a:lnTo>
+                    <a:pt x="6696849" y="2299508"/>
+                  </a:lnTo>
+                  <a:lnTo>
+                    <a:pt x="6774092" y="2306278"/>
+                  </a:lnTo>
+                  <a:lnTo>
+                    <a:pt x="6851336" y="2312871"/>
+                  </a:lnTo>
+                  <a:lnTo>
+                    <a:pt x="6928579" y="2319292"/>
+                  </a:lnTo>
+                  <a:lnTo>
+                    <a:pt x="7005823" y="2325547"/>
+                  </a:lnTo>
+                  <a:lnTo>
+                    <a:pt x="7083066" y="2331638"/>
+                  </a:lnTo>
+                  <a:lnTo>
+                    <a:pt x="7160310" y="2337571"/>
+                  </a:lnTo>
+                  <a:lnTo>
+                    <a:pt x="7237554" y="2343350"/>
+                  </a:lnTo>
+                  <a:lnTo>
+                    <a:pt x="7314797" y="2348978"/>
+                  </a:lnTo>
+                  <a:lnTo>
+                    <a:pt x="7392041" y="2354460"/>
                   </a:lnTo>
                 </a:path>
               </a:pathLst>
@@ -4446,7 +4446,7 @@
           </p:nvSpPr>
           <p:spPr>
             <a:xfrm>
-              <a:off x="817517" y="4679530"/>
+              <a:off x="817517" y="4727786"/>
               <a:ext cx="7799693" cy="0"/>
             </a:xfrm>
             <a:custGeom>
@@ -4489,15 +4489,15 @@
           </p:nvSpPr>
           <p:spPr>
             <a:xfrm>
-              <a:off x="4117484" y="1896563"/>
-              <a:ext cx="0" cy="3826579"/>
+              <a:off x="4117484" y="2073503"/>
+              <a:ext cx="0" cy="3649639"/>
             </a:xfrm>
             <a:custGeom>
               <a:avLst/>
               <a:pathLst>
-                <a:path w="0" h="3826579">
+                <a:path w="0" h="3649639">
                   <a:moveTo>
-                    <a:pt x="0" y="3826579"/>
+                    <a:pt x="0" y="3649639"/>
                   </a:moveTo>
                   <a:lnTo>
                     <a:pt x="0" y="0"/>
@@ -4532,7 +4532,7 @@
           </p:nvSpPr>
           <p:spPr>
             <a:xfrm>
-              <a:off x="692708" y="5509156"/>
+              <a:off x="692708" y="5517199"/>
               <a:ext cx="62179" cy="80101"/>
             </a:xfrm>
             <a:prstGeom prst="rect">
@@ -4578,7 +4578,7 @@
           </p:nvSpPr>
           <p:spPr>
             <a:xfrm>
-              <a:off x="692708" y="4639479"/>
+              <a:off x="692708" y="4687735"/>
               <a:ext cx="62179" cy="80101"/>
             </a:xfrm>
             <a:prstGeom prst="rect">
@@ -4624,7 +4624,7 @@
           </p:nvSpPr>
           <p:spPr>
             <a:xfrm>
-              <a:off x="692708" y="3769802"/>
+              <a:off x="692708" y="3858272"/>
               <a:ext cx="62179" cy="80101"/>
             </a:xfrm>
             <a:prstGeom prst="rect">
@@ -4670,7 +4670,7 @@
           </p:nvSpPr>
           <p:spPr>
             <a:xfrm>
-              <a:off x="692708" y="2900125"/>
+              <a:off x="692708" y="3028808"/>
               <a:ext cx="62179" cy="80101"/>
             </a:xfrm>
             <a:prstGeom prst="rect">
@@ -4716,7 +4716,7 @@
           </p:nvSpPr>
           <p:spPr>
             <a:xfrm>
-              <a:off x="692708" y="2030448"/>
+              <a:off x="692708" y="2199345"/>
               <a:ext cx="62179" cy="80101"/>
             </a:xfrm>
             <a:prstGeom prst="rect">
@@ -4992,7 +4992,7 @@
           </p:nvSpPr>
           <p:spPr>
             <a:xfrm rot="-5400000">
-              <a:off x="68446" y="3759743"/>
+              <a:off x="68446" y="3848213"/>
               <a:ext cx="1016904" cy="100218"/>
             </a:xfrm>
             <a:prstGeom prst="rect">
@@ -5033,6 +5033,52 @@
         <p:sp>
           <p:nvSpPr>
             <p:cNvPr id="38" name="tx38"/>
+            <p:cNvSpPr/>
+            <p:nvPr/>
+          </p:nvSpPr>
+          <p:spPr>
+            <a:xfrm>
+              <a:off x="817517" y="1896563"/>
+              <a:ext cx="5626211" cy="82021"/>
+            </a:xfrm>
+            <a:prstGeom prst="rect">
+              <a:avLst/>
+            </a:prstGeom>
+            <a:noFill/>
+          </p:spPr>
+          <p:txBody>
+            <a:bodyPr lIns="0" rIns="0" tIns="0" bIns="0" anchorCtr="1" anchor="ctr" wrap="none"/>
+            <a:lstStyle/>
+            <a:p>
+              <a:pPr algn="l" marL="0" marR="0" indent="0">
+                <a:lnSpc>
+                  <a:spcPts val="900"/>
+                </a:lnSpc>
+                <a:spcBef>
+                  <a:spcPts val="0"/>
+                </a:spcBef>
+                <a:spcAft>
+                  <a:spcPts val="0"/>
+                </a:spcAft>
+              </a:pPr>
+              <a:r>
+                <a:rPr sz="900">
+                  <a:solidFill>
+                    <a:srgbClr val="404040">
+                      <a:alpha val="100000"/>
+                    </a:srgbClr>
+                  </a:solidFill>
+                  <a:latin typeface="Helvetica"/>
+                  <a:cs typeface="Helvetica"/>
+                </a:rPr>
+                <a:t>subHR per 0.1 ratio decline: 1.35 (0.84-2.17)  |  per IQR decline (Δ = 0.30): 2.44 (0.61-9.87)  |  IQR: [0.84, 1.14]</a:t>
+              </a:r>
+            </a:p>
+          </p:txBody>
+        </p:sp>
+        <p:sp>
+          <p:nvSpPr>
+            <p:cNvPr id="39" name="tx39"/>
             <p:cNvSpPr/>
             <p:nvPr/>
           </p:nvSpPr>

--- a/docs/pptx/auc3/jx-auc3-linsubhr-ratio-hosp6.pptx
+++ b/docs/pptx/auc3/jx-auc3-linsubhr-ratio-hosp6.pptx
@@ -5039,7 +5039,7 @@
           <p:spPr>
             <a:xfrm>
               <a:off x="817517" y="1896563"/>
-              <a:ext cx="5626211" cy="82021"/>
+              <a:ext cx="6169365" cy="82021"/>
             </a:xfrm>
             <a:prstGeom prst="rect">
               <a:avLst/>
@@ -5071,7 +5071,7 @@
                   <a:latin typeface="Helvetica"/>
                   <a:cs typeface="Helvetica"/>
                 </a:rPr>
-                <a:t>subHR per 0.1 ratio decline: 1.35 (0.84-2.17)  |  per IQR decline (Δ = 0.30): 2.44 (0.61-9.87)  |  IQR: [0.84, 1.14]</a:t>
+                <a:t>subHR per 0.1 ratio decline: 1.35 (0.84-2.17), p = 0.210  |  per IQR decline (Δ = 0.30): 2.44 (0.61-9.87)  |  IQR: [0.84, 1.14]</a:t>
               </a:r>
             </a:p>
           </p:txBody>

--- a/docs/pptx/auc3/jx-auc3-linsubhr-ratio-hosp6.pptx
+++ b/docs/pptx/auc3/jx-auc3-linsubhr-ratio-hosp6.pptx
@@ -2443,7 +2443,7 @@
           </p:nvSpPr>
           <p:spPr>
             <a:xfrm>
-              <a:off x="1615213" y="2073503"/>
+              <a:off x="1531834" y="2073503"/>
               <a:ext cx="0" cy="3649639"/>
             </a:xfrm>
             <a:custGeom>
@@ -2486,7 +2486,7 @@
           </p:nvSpPr>
           <p:spPr>
             <a:xfrm>
-              <a:off x="3387871" y="2073503"/>
+              <a:off x="3586410" y="2073503"/>
               <a:ext cx="0" cy="3649639"/>
             </a:xfrm>
             <a:custGeom>
@@ -2529,7 +2529,7 @@
           </p:nvSpPr>
           <p:spPr>
             <a:xfrm>
-              <a:off x="5160528" y="2073503"/>
+              <a:off x="5640985" y="2073503"/>
               <a:ext cx="0" cy="3649639"/>
             </a:xfrm>
             <a:custGeom>
@@ -2572,7 +2572,7 @@
           </p:nvSpPr>
           <p:spPr>
             <a:xfrm>
-              <a:off x="6933186" y="2073503"/>
+              <a:off x="7695561" y="2073503"/>
               <a:ext cx="0" cy="3649639"/>
             </a:xfrm>
             <a:custGeom>
@@ -2830,7 +2830,7 @@
           </p:nvSpPr>
           <p:spPr>
             <a:xfrm>
-              <a:off x="2501542" y="2073503"/>
+              <a:off x="2559122" y="2073503"/>
               <a:ext cx="0" cy="3649639"/>
             </a:xfrm>
             <a:custGeom>
@@ -2873,7 +2873,7 @@
           </p:nvSpPr>
           <p:spPr>
             <a:xfrm>
-              <a:off x="4274200" y="2073503"/>
+              <a:off x="4613698" y="2073503"/>
               <a:ext cx="0" cy="3649639"/>
             </a:xfrm>
             <a:custGeom>
@@ -2916,7 +2916,7 @@
           </p:nvSpPr>
           <p:spPr>
             <a:xfrm>
-              <a:off x="6046857" y="2073503"/>
+              <a:off x="6668273" y="2073503"/>
               <a:ext cx="0" cy="3649639"/>
             </a:xfrm>
             <a:custGeom>
@@ -2953,580 +2953,546 @@
         </p:sp>
         <p:sp>
           <p:nvSpPr>
-            <p:cNvPr id="20" name="pl20"/>
+            <p:cNvPr id="20" name="pg20"/>
             <p:cNvSpPr/>
             <p:nvPr/>
           </p:nvSpPr>
           <p:spPr>
             <a:xfrm>
-              <a:off x="7819515" y="2073503"/>
-              <a:ext cx="0" cy="3649639"/>
+              <a:off x="1172049" y="2073503"/>
+              <a:ext cx="7090630" cy="3460613"/>
             </a:xfrm>
             <a:custGeom>
               <a:avLst/>
               <a:pathLst>
-                <a:path w="0" h="3649639">
+                <a:path w="7090630" h="3460613">
                   <a:moveTo>
-                    <a:pt x="0" y="3649639"/>
+                    <a:pt x="1775538" y="0"/>
                   </a:moveTo>
                   <a:lnTo>
-                    <a:pt x="0" y="0"/>
-                  </a:lnTo>
-                  <a:lnTo>
-                    <a:pt x="0" y="0"/>
-                  </a:lnTo>
-                </a:path>
-              </a:pathLst>
-            </a:custGeom>
-            <a:ln w="13550" cap="flat">
-              <a:solidFill>
-                <a:srgbClr val="EBEBEB">
-                  <a:alpha val="100000"/>
-                </a:srgbClr>
-              </a:solidFill>
-              <a:prstDash val="solid"/>
-              <a:round/>
-            </a:ln>
-          </p:spPr>
-          <p:txBody>
-            <a:bodyPr/>
-            <a:lstStyle/>
-            <a:p/>
-          </p:txBody>
-        </p:sp>
-        <p:sp>
-          <p:nvSpPr>
-            <p:cNvPr id="21" name="pg21"/>
-            <p:cNvSpPr/>
-            <p:nvPr/>
-          </p:nvSpPr>
-          <p:spPr>
-            <a:xfrm>
-              <a:off x="817517" y="2073503"/>
-              <a:ext cx="7392041" cy="3460613"/>
-            </a:xfrm>
-            <a:custGeom>
-              <a:avLst/>
-              <a:pathLst>
-                <a:path w="7392041" h="3460613">
-                  <a:moveTo>
-                    <a:pt x="1659812" y="0"/>
-                  </a:moveTo>
-                  <a:lnTo>
-                    <a:pt x="1676016" y="50347"/>
-                  </a:lnTo>
-                  <a:lnTo>
-                    <a:pt x="1753260" y="274670"/>
-                  </a:lnTo>
-                  <a:lnTo>
-                    <a:pt x="1830504" y="484337"/>
-                  </a:lnTo>
-                  <a:lnTo>
-                    <a:pt x="1907747" y="680305"/>
-                  </a:lnTo>
-                  <a:lnTo>
-                    <a:pt x="1984991" y="863470"/>
-                  </a:lnTo>
-                  <a:lnTo>
-                    <a:pt x="2062234" y="1034667"/>
-                  </a:lnTo>
-                  <a:lnTo>
-                    <a:pt x="2139478" y="1194679"/>
-                  </a:lnTo>
-                  <a:lnTo>
-                    <a:pt x="2216721" y="1344236"/>
-                  </a:lnTo>
-                  <a:lnTo>
-                    <a:pt x="2293965" y="1484023"/>
-                  </a:lnTo>
-                  <a:lnTo>
-                    <a:pt x="2371209" y="1614676"/>
-                  </a:lnTo>
-                  <a:lnTo>
-                    <a:pt x="2448452" y="1736792"/>
-                  </a:lnTo>
-                  <a:lnTo>
-                    <a:pt x="2525696" y="1850931"/>
-                  </a:lnTo>
-                  <a:lnTo>
-                    <a:pt x="2602939" y="1957612"/>
-                  </a:lnTo>
-                  <a:lnTo>
-                    <a:pt x="2680183" y="2057323"/>
-                  </a:lnTo>
-                  <a:lnTo>
-                    <a:pt x="2757426" y="2150519"/>
-                  </a:lnTo>
-                  <a:lnTo>
-                    <a:pt x="2834670" y="2237626"/>
-                  </a:lnTo>
-                  <a:lnTo>
-                    <a:pt x="2911914" y="2319042"/>
-                  </a:lnTo>
-                  <a:lnTo>
-                    <a:pt x="2989157" y="2395139"/>
-                  </a:lnTo>
-                  <a:lnTo>
-                    <a:pt x="3066401" y="2466263"/>
-                  </a:lnTo>
-                  <a:lnTo>
-                    <a:pt x="3143644" y="2532741"/>
-                  </a:lnTo>
-                  <a:lnTo>
-                    <a:pt x="3220888" y="2594876"/>
-                  </a:lnTo>
-                  <a:lnTo>
-                    <a:pt x="3298131" y="2652951"/>
-                  </a:lnTo>
-                  <a:lnTo>
-                    <a:pt x="3375375" y="2642195"/>
-                  </a:lnTo>
-                  <a:lnTo>
-                    <a:pt x="3452619" y="2629631"/>
-                  </a:lnTo>
-                  <a:lnTo>
-                    <a:pt x="3529862" y="2616879"/>
-                  </a:lnTo>
-                  <a:lnTo>
-                    <a:pt x="3607106" y="2603937"/>
-                  </a:lnTo>
-                  <a:lnTo>
-                    <a:pt x="3684349" y="2590802"/>
-                  </a:lnTo>
-                  <a:lnTo>
-                    <a:pt x="3761593" y="2577471"/>
-                  </a:lnTo>
-                  <a:lnTo>
-                    <a:pt x="3838836" y="2563940"/>
-                  </a:lnTo>
-                  <a:lnTo>
-                    <a:pt x="3916080" y="2550208"/>
-                  </a:lnTo>
-                  <a:lnTo>
-                    <a:pt x="3993324" y="2536270"/>
-                  </a:lnTo>
-                  <a:lnTo>
-                    <a:pt x="4070567" y="2522124"/>
-                  </a:lnTo>
-                  <a:lnTo>
-                    <a:pt x="4147811" y="2507768"/>
-                  </a:lnTo>
-                  <a:lnTo>
-                    <a:pt x="4225054" y="2493196"/>
-                  </a:lnTo>
-                  <a:lnTo>
-                    <a:pt x="4302298" y="2478408"/>
-                  </a:lnTo>
-                  <a:lnTo>
-                    <a:pt x="4379541" y="2463398"/>
-                  </a:lnTo>
-                  <a:lnTo>
-                    <a:pt x="4456785" y="2448165"/>
-                  </a:lnTo>
-                  <a:lnTo>
-                    <a:pt x="4534029" y="2432704"/>
-                  </a:lnTo>
-                  <a:lnTo>
-                    <a:pt x="4611272" y="2417012"/>
-                  </a:lnTo>
-                  <a:lnTo>
-                    <a:pt x="4688516" y="2401086"/>
-                  </a:lnTo>
-                  <a:lnTo>
-                    <a:pt x="4765759" y="2384922"/>
-                  </a:lnTo>
-                  <a:lnTo>
-                    <a:pt x="4843003" y="2368517"/>
-                  </a:lnTo>
-                  <a:lnTo>
-                    <a:pt x="4920246" y="2351866"/>
-                  </a:lnTo>
-                  <a:lnTo>
-                    <a:pt x="4997490" y="2334968"/>
-                  </a:lnTo>
-                  <a:lnTo>
-                    <a:pt x="5074734" y="2317817"/>
-                  </a:lnTo>
-                  <a:lnTo>
-                    <a:pt x="5151977" y="2300410"/>
-                  </a:lnTo>
-                  <a:lnTo>
-                    <a:pt x="5229221" y="2282743"/>
-                  </a:lnTo>
-                  <a:lnTo>
-                    <a:pt x="5306464" y="2264812"/>
-                  </a:lnTo>
-                  <a:lnTo>
-                    <a:pt x="5383708" y="2246614"/>
-                  </a:lnTo>
-                  <a:lnTo>
-                    <a:pt x="5460951" y="2228143"/>
-                  </a:lnTo>
-                  <a:lnTo>
-                    <a:pt x="5538195" y="2209398"/>
-                  </a:lnTo>
-                  <a:lnTo>
-                    <a:pt x="5615439" y="2190372"/>
-                  </a:lnTo>
-                  <a:lnTo>
-                    <a:pt x="5692682" y="2171062"/>
-                  </a:lnTo>
-                  <a:lnTo>
-                    <a:pt x="5769926" y="2151464"/>
-                  </a:lnTo>
-                  <a:lnTo>
-                    <a:pt x="5847169" y="2131573"/>
-                  </a:lnTo>
-                  <a:lnTo>
-                    <a:pt x="5924413" y="2111386"/>
-                  </a:lnTo>
-                  <a:lnTo>
-                    <a:pt x="6001656" y="2090897"/>
-                  </a:lnTo>
-                  <a:lnTo>
-                    <a:pt x="6078900" y="2070102"/>
-                  </a:lnTo>
-                  <a:lnTo>
-                    <a:pt x="6156144" y="2048996"/>
-                  </a:lnTo>
-                  <a:lnTo>
-                    <a:pt x="6233387" y="2027576"/>
-                  </a:lnTo>
-                  <a:lnTo>
-                    <a:pt x="6310631" y="2005835"/>
-                  </a:lnTo>
-                  <a:lnTo>
-                    <a:pt x="6387874" y="1983771"/>
-                  </a:lnTo>
-                  <a:lnTo>
-                    <a:pt x="6465118" y="1961376"/>
-                  </a:lnTo>
-                  <a:lnTo>
-                    <a:pt x="6542361" y="1938648"/>
-                  </a:lnTo>
-                  <a:lnTo>
-                    <a:pt x="6619605" y="1915580"/>
-                  </a:lnTo>
-                  <a:lnTo>
-                    <a:pt x="6696849" y="1892167"/>
-                  </a:lnTo>
-                  <a:lnTo>
-                    <a:pt x="6774092" y="1868405"/>
-                  </a:lnTo>
-                  <a:lnTo>
-                    <a:pt x="6851336" y="1844289"/>
-                  </a:lnTo>
-                  <a:lnTo>
-                    <a:pt x="6928579" y="1819812"/>
-                  </a:lnTo>
-                  <a:lnTo>
-                    <a:pt x="7005823" y="1794970"/>
-                  </a:lnTo>
-                  <a:lnTo>
-                    <a:pt x="7083066" y="1769757"/>
-                  </a:lnTo>
-                  <a:lnTo>
-                    <a:pt x="7160310" y="1744167"/>
-                  </a:lnTo>
-                  <a:lnTo>
-                    <a:pt x="7237554" y="1718196"/>
-                  </a:lnTo>
-                  <a:lnTo>
-                    <a:pt x="7314797" y="1691836"/>
-                  </a:lnTo>
-                  <a:lnTo>
-                    <a:pt x="7392041" y="1665083"/>
-                  </a:lnTo>
-                  <a:lnTo>
-                    <a:pt x="7392041" y="3460613"/>
-                  </a:lnTo>
-                  <a:lnTo>
-                    <a:pt x="7314797" y="3458995"/>
-                  </a:lnTo>
-                  <a:lnTo>
-                    <a:pt x="7237554" y="3457265"/>
-                  </a:lnTo>
-                  <a:lnTo>
-                    <a:pt x="7160310" y="3455414"/>
-                  </a:lnTo>
-                  <a:lnTo>
-                    <a:pt x="7083066" y="3453434"/>
-                  </a:lnTo>
-                  <a:lnTo>
-                    <a:pt x="7005823" y="3451315"/>
-                  </a:lnTo>
-                  <a:lnTo>
-                    <a:pt x="6928579" y="3449048"/>
-                  </a:lnTo>
-                  <a:lnTo>
-                    <a:pt x="6851336" y="3446622"/>
-                  </a:lnTo>
-                  <a:lnTo>
-                    <a:pt x="6774092" y="3444027"/>
-                  </a:lnTo>
-                  <a:lnTo>
-                    <a:pt x="6696849" y="3441251"/>
-                  </a:lnTo>
-                  <a:lnTo>
-                    <a:pt x="6619605" y="3438280"/>
-                  </a:lnTo>
-                  <a:lnTo>
-                    <a:pt x="6542361" y="3435102"/>
-                  </a:lnTo>
-                  <a:lnTo>
-                    <a:pt x="6465118" y="3431701"/>
-                  </a:lnTo>
-                  <a:lnTo>
-                    <a:pt x="6387874" y="3428063"/>
-                  </a:lnTo>
-                  <a:lnTo>
-                    <a:pt x="6310631" y="3424171"/>
-                  </a:lnTo>
-                  <a:lnTo>
-                    <a:pt x="6233387" y="3420007"/>
-                  </a:lnTo>
-                  <a:lnTo>
-                    <a:pt x="6156144" y="3415551"/>
-                  </a:lnTo>
-                  <a:lnTo>
-                    <a:pt x="6078900" y="3410784"/>
-                  </a:lnTo>
-                  <a:lnTo>
-                    <a:pt x="6001656" y="3405684"/>
-                  </a:lnTo>
-                  <a:lnTo>
-                    <a:pt x="5924413" y="3400227"/>
-                  </a:lnTo>
-                  <a:lnTo>
-                    <a:pt x="5847169" y="3394389"/>
-                  </a:lnTo>
-                  <a:lnTo>
-                    <a:pt x="5769926" y="3388142"/>
-                  </a:lnTo>
-                  <a:lnTo>
-                    <a:pt x="5692682" y="3381459"/>
-                  </a:lnTo>
-                  <a:lnTo>
-                    <a:pt x="5615439" y="3374309"/>
-                  </a:lnTo>
-                  <a:lnTo>
-                    <a:pt x="5538195" y="3366659"/>
-                  </a:lnTo>
-                  <a:lnTo>
-                    <a:pt x="5460951" y="3358474"/>
-                  </a:lnTo>
-                  <a:lnTo>
-                    <a:pt x="5383708" y="3349717"/>
-                  </a:lnTo>
-                  <a:lnTo>
-                    <a:pt x="5306464" y="3340348"/>
-                  </a:lnTo>
-                  <a:lnTo>
-                    <a:pt x="5229221" y="3330325"/>
-                  </a:lnTo>
-                  <a:lnTo>
-                    <a:pt x="5151977" y="3319600"/>
-                  </a:lnTo>
-                  <a:lnTo>
-                    <a:pt x="5074734" y="3308126"/>
-                  </a:lnTo>
-                  <a:lnTo>
-                    <a:pt x="4997490" y="3295849"/>
-                  </a:lnTo>
-                  <a:lnTo>
-                    <a:pt x="4920246" y="3282715"/>
-                  </a:lnTo>
-                  <a:lnTo>
-                    <a:pt x="4843003" y="3268662"/>
-                  </a:lnTo>
-                  <a:lnTo>
-                    <a:pt x="4765759" y="3253627"/>
-                  </a:lnTo>
-                  <a:lnTo>
-                    <a:pt x="4688516" y="3237541"/>
-                  </a:lnTo>
-                  <a:lnTo>
-                    <a:pt x="4611272" y="3220331"/>
-                  </a:lnTo>
-                  <a:lnTo>
-                    <a:pt x="4534029" y="3201917"/>
-                  </a:lnTo>
-                  <a:lnTo>
-                    <a:pt x="4456785" y="3182217"/>
-                  </a:lnTo>
-                  <a:lnTo>
-                    <a:pt x="4379541" y="3161139"/>
-                  </a:lnTo>
-                  <a:lnTo>
-                    <a:pt x="4302298" y="3138588"/>
-                  </a:lnTo>
-                  <a:lnTo>
-                    <a:pt x="4225054" y="3114460"/>
-                  </a:lnTo>
-                  <a:lnTo>
-                    <a:pt x="4147811" y="3088646"/>
-                  </a:lnTo>
-                  <a:lnTo>
-                    <a:pt x="4070567" y="3061028"/>
-                  </a:lnTo>
-                  <a:lnTo>
-                    <a:pt x="3993324" y="3031479"/>
-                  </a:lnTo>
-                  <a:lnTo>
-                    <a:pt x="3916080" y="2999864"/>
-                  </a:lnTo>
-                  <a:lnTo>
-                    <a:pt x="3838836" y="2966039"/>
-                  </a:lnTo>
-                  <a:lnTo>
-                    <a:pt x="3761593" y="2929850"/>
-                  </a:lnTo>
-                  <a:lnTo>
-                    <a:pt x="3684349" y="2891131"/>
-                  </a:lnTo>
-                  <a:lnTo>
-                    <a:pt x="3607106" y="2849706"/>
-                  </a:lnTo>
-                  <a:lnTo>
-                    <a:pt x="3529862" y="2805385"/>
-                  </a:lnTo>
-                  <a:lnTo>
-                    <a:pt x="3452619" y="2757965"/>
-                  </a:lnTo>
-                  <a:lnTo>
-                    <a:pt x="3375375" y="2707231"/>
-                  </a:lnTo>
-                  <a:lnTo>
-                    <a:pt x="3298131" y="2654575"/>
-                  </a:lnTo>
-                  <a:lnTo>
-                    <a:pt x="3220888" y="2666772"/>
-                  </a:lnTo>
-                  <a:lnTo>
-                    <a:pt x="3143644" y="2678790"/>
-                  </a:lnTo>
-                  <a:lnTo>
-                    <a:pt x="3066401" y="2690631"/>
-                  </a:lnTo>
-                  <a:lnTo>
-                    <a:pt x="2989157" y="2702298"/>
-                  </a:lnTo>
-                  <a:lnTo>
-                    <a:pt x="2911914" y="2713793"/>
-                  </a:lnTo>
-                  <a:lnTo>
-                    <a:pt x="2834670" y="2725119"/>
-                  </a:lnTo>
-                  <a:lnTo>
-                    <a:pt x="2757426" y="2736279"/>
-                  </a:lnTo>
-                  <a:lnTo>
-                    <a:pt x="2680183" y="2747274"/>
-                  </a:lnTo>
-                  <a:lnTo>
-                    <a:pt x="2602939" y="2758108"/>
-                  </a:lnTo>
-                  <a:lnTo>
-                    <a:pt x="2525696" y="2768782"/>
-                  </a:lnTo>
-                  <a:lnTo>
-                    <a:pt x="2448452" y="2779299"/>
-                  </a:lnTo>
-                  <a:lnTo>
-                    <a:pt x="2371209" y="2789662"/>
-                  </a:lnTo>
-                  <a:lnTo>
-                    <a:pt x="2293965" y="2799872"/>
-                  </a:lnTo>
-                  <a:lnTo>
-                    <a:pt x="2216721" y="2809932"/>
-                  </a:lnTo>
-                  <a:lnTo>
-                    <a:pt x="2139478" y="2819844"/>
-                  </a:lnTo>
-                  <a:lnTo>
-                    <a:pt x="2062234" y="2829610"/>
-                  </a:lnTo>
-                  <a:lnTo>
-                    <a:pt x="1984991" y="2839232"/>
-                  </a:lnTo>
-                  <a:lnTo>
-                    <a:pt x="1907747" y="2848713"/>
-                  </a:lnTo>
-                  <a:lnTo>
-                    <a:pt x="1830504" y="2858055"/>
-                  </a:lnTo>
-                  <a:lnTo>
-                    <a:pt x="1753260" y="2867259"/>
-                  </a:lnTo>
-                  <a:lnTo>
-                    <a:pt x="1676016" y="2876327"/>
-                  </a:lnTo>
-                  <a:lnTo>
-                    <a:pt x="1598773" y="2885262"/>
-                  </a:lnTo>
-                  <a:lnTo>
-                    <a:pt x="1521529" y="2894066"/>
-                  </a:lnTo>
-                  <a:lnTo>
-                    <a:pt x="1444286" y="2902741"/>
-                  </a:lnTo>
-                  <a:lnTo>
-                    <a:pt x="1367042" y="2911287"/>
-                  </a:lnTo>
-                  <a:lnTo>
-                    <a:pt x="1289799" y="2919708"/>
-                  </a:lnTo>
-                  <a:lnTo>
-                    <a:pt x="1212555" y="2928005"/>
-                  </a:lnTo>
-                  <a:lnTo>
-                    <a:pt x="1135311" y="2936180"/>
-                  </a:lnTo>
-                  <a:lnTo>
-                    <a:pt x="1058068" y="2944235"/>
-                  </a:lnTo>
-                  <a:lnTo>
-                    <a:pt x="980824" y="2952171"/>
-                  </a:lnTo>
-                  <a:lnTo>
-                    <a:pt x="903581" y="2959991"/>
-                  </a:lnTo>
-                  <a:lnTo>
-                    <a:pt x="826337" y="2967695"/>
-                  </a:lnTo>
-                  <a:lnTo>
-                    <a:pt x="749094" y="2975287"/>
-                  </a:lnTo>
-                  <a:lnTo>
-                    <a:pt x="671850" y="2982766"/>
-                  </a:lnTo>
-                  <a:lnTo>
-                    <a:pt x="594606" y="2990136"/>
-                  </a:lnTo>
-                  <a:lnTo>
-                    <a:pt x="517363" y="2997397"/>
-                  </a:lnTo>
-                  <a:lnTo>
-                    <a:pt x="440119" y="3004551"/>
-                  </a:lnTo>
-                  <a:lnTo>
-                    <a:pt x="362876" y="3011600"/>
-                  </a:lnTo>
-                  <a:lnTo>
-                    <a:pt x="285632" y="3018545"/>
-                  </a:lnTo>
-                  <a:lnTo>
-                    <a:pt x="208389" y="3025389"/>
-                  </a:lnTo>
-                  <a:lnTo>
-                    <a:pt x="131145" y="3032131"/>
-                  </a:lnTo>
-                  <a:lnTo>
-                    <a:pt x="53901" y="3038774"/>
-                  </a:lnTo>
-                  <a:lnTo>
-                    <a:pt x="0" y="3043342"/>
+                    <a:pt x="1790563" y="50347"/>
+                  </a:lnTo>
+                  <a:lnTo>
+                    <a:pt x="1862185" y="274670"/>
+                  </a:lnTo>
+                  <a:lnTo>
+                    <a:pt x="1933808" y="484337"/>
+                  </a:lnTo>
+                  <a:lnTo>
+                    <a:pt x="2005430" y="680305"/>
+                  </a:lnTo>
+                  <a:lnTo>
+                    <a:pt x="2077053" y="863470"/>
+                  </a:lnTo>
+                  <a:lnTo>
+                    <a:pt x="2148675" y="1034667"/>
+                  </a:lnTo>
+                  <a:lnTo>
+                    <a:pt x="2220298" y="1194679"/>
+                  </a:lnTo>
+                  <a:lnTo>
+                    <a:pt x="2291920" y="1344236"/>
+                  </a:lnTo>
+                  <a:lnTo>
+                    <a:pt x="2363543" y="1484023"/>
+                  </a:lnTo>
+                  <a:lnTo>
+                    <a:pt x="2435165" y="1614676"/>
+                  </a:lnTo>
+                  <a:lnTo>
+                    <a:pt x="2506788" y="1736792"/>
+                  </a:lnTo>
+                  <a:lnTo>
+                    <a:pt x="2578410" y="1850931"/>
+                  </a:lnTo>
+                  <a:lnTo>
+                    <a:pt x="2650033" y="1957612"/>
+                  </a:lnTo>
+                  <a:lnTo>
+                    <a:pt x="2721655" y="2057323"/>
+                  </a:lnTo>
+                  <a:lnTo>
+                    <a:pt x="2793278" y="2150519"/>
+                  </a:lnTo>
+                  <a:lnTo>
+                    <a:pt x="2864901" y="2237626"/>
+                  </a:lnTo>
+                  <a:lnTo>
+                    <a:pt x="2936523" y="2319042"/>
+                  </a:lnTo>
+                  <a:lnTo>
+                    <a:pt x="3008146" y="2395139"/>
+                  </a:lnTo>
+                  <a:lnTo>
+                    <a:pt x="3079768" y="2466263"/>
+                  </a:lnTo>
+                  <a:lnTo>
+                    <a:pt x="3151391" y="2532741"/>
+                  </a:lnTo>
+                  <a:lnTo>
+                    <a:pt x="3223013" y="2594876"/>
+                  </a:lnTo>
+                  <a:lnTo>
+                    <a:pt x="3294636" y="2652951"/>
+                  </a:lnTo>
+                  <a:lnTo>
+                    <a:pt x="3366258" y="2642195"/>
+                  </a:lnTo>
+                  <a:lnTo>
+                    <a:pt x="3437881" y="2629631"/>
+                  </a:lnTo>
+                  <a:lnTo>
+                    <a:pt x="3509503" y="2616879"/>
+                  </a:lnTo>
+                  <a:lnTo>
+                    <a:pt x="3581126" y="2603937"/>
+                  </a:lnTo>
+                  <a:lnTo>
+                    <a:pt x="3652748" y="2590802"/>
+                  </a:lnTo>
+                  <a:lnTo>
+                    <a:pt x="3724371" y="2577471"/>
+                  </a:lnTo>
+                  <a:lnTo>
+                    <a:pt x="3795993" y="2563940"/>
+                  </a:lnTo>
+                  <a:lnTo>
+                    <a:pt x="3867616" y="2550208"/>
+                  </a:lnTo>
+                  <a:lnTo>
+                    <a:pt x="3939238" y="2536270"/>
+                  </a:lnTo>
+                  <a:lnTo>
+                    <a:pt x="4010861" y="2522124"/>
+                  </a:lnTo>
+                  <a:lnTo>
+                    <a:pt x="4082483" y="2507768"/>
+                  </a:lnTo>
+                  <a:lnTo>
+                    <a:pt x="4154106" y="2493196"/>
+                  </a:lnTo>
+                  <a:lnTo>
+                    <a:pt x="4225729" y="2478408"/>
+                  </a:lnTo>
+                  <a:lnTo>
+                    <a:pt x="4297351" y="2463398"/>
+                  </a:lnTo>
+                  <a:lnTo>
+                    <a:pt x="4368974" y="2448165"/>
+                  </a:lnTo>
+                  <a:lnTo>
+                    <a:pt x="4440596" y="2432704"/>
+                  </a:lnTo>
+                  <a:lnTo>
+                    <a:pt x="4512219" y="2417012"/>
+                  </a:lnTo>
+                  <a:lnTo>
+                    <a:pt x="4583841" y="2401086"/>
+                  </a:lnTo>
+                  <a:lnTo>
+                    <a:pt x="4655464" y="2384922"/>
+                  </a:lnTo>
+                  <a:lnTo>
+                    <a:pt x="4727086" y="2368517"/>
+                  </a:lnTo>
+                  <a:lnTo>
+                    <a:pt x="4798709" y="2351866"/>
+                  </a:lnTo>
+                  <a:lnTo>
+                    <a:pt x="4870331" y="2334968"/>
+                  </a:lnTo>
+                  <a:lnTo>
+                    <a:pt x="4941954" y="2317817"/>
+                  </a:lnTo>
+                  <a:lnTo>
+                    <a:pt x="5013576" y="2300410"/>
+                  </a:lnTo>
+                  <a:lnTo>
+                    <a:pt x="5085199" y="2282743"/>
+                  </a:lnTo>
+                  <a:lnTo>
+                    <a:pt x="5156821" y="2264812"/>
+                  </a:lnTo>
+                  <a:lnTo>
+                    <a:pt x="5228444" y="2246614"/>
+                  </a:lnTo>
+                  <a:lnTo>
+                    <a:pt x="5300066" y="2228143"/>
+                  </a:lnTo>
+                  <a:lnTo>
+                    <a:pt x="5371689" y="2209398"/>
+                  </a:lnTo>
+                  <a:lnTo>
+                    <a:pt x="5443311" y="2190372"/>
+                  </a:lnTo>
+                  <a:lnTo>
+                    <a:pt x="5514934" y="2171062"/>
+                  </a:lnTo>
+                  <a:lnTo>
+                    <a:pt x="5586557" y="2151464"/>
+                  </a:lnTo>
+                  <a:lnTo>
+                    <a:pt x="5658179" y="2131573"/>
+                  </a:lnTo>
+                  <a:lnTo>
+                    <a:pt x="5729802" y="2111386"/>
+                  </a:lnTo>
+                  <a:lnTo>
+                    <a:pt x="5801424" y="2090897"/>
+                  </a:lnTo>
+                  <a:lnTo>
+                    <a:pt x="5873047" y="2070102"/>
+                  </a:lnTo>
+                  <a:lnTo>
+                    <a:pt x="5944669" y="2048996"/>
+                  </a:lnTo>
+                  <a:lnTo>
+                    <a:pt x="6016292" y="2027576"/>
+                  </a:lnTo>
+                  <a:lnTo>
+                    <a:pt x="6087914" y="2005835"/>
+                  </a:lnTo>
+                  <a:lnTo>
+                    <a:pt x="6159537" y="1983771"/>
+                  </a:lnTo>
+                  <a:lnTo>
+                    <a:pt x="6231159" y="1961376"/>
+                  </a:lnTo>
+                  <a:lnTo>
+                    <a:pt x="6302782" y="1938648"/>
+                  </a:lnTo>
+                  <a:lnTo>
+                    <a:pt x="6374404" y="1915580"/>
+                  </a:lnTo>
+                  <a:lnTo>
+                    <a:pt x="6446027" y="1892167"/>
+                  </a:lnTo>
+                  <a:lnTo>
+                    <a:pt x="6517649" y="1868405"/>
+                  </a:lnTo>
+                  <a:lnTo>
+                    <a:pt x="6589272" y="1844289"/>
+                  </a:lnTo>
+                  <a:lnTo>
+                    <a:pt x="6660894" y="1819812"/>
+                  </a:lnTo>
+                  <a:lnTo>
+                    <a:pt x="6732517" y="1794970"/>
+                  </a:lnTo>
+                  <a:lnTo>
+                    <a:pt x="6804139" y="1769757"/>
+                  </a:lnTo>
+                  <a:lnTo>
+                    <a:pt x="6875762" y="1744167"/>
+                  </a:lnTo>
+                  <a:lnTo>
+                    <a:pt x="6947385" y="1718196"/>
+                  </a:lnTo>
+                  <a:lnTo>
+                    <a:pt x="7019007" y="1691836"/>
+                  </a:lnTo>
+                  <a:lnTo>
+                    <a:pt x="7090630" y="1665083"/>
+                  </a:lnTo>
+                  <a:lnTo>
+                    <a:pt x="7090630" y="3460613"/>
+                  </a:lnTo>
+                  <a:lnTo>
+                    <a:pt x="7019007" y="3458995"/>
+                  </a:lnTo>
+                  <a:lnTo>
+                    <a:pt x="6947385" y="3457265"/>
+                  </a:lnTo>
+                  <a:lnTo>
+                    <a:pt x="6875762" y="3455414"/>
+                  </a:lnTo>
+                  <a:lnTo>
+                    <a:pt x="6804139" y="3453434"/>
+                  </a:lnTo>
+                  <a:lnTo>
+                    <a:pt x="6732517" y="3451315"/>
+                  </a:lnTo>
+                  <a:lnTo>
+                    <a:pt x="6660894" y="3449048"/>
+                  </a:lnTo>
+                  <a:lnTo>
+                    <a:pt x="6589272" y="3446622"/>
+                  </a:lnTo>
+                  <a:lnTo>
+                    <a:pt x="6517649" y="3444027"/>
+                  </a:lnTo>
+                  <a:lnTo>
+                    <a:pt x="6446027" y="3441251"/>
+                  </a:lnTo>
+                  <a:lnTo>
+                    <a:pt x="6374404" y="3438280"/>
+                  </a:lnTo>
+                  <a:lnTo>
+                    <a:pt x="6302782" y="3435102"/>
+                  </a:lnTo>
+                  <a:lnTo>
+                    <a:pt x="6231159" y="3431701"/>
+                  </a:lnTo>
+                  <a:lnTo>
+                    <a:pt x="6159537" y="3428063"/>
+                  </a:lnTo>
+                  <a:lnTo>
+                    <a:pt x="6087914" y="3424171"/>
+                  </a:lnTo>
+                  <a:lnTo>
+                    <a:pt x="6016292" y="3420007"/>
+                  </a:lnTo>
+                  <a:lnTo>
+                    <a:pt x="5944669" y="3415551"/>
+                  </a:lnTo>
+                  <a:lnTo>
+                    <a:pt x="5873047" y="3410784"/>
+                  </a:lnTo>
+                  <a:lnTo>
+                    <a:pt x="5801424" y="3405684"/>
+                  </a:lnTo>
+                  <a:lnTo>
+                    <a:pt x="5729802" y="3400227"/>
+                  </a:lnTo>
+                  <a:lnTo>
+                    <a:pt x="5658179" y="3394389"/>
+                  </a:lnTo>
+                  <a:lnTo>
+                    <a:pt x="5586557" y="3388142"/>
+                  </a:lnTo>
+                  <a:lnTo>
+                    <a:pt x="5514934" y="3381459"/>
+                  </a:lnTo>
+                  <a:lnTo>
+                    <a:pt x="5443311" y="3374309"/>
+                  </a:lnTo>
+                  <a:lnTo>
+                    <a:pt x="5371689" y="3366659"/>
+                  </a:lnTo>
+                  <a:lnTo>
+                    <a:pt x="5300066" y="3358474"/>
+                  </a:lnTo>
+                  <a:lnTo>
+                    <a:pt x="5228444" y="3349717"/>
+                  </a:lnTo>
+                  <a:lnTo>
+                    <a:pt x="5156821" y="3340348"/>
+                  </a:lnTo>
+                  <a:lnTo>
+                    <a:pt x="5085199" y="3330325"/>
+                  </a:lnTo>
+                  <a:lnTo>
+                    <a:pt x="5013576" y="3319600"/>
+                  </a:lnTo>
+                  <a:lnTo>
+                    <a:pt x="4941954" y="3308126"/>
+                  </a:lnTo>
+                  <a:lnTo>
+                    <a:pt x="4870331" y="3295849"/>
+                  </a:lnTo>
+                  <a:lnTo>
+                    <a:pt x="4798709" y="3282715"/>
+                  </a:lnTo>
+                  <a:lnTo>
+                    <a:pt x="4727086" y="3268662"/>
+                  </a:lnTo>
+                  <a:lnTo>
+                    <a:pt x="4655464" y="3253627"/>
+                  </a:lnTo>
+                  <a:lnTo>
+                    <a:pt x="4583841" y="3237541"/>
+                  </a:lnTo>
+                  <a:lnTo>
+                    <a:pt x="4512219" y="3220331"/>
+                  </a:lnTo>
+                  <a:lnTo>
+                    <a:pt x="4440596" y="3201917"/>
+                  </a:lnTo>
+                  <a:lnTo>
+                    <a:pt x="4368974" y="3182217"/>
+                  </a:lnTo>
+                  <a:lnTo>
+                    <a:pt x="4297351" y="3161139"/>
+                  </a:lnTo>
+                  <a:lnTo>
+                    <a:pt x="4225729" y="3138588"/>
+                  </a:lnTo>
+                  <a:lnTo>
+                    <a:pt x="4154106" y="3114460"/>
+                  </a:lnTo>
+                  <a:lnTo>
+                    <a:pt x="4082483" y="3088646"/>
+                  </a:lnTo>
+                  <a:lnTo>
+                    <a:pt x="4010861" y="3061028"/>
+                  </a:lnTo>
+                  <a:lnTo>
+                    <a:pt x="3939238" y="3031479"/>
+                  </a:lnTo>
+                  <a:lnTo>
+                    <a:pt x="3867616" y="2999864"/>
+                  </a:lnTo>
+                  <a:lnTo>
+                    <a:pt x="3795993" y="2966039"/>
+                  </a:lnTo>
+                  <a:lnTo>
+                    <a:pt x="3724371" y="2929850"/>
+                  </a:lnTo>
+                  <a:lnTo>
+                    <a:pt x="3652748" y="2891131"/>
+                  </a:lnTo>
+                  <a:lnTo>
+                    <a:pt x="3581126" y="2849706"/>
+                  </a:lnTo>
+                  <a:lnTo>
+                    <a:pt x="3509503" y="2805385"/>
+                  </a:lnTo>
+                  <a:lnTo>
+                    <a:pt x="3437881" y="2757965"/>
+                  </a:lnTo>
+                  <a:lnTo>
+                    <a:pt x="3366258" y="2707231"/>
+                  </a:lnTo>
+                  <a:lnTo>
+                    <a:pt x="3294636" y="2654575"/>
+                  </a:lnTo>
+                  <a:lnTo>
+                    <a:pt x="3223013" y="2666772"/>
+                  </a:lnTo>
+                  <a:lnTo>
+                    <a:pt x="3151391" y="2678790"/>
+                  </a:lnTo>
+                  <a:lnTo>
+                    <a:pt x="3079768" y="2690631"/>
+                  </a:lnTo>
+                  <a:lnTo>
+                    <a:pt x="3008146" y="2702298"/>
+                  </a:lnTo>
+                  <a:lnTo>
+                    <a:pt x="2936523" y="2713793"/>
+                  </a:lnTo>
+                  <a:lnTo>
+                    <a:pt x="2864901" y="2725119"/>
+                  </a:lnTo>
+                  <a:lnTo>
+                    <a:pt x="2793278" y="2736279"/>
+                  </a:lnTo>
+                  <a:lnTo>
+                    <a:pt x="2721655" y="2747274"/>
+                  </a:lnTo>
+                  <a:lnTo>
+                    <a:pt x="2650033" y="2758108"/>
+                  </a:lnTo>
+                  <a:lnTo>
+                    <a:pt x="2578410" y="2768782"/>
+                  </a:lnTo>
+                  <a:lnTo>
+                    <a:pt x="2506788" y="2779299"/>
+                  </a:lnTo>
+                  <a:lnTo>
+                    <a:pt x="2435165" y="2789662"/>
+                  </a:lnTo>
+                  <a:lnTo>
+                    <a:pt x="2363543" y="2799872"/>
+                  </a:lnTo>
+                  <a:lnTo>
+                    <a:pt x="2291920" y="2809932"/>
+                  </a:lnTo>
+                  <a:lnTo>
+                    <a:pt x="2220298" y="2819844"/>
+                  </a:lnTo>
+                  <a:lnTo>
+                    <a:pt x="2148675" y="2829610"/>
+                  </a:lnTo>
+                  <a:lnTo>
+                    <a:pt x="2077053" y="2839232"/>
+                  </a:lnTo>
+                  <a:lnTo>
+                    <a:pt x="2005430" y="2848713"/>
+                  </a:lnTo>
+                  <a:lnTo>
+                    <a:pt x="1933808" y="2858055"/>
+                  </a:lnTo>
+                  <a:lnTo>
+                    <a:pt x="1862185" y="2867259"/>
+                  </a:lnTo>
+                  <a:lnTo>
+                    <a:pt x="1790563" y="2876327"/>
+                  </a:lnTo>
+                  <a:lnTo>
+                    <a:pt x="1718940" y="2885262"/>
+                  </a:lnTo>
+                  <a:lnTo>
+                    <a:pt x="1647318" y="2894066"/>
+                  </a:lnTo>
+                  <a:lnTo>
+                    <a:pt x="1575695" y="2902741"/>
+                  </a:lnTo>
+                  <a:lnTo>
+                    <a:pt x="1504073" y="2911287"/>
+                  </a:lnTo>
+                  <a:lnTo>
+                    <a:pt x="1432450" y="2919708"/>
+                  </a:lnTo>
+                  <a:lnTo>
+                    <a:pt x="1360827" y="2928005"/>
+                  </a:lnTo>
+                  <a:lnTo>
+                    <a:pt x="1289205" y="2936180"/>
+                  </a:lnTo>
+                  <a:lnTo>
+                    <a:pt x="1217582" y="2944235"/>
+                  </a:lnTo>
+                  <a:lnTo>
+                    <a:pt x="1145960" y="2952171"/>
+                  </a:lnTo>
+                  <a:lnTo>
+                    <a:pt x="1074337" y="2959991"/>
+                  </a:lnTo>
+                  <a:lnTo>
+                    <a:pt x="1002715" y="2967695"/>
+                  </a:lnTo>
+                  <a:lnTo>
+                    <a:pt x="931092" y="2975287"/>
+                  </a:lnTo>
+                  <a:lnTo>
+                    <a:pt x="859470" y="2982766"/>
+                  </a:lnTo>
+                  <a:lnTo>
+                    <a:pt x="787847" y="2990136"/>
+                  </a:lnTo>
+                  <a:lnTo>
+                    <a:pt x="716225" y="2997397"/>
+                  </a:lnTo>
+                  <a:lnTo>
+                    <a:pt x="644602" y="3004551"/>
+                  </a:lnTo>
+                  <a:lnTo>
+                    <a:pt x="572980" y="3011600"/>
+                  </a:lnTo>
+                  <a:lnTo>
+                    <a:pt x="501357" y="3018545"/>
+                  </a:lnTo>
+                  <a:lnTo>
+                    <a:pt x="429735" y="3025389"/>
+                  </a:lnTo>
+                  <a:lnTo>
+                    <a:pt x="358112" y="3032131"/>
+                  </a:lnTo>
+                  <a:lnTo>
+                    <a:pt x="286490" y="3038774"/>
+                  </a:lnTo>
+                  <a:lnTo>
+                    <a:pt x="214867" y="3045320"/>
+                  </a:lnTo>
+                  <a:lnTo>
+                    <a:pt x="143245" y="3051769"/>
+                  </a:lnTo>
+                  <a:lnTo>
+                    <a:pt x="71622" y="3058124"/>
+                  </a:lnTo>
+                  <a:lnTo>
+                    <a:pt x="0" y="3064385"/>
                   </a:lnTo>
                   <a:close/>
                 </a:path>
@@ -3546,246 +3512,571 @@
         </p:sp>
         <p:sp>
           <p:nvSpPr>
+            <p:cNvPr id="21" name="pl21"/>
+            <p:cNvSpPr/>
+            <p:nvPr/>
+          </p:nvSpPr>
+          <p:spPr>
+            <a:xfrm>
+              <a:off x="2947587" y="2073503"/>
+              <a:ext cx="5315091" cy="2652951"/>
+            </a:xfrm>
+            <a:custGeom>
+              <a:avLst/>
+              <a:pathLst>
+                <a:path w="5315091" h="2652951">
+                  <a:moveTo>
+                    <a:pt x="0" y="0"/>
+                  </a:moveTo>
+                  <a:lnTo>
+                    <a:pt x="15024" y="50347"/>
+                  </a:lnTo>
+                  <a:lnTo>
+                    <a:pt x="86647" y="274670"/>
+                  </a:lnTo>
+                  <a:lnTo>
+                    <a:pt x="158269" y="484337"/>
+                  </a:lnTo>
+                  <a:lnTo>
+                    <a:pt x="229892" y="680305"/>
+                  </a:lnTo>
+                  <a:lnTo>
+                    <a:pt x="301514" y="863470"/>
+                  </a:lnTo>
+                  <a:lnTo>
+                    <a:pt x="373137" y="1034667"/>
+                  </a:lnTo>
+                  <a:lnTo>
+                    <a:pt x="444759" y="1194679"/>
+                  </a:lnTo>
+                  <a:lnTo>
+                    <a:pt x="516382" y="1344236"/>
+                  </a:lnTo>
+                  <a:lnTo>
+                    <a:pt x="588005" y="1484023"/>
+                  </a:lnTo>
+                  <a:lnTo>
+                    <a:pt x="659627" y="1614676"/>
+                  </a:lnTo>
+                  <a:lnTo>
+                    <a:pt x="731250" y="1736792"/>
+                  </a:lnTo>
+                  <a:lnTo>
+                    <a:pt x="802872" y="1850931"/>
+                  </a:lnTo>
+                  <a:lnTo>
+                    <a:pt x="874495" y="1957612"/>
+                  </a:lnTo>
+                  <a:lnTo>
+                    <a:pt x="946117" y="2057323"/>
+                  </a:lnTo>
+                  <a:lnTo>
+                    <a:pt x="1017740" y="2150519"/>
+                  </a:lnTo>
+                  <a:lnTo>
+                    <a:pt x="1089362" y="2237626"/>
+                  </a:lnTo>
+                  <a:lnTo>
+                    <a:pt x="1160985" y="2319042"/>
+                  </a:lnTo>
+                  <a:lnTo>
+                    <a:pt x="1232607" y="2395139"/>
+                  </a:lnTo>
+                  <a:lnTo>
+                    <a:pt x="1304230" y="2466263"/>
+                  </a:lnTo>
+                  <a:lnTo>
+                    <a:pt x="1375852" y="2532741"/>
+                  </a:lnTo>
+                  <a:lnTo>
+                    <a:pt x="1447475" y="2594876"/>
+                  </a:lnTo>
+                  <a:lnTo>
+                    <a:pt x="1519097" y="2652951"/>
+                  </a:lnTo>
+                  <a:lnTo>
+                    <a:pt x="1590720" y="2642195"/>
+                  </a:lnTo>
+                  <a:lnTo>
+                    <a:pt x="1662342" y="2629631"/>
+                  </a:lnTo>
+                  <a:lnTo>
+                    <a:pt x="1733965" y="2616879"/>
+                  </a:lnTo>
+                  <a:lnTo>
+                    <a:pt x="1805587" y="2603937"/>
+                  </a:lnTo>
+                  <a:lnTo>
+                    <a:pt x="1877210" y="2590802"/>
+                  </a:lnTo>
+                  <a:lnTo>
+                    <a:pt x="1948833" y="2577471"/>
+                  </a:lnTo>
+                  <a:lnTo>
+                    <a:pt x="2020455" y="2563940"/>
+                  </a:lnTo>
+                  <a:lnTo>
+                    <a:pt x="2092078" y="2550208"/>
+                  </a:lnTo>
+                  <a:lnTo>
+                    <a:pt x="2163700" y="2536270"/>
+                  </a:lnTo>
+                  <a:lnTo>
+                    <a:pt x="2235323" y="2522124"/>
+                  </a:lnTo>
+                  <a:lnTo>
+                    <a:pt x="2306945" y="2507768"/>
+                  </a:lnTo>
+                  <a:lnTo>
+                    <a:pt x="2378568" y="2493196"/>
+                  </a:lnTo>
+                  <a:lnTo>
+                    <a:pt x="2450190" y="2478408"/>
+                  </a:lnTo>
+                  <a:lnTo>
+                    <a:pt x="2521813" y="2463398"/>
+                  </a:lnTo>
+                  <a:lnTo>
+                    <a:pt x="2593435" y="2448165"/>
+                  </a:lnTo>
+                  <a:lnTo>
+                    <a:pt x="2665058" y="2432704"/>
+                  </a:lnTo>
+                  <a:lnTo>
+                    <a:pt x="2736680" y="2417012"/>
+                  </a:lnTo>
+                  <a:lnTo>
+                    <a:pt x="2808303" y="2401086"/>
+                  </a:lnTo>
+                  <a:lnTo>
+                    <a:pt x="2879925" y="2384922"/>
+                  </a:lnTo>
+                  <a:lnTo>
+                    <a:pt x="2951548" y="2368517"/>
+                  </a:lnTo>
+                  <a:lnTo>
+                    <a:pt x="3023170" y="2351866"/>
+                  </a:lnTo>
+                  <a:lnTo>
+                    <a:pt x="3094793" y="2334968"/>
+                  </a:lnTo>
+                  <a:lnTo>
+                    <a:pt x="3166415" y="2317817"/>
+                  </a:lnTo>
+                  <a:lnTo>
+                    <a:pt x="3238038" y="2300410"/>
+                  </a:lnTo>
+                  <a:lnTo>
+                    <a:pt x="3309661" y="2282743"/>
+                  </a:lnTo>
+                  <a:lnTo>
+                    <a:pt x="3381283" y="2264812"/>
+                  </a:lnTo>
+                  <a:lnTo>
+                    <a:pt x="3452906" y="2246614"/>
+                  </a:lnTo>
+                  <a:lnTo>
+                    <a:pt x="3524528" y="2228143"/>
+                  </a:lnTo>
+                  <a:lnTo>
+                    <a:pt x="3596151" y="2209398"/>
+                  </a:lnTo>
+                  <a:lnTo>
+                    <a:pt x="3667773" y="2190372"/>
+                  </a:lnTo>
+                  <a:lnTo>
+                    <a:pt x="3739396" y="2171062"/>
+                  </a:lnTo>
+                  <a:lnTo>
+                    <a:pt x="3811018" y="2151464"/>
+                  </a:lnTo>
+                  <a:lnTo>
+                    <a:pt x="3882641" y="2131573"/>
+                  </a:lnTo>
+                  <a:lnTo>
+                    <a:pt x="3954263" y="2111386"/>
+                  </a:lnTo>
+                  <a:lnTo>
+                    <a:pt x="4025886" y="2090897"/>
+                  </a:lnTo>
+                  <a:lnTo>
+                    <a:pt x="4097508" y="2070102"/>
+                  </a:lnTo>
+                  <a:lnTo>
+                    <a:pt x="4169131" y="2048996"/>
+                  </a:lnTo>
+                  <a:lnTo>
+                    <a:pt x="4240753" y="2027576"/>
+                  </a:lnTo>
+                  <a:lnTo>
+                    <a:pt x="4312376" y="2005835"/>
+                  </a:lnTo>
+                  <a:lnTo>
+                    <a:pt x="4383998" y="1983771"/>
+                  </a:lnTo>
+                  <a:lnTo>
+                    <a:pt x="4455621" y="1961376"/>
+                  </a:lnTo>
+                  <a:lnTo>
+                    <a:pt x="4527243" y="1938648"/>
+                  </a:lnTo>
+                  <a:lnTo>
+                    <a:pt x="4598866" y="1915580"/>
+                  </a:lnTo>
+                  <a:lnTo>
+                    <a:pt x="4670489" y="1892167"/>
+                  </a:lnTo>
+                  <a:lnTo>
+                    <a:pt x="4742111" y="1868405"/>
+                  </a:lnTo>
+                  <a:lnTo>
+                    <a:pt x="4813734" y="1844289"/>
+                  </a:lnTo>
+                  <a:lnTo>
+                    <a:pt x="4885356" y="1819812"/>
+                  </a:lnTo>
+                  <a:lnTo>
+                    <a:pt x="4956979" y="1794970"/>
+                  </a:lnTo>
+                  <a:lnTo>
+                    <a:pt x="5028601" y="1769757"/>
+                  </a:lnTo>
+                  <a:lnTo>
+                    <a:pt x="5100224" y="1744167"/>
+                  </a:lnTo>
+                  <a:lnTo>
+                    <a:pt x="5171846" y="1718196"/>
+                  </a:lnTo>
+                  <a:lnTo>
+                    <a:pt x="5243469" y="1691836"/>
+                  </a:lnTo>
+                  <a:lnTo>
+                    <a:pt x="5315091" y="1665083"/>
+                  </a:lnTo>
+                </a:path>
+              </a:pathLst>
+            </a:custGeom>
+          </p:spPr>
+          <p:txBody>
+            <a:bodyPr/>
+            <a:lstStyle/>
+            <a:p/>
+          </p:txBody>
+        </p:sp>
+        <p:sp>
+          <p:nvSpPr>
             <p:cNvPr id="22" name="pl22"/>
             <p:cNvSpPr/>
             <p:nvPr/>
           </p:nvSpPr>
           <p:spPr>
             <a:xfrm>
-              <a:off x="2477330" y="2073503"/>
-              <a:ext cx="5732228" cy="2652951"/>
+              <a:off x="1172049" y="4728078"/>
+              <a:ext cx="7090630" cy="806037"/>
             </a:xfrm>
             <a:custGeom>
               <a:avLst/>
               <a:pathLst>
-                <a:path w="5732228" h="2652951">
+                <a:path w="7090630" h="806037">
                   <a:moveTo>
-                    <a:pt x="0" y="0"/>
+                    <a:pt x="7090630" y="806037"/>
                   </a:moveTo>
                   <a:lnTo>
-                    <a:pt x="16203" y="50347"/>
-                  </a:lnTo>
-                  <a:lnTo>
-                    <a:pt x="93447" y="274670"/>
-                  </a:lnTo>
-                  <a:lnTo>
-                    <a:pt x="170691" y="484337"/>
-                  </a:lnTo>
-                  <a:lnTo>
-                    <a:pt x="247934" y="680305"/>
-                  </a:lnTo>
-                  <a:lnTo>
-                    <a:pt x="325178" y="863470"/>
-                  </a:lnTo>
-                  <a:lnTo>
-                    <a:pt x="402421" y="1034667"/>
-                  </a:lnTo>
-                  <a:lnTo>
-                    <a:pt x="479665" y="1194679"/>
-                  </a:lnTo>
-                  <a:lnTo>
-                    <a:pt x="556908" y="1344236"/>
-                  </a:lnTo>
-                  <a:lnTo>
-                    <a:pt x="634152" y="1484023"/>
-                  </a:lnTo>
-                  <a:lnTo>
-                    <a:pt x="711396" y="1614676"/>
-                  </a:lnTo>
-                  <a:lnTo>
-                    <a:pt x="788639" y="1736792"/>
-                  </a:lnTo>
-                  <a:lnTo>
-                    <a:pt x="865883" y="1850931"/>
-                  </a:lnTo>
-                  <a:lnTo>
-                    <a:pt x="943126" y="1957612"/>
-                  </a:lnTo>
-                  <a:lnTo>
-                    <a:pt x="1020370" y="2057323"/>
-                  </a:lnTo>
-                  <a:lnTo>
-                    <a:pt x="1097613" y="2150519"/>
-                  </a:lnTo>
-                  <a:lnTo>
-                    <a:pt x="1174857" y="2237626"/>
-                  </a:lnTo>
-                  <a:lnTo>
-                    <a:pt x="1252101" y="2319042"/>
-                  </a:lnTo>
-                  <a:lnTo>
-                    <a:pt x="1329344" y="2395139"/>
-                  </a:lnTo>
-                  <a:lnTo>
-                    <a:pt x="1406588" y="2466263"/>
-                  </a:lnTo>
-                  <a:lnTo>
-                    <a:pt x="1483831" y="2532741"/>
-                  </a:lnTo>
-                  <a:lnTo>
-                    <a:pt x="1561075" y="2594876"/>
-                  </a:lnTo>
-                  <a:lnTo>
-                    <a:pt x="1638318" y="2652951"/>
-                  </a:lnTo>
-                  <a:lnTo>
-                    <a:pt x="1715562" y="2642195"/>
-                  </a:lnTo>
-                  <a:lnTo>
-                    <a:pt x="1792806" y="2629631"/>
-                  </a:lnTo>
-                  <a:lnTo>
-                    <a:pt x="1870049" y="2616879"/>
-                  </a:lnTo>
-                  <a:lnTo>
-                    <a:pt x="1947293" y="2603937"/>
-                  </a:lnTo>
-                  <a:lnTo>
-                    <a:pt x="2024536" y="2590802"/>
-                  </a:lnTo>
-                  <a:lnTo>
-                    <a:pt x="2101780" y="2577471"/>
-                  </a:lnTo>
-                  <a:lnTo>
-                    <a:pt x="2179023" y="2563940"/>
-                  </a:lnTo>
-                  <a:lnTo>
-                    <a:pt x="2256267" y="2550208"/>
-                  </a:lnTo>
-                  <a:lnTo>
-                    <a:pt x="2333511" y="2536270"/>
-                  </a:lnTo>
-                  <a:lnTo>
-                    <a:pt x="2410754" y="2522124"/>
-                  </a:lnTo>
-                  <a:lnTo>
-                    <a:pt x="2487998" y="2507768"/>
-                  </a:lnTo>
-                  <a:lnTo>
-                    <a:pt x="2565241" y="2493196"/>
-                  </a:lnTo>
-                  <a:lnTo>
-                    <a:pt x="2642485" y="2478408"/>
-                  </a:lnTo>
-                  <a:lnTo>
-                    <a:pt x="2719728" y="2463398"/>
-                  </a:lnTo>
-                  <a:lnTo>
-                    <a:pt x="2796972" y="2448165"/>
-                  </a:lnTo>
-                  <a:lnTo>
-                    <a:pt x="2874216" y="2432704"/>
-                  </a:lnTo>
-                  <a:lnTo>
-                    <a:pt x="2951459" y="2417012"/>
-                  </a:lnTo>
-                  <a:lnTo>
-                    <a:pt x="3028703" y="2401086"/>
-                  </a:lnTo>
-                  <a:lnTo>
-                    <a:pt x="3105946" y="2384922"/>
-                  </a:lnTo>
-                  <a:lnTo>
-                    <a:pt x="3183190" y="2368517"/>
-                  </a:lnTo>
-                  <a:lnTo>
-                    <a:pt x="3260433" y="2351866"/>
-                  </a:lnTo>
-                  <a:lnTo>
-                    <a:pt x="3337677" y="2334968"/>
-                  </a:lnTo>
-                  <a:lnTo>
-                    <a:pt x="3414921" y="2317817"/>
-                  </a:lnTo>
-                  <a:lnTo>
-                    <a:pt x="3492164" y="2300410"/>
-                  </a:lnTo>
-                  <a:lnTo>
-                    <a:pt x="3569408" y="2282743"/>
-                  </a:lnTo>
-                  <a:lnTo>
-                    <a:pt x="3646651" y="2264812"/>
-                  </a:lnTo>
-                  <a:lnTo>
-                    <a:pt x="3723895" y="2246614"/>
-                  </a:lnTo>
-                  <a:lnTo>
-                    <a:pt x="3801138" y="2228143"/>
-                  </a:lnTo>
-                  <a:lnTo>
-                    <a:pt x="3878382" y="2209398"/>
-                  </a:lnTo>
-                  <a:lnTo>
-                    <a:pt x="3955626" y="2190372"/>
-                  </a:lnTo>
-                  <a:lnTo>
-                    <a:pt x="4032869" y="2171062"/>
-                  </a:lnTo>
-                  <a:lnTo>
-                    <a:pt x="4110113" y="2151464"/>
-                  </a:lnTo>
-                  <a:lnTo>
-                    <a:pt x="4187356" y="2131573"/>
-                  </a:lnTo>
-                  <a:lnTo>
-                    <a:pt x="4264600" y="2111386"/>
-                  </a:lnTo>
-                  <a:lnTo>
-                    <a:pt x="4341844" y="2090897"/>
-                  </a:lnTo>
-                  <a:lnTo>
-                    <a:pt x="4419087" y="2070102"/>
-                  </a:lnTo>
-                  <a:lnTo>
-                    <a:pt x="4496331" y="2048996"/>
-                  </a:lnTo>
-                  <a:lnTo>
-                    <a:pt x="4573574" y="2027576"/>
-                  </a:lnTo>
-                  <a:lnTo>
-                    <a:pt x="4650818" y="2005835"/>
-                  </a:lnTo>
-                  <a:lnTo>
-                    <a:pt x="4728061" y="1983771"/>
-                  </a:lnTo>
-                  <a:lnTo>
-                    <a:pt x="4805305" y="1961376"/>
-                  </a:lnTo>
-                  <a:lnTo>
-                    <a:pt x="4882549" y="1938648"/>
-                  </a:lnTo>
-                  <a:lnTo>
-                    <a:pt x="4959792" y="1915580"/>
-                  </a:lnTo>
-                  <a:lnTo>
-                    <a:pt x="5037036" y="1892167"/>
-                  </a:lnTo>
-                  <a:lnTo>
-                    <a:pt x="5114279" y="1868405"/>
-                  </a:lnTo>
-                  <a:lnTo>
-                    <a:pt x="5191523" y="1844289"/>
-                  </a:lnTo>
-                  <a:lnTo>
-                    <a:pt x="5268766" y="1819812"/>
-                  </a:lnTo>
-                  <a:lnTo>
-                    <a:pt x="5346010" y="1794970"/>
-                  </a:lnTo>
-                  <a:lnTo>
-                    <a:pt x="5423254" y="1769757"/>
-                  </a:lnTo>
-                  <a:lnTo>
-                    <a:pt x="5500497" y="1744167"/>
-                  </a:lnTo>
-                  <a:lnTo>
-                    <a:pt x="5577741" y="1718196"/>
-                  </a:lnTo>
-                  <a:lnTo>
-                    <a:pt x="5654984" y="1691836"/>
-                  </a:lnTo>
-                  <a:lnTo>
-                    <a:pt x="5732228" y="1665083"/>
+                    <a:pt x="7019007" y="804420"/>
+                  </a:lnTo>
+                  <a:lnTo>
+                    <a:pt x="6947385" y="802690"/>
+                  </a:lnTo>
+                  <a:lnTo>
+                    <a:pt x="6875762" y="800839"/>
+                  </a:lnTo>
+                  <a:lnTo>
+                    <a:pt x="6804139" y="798858"/>
+                  </a:lnTo>
+                  <a:lnTo>
+                    <a:pt x="6732517" y="796740"/>
+                  </a:lnTo>
+                  <a:lnTo>
+                    <a:pt x="6660894" y="794472"/>
+                  </a:lnTo>
+                  <a:lnTo>
+                    <a:pt x="6589272" y="792047"/>
+                  </a:lnTo>
+                  <a:lnTo>
+                    <a:pt x="6517649" y="789452"/>
+                  </a:lnTo>
+                  <a:lnTo>
+                    <a:pt x="6446027" y="786675"/>
+                  </a:lnTo>
+                  <a:lnTo>
+                    <a:pt x="6374404" y="783705"/>
+                  </a:lnTo>
+                  <a:lnTo>
+                    <a:pt x="6302782" y="780527"/>
+                  </a:lnTo>
+                  <a:lnTo>
+                    <a:pt x="6231159" y="777126"/>
+                  </a:lnTo>
+                  <a:lnTo>
+                    <a:pt x="6159537" y="773488"/>
+                  </a:lnTo>
+                  <a:lnTo>
+                    <a:pt x="6087914" y="769596"/>
+                  </a:lnTo>
+                  <a:lnTo>
+                    <a:pt x="6016292" y="765431"/>
+                  </a:lnTo>
+                  <a:lnTo>
+                    <a:pt x="5944669" y="760976"/>
+                  </a:lnTo>
+                  <a:lnTo>
+                    <a:pt x="5873047" y="756209"/>
+                  </a:lnTo>
+                  <a:lnTo>
+                    <a:pt x="5801424" y="751108"/>
+                  </a:lnTo>
+                  <a:lnTo>
+                    <a:pt x="5729802" y="745652"/>
+                  </a:lnTo>
+                  <a:lnTo>
+                    <a:pt x="5658179" y="739813"/>
+                  </a:lnTo>
+                  <a:lnTo>
+                    <a:pt x="5586557" y="733567"/>
+                  </a:lnTo>
+                  <a:lnTo>
+                    <a:pt x="5514934" y="726884"/>
+                  </a:lnTo>
+                  <a:lnTo>
+                    <a:pt x="5443311" y="719734"/>
+                  </a:lnTo>
+                  <a:lnTo>
+                    <a:pt x="5371689" y="712084"/>
+                  </a:lnTo>
+                  <a:lnTo>
+                    <a:pt x="5300066" y="703899"/>
+                  </a:lnTo>
+                  <a:lnTo>
+                    <a:pt x="5228444" y="695142"/>
+                  </a:lnTo>
+                  <a:lnTo>
+                    <a:pt x="5156821" y="685773"/>
+                  </a:lnTo>
+                  <a:lnTo>
+                    <a:pt x="5085199" y="675749"/>
+                  </a:lnTo>
+                  <a:lnTo>
+                    <a:pt x="5013576" y="665025"/>
+                  </a:lnTo>
+                  <a:lnTo>
+                    <a:pt x="4941954" y="653550"/>
+                  </a:lnTo>
+                  <a:lnTo>
+                    <a:pt x="4870331" y="641274"/>
+                  </a:lnTo>
+                  <a:lnTo>
+                    <a:pt x="4798709" y="628140"/>
+                  </a:lnTo>
+                  <a:lnTo>
+                    <a:pt x="4727086" y="614087"/>
+                  </a:lnTo>
+                  <a:lnTo>
+                    <a:pt x="4655464" y="599052"/>
+                  </a:lnTo>
+                  <a:lnTo>
+                    <a:pt x="4583841" y="582966"/>
+                  </a:lnTo>
+                  <a:lnTo>
+                    <a:pt x="4512219" y="565756"/>
+                  </a:lnTo>
+                  <a:lnTo>
+                    <a:pt x="4440596" y="547342"/>
+                  </a:lnTo>
+                  <a:lnTo>
+                    <a:pt x="4368974" y="527642"/>
+                  </a:lnTo>
+                  <a:lnTo>
+                    <a:pt x="4297351" y="506564"/>
+                  </a:lnTo>
+                  <a:lnTo>
+                    <a:pt x="4225729" y="484013"/>
+                  </a:lnTo>
+                  <a:lnTo>
+                    <a:pt x="4154106" y="459885"/>
+                  </a:lnTo>
+                  <a:lnTo>
+                    <a:pt x="4082483" y="434071"/>
+                  </a:lnTo>
+                  <a:lnTo>
+                    <a:pt x="4010861" y="406452"/>
+                  </a:lnTo>
+                  <a:lnTo>
+                    <a:pt x="3939238" y="376903"/>
+                  </a:lnTo>
+                  <a:lnTo>
+                    <a:pt x="3867616" y="345289"/>
+                  </a:lnTo>
+                  <a:lnTo>
+                    <a:pt x="3795993" y="311464"/>
+                  </a:lnTo>
+                  <a:lnTo>
+                    <a:pt x="3724371" y="275275"/>
+                  </a:lnTo>
+                  <a:lnTo>
+                    <a:pt x="3652748" y="236556"/>
+                  </a:lnTo>
+                  <a:lnTo>
+                    <a:pt x="3581126" y="195130"/>
+                  </a:lnTo>
+                  <a:lnTo>
+                    <a:pt x="3509503" y="150809"/>
+                  </a:lnTo>
+                  <a:lnTo>
+                    <a:pt x="3437881" y="103390"/>
+                  </a:lnTo>
+                  <a:lnTo>
+                    <a:pt x="3366258" y="52656"/>
+                  </a:lnTo>
+                  <a:lnTo>
+                    <a:pt x="3294636" y="0"/>
+                  </a:lnTo>
+                  <a:lnTo>
+                    <a:pt x="3223013" y="12197"/>
+                  </a:lnTo>
+                  <a:lnTo>
+                    <a:pt x="3151391" y="24215"/>
+                  </a:lnTo>
+                  <a:lnTo>
+                    <a:pt x="3079768" y="36056"/>
+                  </a:lnTo>
+                  <a:lnTo>
+                    <a:pt x="3008146" y="47722"/>
+                  </a:lnTo>
+                  <a:lnTo>
+                    <a:pt x="2936523" y="59218"/>
+                  </a:lnTo>
+                  <a:lnTo>
+                    <a:pt x="2864901" y="70544"/>
+                  </a:lnTo>
+                  <a:lnTo>
+                    <a:pt x="2793278" y="81703"/>
+                  </a:lnTo>
+                  <a:lnTo>
+                    <a:pt x="2721655" y="92699"/>
+                  </a:lnTo>
+                  <a:lnTo>
+                    <a:pt x="2650033" y="103532"/>
+                  </a:lnTo>
+                  <a:lnTo>
+                    <a:pt x="2578410" y="114207"/>
+                  </a:lnTo>
+                  <a:lnTo>
+                    <a:pt x="2506788" y="124724"/>
+                  </a:lnTo>
+                  <a:lnTo>
+                    <a:pt x="2435165" y="135086"/>
+                  </a:lnTo>
+                  <a:lnTo>
+                    <a:pt x="2363543" y="145297"/>
+                  </a:lnTo>
+                  <a:lnTo>
+                    <a:pt x="2291920" y="155356"/>
+                  </a:lnTo>
+                  <a:lnTo>
+                    <a:pt x="2220298" y="165268"/>
+                  </a:lnTo>
+                  <a:lnTo>
+                    <a:pt x="2148675" y="175034"/>
+                  </a:lnTo>
+                  <a:lnTo>
+                    <a:pt x="2077053" y="184657"/>
+                  </a:lnTo>
+                  <a:lnTo>
+                    <a:pt x="2005430" y="194138"/>
+                  </a:lnTo>
+                  <a:lnTo>
+                    <a:pt x="1933808" y="203479"/>
+                  </a:lnTo>
+                  <a:lnTo>
+                    <a:pt x="1862185" y="212683"/>
+                  </a:lnTo>
+                  <a:lnTo>
+                    <a:pt x="1790563" y="221752"/>
+                  </a:lnTo>
+                  <a:lnTo>
+                    <a:pt x="1718940" y="230687"/>
+                  </a:lnTo>
+                  <a:lnTo>
+                    <a:pt x="1647318" y="239491"/>
+                  </a:lnTo>
+                  <a:lnTo>
+                    <a:pt x="1575695" y="248165"/>
+                  </a:lnTo>
+                  <a:lnTo>
+                    <a:pt x="1504073" y="256712"/>
+                  </a:lnTo>
+                  <a:lnTo>
+                    <a:pt x="1432450" y="265133"/>
+                  </a:lnTo>
+                  <a:lnTo>
+                    <a:pt x="1360827" y="273430"/>
+                  </a:lnTo>
+                  <a:lnTo>
+                    <a:pt x="1289205" y="281605"/>
+                  </a:lnTo>
+                  <a:lnTo>
+                    <a:pt x="1217582" y="289660"/>
+                  </a:lnTo>
+                  <a:lnTo>
+                    <a:pt x="1145960" y="297596"/>
+                  </a:lnTo>
+                  <a:lnTo>
+                    <a:pt x="1074337" y="305416"/>
+                  </a:lnTo>
+                  <a:lnTo>
+                    <a:pt x="1002715" y="313120"/>
+                  </a:lnTo>
+                  <a:lnTo>
+                    <a:pt x="931092" y="320711"/>
+                  </a:lnTo>
+                  <a:lnTo>
+                    <a:pt x="859470" y="328191"/>
+                  </a:lnTo>
+                  <a:lnTo>
+                    <a:pt x="787847" y="335560"/>
+                  </a:lnTo>
+                  <a:lnTo>
+                    <a:pt x="716225" y="342822"/>
+                  </a:lnTo>
+                  <a:lnTo>
+                    <a:pt x="644602" y="349976"/>
+                  </a:lnTo>
+                  <a:lnTo>
+                    <a:pt x="572980" y="357025"/>
+                  </a:lnTo>
+                  <a:lnTo>
+                    <a:pt x="501357" y="363970"/>
+                  </a:lnTo>
+                  <a:lnTo>
+                    <a:pt x="429735" y="370813"/>
+                  </a:lnTo>
+                  <a:lnTo>
+                    <a:pt x="358112" y="377556"/>
+                  </a:lnTo>
+                  <a:lnTo>
+                    <a:pt x="286490" y="384199"/>
+                  </a:lnTo>
+                  <a:lnTo>
+                    <a:pt x="214867" y="390745"/>
+                  </a:lnTo>
+                  <a:lnTo>
+                    <a:pt x="143245" y="397194"/>
+                  </a:lnTo>
+                  <a:lnTo>
+                    <a:pt x="71622" y="403549"/>
+                  </a:lnTo>
+                  <a:lnTo>
+                    <a:pt x="0" y="409810"/>
                   </a:lnTo>
                 </a:path>
               </a:pathLst>
@@ -3805,619 +4096,312 @@
           </p:nvSpPr>
           <p:spPr>
             <a:xfrm>
-              <a:off x="817517" y="4728078"/>
-              <a:ext cx="7392041" cy="806037"/>
+              <a:off x="1172049" y="2764962"/>
+              <a:ext cx="7090630" cy="2587171"/>
             </a:xfrm>
             <a:custGeom>
               <a:avLst/>
               <a:pathLst>
-                <a:path w="7392041" h="806037">
-                  <a:moveTo>
-                    <a:pt x="7392041" y="806037"/>
-                  </a:moveTo>
-                  <a:lnTo>
-                    <a:pt x="7314797" y="804420"/>
-                  </a:lnTo>
-                  <a:lnTo>
-                    <a:pt x="7237554" y="802690"/>
-                  </a:lnTo>
-                  <a:lnTo>
-                    <a:pt x="7160310" y="800839"/>
-                  </a:lnTo>
-                  <a:lnTo>
-                    <a:pt x="7083066" y="798858"/>
-                  </a:lnTo>
-                  <a:lnTo>
-                    <a:pt x="7005823" y="796740"/>
-                  </a:lnTo>
-                  <a:lnTo>
-                    <a:pt x="6928579" y="794472"/>
-                  </a:lnTo>
-                  <a:lnTo>
-                    <a:pt x="6851336" y="792047"/>
-                  </a:lnTo>
-                  <a:lnTo>
-                    <a:pt x="6774092" y="789452"/>
-                  </a:lnTo>
-                  <a:lnTo>
-                    <a:pt x="6696849" y="786675"/>
-                  </a:lnTo>
-                  <a:lnTo>
-                    <a:pt x="6619605" y="783705"/>
-                  </a:lnTo>
-                  <a:lnTo>
-                    <a:pt x="6542361" y="780527"/>
-                  </a:lnTo>
-                  <a:lnTo>
-                    <a:pt x="6465118" y="777126"/>
-                  </a:lnTo>
-                  <a:lnTo>
-                    <a:pt x="6387874" y="773488"/>
-                  </a:lnTo>
-                  <a:lnTo>
-                    <a:pt x="6310631" y="769596"/>
-                  </a:lnTo>
-                  <a:lnTo>
-                    <a:pt x="6233387" y="765431"/>
-                  </a:lnTo>
-                  <a:lnTo>
-                    <a:pt x="6156144" y="760976"/>
-                  </a:lnTo>
-                  <a:lnTo>
-                    <a:pt x="6078900" y="756209"/>
-                  </a:lnTo>
-                  <a:lnTo>
-                    <a:pt x="6001656" y="751108"/>
-                  </a:lnTo>
-                  <a:lnTo>
-                    <a:pt x="5924413" y="745652"/>
-                  </a:lnTo>
-                  <a:lnTo>
-                    <a:pt x="5847169" y="739813"/>
-                  </a:lnTo>
-                  <a:lnTo>
-                    <a:pt x="5769926" y="733567"/>
-                  </a:lnTo>
-                  <a:lnTo>
-                    <a:pt x="5692682" y="726884"/>
-                  </a:lnTo>
-                  <a:lnTo>
-                    <a:pt x="5615439" y="719734"/>
-                  </a:lnTo>
-                  <a:lnTo>
-                    <a:pt x="5538195" y="712084"/>
-                  </a:lnTo>
-                  <a:lnTo>
-                    <a:pt x="5460951" y="703899"/>
-                  </a:lnTo>
-                  <a:lnTo>
-                    <a:pt x="5383708" y="695142"/>
-                  </a:lnTo>
-                  <a:lnTo>
-                    <a:pt x="5306464" y="685773"/>
-                  </a:lnTo>
-                  <a:lnTo>
-                    <a:pt x="5229221" y="675749"/>
-                  </a:lnTo>
-                  <a:lnTo>
-                    <a:pt x="5151977" y="665025"/>
-                  </a:lnTo>
-                  <a:lnTo>
-                    <a:pt x="5074734" y="653550"/>
-                  </a:lnTo>
-                  <a:lnTo>
-                    <a:pt x="4997490" y="641274"/>
-                  </a:lnTo>
-                  <a:lnTo>
-                    <a:pt x="4920246" y="628140"/>
-                  </a:lnTo>
-                  <a:lnTo>
-                    <a:pt x="4843003" y="614087"/>
-                  </a:lnTo>
-                  <a:lnTo>
-                    <a:pt x="4765759" y="599052"/>
-                  </a:lnTo>
-                  <a:lnTo>
-                    <a:pt x="4688516" y="582966"/>
-                  </a:lnTo>
-                  <a:lnTo>
-                    <a:pt x="4611272" y="565756"/>
-                  </a:lnTo>
-                  <a:lnTo>
-                    <a:pt x="4534029" y="547342"/>
-                  </a:lnTo>
-                  <a:lnTo>
-                    <a:pt x="4456785" y="527642"/>
-                  </a:lnTo>
-                  <a:lnTo>
-                    <a:pt x="4379541" y="506564"/>
-                  </a:lnTo>
-                  <a:lnTo>
-                    <a:pt x="4302298" y="484013"/>
-                  </a:lnTo>
-                  <a:lnTo>
-                    <a:pt x="4225054" y="459885"/>
-                  </a:lnTo>
-                  <a:lnTo>
-                    <a:pt x="4147811" y="434071"/>
-                  </a:lnTo>
-                  <a:lnTo>
-                    <a:pt x="4070567" y="406452"/>
-                  </a:lnTo>
-                  <a:lnTo>
-                    <a:pt x="3993324" y="376903"/>
-                  </a:lnTo>
-                  <a:lnTo>
-                    <a:pt x="3916080" y="345289"/>
-                  </a:lnTo>
-                  <a:lnTo>
-                    <a:pt x="3838836" y="311464"/>
-                  </a:lnTo>
-                  <a:lnTo>
-                    <a:pt x="3761593" y="275275"/>
-                  </a:lnTo>
-                  <a:lnTo>
-                    <a:pt x="3684349" y="236556"/>
-                  </a:lnTo>
-                  <a:lnTo>
-                    <a:pt x="3607106" y="195130"/>
-                  </a:lnTo>
-                  <a:lnTo>
-                    <a:pt x="3529862" y="150809"/>
-                  </a:lnTo>
-                  <a:lnTo>
-                    <a:pt x="3452619" y="103390"/>
-                  </a:lnTo>
-                  <a:lnTo>
-                    <a:pt x="3375375" y="52656"/>
-                  </a:lnTo>
-                  <a:lnTo>
-                    <a:pt x="3298131" y="0"/>
-                  </a:lnTo>
-                  <a:lnTo>
-                    <a:pt x="3220888" y="12197"/>
-                  </a:lnTo>
-                  <a:lnTo>
-                    <a:pt x="3143644" y="24215"/>
-                  </a:lnTo>
-                  <a:lnTo>
-                    <a:pt x="3066401" y="36056"/>
-                  </a:lnTo>
-                  <a:lnTo>
-                    <a:pt x="2989157" y="47722"/>
-                  </a:lnTo>
-                  <a:lnTo>
-                    <a:pt x="2911914" y="59218"/>
-                  </a:lnTo>
-                  <a:lnTo>
-                    <a:pt x="2834670" y="70544"/>
-                  </a:lnTo>
-                  <a:lnTo>
-                    <a:pt x="2757426" y="81703"/>
-                  </a:lnTo>
-                  <a:lnTo>
-                    <a:pt x="2680183" y="92699"/>
-                  </a:lnTo>
-                  <a:lnTo>
-                    <a:pt x="2602939" y="103532"/>
-                  </a:lnTo>
-                  <a:lnTo>
-                    <a:pt x="2525696" y="114207"/>
-                  </a:lnTo>
-                  <a:lnTo>
-                    <a:pt x="2448452" y="124724"/>
-                  </a:lnTo>
-                  <a:lnTo>
-                    <a:pt x="2371209" y="135086"/>
-                  </a:lnTo>
-                  <a:lnTo>
-                    <a:pt x="2293965" y="145297"/>
-                  </a:lnTo>
-                  <a:lnTo>
-                    <a:pt x="2216721" y="155356"/>
-                  </a:lnTo>
-                  <a:lnTo>
-                    <a:pt x="2139478" y="165268"/>
-                  </a:lnTo>
-                  <a:lnTo>
-                    <a:pt x="2062234" y="175034"/>
-                  </a:lnTo>
-                  <a:lnTo>
-                    <a:pt x="1984991" y="184657"/>
-                  </a:lnTo>
-                  <a:lnTo>
-                    <a:pt x="1907747" y="194138"/>
-                  </a:lnTo>
-                  <a:lnTo>
-                    <a:pt x="1830504" y="203479"/>
-                  </a:lnTo>
-                  <a:lnTo>
-                    <a:pt x="1753260" y="212683"/>
-                  </a:lnTo>
-                  <a:lnTo>
-                    <a:pt x="1676016" y="221752"/>
-                  </a:lnTo>
-                  <a:lnTo>
-                    <a:pt x="1598773" y="230687"/>
-                  </a:lnTo>
-                  <a:lnTo>
-                    <a:pt x="1521529" y="239491"/>
-                  </a:lnTo>
-                  <a:lnTo>
-                    <a:pt x="1444286" y="248165"/>
-                  </a:lnTo>
-                  <a:lnTo>
-                    <a:pt x="1367042" y="256712"/>
-                  </a:lnTo>
-                  <a:lnTo>
-                    <a:pt x="1289799" y="265133"/>
-                  </a:lnTo>
-                  <a:lnTo>
-                    <a:pt x="1212555" y="273430"/>
-                  </a:lnTo>
-                  <a:lnTo>
-                    <a:pt x="1135311" y="281605"/>
-                  </a:lnTo>
-                  <a:lnTo>
-                    <a:pt x="1058068" y="289660"/>
-                  </a:lnTo>
-                  <a:lnTo>
-                    <a:pt x="980824" y="297596"/>
-                  </a:lnTo>
-                  <a:lnTo>
-                    <a:pt x="903581" y="305416"/>
-                  </a:lnTo>
-                  <a:lnTo>
-                    <a:pt x="826337" y="313120"/>
-                  </a:lnTo>
-                  <a:lnTo>
-                    <a:pt x="749094" y="320711"/>
-                  </a:lnTo>
-                  <a:lnTo>
-                    <a:pt x="671850" y="328191"/>
-                  </a:lnTo>
-                  <a:lnTo>
-                    <a:pt x="594606" y="335560"/>
-                  </a:lnTo>
-                  <a:lnTo>
-                    <a:pt x="517363" y="342822"/>
-                  </a:lnTo>
-                  <a:lnTo>
-                    <a:pt x="440119" y="349976"/>
-                  </a:lnTo>
-                  <a:lnTo>
-                    <a:pt x="362876" y="357025"/>
-                  </a:lnTo>
-                  <a:lnTo>
-                    <a:pt x="285632" y="363970"/>
-                  </a:lnTo>
-                  <a:lnTo>
-                    <a:pt x="208389" y="370813"/>
-                  </a:lnTo>
-                  <a:lnTo>
-                    <a:pt x="131145" y="377556"/>
-                  </a:lnTo>
-                  <a:lnTo>
-                    <a:pt x="53901" y="384199"/>
-                  </a:lnTo>
-                  <a:lnTo>
-                    <a:pt x="0" y="388767"/>
-                  </a:lnTo>
-                </a:path>
-              </a:pathLst>
-            </a:custGeom>
-          </p:spPr>
-          <p:txBody>
-            <a:bodyPr/>
-            <a:lstStyle/>
-            <a:p/>
-          </p:txBody>
-        </p:sp>
-        <p:sp>
-          <p:nvSpPr>
-            <p:cNvPr id="24" name="pl24"/>
-            <p:cNvSpPr/>
-            <p:nvPr/>
-          </p:nvSpPr>
-          <p:spPr>
-            <a:xfrm>
-              <a:off x="817517" y="2997673"/>
-              <a:ext cx="7392041" cy="2354460"/>
-            </a:xfrm>
-            <a:custGeom>
-              <a:avLst/>
-              <a:pathLst>
-                <a:path w="7392041" h="2354460">
+                <a:path w="7090630" h="2587171">
                   <a:moveTo>
                     <a:pt x="0" y="0"/>
                   </a:moveTo>
                   <a:lnTo>
-                    <a:pt x="53901" y="46860"/>
-                  </a:lnTo>
-                  <a:lnTo>
-                    <a:pt x="131145" y="112264"/>
-                  </a:lnTo>
-                  <a:lnTo>
-                    <a:pt x="208389" y="175966"/>
-                  </a:lnTo>
-                  <a:lnTo>
-                    <a:pt x="285632" y="238010"/>
-                  </a:lnTo>
-                  <a:lnTo>
-                    <a:pt x="362876" y="298439"/>
-                  </a:lnTo>
-                  <a:lnTo>
-                    <a:pt x="440119" y="357295"/>
-                  </a:lnTo>
-                  <a:lnTo>
-                    <a:pt x="517363" y="414619"/>
-                  </a:lnTo>
-                  <a:lnTo>
-                    <a:pt x="594606" y="470451"/>
-                  </a:lnTo>
-                  <a:lnTo>
-                    <a:pt x="671850" y="524830"/>
-                  </a:lnTo>
-                  <a:lnTo>
-                    <a:pt x="749094" y="577793"/>
-                  </a:lnTo>
-                  <a:lnTo>
-                    <a:pt x="826337" y="629377"/>
-                  </a:lnTo>
-                  <a:lnTo>
-                    <a:pt x="903581" y="679619"/>
-                  </a:lnTo>
-                  <a:lnTo>
-                    <a:pt x="980824" y="728553"/>
-                  </a:lnTo>
-                  <a:lnTo>
-                    <a:pt x="1058068" y="776214"/>
-                  </a:lnTo>
-                  <a:lnTo>
-                    <a:pt x="1135311" y="822634"/>
-                  </a:lnTo>
-                  <a:lnTo>
-                    <a:pt x="1212555" y="867845"/>
-                  </a:lnTo>
-                  <a:lnTo>
-                    <a:pt x="1289799" y="911880"/>
-                  </a:lnTo>
-                  <a:lnTo>
-                    <a:pt x="1367042" y="954768"/>
-                  </a:lnTo>
-                  <a:lnTo>
-                    <a:pt x="1444286" y="996541"/>
-                  </a:lnTo>
-                  <a:lnTo>
-                    <a:pt x="1521529" y="1037225"/>
-                  </a:lnTo>
-                  <a:lnTo>
-                    <a:pt x="1598773" y="1076851"/>
-                  </a:lnTo>
-                  <a:lnTo>
-                    <a:pt x="1676016" y="1115446"/>
-                  </a:lnTo>
-                  <a:lnTo>
-                    <a:pt x="1753260" y="1153035"/>
-                  </a:lnTo>
-                  <a:lnTo>
-                    <a:pt x="1830504" y="1189647"/>
-                  </a:lnTo>
-                  <a:lnTo>
-                    <a:pt x="1907747" y="1225305"/>
-                  </a:lnTo>
-                  <a:lnTo>
-                    <a:pt x="1984991" y="1260036"/>
-                  </a:lnTo>
-                  <a:lnTo>
-                    <a:pt x="2062234" y="1293862"/>
-                  </a:lnTo>
-                  <a:lnTo>
-                    <a:pt x="2139478" y="1326808"/>
-                  </a:lnTo>
-                  <a:lnTo>
-                    <a:pt x="2216721" y="1358896"/>
-                  </a:lnTo>
-                  <a:lnTo>
-                    <a:pt x="2293965" y="1390149"/>
-                  </a:lnTo>
-                  <a:lnTo>
-                    <a:pt x="2371209" y="1420588"/>
-                  </a:lnTo>
-                  <a:lnTo>
-                    <a:pt x="2448452" y="1450235"/>
-                  </a:lnTo>
-                  <a:lnTo>
-                    <a:pt x="2525696" y="1479111"/>
-                  </a:lnTo>
-                  <a:lnTo>
-                    <a:pt x="2602939" y="1507235"/>
-                  </a:lnTo>
-                  <a:lnTo>
-                    <a:pt x="2680183" y="1534626"/>
-                  </a:lnTo>
-                  <a:lnTo>
-                    <a:pt x="2757426" y="1561305"/>
-                  </a:lnTo>
-                  <a:lnTo>
-                    <a:pt x="2834670" y="1587290"/>
-                  </a:lnTo>
-                  <a:lnTo>
-                    <a:pt x="2911914" y="1612598"/>
-                  </a:lnTo>
-                  <a:lnTo>
-                    <a:pt x="2989157" y="1637247"/>
-                  </a:lnTo>
-                  <a:lnTo>
-                    <a:pt x="3066401" y="1661255"/>
-                  </a:lnTo>
-                  <a:lnTo>
-                    <a:pt x="3143644" y="1684637"/>
-                  </a:lnTo>
-                  <a:lnTo>
-                    <a:pt x="3220888" y="1707411"/>
-                  </a:lnTo>
-                  <a:lnTo>
-                    <a:pt x="3298131" y="1729593"/>
-                  </a:lnTo>
-                  <a:lnTo>
-                    <a:pt x="3375375" y="1751197"/>
-                  </a:lnTo>
-                  <a:lnTo>
-                    <a:pt x="3452619" y="1772238"/>
-                  </a:lnTo>
-                  <a:lnTo>
-                    <a:pt x="3529862" y="1792732"/>
-                  </a:lnTo>
-                  <a:lnTo>
-                    <a:pt x="3607106" y="1812693"/>
-                  </a:lnTo>
-                  <a:lnTo>
-                    <a:pt x="3684349" y="1832134"/>
-                  </a:lnTo>
-                  <a:lnTo>
-                    <a:pt x="3761593" y="1851069"/>
-                  </a:lnTo>
-                  <a:lnTo>
-                    <a:pt x="3838836" y="1869511"/>
-                  </a:lnTo>
-                  <a:lnTo>
-                    <a:pt x="3916080" y="1887473"/>
-                  </a:lnTo>
-                  <a:lnTo>
-                    <a:pt x="3993324" y="1904967"/>
-                  </a:lnTo>
-                  <a:lnTo>
-                    <a:pt x="4070567" y="1922006"/>
-                  </a:lnTo>
-                  <a:lnTo>
-                    <a:pt x="4147811" y="1938602"/>
-                  </a:lnTo>
-                  <a:lnTo>
-                    <a:pt x="4225054" y="1954765"/>
-                  </a:lnTo>
-                  <a:lnTo>
-                    <a:pt x="4302298" y="1970508"/>
-                  </a:lnTo>
-                  <a:lnTo>
-                    <a:pt x="4379541" y="1985841"/>
-                  </a:lnTo>
-                  <a:lnTo>
-                    <a:pt x="4456785" y="2000775"/>
-                  </a:lnTo>
-                  <a:lnTo>
-                    <a:pt x="4534029" y="2015320"/>
-                  </a:lnTo>
-                  <a:lnTo>
-                    <a:pt x="4611272" y="2029487"/>
-                  </a:lnTo>
-                  <a:lnTo>
-                    <a:pt x="4688516" y="2043285"/>
-                  </a:lnTo>
-                  <a:lnTo>
-                    <a:pt x="4765759" y="2056724"/>
-                  </a:lnTo>
-                  <a:lnTo>
-                    <a:pt x="4843003" y="2069813"/>
-                  </a:lnTo>
-                  <a:lnTo>
-                    <a:pt x="4920246" y="2082561"/>
-                  </a:lnTo>
-                  <a:lnTo>
-                    <a:pt x="4997490" y="2094977"/>
-                  </a:lnTo>
-                  <a:lnTo>
-                    <a:pt x="5074734" y="2107070"/>
-                  </a:lnTo>
-                  <a:lnTo>
-                    <a:pt x="5151977" y="2118849"/>
-                  </a:lnTo>
-                  <a:lnTo>
-                    <a:pt x="5229221" y="2130321"/>
-                  </a:lnTo>
-                  <a:lnTo>
-                    <a:pt x="5306464" y="2141494"/>
-                  </a:lnTo>
-                  <a:lnTo>
-                    <a:pt x="5383708" y="2152376"/>
-                  </a:lnTo>
-                  <a:lnTo>
-                    <a:pt x="5460951" y="2162976"/>
-                  </a:lnTo>
-                  <a:lnTo>
-                    <a:pt x="5538195" y="2173299"/>
-                  </a:lnTo>
-                  <a:lnTo>
-                    <a:pt x="5615439" y="2183353"/>
-                  </a:lnTo>
-                  <a:lnTo>
-                    <a:pt x="5692682" y="2193146"/>
-                  </a:lnTo>
-                  <a:lnTo>
-                    <a:pt x="5769926" y="2202684"/>
-                  </a:lnTo>
-                  <a:lnTo>
-                    <a:pt x="5847169" y="2211974"/>
-                  </a:lnTo>
-                  <a:lnTo>
-                    <a:pt x="5924413" y="2221022"/>
-                  </a:lnTo>
-                  <a:lnTo>
-                    <a:pt x="6001656" y="2229834"/>
-                  </a:lnTo>
-                  <a:lnTo>
-                    <a:pt x="6078900" y="2238417"/>
-                  </a:lnTo>
-                  <a:lnTo>
-                    <a:pt x="6156144" y="2246777"/>
-                  </a:lnTo>
-                  <a:lnTo>
-                    <a:pt x="6233387" y="2254919"/>
-                  </a:lnTo>
-                  <a:lnTo>
-                    <a:pt x="6310631" y="2262849"/>
-                  </a:lnTo>
-                  <a:lnTo>
-                    <a:pt x="6387874" y="2270572"/>
-                  </a:lnTo>
-                  <a:lnTo>
-                    <a:pt x="6465118" y="2278095"/>
-                  </a:lnTo>
-                  <a:lnTo>
-                    <a:pt x="6542361" y="2285422"/>
-                  </a:lnTo>
-                  <a:lnTo>
-                    <a:pt x="6619605" y="2292558"/>
-                  </a:lnTo>
-                  <a:lnTo>
-                    <a:pt x="6696849" y="2299508"/>
-                  </a:lnTo>
-                  <a:lnTo>
-                    <a:pt x="6774092" y="2306278"/>
-                  </a:lnTo>
-                  <a:lnTo>
-                    <a:pt x="6851336" y="2312871"/>
-                  </a:lnTo>
-                  <a:lnTo>
-                    <a:pt x="6928579" y="2319292"/>
-                  </a:lnTo>
-                  <a:lnTo>
-                    <a:pt x="7005823" y="2325547"/>
-                  </a:lnTo>
-                  <a:lnTo>
-                    <a:pt x="7083066" y="2331638"/>
-                  </a:lnTo>
-                  <a:lnTo>
-                    <a:pt x="7160310" y="2337571"/>
-                  </a:lnTo>
-                  <a:lnTo>
-                    <a:pt x="7237554" y="2343350"/>
-                  </a:lnTo>
-                  <a:lnTo>
-                    <a:pt x="7314797" y="2348978"/>
-                  </a:lnTo>
-                  <a:lnTo>
-                    <a:pt x="7392041" y="2354460"/>
+                    <a:pt x="71622" y="72681"/>
+                  </a:lnTo>
+                  <a:lnTo>
+                    <a:pt x="143245" y="143471"/>
+                  </a:lnTo>
+                  <a:lnTo>
+                    <a:pt x="214867" y="212418"/>
+                  </a:lnTo>
+                  <a:lnTo>
+                    <a:pt x="286490" y="279570"/>
+                  </a:lnTo>
+                  <a:lnTo>
+                    <a:pt x="358112" y="344975"/>
+                  </a:lnTo>
+                  <a:lnTo>
+                    <a:pt x="429735" y="408677"/>
+                  </a:lnTo>
+                  <a:lnTo>
+                    <a:pt x="501357" y="470721"/>
+                  </a:lnTo>
+                  <a:lnTo>
+                    <a:pt x="572980" y="531149"/>
+                  </a:lnTo>
+                  <a:lnTo>
+                    <a:pt x="644602" y="590005"/>
+                  </a:lnTo>
+                  <a:lnTo>
+                    <a:pt x="716225" y="647329"/>
+                  </a:lnTo>
+                  <a:lnTo>
+                    <a:pt x="787847" y="703161"/>
+                  </a:lnTo>
+                  <a:lnTo>
+                    <a:pt x="859470" y="757540"/>
+                  </a:lnTo>
+                  <a:lnTo>
+                    <a:pt x="931092" y="810503"/>
+                  </a:lnTo>
+                  <a:lnTo>
+                    <a:pt x="1002715" y="862088"/>
+                  </a:lnTo>
+                  <a:lnTo>
+                    <a:pt x="1074337" y="912330"/>
+                  </a:lnTo>
+                  <a:lnTo>
+                    <a:pt x="1145960" y="961264"/>
+                  </a:lnTo>
+                  <a:lnTo>
+                    <a:pt x="1217582" y="1008924"/>
+                  </a:lnTo>
+                  <a:lnTo>
+                    <a:pt x="1289205" y="1055344"/>
+                  </a:lnTo>
+                  <a:lnTo>
+                    <a:pt x="1360827" y="1100556"/>
+                  </a:lnTo>
+                  <a:lnTo>
+                    <a:pt x="1432450" y="1144590"/>
+                  </a:lnTo>
+                  <a:lnTo>
+                    <a:pt x="1504073" y="1187479"/>
+                  </a:lnTo>
+                  <a:lnTo>
+                    <a:pt x="1575695" y="1229251"/>
+                  </a:lnTo>
+                  <a:lnTo>
+                    <a:pt x="1647318" y="1269936"/>
+                  </a:lnTo>
+                  <a:lnTo>
+                    <a:pt x="1718940" y="1309562"/>
+                  </a:lnTo>
+                  <a:lnTo>
+                    <a:pt x="1790563" y="1348156"/>
+                  </a:lnTo>
+                  <a:lnTo>
+                    <a:pt x="1862185" y="1385746"/>
+                  </a:lnTo>
+                  <a:lnTo>
+                    <a:pt x="1933808" y="1422357"/>
+                  </a:lnTo>
+                  <a:lnTo>
+                    <a:pt x="2005430" y="1458016"/>
+                  </a:lnTo>
+                  <a:lnTo>
+                    <a:pt x="2077053" y="1492746"/>
+                  </a:lnTo>
+                  <a:lnTo>
+                    <a:pt x="2148675" y="1526572"/>
+                  </a:lnTo>
+                  <a:lnTo>
+                    <a:pt x="2220298" y="1559518"/>
+                  </a:lnTo>
+                  <a:lnTo>
+                    <a:pt x="2291920" y="1591606"/>
+                  </a:lnTo>
+                  <a:lnTo>
+                    <a:pt x="2363543" y="1622859"/>
+                  </a:lnTo>
+                  <a:lnTo>
+                    <a:pt x="2435165" y="1653299"/>
+                  </a:lnTo>
+                  <a:lnTo>
+                    <a:pt x="2506788" y="1682946"/>
+                  </a:lnTo>
+                  <a:lnTo>
+                    <a:pt x="2578410" y="1711821"/>
+                  </a:lnTo>
+                  <a:lnTo>
+                    <a:pt x="2650033" y="1739945"/>
+                  </a:lnTo>
+                  <a:lnTo>
+                    <a:pt x="2721655" y="1767337"/>
+                  </a:lnTo>
+                  <a:lnTo>
+                    <a:pt x="2793278" y="1794016"/>
+                  </a:lnTo>
+                  <a:lnTo>
+                    <a:pt x="2864901" y="1820000"/>
+                  </a:lnTo>
+                  <a:lnTo>
+                    <a:pt x="2936523" y="1845308"/>
+                  </a:lnTo>
+                  <a:lnTo>
+                    <a:pt x="3008146" y="1869957"/>
+                  </a:lnTo>
+                  <a:lnTo>
+                    <a:pt x="3079768" y="1893965"/>
+                  </a:lnTo>
+                  <a:lnTo>
+                    <a:pt x="3151391" y="1917348"/>
+                  </a:lnTo>
+                  <a:lnTo>
+                    <a:pt x="3223013" y="1940122"/>
+                  </a:lnTo>
+                  <a:lnTo>
+                    <a:pt x="3294636" y="1962303"/>
+                  </a:lnTo>
+                  <a:lnTo>
+                    <a:pt x="3366258" y="1983907"/>
+                  </a:lnTo>
+                  <a:lnTo>
+                    <a:pt x="3437881" y="2004949"/>
+                  </a:lnTo>
+                  <a:lnTo>
+                    <a:pt x="3509503" y="2025443"/>
+                  </a:lnTo>
+                  <a:lnTo>
+                    <a:pt x="3581126" y="2045403"/>
+                  </a:lnTo>
+                  <a:lnTo>
+                    <a:pt x="3652748" y="2064844"/>
+                  </a:lnTo>
+                  <a:lnTo>
+                    <a:pt x="3724371" y="2083779"/>
+                  </a:lnTo>
+                  <a:lnTo>
+                    <a:pt x="3795993" y="2102221"/>
+                  </a:lnTo>
+                  <a:lnTo>
+                    <a:pt x="3867616" y="2120183"/>
+                  </a:lnTo>
+                  <a:lnTo>
+                    <a:pt x="3939238" y="2137677"/>
+                  </a:lnTo>
+                  <a:lnTo>
+                    <a:pt x="4010861" y="2154717"/>
+                  </a:lnTo>
+                  <a:lnTo>
+                    <a:pt x="4082483" y="2171312"/>
+                  </a:lnTo>
+                  <a:lnTo>
+                    <a:pt x="4154106" y="2187476"/>
+                  </a:lnTo>
+                  <a:lnTo>
+                    <a:pt x="4225729" y="2203219"/>
+                  </a:lnTo>
+                  <a:lnTo>
+                    <a:pt x="4297351" y="2218552"/>
+                  </a:lnTo>
+                  <a:lnTo>
+                    <a:pt x="4368974" y="2233486"/>
+                  </a:lnTo>
+                  <a:lnTo>
+                    <a:pt x="4440596" y="2248031"/>
+                  </a:lnTo>
+                  <a:lnTo>
+                    <a:pt x="4512219" y="2262198"/>
+                  </a:lnTo>
+                  <a:lnTo>
+                    <a:pt x="4583841" y="2275995"/>
+                  </a:lnTo>
+                  <a:lnTo>
+                    <a:pt x="4655464" y="2289434"/>
+                  </a:lnTo>
+                  <a:lnTo>
+                    <a:pt x="4727086" y="2302523"/>
+                  </a:lnTo>
+                  <a:lnTo>
+                    <a:pt x="4798709" y="2315271"/>
+                  </a:lnTo>
+                  <a:lnTo>
+                    <a:pt x="4870331" y="2327688"/>
+                  </a:lnTo>
+                  <a:lnTo>
+                    <a:pt x="4941954" y="2339781"/>
+                  </a:lnTo>
+                  <a:lnTo>
+                    <a:pt x="5013576" y="2351559"/>
+                  </a:lnTo>
+                  <a:lnTo>
+                    <a:pt x="5085199" y="2363031"/>
+                  </a:lnTo>
+                  <a:lnTo>
+                    <a:pt x="5156821" y="2374205"/>
+                  </a:lnTo>
+                  <a:lnTo>
+                    <a:pt x="5228444" y="2385087"/>
+                  </a:lnTo>
+                  <a:lnTo>
+                    <a:pt x="5300066" y="2395686"/>
+                  </a:lnTo>
+                  <a:lnTo>
+                    <a:pt x="5371689" y="2406009"/>
+                  </a:lnTo>
+                  <a:lnTo>
+                    <a:pt x="5443311" y="2416064"/>
+                  </a:lnTo>
+                  <a:lnTo>
+                    <a:pt x="5514934" y="2425857"/>
+                  </a:lnTo>
+                  <a:lnTo>
+                    <a:pt x="5586557" y="2435395"/>
+                  </a:lnTo>
+                  <a:lnTo>
+                    <a:pt x="5658179" y="2444684"/>
+                  </a:lnTo>
+                  <a:lnTo>
+                    <a:pt x="5729802" y="2453732"/>
+                  </a:lnTo>
+                  <a:lnTo>
+                    <a:pt x="5801424" y="2462545"/>
+                  </a:lnTo>
+                  <a:lnTo>
+                    <a:pt x="5873047" y="2471128"/>
+                  </a:lnTo>
+                  <a:lnTo>
+                    <a:pt x="5944669" y="2479487"/>
+                  </a:lnTo>
+                  <a:lnTo>
+                    <a:pt x="6016292" y="2487629"/>
+                  </a:lnTo>
+                  <a:lnTo>
+                    <a:pt x="6087914" y="2495559"/>
+                  </a:lnTo>
+                  <a:lnTo>
+                    <a:pt x="6159537" y="2503283"/>
+                  </a:lnTo>
+                  <a:lnTo>
+                    <a:pt x="6231159" y="2510805"/>
+                  </a:lnTo>
+                  <a:lnTo>
+                    <a:pt x="6302782" y="2518132"/>
+                  </a:lnTo>
+                  <a:lnTo>
+                    <a:pt x="6374404" y="2525268"/>
+                  </a:lnTo>
+                  <a:lnTo>
+                    <a:pt x="6446027" y="2532219"/>
+                  </a:lnTo>
+                  <a:lnTo>
+                    <a:pt x="6517649" y="2538988"/>
+                  </a:lnTo>
+                  <a:lnTo>
+                    <a:pt x="6589272" y="2545581"/>
+                  </a:lnTo>
+                  <a:lnTo>
+                    <a:pt x="6660894" y="2552003"/>
+                  </a:lnTo>
+                  <a:lnTo>
+                    <a:pt x="6732517" y="2558257"/>
+                  </a:lnTo>
+                  <a:lnTo>
+                    <a:pt x="6804139" y="2564349"/>
+                  </a:lnTo>
+                  <a:lnTo>
+                    <a:pt x="6875762" y="2570282"/>
+                  </a:lnTo>
+                  <a:lnTo>
+                    <a:pt x="6947385" y="2576061"/>
+                  </a:lnTo>
+                  <a:lnTo>
+                    <a:pt x="7019007" y="2581689"/>
+                  </a:lnTo>
+                  <a:lnTo>
+                    <a:pt x="7090630" y="2587171"/>
                   </a:lnTo>
                 </a:path>
               </a:pathLst>
@@ -4440,7 +4424,7 @@
         </p:sp>
         <p:sp>
           <p:nvSpPr>
-            <p:cNvPr id="25" name="pl25"/>
+            <p:cNvPr id="24" name="pl24"/>
             <p:cNvSpPr/>
             <p:nvPr/>
           </p:nvSpPr>
@@ -4483,13 +4467,13 @@
         </p:sp>
         <p:sp>
           <p:nvSpPr>
-            <p:cNvPr id="26" name="pl26"/>
+            <p:cNvPr id="25" name="pl25"/>
             <p:cNvSpPr/>
             <p:nvPr/>
           </p:nvSpPr>
           <p:spPr>
             <a:xfrm>
-              <a:off x="4117484" y="2073503"/>
+              <a:off x="4468386" y="2073503"/>
               <a:ext cx="0" cy="3649639"/>
             </a:xfrm>
             <a:custGeom>
@@ -4526,7 +4510,7 @@
         </p:sp>
         <p:sp>
           <p:nvSpPr>
-            <p:cNvPr id="27" name="tx27"/>
+            <p:cNvPr id="26" name="tx26"/>
             <p:cNvSpPr/>
             <p:nvPr/>
           </p:nvSpPr>
@@ -4572,7 +4556,7 @@
         </p:sp>
         <p:sp>
           <p:nvSpPr>
-            <p:cNvPr id="28" name="tx28"/>
+            <p:cNvPr id="27" name="tx27"/>
             <p:cNvSpPr/>
             <p:nvPr/>
           </p:nvSpPr>
@@ -4618,7 +4602,7 @@
         </p:sp>
         <p:sp>
           <p:nvSpPr>
-            <p:cNvPr id="29" name="tx29"/>
+            <p:cNvPr id="28" name="tx28"/>
             <p:cNvSpPr/>
             <p:nvPr/>
           </p:nvSpPr>
@@ -4664,7 +4648,7 @@
         </p:sp>
         <p:sp>
           <p:nvSpPr>
-            <p:cNvPr id="30" name="tx30"/>
+            <p:cNvPr id="29" name="tx29"/>
             <p:cNvSpPr/>
             <p:nvPr/>
           </p:nvSpPr>
@@ -4710,7 +4694,7 @@
         </p:sp>
         <p:sp>
           <p:nvSpPr>
-            <p:cNvPr id="31" name="tx31"/>
+            <p:cNvPr id="30" name="tx30"/>
             <p:cNvSpPr/>
             <p:nvPr/>
           </p:nvSpPr>
@@ -4756,14 +4740,14 @@
         </p:sp>
         <p:sp>
           <p:nvSpPr>
-            <p:cNvPr id="32" name="tx32"/>
+            <p:cNvPr id="31" name="tx31"/>
             <p:cNvSpPr/>
             <p:nvPr/>
           </p:nvSpPr>
           <p:spPr>
             <a:xfrm>
-              <a:off x="2423864" y="5785772"/>
-              <a:ext cx="155356" cy="80101"/>
+              <a:off x="2478335" y="5785772"/>
+              <a:ext cx="161574" cy="80101"/>
             </a:xfrm>
             <a:prstGeom prst="rect">
               <a:avLst/>
@@ -4795,21 +4779,21 @@
                   <a:latin typeface="Helvetica"/>
                   <a:cs typeface="Helvetica"/>
                 </a:rPr>
-                <a:t>0.8</a:t>
+                <a:t>-25</a:t>
               </a:r>
             </a:p>
           </p:txBody>
         </p:sp>
         <p:sp>
           <p:nvSpPr>
-            <p:cNvPr id="33" name="tx33"/>
+            <p:cNvPr id="32" name="tx32"/>
             <p:cNvSpPr/>
             <p:nvPr/>
           </p:nvSpPr>
           <p:spPr>
             <a:xfrm>
-              <a:off x="4196521" y="5785772"/>
-              <a:ext cx="155356" cy="80101"/>
+              <a:off x="4582608" y="5785772"/>
+              <a:ext cx="62179" cy="80101"/>
             </a:xfrm>
             <a:prstGeom prst="rect">
               <a:avLst/>
@@ -4841,21 +4825,21 @@
                   <a:latin typeface="Helvetica"/>
                   <a:cs typeface="Helvetica"/>
                 </a:rPr>
-                <a:t>1.0</a:t>
+                <a:t>0</a:t>
               </a:r>
             </a:p>
           </p:txBody>
         </p:sp>
         <p:sp>
           <p:nvSpPr>
-            <p:cNvPr id="34" name="tx34"/>
+            <p:cNvPr id="33" name="tx33"/>
             <p:cNvSpPr/>
             <p:nvPr/>
           </p:nvSpPr>
           <p:spPr>
             <a:xfrm>
-              <a:off x="5969179" y="5785772"/>
-              <a:ext cx="155356" cy="80101"/>
+              <a:off x="6606094" y="5785772"/>
+              <a:ext cx="124358" cy="80101"/>
             </a:xfrm>
             <a:prstGeom prst="rect">
               <a:avLst/>
@@ -4887,67 +4871,21 @@
                   <a:latin typeface="Helvetica"/>
                   <a:cs typeface="Helvetica"/>
                 </a:rPr>
-                <a:t>1.2</a:t>
+                <a:t>25</a:t>
               </a:r>
             </a:p>
           </p:txBody>
         </p:sp>
         <p:sp>
           <p:nvSpPr>
-            <p:cNvPr id="35" name="tx35"/>
+            <p:cNvPr id="34" name="tx34"/>
             <p:cNvSpPr/>
             <p:nvPr/>
           </p:nvSpPr>
           <p:spPr>
             <a:xfrm>
-              <a:off x="7741836" y="5785772"/>
-              <a:ext cx="155356" cy="80101"/>
-            </a:xfrm>
-            <a:prstGeom prst="rect">
-              <a:avLst/>
-            </a:prstGeom>
-            <a:noFill/>
-          </p:spPr>
-          <p:txBody>
-            <a:bodyPr lIns="0" rIns="0" tIns="0" bIns="0" anchorCtr="1" anchor="ctr" wrap="none"/>
-            <a:lstStyle/>
-            <a:p>
-              <a:pPr algn="l" marL="0" marR="0" indent="0">
-                <a:lnSpc>
-                  <a:spcPts val="880"/>
-                </a:lnSpc>
-                <a:spcBef>
-                  <a:spcPts val="0"/>
-                </a:spcBef>
-                <a:spcAft>
-                  <a:spcPts val="0"/>
-                </a:spcAft>
-              </a:pPr>
-              <a:r>
-                <a:rPr sz="880">
-                  <a:solidFill>
-                    <a:srgbClr val="4D4D4D">
-                      <a:alpha val="100000"/>
-                    </a:srgbClr>
-                  </a:solidFill>
-                  <a:latin typeface="Helvetica"/>
-                  <a:cs typeface="Helvetica"/>
-                </a:rPr>
-                <a:t>1.4</a:t>
-              </a:r>
-            </a:p>
-          </p:txBody>
-        </p:sp>
-        <p:sp>
-          <p:nvSpPr>
-            <p:cNvPr id="36" name="tx36"/>
-            <p:cNvSpPr/>
-            <p:nvPr/>
-          </p:nvSpPr>
-          <p:spPr>
-            <a:xfrm>
-              <a:off x="3879271" y="5925448"/>
-              <a:ext cx="1676186" cy="100218"/>
+              <a:off x="2928340" y="5925448"/>
+              <a:ext cx="3578047" cy="100218"/>
             </a:xfrm>
             <a:prstGeom prst="rect">
               <a:avLst/>
@@ -4979,14 +4917,14 @@
                   <a:latin typeface="Helvetica"/>
                   <a:cs typeface="Helvetica"/>
                 </a:rPr>
-                <a:t>CKD-EPI Cr-Cys / CG ratio</a:t>
+                <a:t>eGFR difference (%): 100 × (CKD-EPI Cr-Cys − CG) / CG</a:t>
               </a:r>
             </a:p>
           </p:txBody>
         </p:sp>
         <p:sp>
           <p:nvSpPr>
-            <p:cNvPr id="37" name="tx37"/>
+            <p:cNvPr id="35" name="tx35"/>
             <p:cNvSpPr/>
             <p:nvPr/>
           </p:nvSpPr>
@@ -5032,14 +4970,14 @@
         </p:sp>
         <p:sp>
           <p:nvSpPr>
-            <p:cNvPr id="38" name="tx38"/>
+            <p:cNvPr id="36" name="tx36"/>
             <p:cNvSpPr/>
             <p:nvPr/>
           </p:nvSpPr>
           <p:spPr>
             <a:xfrm>
               <a:off x="817517" y="1896563"/>
-              <a:ext cx="6169365" cy="82021"/>
+              <a:ext cx="6321612" cy="82021"/>
             </a:xfrm>
             <a:prstGeom prst="rect">
               <a:avLst/>
@@ -5071,14 +5009,14 @@
                   <a:latin typeface="Helvetica"/>
                   <a:cs typeface="Helvetica"/>
                 </a:rPr>
-                <a:t>subHR per 0.1 ratio decline: 1.35 (0.84-2.17), p = 0.210  |  per IQR decline (Δ = 0.30): 2.44 (0.61-9.87)  |  IQR: [0.84, 1.14]</a:t>
+                <a:t>subHR per 10 % decline: 1.35 (0.84-2.17), p = 0.210  |  per IQR decline (Δ = 29.5 %): 2.44 (0.61-9.87)  |  IQR: [-15.6, 13.9] %</a:t>
               </a:r>
             </a:p>
           </p:txBody>
         </p:sp>
         <p:sp>
           <p:nvSpPr>
-            <p:cNvPr id="39" name="tx39"/>
+            <p:cNvPr id="37" name="tx37"/>
             <p:cNvSpPr/>
             <p:nvPr/>
           </p:nvSpPr>

--- a/docs/pptx/auc3/jx-auc3-linsubhr-ratio-hosp6.pptx
+++ b/docs/pptx/auc3/jx-auc3-linsubhr-ratio-hosp6.pptx
@@ -2265,34 +2265,26 @@
         </p:sp>
         <p:sp>
           <p:nvSpPr>
-            <p:cNvPr id="4" name="pl4"/>
+            <p:cNvPr id="4" name="rc4"/>
             <p:cNvSpPr/>
             <p:nvPr/>
           </p:nvSpPr>
           <p:spPr>
             <a:xfrm>
-              <a:off x="817517" y="5142518"/>
-              <a:ext cx="7799693" cy="0"/>
+              <a:off x="457200" y="1600200"/>
+              <a:ext cx="8229600" cy="4525962"/>
             </a:xfrm>
-            <a:custGeom>
+            <a:prstGeom prst="rect">
               <a:avLst/>
-              <a:pathLst>
-                <a:path w="7799693" h="0">
-                  <a:moveTo>
-                    <a:pt x="0" y="0"/>
-                  </a:moveTo>
-                  <a:lnTo>
-                    <a:pt x="7799693" y="0"/>
-                  </a:lnTo>
-                  <a:lnTo>
-                    <a:pt x="7799693" y="0"/>
-                  </a:lnTo>
-                </a:path>
-              </a:pathLst>
-            </a:custGeom>
-            <a:ln w="6775" cap="flat">
+            </a:prstGeom>
+            <a:solidFill>
+              <a:srgbClr val="FFFFFF">
+                <a:alpha val="100000"/>
+              </a:srgbClr>
+            </a:solidFill>
+            <a:ln w="13550" cap="rnd">
               <a:solidFill>
-                <a:srgbClr val="EBEBEB">
+                <a:srgbClr val="FFFFFF">
                   <a:alpha val="100000"/>
                 </a:srgbClr>
               </a:solidFill>
@@ -2314,21 +2306,21 @@
           </p:nvSpPr>
           <p:spPr>
             <a:xfrm>
-              <a:off x="817517" y="4313054"/>
-              <a:ext cx="7799693" cy="0"/>
+              <a:off x="887106" y="3250627"/>
+              <a:ext cx="7660515" cy="0"/>
             </a:xfrm>
             <a:custGeom>
               <a:avLst/>
               <a:pathLst>
-                <a:path w="7799693" h="0">
+                <a:path w="7660515" h="0">
                   <a:moveTo>
                     <a:pt x="0" y="0"/>
                   </a:moveTo>
                   <a:lnTo>
-                    <a:pt x="7799693" y="0"/>
-                  </a:lnTo>
-                  <a:lnTo>
-                    <a:pt x="7799693" y="0"/>
+                    <a:pt x="7660515" y="0"/>
+                  </a:lnTo>
+                  <a:lnTo>
+                    <a:pt x="7660515" y="0"/>
                   </a:lnTo>
                 </a:path>
               </a:pathLst>
@@ -2357,21 +2349,21 @@
           </p:nvSpPr>
           <p:spPr>
             <a:xfrm>
-              <a:off x="817517" y="3483591"/>
-              <a:ext cx="7799693" cy="0"/>
+              <a:off x="887106" y="2951293"/>
+              <a:ext cx="7660515" cy="0"/>
             </a:xfrm>
             <a:custGeom>
               <a:avLst/>
               <a:pathLst>
-                <a:path w="7799693" h="0">
+                <a:path w="7660515" h="0">
                   <a:moveTo>
                     <a:pt x="0" y="0"/>
                   </a:moveTo>
                   <a:lnTo>
-                    <a:pt x="7799693" y="0"/>
-                  </a:lnTo>
-                  <a:lnTo>
-                    <a:pt x="7799693" y="0"/>
+                    <a:pt x="7660515" y="0"/>
+                  </a:lnTo>
+                  <a:lnTo>
+                    <a:pt x="7660515" y="0"/>
                   </a:lnTo>
                 </a:path>
               </a:pathLst>
@@ -2400,21 +2392,21 @@
           </p:nvSpPr>
           <p:spPr>
             <a:xfrm>
-              <a:off x="817517" y="2654127"/>
-              <a:ext cx="7799693" cy="0"/>
+              <a:off x="887106" y="2651959"/>
+              <a:ext cx="7660515" cy="0"/>
             </a:xfrm>
             <a:custGeom>
               <a:avLst/>
               <a:pathLst>
-                <a:path w="7799693" h="0">
+                <a:path w="7660515" h="0">
                   <a:moveTo>
                     <a:pt x="0" y="0"/>
                   </a:moveTo>
                   <a:lnTo>
-                    <a:pt x="7799693" y="0"/>
-                  </a:lnTo>
-                  <a:lnTo>
-                    <a:pt x="7799693" y="0"/>
+                    <a:pt x="7660515" y="0"/>
+                  </a:lnTo>
+                  <a:lnTo>
+                    <a:pt x="7660515" y="0"/>
                   </a:lnTo>
                 </a:path>
               </a:pathLst>
@@ -2443,21 +2435,21 @@
           </p:nvSpPr>
           <p:spPr>
             <a:xfrm>
-              <a:off x="1531834" y="2073503"/>
-              <a:ext cx="0" cy="3649639"/>
+              <a:off x="887106" y="2352625"/>
+              <a:ext cx="7660515" cy="0"/>
             </a:xfrm>
             <a:custGeom>
               <a:avLst/>
               <a:pathLst>
-                <a:path w="0" h="3649639">
+                <a:path w="7660515" h="0">
                   <a:moveTo>
-                    <a:pt x="0" y="3649639"/>
+                    <a:pt x="0" y="0"/>
                   </a:moveTo>
                   <a:lnTo>
-                    <a:pt x="0" y="0"/>
-                  </a:lnTo>
-                  <a:lnTo>
-                    <a:pt x="0" y="0"/>
+                    <a:pt x="7660515" y="0"/>
+                  </a:lnTo>
+                  <a:lnTo>
+                    <a:pt x="7660515" y="0"/>
                   </a:lnTo>
                 </a:path>
               </a:pathLst>
@@ -2486,15 +2478,15 @@
           </p:nvSpPr>
           <p:spPr>
             <a:xfrm>
-              <a:off x="3586410" y="2073503"/>
-              <a:ext cx="0" cy="3649639"/>
+              <a:off x="1588677" y="2143092"/>
+              <a:ext cx="0" cy="1317069"/>
             </a:xfrm>
             <a:custGeom>
               <a:avLst/>
               <a:pathLst>
-                <a:path w="0" h="3649639">
+                <a:path w="0" h="1317069">
                   <a:moveTo>
-                    <a:pt x="0" y="3649639"/>
+                    <a:pt x="0" y="1317069"/>
                   </a:moveTo>
                   <a:lnTo>
                     <a:pt x="0" y="0"/>
@@ -2529,15 +2521,15 @@
           </p:nvSpPr>
           <p:spPr>
             <a:xfrm>
-              <a:off x="5640985" y="2073503"/>
-              <a:ext cx="0" cy="3649639"/>
+              <a:off x="3606590" y="2143092"/>
+              <a:ext cx="0" cy="1317069"/>
             </a:xfrm>
             <a:custGeom>
               <a:avLst/>
               <a:pathLst>
-                <a:path w="0" h="3649639">
+                <a:path w="0" h="1317069">
                   <a:moveTo>
-                    <a:pt x="0" y="3649639"/>
+                    <a:pt x="0" y="1317069"/>
                   </a:moveTo>
                   <a:lnTo>
                     <a:pt x="0" y="0"/>
@@ -2572,15 +2564,15 @@
           </p:nvSpPr>
           <p:spPr>
             <a:xfrm>
-              <a:off x="7695561" y="2073503"/>
-              <a:ext cx="0" cy="3649639"/>
+              <a:off x="5624504" y="2143092"/>
+              <a:ext cx="0" cy="1317069"/>
             </a:xfrm>
             <a:custGeom>
               <a:avLst/>
               <a:pathLst>
-                <a:path w="0" h="3649639">
+                <a:path w="0" h="1317069">
                   <a:moveTo>
-                    <a:pt x="0" y="3649639"/>
+                    <a:pt x="0" y="1317069"/>
                   </a:moveTo>
                   <a:lnTo>
                     <a:pt x="0" y="0"/>
@@ -2615,26 +2607,26 @@
           </p:nvSpPr>
           <p:spPr>
             <a:xfrm>
-              <a:off x="817517" y="5557249"/>
-              <a:ext cx="7799693" cy="0"/>
+              <a:off x="7642418" y="2143092"/>
+              <a:ext cx="0" cy="1317069"/>
             </a:xfrm>
             <a:custGeom>
               <a:avLst/>
               <a:pathLst>
-                <a:path w="7799693" h="0">
+                <a:path w="0" h="1317069">
                   <a:moveTo>
+                    <a:pt x="0" y="1317069"/>
+                  </a:moveTo>
+                  <a:lnTo>
                     <a:pt x="0" y="0"/>
-                  </a:moveTo>
-                  <a:lnTo>
-                    <a:pt x="7799693" y="0"/>
-                  </a:lnTo>
-                  <a:lnTo>
-                    <a:pt x="7799693" y="0"/>
+                  </a:lnTo>
+                  <a:lnTo>
+                    <a:pt x="0" y="0"/>
                   </a:lnTo>
                 </a:path>
               </a:pathLst>
             </a:custGeom>
-            <a:ln w="13550" cap="flat">
+            <a:ln w="6775" cap="flat">
               <a:solidFill>
                 <a:srgbClr val="EBEBEB">
                   <a:alpha val="100000"/>
@@ -2658,21 +2650,21 @@
           </p:nvSpPr>
           <p:spPr>
             <a:xfrm>
-              <a:off x="817517" y="4727786"/>
-              <a:ext cx="7799693" cy="0"/>
+              <a:off x="887106" y="3400294"/>
+              <a:ext cx="7660515" cy="0"/>
             </a:xfrm>
             <a:custGeom>
               <a:avLst/>
               <a:pathLst>
-                <a:path w="7799693" h="0">
+                <a:path w="7660515" h="0">
                   <a:moveTo>
                     <a:pt x="0" y="0"/>
                   </a:moveTo>
                   <a:lnTo>
-                    <a:pt x="7799693" y="0"/>
-                  </a:lnTo>
-                  <a:lnTo>
-                    <a:pt x="7799693" y="0"/>
+                    <a:pt x="7660515" y="0"/>
+                  </a:lnTo>
+                  <a:lnTo>
+                    <a:pt x="7660515" y="0"/>
                   </a:lnTo>
                 </a:path>
               </a:pathLst>
@@ -2701,21 +2693,21 @@
           </p:nvSpPr>
           <p:spPr>
             <a:xfrm>
-              <a:off x="817517" y="3898322"/>
-              <a:ext cx="7799693" cy="0"/>
+              <a:off x="887106" y="3100960"/>
+              <a:ext cx="7660515" cy="0"/>
             </a:xfrm>
             <a:custGeom>
               <a:avLst/>
               <a:pathLst>
-                <a:path w="7799693" h="0">
+                <a:path w="7660515" h="0">
                   <a:moveTo>
                     <a:pt x="0" y="0"/>
                   </a:moveTo>
                   <a:lnTo>
-                    <a:pt x="7799693" y="0"/>
-                  </a:lnTo>
-                  <a:lnTo>
-                    <a:pt x="7799693" y="0"/>
+                    <a:pt x="7660515" y="0"/>
+                  </a:lnTo>
+                  <a:lnTo>
+                    <a:pt x="7660515" y="0"/>
                   </a:lnTo>
                 </a:path>
               </a:pathLst>
@@ -2744,21 +2736,21 @@
           </p:nvSpPr>
           <p:spPr>
             <a:xfrm>
-              <a:off x="817517" y="3068859"/>
-              <a:ext cx="7799693" cy="0"/>
+              <a:off x="887106" y="2801626"/>
+              <a:ext cx="7660515" cy="0"/>
             </a:xfrm>
             <a:custGeom>
               <a:avLst/>
               <a:pathLst>
-                <a:path w="7799693" h="0">
+                <a:path w="7660515" h="0">
                   <a:moveTo>
                     <a:pt x="0" y="0"/>
                   </a:moveTo>
                   <a:lnTo>
-                    <a:pt x="7799693" y="0"/>
-                  </a:lnTo>
-                  <a:lnTo>
-                    <a:pt x="7799693" y="0"/>
+                    <a:pt x="7660515" y="0"/>
+                  </a:lnTo>
+                  <a:lnTo>
+                    <a:pt x="7660515" y="0"/>
                   </a:lnTo>
                 </a:path>
               </a:pathLst>
@@ -2787,21 +2779,21 @@
           </p:nvSpPr>
           <p:spPr>
             <a:xfrm>
-              <a:off x="817517" y="2239395"/>
-              <a:ext cx="7799693" cy="0"/>
+              <a:off x="887106" y="2502292"/>
+              <a:ext cx="7660515" cy="0"/>
             </a:xfrm>
             <a:custGeom>
               <a:avLst/>
               <a:pathLst>
-                <a:path w="7799693" h="0">
+                <a:path w="7660515" h="0">
                   <a:moveTo>
                     <a:pt x="0" y="0"/>
                   </a:moveTo>
                   <a:lnTo>
-                    <a:pt x="7799693" y="0"/>
-                  </a:lnTo>
-                  <a:lnTo>
-                    <a:pt x="7799693" y="0"/>
+                    <a:pt x="7660515" y="0"/>
+                  </a:lnTo>
+                  <a:lnTo>
+                    <a:pt x="7660515" y="0"/>
                   </a:lnTo>
                 </a:path>
               </a:pathLst>
@@ -2830,21 +2822,21 @@
           </p:nvSpPr>
           <p:spPr>
             <a:xfrm>
-              <a:off x="2559122" y="2073503"/>
-              <a:ext cx="0" cy="3649639"/>
+              <a:off x="887106" y="2202958"/>
+              <a:ext cx="7660515" cy="0"/>
             </a:xfrm>
             <a:custGeom>
               <a:avLst/>
               <a:pathLst>
-                <a:path w="0" h="3649639">
+                <a:path w="7660515" h="0">
                   <a:moveTo>
-                    <a:pt x="0" y="3649639"/>
+                    <a:pt x="0" y="0"/>
                   </a:moveTo>
                   <a:lnTo>
-                    <a:pt x="0" y="0"/>
-                  </a:lnTo>
-                  <a:lnTo>
-                    <a:pt x="0" y="0"/>
+                    <a:pt x="7660515" y="0"/>
+                  </a:lnTo>
+                  <a:lnTo>
+                    <a:pt x="7660515" y="0"/>
                   </a:lnTo>
                 </a:path>
               </a:pathLst>
@@ -2873,15 +2865,15 @@
           </p:nvSpPr>
           <p:spPr>
             <a:xfrm>
-              <a:off x="4613698" y="2073503"/>
-              <a:ext cx="0" cy="3649639"/>
+              <a:off x="2597634" y="2143092"/>
+              <a:ext cx="0" cy="1317069"/>
             </a:xfrm>
             <a:custGeom>
               <a:avLst/>
               <a:pathLst>
-                <a:path w="0" h="3649639">
+                <a:path w="0" h="1317069">
                   <a:moveTo>
-                    <a:pt x="0" y="3649639"/>
+                    <a:pt x="0" y="1317069"/>
                   </a:moveTo>
                   <a:lnTo>
                     <a:pt x="0" y="0"/>
@@ -2916,15 +2908,15 @@
           </p:nvSpPr>
           <p:spPr>
             <a:xfrm>
-              <a:off x="6668273" y="2073503"/>
-              <a:ext cx="0" cy="3649639"/>
+              <a:off x="4615547" y="2143092"/>
+              <a:ext cx="0" cy="1317069"/>
             </a:xfrm>
             <a:custGeom>
               <a:avLst/>
               <a:pathLst>
-                <a:path w="0" h="3649639">
+                <a:path w="0" h="1317069">
                   <a:moveTo>
-                    <a:pt x="0" y="3649639"/>
+                    <a:pt x="0" y="1317069"/>
                   </a:moveTo>
                   <a:lnTo>
                     <a:pt x="0" y="0"/>
@@ -2953,546 +2945,589 @@
         </p:sp>
         <p:sp>
           <p:nvSpPr>
-            <p:cNvPr id="20" name="pg20"/>
+            <p:cNvPr id="20" name="pl20"/>
             <p:cNvSpPr/>
             <p:nvPr/>
           </p:nvSpPr>
           <p:spPr>
             <a:xfrm>
-              <a:off x="1172049" y="2073503"/>
-              <a:ext cx="7090630" cy="3460613"/>
+              <a:off x="6633461" y="2143092"/>
+              <a:ext cx="0" cy="1317069"/>
             </a:xfrm>
             <a:custGeom>
               <a:avLst/>
               <a:pathLst>
-                <a:path w="7090630" h="3460613">
+                <a:path w="0" h="1317069">
                   <a:moveTo>
-                    <a:pt x="1775538" y="0"/>
+                    <a:pt x="0" y="1317069"/>
                   </a:moveTo>
                   <a:lnTo>
-                    <a:pt x="1790563" y="50347"/>
-                  </a:lnTo>
-                  <a:lnTo>
-                    <a:pt x="1862185" y="274670"/>
-                  </a:lnTo>
-                  <a:lnTo>
-                    <a:pt x="1933808" y="484337"/>
-                  </a:lnTo>
-                  <a:lnTo>
-                    <a:pt x="2005430" y="680305"/>
-                  </a:lnTo>
-                  <a:lnTo>
-                    <a:pt x="2077053" y="863470"/>
-                  </a:lnTo>
-                  <a:lnTo>
-                    <a:pt x="2148675" y="1034667"/>
-                  </a:lnTo>
-                  <a:lnTo>
-                    <a:pt x="2220298" y="1194679"/>
-                  </a:lnTo>
-                  <a:lnTo>
-                    <a:pt x="2291920" y="1344236"/>
-                  </a:lnTo>
-                  <a:lnTo>
-                    <a:pt x="2363543" y="1484023"/>
-                  </a:lnTo>
-                  <a:lnTo>
-                    <a:pt x="2435165" y="1614676"/>
-                  </a:lnTo>
-                  <a:lnTo>
-                    <a:pt x="2506788" y="1736792"/>
-                  </a:lnTo>
-                  <a:lnTo>
-                    <a:pt x="2578410" y="1850931"/>
-                  </a:lnTo>
-                  <a:lnTo>
-                    <a:pt x="2650033" y="1957612"/>
-                  </a:lnTo>
-                  <a:lnTo>
-                    <a:pt x="2721655" y="2057323"/>
-                  </a:lnTo>
-                  <a:lnTo>
-                    <a:pt x="2793278" y="2150519"/>
-                  </a:lnTo>
-                  <a:lnTo>
-                    <a:pt x="2864901" y="2237626"/>
-                  </a:lnTo>
-                  <a:lnTo>
-                    <a:pt x="2936523" y="2319042"/>
-                  </a:lnTo>
-                  <a:lnTo>
-                    <a:pt x="3008146" y="2395139"/>
-                  </a:lnTo>
-                  <a:lnTo>
-                    <a:pt x="3079768" y="2466263"/>
-                  </a:lnTo>
-                  <a:lnTo>
-                    <a:pt x="3151391" y="2532741"/>
-                  </a:lnTo>
-                  <a:lnTo>
-                    <a:pt x="3223013" y="2594876"/>
-                  </a:lnTo>
-                  <a:lnTo>
-                    <a:pt x="3294636" y="2652951"/>
-                  </a:lnTo>
-                  <a:lnTo>
-                    <a:pt x="3366258" y="2642195"/>
-                  </a:lnTo>
-                  <a:lnTo>
-                    <a:pt x="3437881" y="2629631"/>
-                  </a:lnTo>
-                  <a:lnTo>
-                    <a:pt x="3509503" y="2616879"/>
-                  </a:lnTo>
-                  <a:lnTo>
-                    <a:pt x="3581126" y="2603937"/>
-                  </a:lnTo>
-                  <a:lnTo>
-                    <a:pt x="3652748" y="2590802"/>
-                  </a:lnTo>
-                  <a:lnTo>
-                    <a:pt x="3724371" y="2577471"/>
-                  </a:lnTo>
-                  <a:lnTo>
-                    <a:pt x="3795993" y="2563940"/>
-                  </a:lnTo>
-                  <a:lnTo>
-                    <a:pt x="3867616" y="2550208"/>
-                  </a:lnTo>
-                  <a:lnTo>
-                    <a:pt x="3939238" y="2536270"/>
-                  </a:lnTo>
-                  <a:lnTo>
-                    <a:pt x="4010861" y="2522124"/>
-                  </a:lnTo>
-                  <a:lnTo>
-                    <a:pt x="4082483" y="2507768"/>
-                  </a:lnTo>
-                  <a:lnTo>
-                    <a:pt x="4154106" y="2493196"/>
-                  </a:lnTo>
-                  <a:lnTo>
-                    <a:pt x="4225729" y="2478408"/>
-                  </a:lnTo>
-                  <a:lnTo>
-                    <a:pt x="4297351" y="2463398"/>
-                  </a:lnTo>
-                  <a:lnTo>
-                    <a:pt x="4368974" y="2448165"/>
-                  </a:lnTo>
-                  <a:lnTo>
-                    <a:pt x="4440596" y="2432704"/>
-                  </a:lnTo>
-                  <a:lnTo>
-                    <a:pt x="4512219" y="2417012"/>
-                  </a:lnTo>
-                  <a:lnTo>
-                    <a:pt x="4583841" y="2401086"/>
-                  </a:lnTo>
-                  <a:lnTo>
-                    <a:pt x="4655464" y="2384922"/>
-                  </a:lnTo>
-                  <a:lnTo>
-                    <a:pt x="4727086" y="2368517"/>
-                  </a:lnTo>
-                  <a:lnTo>
-                    <a:pt x="4798709" y="2351866"/>
-                  </a:lnTo>
-                  <a:lnTo>
-                    <a:pt x="4870331" y="2334968"/>
-                  </a:lnTo>
-                  <a:lnTo>
-                    <a:pt x="4941954" y="2317817"/>
-                  </a:lnTo>
-                  <a:lnTo>
-                    <a:pt x="5013576" y="2300410"/>
-                  </a:lnTo>
-                  <a:lnTo>
-                    <a:pt x="5085199" y="2282743"/>
-                  </a:lnTo>
-                  <a:lnTo>
-                    <a:pt x="5156821" y="2264812"/>
-                  </a:lnTo>
-                  <a:lnTo>
-                    <a:pt x="5228444" y="2246614"/>
-                  </a:lnTo>
-                  <a:lnTo>
-                    <a:pt x="5300066" y="2228143"/>
-                  </a:lnTo>
-                  <a:lnTo>
-                    <a:pt x="5371689" y="2209398"/>
-                  </a:lnTo>
-                  <a:lnTo>
-                    <a:pt x="5443311" y="2190372"/>
-                  </a:lnTo>
-                  <a:lnTo>
-                    <a:pt x="5514934" y="2171062"/>
-                  </a:lnTo>
-                  <a:lnTo>
-                    <a:pt x="5586557" y="2151464"/>
-                  </a:lnTo>
-                  <a:lnTo>
-                    <a:pt x="5658179" y="2131573"/>
-                  </a:lnTo>
-                  <a:lnTo>
-                    <a:pt x="5729802" y="2111386"/>
-                  </a:lnTo>
-                  <a:lnTo>
-                    <a:pt x="5801424" y="2090897"/>
-                  </a:lnTo>
-                  <a:lnTo>
-                    <a:pt x="5873047" y="2070102"/>
-                  </a:lnTo>
-                  <a:lnTo>
-                    <a:pt x="5944669" y="2048996"/>
-                  </a:lnTo>
-                  <a:lnTo>
-                    <a:pt x="6016292" y="2027576"/>
-                  </a:lnTo>
-                  <a:lnTo>
-                    <a:pt x="6087914" y="2005835"/>
-                  </a:lnTo>
-                  <a:lnTo>
-                    <a:pt x="6159537" y="1983771"/>
-                  </a:lnTo>
-                  <a:lnTo>
-                    <a:pt x="6231159" y="1961376"/>
-                  </a:lnTo>
-                  <a:lnTo>
-                    <a:pt x="6302782" y="1938648"/>
-                  </a:lnTo>
-                  <a:lnTo>
-                    <a:pt x="6374404" y="1915580"/>
-                  </a:lnTo>
-                  <a:lnTo>
-                    <a:pt x="6446027" y="1892167"/>
-                  </a:lnTo>
-                  <a:lnTo>
-                    <a:pt x="6517649" y="1868405"/>
-                  </a:lnTo>
-                  <a:lnTo>
-                    <a:pt x="6589272" y="1844289"/>
-                  </a:lnTo>
-                  <a:lnTo>
-                    <a:pt x="6660894" y="1819812"/>
-                  </a:lnTo>
-                  <a:lnTo>
-                    <a:pt x="6732517" y="1794970"/>
-                  </a:lnTo>
-                  <a:lnTo>
-                    <a:pt x="6804139" y="1769757"/>
-                  </a:lnTo>
-                  <a:lnTo>
-                    <a:pt x="6875762" y="1744167"/>
-                  </a:lnTo>
-                  <a:lnTo>
-                    <a:pt x="6947385" y="1718196"/>
-                  </a:lnTo>
-                  <a:lnTo>
-                    <a:pt x="7019007" y="1691836"/>
-                  </a:lnTo>
-                  <a:lnTo>
-                    <a:pt x="7090630" y="1665083"/>
-                  </a:lnTo>
-                  <a:lnTo>
-                    <a:pt x="7090630" y="3460613"/>
-                  </a:lnTo>
-                  <a:lnTo>
-                    <a:pt x="7019007" y="3458995"/>
-                  </a:lnTo>
-                  <a:lnTo>
-                    <a:pt x="6947385" y="3457265"/>
-                  </a:lnTo>
-                  <a:lnTo>
-                    <a:pt x="6875762" y="3455414"/>
-                  </a:lnTo>
-                  <a:lnTo>
-                    <a:pt x="6804139" y="3453434"/>
-                  </a:lnTo>
-                  <a:lnTo>
-                    <a:pt x="6732517" y="3451315"/>
-                  </a:lnTo>
-                  <a:lnTo>
-                    <a:pt x="6660894" y="3449048"/>
-                  </a:lnTo>
-                  <a:lnTo>
-                    <a:pt x="6589272" y="3446622"/>
-                  </a:lnTo>
-                  <a:lnTo>
-                    <a:pt x="6517649" y="3444027"/>
-                  </a:lnTo>
-                  <a:lnTo>
-                    <a:pt x="6446027" y="3441251"/>
-                  </a:lnTo>
-                  <a:lnTo>
-                    <a:pt x="6374404" y="3438280"/>
-                  </a:lnTo>
-                  <a:lnTo>
-                    <a:pt x="6302782" y="3435102"/>
-                  </a:lnTo>
-                  <a:lnTo>
-                    <a:pt x="6231159" y="3431701"/>
-                  </a:lnTo>
-                  <a:lnTo>
-                    <a:pt x="6159537" y="3428063"/>
-                  </a:lnTo>
-                  <a:lnTo>
-                    <a:pt x="6087914" y="3424171"/>
-                  </a:lnTo>
-                  <a:lnTo>
-                    <a:pt x="6016292" y="3420007"/>
-                  </a:lnTo>
-                  <a:lnTo>
-                    <a:pt x="5944669" y="3415551"/>
-                  </a:lnTo>
-                  <a:lnTo>
-                    <a:pt x="5873047" y="3410784"/>
-                  </a:lnTo>
-                  <a:lnTo>
-                    <a:pt x="5801424" y="3405684"/>
-                  </a:lnTo>
-                  <a:lnTo>
-                    <a:pt x="5729802" y="3400227"/>
-                  </a:lnTo>
-                  <a:lnTo>
-                    <a:pt x="5658179" y="3394389"/>
-                  </a:lnTo>
-                  <a:lnTo>
-                    <a:pt x="5586557" y="3388142"/>
-                  </a:lnTo>
-                  <a:lnTo>
-                    <a:pt x="5514934" y="3381459"/>
-                  </a:lnTo>
-                  <a:lnTo>
-                    <a:pt x="5443311" y="3374309"/>
-                  </a:lnTo>
-                  <a:lnTo>
-                    <a:pt x="5371689" y="3366659"/>
-                  </a:lnTo>
-                  <a:lnTo>
-                    <a:pt x="5300066" y="3358474"/>
-                  </a:lnTo>
-                  <a:lnTo>
-                    <a:pt x="5228444" y="3349717"/>
-                  </a:lnTo>
-                  <a:lnTo>
-                    <a:pt x="5156821" y="3340348"/>
-                  </a:lnTo>
-                  <a:lnTo>
-                    <a:pt x="5085199" y="3330325"/>
-                  </a:lnTo>
-                  <a:lnTo>
-                    <a:pt x="5013576" y="3319600"/>
-                  </a:lnTo>
-                  <a:lnTo>
-                    <a:pt x="4941954" y="3308126"/>
-                  </a:lnTo>
-                  <a:lnTo>
-                    <a:pt x="4870331" y="3295849"/>
-                  </a:lnTo>
-                  <a:lnTo>
-                    <a:pt x="4798709" y="3282715"/>
-                  </a:lnTo>
-                  <a:lnTo>
-                    <a:pt x="4727086" y="3268662"/>
-                  </a:lnTo>
-                  <a:lnTo>
-                    <a:pt x="4655464" y="3253627"/>
-                  </a:lnTo>
-                  <a:lnTo>
-                    <a:pt x="4583841" y="3237541"/>
-                  </a:lnTo>
-                  <a:lnTo>
-                    <a:pt x="4512219" y="3220331"/>
-                  </a:lnTo>
-                  <a:lnTo>
-                    <a:pt x="4440596" y="3201917"/>
-                  </a:lnTo>
-                  <a:lnTo>
-                    <a:pt x="4368974" y="3182217"/>
-                  </a:lnTo>
-                  <a:lnTo>
-                    <a:pt x="4297351" y="3161139"/>
-                  </a:lnTo>
-                  <a:lnTo>
-                    <a:pt x="4225729" y="3138588"/>
-                  </a:lnTo>
-                  <a:lnTo>
-                    <a:pt x="4154106" y="3114460"/>
-                  </a:lnTo>
-                  <a:lnTo>
-                    <a:pt x="4082483" y="3088646"/>
-                  </a:lnTo>
-                  <a:lnTo>
-                    <a:pt x="4010861" y="3061028"/>
-                  </a:lnTo>
-                  <a:lnTo>
-                    <a:pt x="3939238" y="3031479"/>
-                  </a:lnTo>
-                  <a:lnTo>
-                    <a:pt x="3867616" y="2999864"/>
-                  </a:lnTo>
-                  <a:lnTo>
-                    <a:pt x="3795993" y="2966039"/>
-                  </a:lnTo>
-                  <a:lnTo>
-                    <a:pt x="3724371" y="2929850"/>
-                  </a:lnTo>
-                  <a:lnTo>
-                    <a:pt x="3652748" y="2891131"/>
-                  </a:lnTo>
-                  <a:lnTo>
-                    <a:pt x="3581126" y="2849706"/>
-                  </a:lnTo>
-                  <a:lnTo>
-                    <a:pt x="3509503" y="2805385"/>
-                  </a:lnTo>
-                  <a:lnTo>
-                    <a:pt x="3437881" y="2757965"/>
-                  </a:lnTo>
-                  <a:lnTo>
-                    <a:pt x="3366258" y="2707231"/>
-                  </a:lnTo>
-                  <a:lnTo>
-                    <a:pt x="3294636" y="2654575"/>
-                  </a:lnTo>
-                  <a:lnTo>
-                    <a:pt x="3223013" y="2666772"/>
-                  </a:lnTo>
-                  <a:lnTo>
-                    <a:pt x="3151391" y="2678790"/>
-                  </a:lnTo>
-                  <a:lnTo>
-                    <a:pt x="3079768" y="2690631"/>
-                  </a:lnTo>
-                  <a:lnTo>
-                    <a:pt x="3008146" y="2702298"/>
-                  </a:lnTo>
-                  <a:lnTo>
-                    <a:pt x="2936523" y="2713793"/>
-                  </a:lnTo>
-                  <a:lnTo>
-                    <a:pt x="2864901" y="2725119"/>
-                  </a:lnTo>
-                  <a:lnTo>
-                    <a:pt x="2793278" y="2736279"/>
-                  </a:lnTo>
-                  <a:lnTo>
-                    <a:pt x="2721655" y="2747274"/>
-                  </a:lnTo>
-                  <a:lnTo>
-                    <a:pt x="2650033" y="2758108"/>
-                  </a:lnTo>
-                  <a:lnTo>
-                    <a:pt x="2578410" y="2768782"/>
-                  </a:lnTo>
-                  <a:lnTo>
-                    <a:pt x="2506788" y="2779299"/>
-                  </a:lnTo>
-                  <a:lnTo>
-                    <a:pt x="2435165" y="2789662"/>
-                  </a:lnTo>
-                  <a:lnTo>
-                    <a:pt x="2363543" y="2799872"/>
-                  </a:lnTo>
-                  <a:lnTo>
-                    <a:pt x="2291920" y="2809932"/>
-                  </a:lnTo>
-                  <a:lnTo>
-                    <a:pt x="2220298" y="2819844"/>
-                  </a:lnTo>
-                  <a:lnTo>
-                    <a:pt x="2148675" y="2829610"/>
-                  </a:lnTo>
-                  <a:lnTo>
-                    <a:pt x="2077053" y="2839232"/>
-                  </a:lnTo>
-                  <a:lnTo>
-                    <a:pt x="2005430" y="2848713"/>
-                  </a:lnTo>
-                  <a:lnTo>
-                    <a:pt x="1933808" y="2858055"/>
-                  </a:lnTo>
-                  <a:lnTo>
-                    <a:pt x="1862185" y="2867259"/>
-                  </a:lnTo>
-                  <a:lnTo>
-                    <a:pt x="1790563" y="2876327"/>
-                  </a:lnTo>
-                  <a:lnTo>
-                    <a:pt x="1718940" y="2885262"/>
-                  </a:lnTo>
-                  <a:lnTo>
-                    <a:pt x="1647318" y="2894066"/>
-                  </a:lnTo>
-                  <a:lnTo>
-                    <a:pt x="1575695" y="2902741"/>
-                  </a:lnTo>
-                  <a:lnTo>
-                    <a:pt x="1504073" y="2911287"/>
-                  </a:lnTo>
-                  <a:lnTo>
-                    <a:pt x="1432450" y="2919708"/>
-                  </a:lnTo>
-                  <a:lnTo>
-                    <a:pt x="1360827" y="2928005"/>
-                  </a:lnTo>
-                  <a:lnTo>
-                    <a:pt x="1289205" y="2936180"/>
-                  </a:lnTo>
-                  <a:lnTo>
-                    <a:pt x="1217582" y="2944235"/>
-                  </a:lnTo>
-                  <a:lnTo>
-                    <a:pt x="1145960" y="2952171"/>
-                  </a:lnTo>
-                  <a:lnTo>
-                    <a:pt x="1074337" y="2959991"/>
-                  </a:lnTo>
-                  <a:lnTo>
-                    <a:pt x="1002715" y="2967695"/>
-                  </a:lnTo>
-                  <a:lnTo>
-                    <a:pt x="931092" y="2975287"/>
-                  </a:lnTo>
-                  <a:lnTo>
-                    <a:pt x="859470" y="2982766"/>
-                  </a:lnTo>
-                  <a:lnTo>
-                    <a:pt x="787847" y="2990136"/>
-                  </a:lnTo>
-                  <a:lnTo>
-                    <a:pt x="716225" y="2997397"/>
-                  </a:lnTo>
-                  <a:lnTo>
-                    <a:pt x="644602" y="3004551"/>
-                  </a:lnTo>
-                  <a:lnTo>
-                    <a:pt x="572980" y="3011600"/>
-                  </a:lnTo>
-                  <a:lnTo>
-                    <a:pt x="501357" y="3018545"/>
-                  </a:lnTo>
-                  <a:lnTo>
-                    <a:pt x="429735" y="3025389"/>
-                  </a:lnTo>
-                  <a:lnTo>
-                    <a:pt x="358112" y="3032131"/>
-                  </a:lnTo>
-                  <a:lnTo>
-                    <a:pt x="286490" y="3038774"/>
-                  </a:lnTo>
-                  <a:lnTo>
-                    <a:pt x="214867" y="3045320"/>
-                  </a:lnTo>
-                  <a:lnTo>
-                    <a:pt x="143245" y="3051769"/>
-                  </a:lnTo>
-                  <a:lnTo>
-                    <a:pt x="71622" y="3058124"/>
-                  </a:lnTo>
-                  <a:lnTo>
-                    <a:pt x="0" y="3064385"/>
+                    <a:pt x="0" y="0"/>
+                  </a:lnTo>
+                  <a:lnTo>
+                    <a:pt x="0" y="0"/>
+                  </a:lnTo>
+                </a:path>
+              </a:pathLst>
+            </a:custGeom>
+            <a:ln w="13550" cap="flat">
+              <a:solidFill>
+                <a:srgbClr val="EBEBEB">
+                  <a:alpha val="100000"/>
+                </a:srgbClr>
+              </a:solidFill>
+              <a:prstDash val="solid"/>
+              <a:round/>
+            </a:ln>
+          </p:spPr>
+          <p:txBody>
+            <a:bodyPr/>
+            <a:lstStyle/>
+            <a:p/>
+          </p:txBody>
+        </p:sp>
+        <p:sp>
+          <p:nvSpPr>
+            <p:cNvPr id="21" name="pg21"/>
+            <p:cNvSpPr/>
+            <p:nvPr/>
+          </p:nvSpPr>
+          <p:spPr>
+            <a:xfrm>
+              <a:off x="1235312" y="2143092"/>
+              <a:ext cx="6964104" cy="1248853"/>
+            </a:xfrm>
+            <a:custGeom>
+              <a:avLst/>
+              <a:pathLst>
+                <a:path w="6964104" h="1248853">
+                  <a:moveTo>
+                    <a:pt x="1743855" y="0"/>
+                  </a:moveTo>
+                  <a:lnTo>
+                    <a:pt x="1758612" y="18169"/>
+                  </a:lnTo>
+                  <a:lnTo>
+                    <a:pt x="1828956" y="99122"/>
+                  </a:lnTo>
+                  <a:lnTo>
+                    <a:pt x="1899301" y="174785"/>
+                  </a:lnTo>
+                  <a:lnTo>
+                    <a:pt x="1969645" y="245506"/>
+                  </a:lnTo>
+                  <a:lnTo>
+                    <a:pt x="2039990" y="311606"/>
+                  </a:lnTo>
+                  <a:lnTo>
+                    <a:pt x="2110334" y="373387"/>
+                  </a:lnTo>
+                  <a:lnTo>
+                    <a:pt x="2180679" y="431131"/>
+                  </a:lnTo>
+                  <a:lnTo>
+                    <a:pt x="2251023" y="485103"/>
+                  </a:lnTo>
+                  <a:lnTo>
+                    <a:pt x="2321368" y="535548"/>
+                  </a:lnTo>
+                  <a:lnTo>
+                    <a:pt x="2391712" y="582698"/>
+                  </a:lnTo>
+                  <a:lnTo>
+                    <a:pt x="2462057" y="626767"/>
+                  </a:lnTo>
+                  <a:lnTo>
+                    <a:pt x="2532401" y="667957"/>
+                  </a:lnTo>
+                  <a:lnTo>
+                    <a:pt x="2602746" y="706456"/>
+                  </a:lnTo>
+                  <a:lnTo>
+                    <a:pt x="2673090" y="742439"/>
+                  </a:lnTo>
+                  <a:lnTo>
+                    <a:pt x="2743435" y="776071"/>
+                  </a:lnTo>
+                  <a:lnTo>
+                    <a:pt x="2813779" y="807506"/>
+                  </a:lnTo>
+                  <a:lnTo>
+                    <a:pt x="2884124" y="836887"/>
+                  </a:lnTo>
+                  <a:lnTo>
+                    <a:pt x="2954468" y="864349"/>
+                  </a:lnTo>
+                  <a:lnTo>
+                    <a:pt x="3024813" y="890016"/>
+                  </a:lnTo>
+                  <a:lnTo>
+                    <a:pt x="3095157" y="914006"/>
+                  </a:lnTo>
+                  <a:lnTo>
+                    <a:pt x="3165502" y="936429"/>
+                  </a:lnTo>
+                  <a:lnTo>
+                    <a:pt x="3235846" y="957387"/>
+                  </a:lnTo>
+                  <a:lnTo>
+                    <a:pt x="3306191" y="953506"/>
+                  </a:lnTo>
+                  <a:lnTo>
+                    <a:pt x="3376535" y="948972"/>
+                  </a:lnTo>
+                  <a:lnTo>
+                    <a:pt x="3446880" y="944370"/>
+                  </a:lnTo>
+                  <a:lnTo>
+                    <a:pt x="3517224" y="939699"/>
+                  </a:lnTo>
+                  <a:lnTo>
+                    <a:pt x="3587569" y="934959"/>
+                  </a:lnTo>
+                  <a:lnTo>
+                    <a:pt x="3657913" y="930148"/>
+                  </a:lnTo>
+                  <a:lnTo>
+                    <a:pt x="3728257" y="925265"/>
+                  </a:lnTo>
+                  <a:lnTo>
+                    <a:pt x="3798602" y="920310"/>
+                  </a:lnTo>
+                  <a:lnTo>
+                    <a:pt x="3868946" y="915280"/>
+                  </a:lnTo>
+                  <a:lnTo>
+                    <a:pt x="3939291" y="910175"/>
+                  </a:lnTo>
+                  <a:lnTo>
+                    <a:pt x="4009635" y="904994"/>
+                  </a:lnTo>
+                  <a:lnTo>
+                    <a:pt x="4079980" y="899736"/>
+                  </a:lnTo>
+                  <a:lnTo>
+                    <a:pt x="4150324" y="894399"/>
+                  </a:lnTo>
+                  <a:lnTo>
+                    <a:pt x="4220669" y="888982"/>
+                  </a:lnTo>
+                  <a:lnTo>
+                    <a:pt x="4291013" y="883485"/>
+                  </a:lnTo>
+                  <a:lnTo>
+                    <a:pt x="4361358" y="877905"/>
+                  </a:lnTo>
+                  <a:lnTo>
+                    <a:pt x="4431702" y="872242"/>
+                  </a:lnTo>
+                  <a:lnTo>
+                    <a:pt x="4502047" y="866495"/>
+                  </a:lnTo>
+                  <a:lnTo>
+                    <a:pt x="4572391" y="860662"/>
+                  </a:lnTo>
+                  <a:lnTo>
+                    <a:pt x="4642736" y="854742"/>
+                  </a:lnTo>
+                  <a:lnTo>
+                    <a:pt x="4713080" y="848733"/>
+                  </a:lnTo>
+                  <a:lnTo>
+                    <a:pt x="4783425" y="842635"/>
+                  </a:lnTo>
+                  <a:lnTo>
+                    <a:pt x="4853769" y="836445"/>
+                  </a:lnTo>
+                  <a:lnTo>
+                    <a:pt x="4924114" y="830163"/>
+                  </a:lnTo>
+                  <a:lnTo>
+                    <a:pt x="4994458" y="823788"/>
+                  </a:lnTo>
+                  <a:lnTo>
+                    <a:pt x="5064803" y="817317"/>
+                  </a:lnTo>
+                  <a:lnTo>
+                    <a:pt x="5135147" y="810750"/>
+                  </a:lnTo>
+                  <a:lnTo>
+                    <a:pt x="5205492" y="804084"/>
+                  </a:lnTo>
+                  <a:lnTo>
+                    <a:pt x="5275836" y="797319"/>
+                  </a:lnTo>
+                  <a:lnTo>
+                    <a:pt x="5346181" y="790453"/>
+                  </a:lnTo>
+                  <a:lnTo>
+                    <a:pt x="5416525" y="783485"/>
+                  </a:lnTo>
+                  <a:lnTo>
+                    <a:pt x="5486870" y="776412"/>
+                  </a:lnTo>
+                  <a:lnTo>
+                    <a:pt x="5557214" y="769234"/>
+                  </a:lnTo>
+                  <a:lnTo>
+                    <a:pt x="5627559" y="761949"/>
+                  </a:lnTo>
+                  <a:lnTo>
+                    <a:pt x="5697903" y="754555"/>
+                  </a:lnTo>
+                  <a:lnTo>
+                    <a:pt x="5768248" y="747051"/>
+                  </a:lnTo>
+                  <a:lnTo>
+                    <a:pt x="5838592" y="739434"/>
+                  </a:lnTo>
+                  <a:lnTo>
+                    <a:pt x="5908937" y="731704"/>
+                  </a:lnTo>
+                  <a:lnTo>
+                    <a:pt x="5979281" y="723858"/>
+                  </a:lnTo>
+                  <a:lnTo>
+                    <a:pt x="6049626" y="715896"/>
+                  </a:lnTo>
+                  <a:lnTo>
+                    <a:pt x="6119970" y="707814"/>
+                  </a:lnTo>
+                  <a:lnTo>
+                    <a:pt x="6190315" y="699612"/>
+                  </a:lnTo>
+                  <a:lnTo>
+                    <a:pt x="6260659" y="691287"/>
+                  </a:lnTo>
+                  <a:lnTo>
+                    <a:pt x="6331004" y="682838"/>
+                  </a:lnTo>
+                  <a:lnTo>
+                    <a:pt x="6401348" y="674263"/>
+                  </a:lnTo>
+                  <a:lnTo>
+                    <a:pt x="6471693" y="665560"/>
+                  </a:lnTo>
+                  <a:lnTo>
+                    <a:pt x="6542037" y="656727"/>
+                  </a:lnTo>
+                  <a:lnTo>
+                    <a:pt x="6612382" y="647762"/>
+                  </a:lnTo>
+                  <a:lnTo>
+                    <a:pt x="6682726" y="638663"/>
+                  </a:lnTo>
+                  <a:lnTo>
+                    <a:pt x="6753071" y="629429"/>
+                  </a:lnTo>
+                  <a:lnTo>
+                    <a:pt x="6823415" y="620056"/>
+                  </a:lnTo>
+                  <a:lnTo>
+                    <a:pt x="6893760" y="610544"/>
+                  </a:lnTo>
+                  <a:lnTo>
+                    <a:pt x="6964104" y="600889"/>
+                  </a:lnTo>
+                  <a:lnTo>
+                    <a:pt x="6964104" y="1248853"/>
+                  </a:lnTo>
+                  <a:lnTo>
+                    <a:pt x="6893760" y="1248270"/>
+                  </a:lnTo>
+                  <a:lnTo>
+                    <a:pt x="6823415" y="1247645"/>
+                  </a:lnTo>
+                  <a:lnTo>
+                    <a:pt x="6753071" y="1246977"/>
+                  </a:lnTo>
+                  <a:lnTo>
+                    <a:pt x="6682726" y="1246263"/>
+                  </a:lnTo>
+                  <a:lnTo>
+                    <a:pt x="6612382" y="1245498"/>
+                  </a:lnTo>
+                  <a:lnTo>
+                    <a:pt x="6542037" y="1244680"/>
+                  </a:lnTo>
+                  <a:lnTo>
+                    <a:pt x="6471693" y="1243805"/>
+                  </a:lnTo>
+                  <a:lnTo>
+                    <a:pt x="6401348" y="1242868"/>
+                  </a:lnTo>
+                  <a:lnTo>
+                    <a:pt x="6331004" y="1241866"/>
+                  </a:lnTo>
+                  <a:lnTo>
+                    <a:pt x="6260659" y="1240794"/>
+                  </a:lnTo>
+                  <a:lnTo>
+                    <a:pt x="6190315" y="1239647"/>
+                  </a:lnTo>
+                  <a:lnTo>
+                    <a:pt x="6119970" y="1238420"/>
+                  </a:lnTo>
+                  <a:lnTo>
+                    <a:pt x="6049626" y="1237107"/>
+                  </a:lnTo>
+                  <a:lnTo>
+                    <a:pt x="5979281" y="1235702"/>
+                  </a:lnTo>
+                  <a:lnTo>
+                    <a:pt x="5908937" y="1234200"/>
+                  </a:lnTo>
+                  <a:lnTo>
+                    <a:pt x="5838592" y="1232592"/>
+                  </a:lnTo>
+                  <a:lnTo>
+                    <a:pt x="5768248" y="1230871"/>
+                  </a:lnTo>
+                  <a:lnTo>
+                    <a:pt x="5697903" y="1229031"/>
+                  </a:lnTo>
+                  <a:lnTo>
+                    <a:pt x="5627559" y="1227062"/>
+                  </a:lnTo>
+                  <a:lnTo>
+                    <a:pt x="5557214" y="1224955"/>
+                  </a:lnTo>
+                  <a:lnTo>
+                    <a:pt x="5486870" y="1222700"/>
+                  </a:lnTo>
+                  <a:lnTo>
+                    <a:pt x="5416525" y="1220289"/>
+                  </a:lnTo>
+                  <a:lnTo>
+                    <a:pt x="5346181" y="1217708"/>
+                  </a:lnTo>
+                  <a:lnTo>
+                    <a:pt x="5275836" y="1214948"/>
+                  </a:lnTo>
+                  <a:lnTo>
+                    <a:pt x="5205492" y="1211994"/>
+                  </a:lnTo>
+                  <a:lnTo>
+                    <a:pt x="5135147" y="1208834"/>
+                  </a:lnTo>
+                  <a:lnTo>
+                    <a:pt x="5064803" y="1205453"/>
+                  </a:lnTo>
+                  <a:lnTo>
+                    <a:pt x="4994458" y="1201835"/>
+                  </a:lnTo>
+                  <a:lnTo>
+                    <a:pt x="4924114" y="1197965"/>
+                  </a:lnTo>
+                  <a:lnTo>
+                    <a:pt x="4853769" y="1193824"/>
+                  </a:lnTo>
+                  <a:lnTo>
+                    <a:pt x="4783425" y="1189394"/>
+                  </a:lnTo>
+                  <a:lnTo>
+                    <a:pt x="4713080" y="1184654"/>
+                  </a:lnTo>
+                  <a:lnTo>
+                    <a:pt x="4642736" y="1179583"/>
+                  </a:lnTo>
+                  <a:lnTo>
+                    <a:pt x="4572391" y="1174157"/>
+                  </a:lnTo>
+                  <a:lnTo>
+                    <a:pt x="4502047" y="1168352"/>
+                  </a:lnTo>
+                  <a:lnTo>
+                    <a:pt x="4431702" y="1162141"/>
+                  </a:lnTo>
+                  <a:lnTo>
+                    <a:pt x="4361358" y="1155496"/>
+                  </a:lnTo>
+                  <a:lnTo>
+                    <a:pt x="4291013" y="1148387"/>
+                  </a:lnTo>
+                  <a:lnTo>
+                    <a:pt x="4220669" y="1140780"/>
+                  </a:lnTo>
+                  <a:lnTo>
+                    <a:pt x="4150324" y="1132642"/>
+                  </a:lnTo>
+                  <a:lnTo>
+                    <a:pt x="4079980" y="1123935"/>
+                  </a:lnTo>
+                  <a:lnTo>
+                    <a:pt x="4009635" y="1114619"/>
+                  </a:lnTo>
+                  <a:lnTo>
+                    <a:pt x="3939291" y="1104653"/>
+                  </a:lnTo>
+                  <a:lnTo>
+                    <a:pt x="3868946" y="1093989"/>
+                  </a:lnTo>
+                  <a:lnTo>
+                    <a:pt x="3798602" y="1082580"/>
+                  </a:lnTo>
+                  <a:lnTo>
+                    <a:pt x="3728257" y="1070373"/>
+                  </a:lnTo>
+                  <a:lnTo>
+                    <a:pt x="3657913" y="1057314"/>
+                  </a:lnTo>
+                  <a:lnTo>
+                    <a:pt x="3587569" y="1043341"/>
+                  </a:lnTo>
+                  <a:lnTo>
+                    <a:pt x="3517224" y="1028391"/>
+                  </a:lnTo>
+                  <a:lnTo>
+                    <a:pt x="3446880" y="1012397"/>
+                  </a:lnTo>
+                  <a:lnTo>
+                    <a:pt x="3376535" y="995284"/>
+                  </a:lnTo>
+                  <a:lnTo>
+                    <a:pt x="3306191" y="976976"/>
+                  </a:lnTo>
+                  <a:lnTo>
+                    <a:pt x="3235846" y="957973"/>
+                  </a:lnTo>
+                  <a:lnTo>
+                    <a:pt x="3165502" y="962375"/>
+                  </a:lnTo>
+                  <a:lnTo>
+                    <a:pt x="3095157" y="966712"/>
+                  </a:lnTo>
+                  <a:lnTo>
+                    <a:pt x="3024813" y="970985"/>
+                  </a:lnTo>
+                  <a:lnTo>
+                    <a:pt x="2954468" y="975195"/>
+                  </a:lnTo>
+                  <a:lnTo>
+                    <a:pt x="2884124" y="979344"/>
+                  </a:lnTo>
+                  <a:lnTo>
+                    <a:pt x="2813779" y="983431"/>
+                  </a:lnTo>
+                  <a:lnTo>
+                    <a:pt x="2743435" y="987458"/>
+                  </a:lnTo>
+                  <a:lnTo>
+                    <a:pt x="2673090" y="991426"/>
+                  </a:lnTo>
+                  <a:lnTo>
+                    <a:pt x="2602746" y="995336"/>
+                  </a:lnTo>
+                  <a:lnTo>
+                    <a:pt x="2532401" y="999188"/>
+                  </a:lnTo>
+                  <a:lnTo>
+                    <a:pt x="2462057" y="1002983"/>
+                  </a:lnTo>
+                  <a:lnTo>
+                    <a:pt x="2391712" y="1006723"/>
+                  </a:lnTo>
+                  <a:lnTo>
+                    <a:pt x="2321368" y="1010408"/>
+                  </a:lnTo>
+                  <a:lnTo>
+                    <a:pt x="2251023" y="1014038"/>
+                  </a:lnTo>
+                  <a:lnTo>
+                    <a:pt x="2180679" y="1017615"/>
+                  </a:lnTo>
+                  <a:lnTo>
+                    <a:pt x="2110334" y="1021139"/>
+                  </a:lnTo>
+                  <a:lnTo>
+                    <a:pt x="2039990" y="1024612"/>
+                  </a:lnTo>
+                  <a:lnTo>
+                    <a:pt x="1969645" y="1028033"/>
+                  </a:lnTo>
+                  <a:lnTo>
+                    <a:pt x="1899301" y="1031404"/>
+                  </a:lnTo>
+                  <a:lnTo>
+                    <a:pt x="1828956" y="1034726"/>
+                  </a:lnTo>
+                  <a:lnTo>
+                    <a:pt x="1758612" y="1037998"/>
+                  </a:lnTo>
+                  <a:lnTo>
+                    <a:pt x="1688267" y="1041223"/>
+                  </a:lnTo>
+                  <a:lnTo>
+                    <a:pt x="1617923" y="1044400"/>
+                  </a:lnTo>
+                  <a:lnTo>
+                    <a:pt x="1547578" y="1047530"/>
+                  </a:lnTo>
+                  <a:lnTo>
+                    <a:pt x="1477234" y="1050615"/>
+                  </a:lnTo>
+                  <a:lnTo>
+                    <a:pt x="1406889" y="1053654"/>
+                  </a:lnTo>
+                  <a:lnTo>
+                    <a:pt x="1336545" y="1056648"/>
+                  </a:lnTo>
+                  <a:lnTo>
+                    <a:pt x="1266200" y="1059598"/>
+                  </a:lnTo>
+                  <a:lnTo>
+                    <a:pt x="1195856" y="1062505"/>
+                  </a:lnTo>
+                  <a:lnTo>
+                    <a:pt x="1125511" y="1065369"/>
+                  </a:lnTo>
+                  <a:lnTo>
+                    <a:pt x="1055167" y="1068191"/>
+                  </a:lnTo>
+                  <a:lnTo>
+                    <a:pt x="984822" y="1070971"/>
+                  </a:lnTo>
+                  <a:lnTo>
+                    <a:pt x="914478" y="1073711"/>
+                  </a:lnTo>
+                  <a:lnTo>
+                    <a:pt x="844133" y="1076410"/>
+                  </a:lnTo>
+                  <a:lnTo>
+                    <a:pt x="773789" y="1079069"/>
+                  </a:lnTo>
+                  <a:lnTo>
+                    <a:pt x="703444" y="1081690"/>
+                  </a:lnTo>
+                  <a:lnTo>
+                    <a:pt x="633100" y="1084271"/>
+                  </a:lnTo>
+                  <a:lnTo>
+                    <a:pt x="562755" y="1086815"/>
+                  </a:lnTo>
+                  <a:lnTo>
+                    <a:pt x="492411" y="1089322"/>
+                  </a:lnTo>
+                  <a:lnTo>
+                    <a:pt x="422066" y="1091791"/>
+                  </a:lnTo>
+                  <a:lnTo>
+                    <a:pt x="351722" y="1094224"/>
+                  </a:lnTo>
+                  <a:lnTo>
+                    <a:pt x="281377" y="1096622"/>
+                  </a:lnTo>
+                  <a:lnTo>
+                    <a:pt x="211033" y="1098984"/>
+                  </a:lnTo>
+                  <a:lnTo>
+                    <a:pt x="140688" y="1101311"/>
+                  </a:lnTo>
+                  <a:lnTo>
+                    <a:pt x="70344" y="1103605"/>
+                  </a:lnTo>
+                  <a:lnTo>
+                    <a:pt x="0" y="1105864"/>
                   </a:lnTo>
                   <a:close/>
                 </a:path>
@@ -3512,571 +3547,246 @@
         </p:sp>
         <p:sp>
           <p:nvSpPr>
-            <p:cNvPr id="21" name="pl21"/>
-            <p:cNvSpPr/>
-            <p:nvPr/>
-          </p:nvSpPr>
-          <p:spPr>
-            <a:xfrm>
-              <a:off x="2947587" y="2073503"/>
-              <a:ext cx="5315091" cy="2652951"/>
-            </a:xfrm>
-            <a:custGeom>
-              <a:avLst/>
-              <a:pathLst>
-                <a:path w="5315091" h="2652951">
-                  <a:moveTo>
-                    <a:pt x="0" y="0"/>
-                  </a:moveTo>
-                  <a:lnTo>
-                    <a:pt x="15024" y="50347"/>
-                  </a:lnTo>
-                  <a:lnTo>
-                    <a:pt x="86647" y="274670"/>
-                  </a:lnTo>
-                  <a:lnTo>
-                    <a:pt x="158269" y="484337"/>
-                  </a:lnTo>
-                  <a:lnTo>
-                    <a:pt x="229892" y="680305"/>
-                  </a:lnTo>
-                  <a:lnTo>
-                    <a:pt x="301514" y="863470"/>
-                  </a:lnTo>
-                  <a:lnTo>
-                    <a:pt x="373137" y="1034667"/>
-                  </a:lnTo>
-                  <a:lnTo>
-                    <a:pt x="444759" y="1194679"/>
-                  </a:lnTo>
-                  <a:lnTo>
-                    <a:pt x="516382" y="1344236"/>
-                  </a:lnTo>
-                  <a:lnTo>
-                    <a:pt x="588005" y="1484023"/>
-                  </a:lnTo>
-                  <a:lnTo>
-                    <a:pt x="659627" y="1614676"/>
-                  </a:lnTo>
-                  <a:lnTo>
-                    <a:pt x="731250" y="1736792"/>
-                  </a:lnTo>
-                  <a:lnTo>
-                    <a:pt x="802872" y="1850931"/>
-                  </a:lnTo>
-                  <a:lnTo>
-                    <a:pt x="874495" y="1957612"/>
-                  </a:lnTo>
-                  <a:lnTo>
-                    <a:pt x="946117" y="2057323"/>
-                  </a:lnTo>
-                  <a:lnTo>
-                    <a:pt x="1017740" y="2150519"/>
-                  </a:lnTo>
-                  <a:lnTo>
-                    <a:pt x="1089362" y="2237626"/>
-                  </a:lnTo>
-                  <a:lnTo>
-                    <a:pt x="1160985" y="2319042"/>
-                  </a:lnTo>
-                  <a:lnTo>
-                    <a:pt x="1232607" y="2395139"/>
-                  </a:lnTo>
-                  <a:lnTo>
-                    <a:pt x="1304230" y="2466263"/>
-                  </a:lnTo>
-                  <a:lnTo>
-                    <a:pt x="1375852" y="2532741"/>
-                  </a:lnTo>
-                  <a:lnTo>
-                    <a:pt x="1447475" y="2594876"/>
-                  </a:lnTo>
-                  <a:lnTo>
-                    <a:pt x="1519097" y="2652951"/>
-                  </a:lnTo>
-                  <a:lnTo>
-                    <a:pt x="1590720" y="2642195"/>
-                  </a:lnTo>
-                  <a:lnTo>
-                    <a:pt x="1662342" y="2629631"/>
-                  </a:lnTo>
-                  <a:lnTo>
-                    <a:pt x="1733965" y="2616879"/>
-                  </a:lnTo>
-                  <a:lnTo>
-                    <a:pt x="1805587" y="2603937"/>
-                  </a:lnTo>
-                  <a:lnTo>
-                    <a:pt x="1877210" y="2590802"/>
-                  </a:lnTo>
-                  <a:lnTo>
-                    <a:pt x="1948833" y="2577471"/>
-                  </a:lnTo>
-                  <a:lnTo>
-                    <a:pt x="2020455" y="2563940"/>
-                  </a:lnTo>
-                  <a:lnTo>
-                    <a:pt x="2092078" y="2550208"/>
-                  </a:lnTo>
-                  <a:lnTo>
-                    <a:pt x="2163700" y="2536270"/>
-                  </a:lnTo>
-                  <a:lnTo>
-                    <a:pt x="2235323" y="2522124"/>
-                  </a:lnTo>
-                  <a:lnTo>
-                    <a:pt x="2306945" y="2507768"/>
-                  </a:lnTo>
-                  <a:lnTo>
-                    <a:pt x="2378568" y="2493196"/>
-                  </a:lnTo>
-                  <a:lnTo>
-                    <a:pt x="2450190" y="2478408"/>
-                  </a:lnTo>
-                  <a:lnTo>
-                    <a:pt x="2521813" y="2463398"/>
-                  </a:lnTo>
-                  <a:lnTo>
-                    <a:pt x="2593435" y="2448165"/>
-                  </a:lnTo>
-                  <a:lnTo>
-                    <a:pt x="2665058" y="2432704"/>
-                  </a:lnTo>
-                  <a:lnTo>
-                    <a:pt x="2736680" y="2417012"/>
-                  </a:lnTo>
-                  <a:lnTo>
-                    <a:pt x="2808303" y="2401086"/>
-                  </a:lnTo>
-                  <a:lnTo>
-                    <a:pt x="2879925" y="2384922"/>
-                  </a:lnTo>
-                  <a:lnTo>
-                    <a:pt x="2951548" y="2368517"/>
-                  </a:lnTo>
-                  <a:lnTo>
-                    <a:pt x="3023170" y="2351866"/>
-                  </a:lnTo>
-                  <a:lnTo>
-                    <a:pt x="3094793" y="2334968"/>
-                  </a:lnTo>
-                  <a:lnTo>
-                    <a:pt x="3166415" y="2317817"/>
-                  </a:lnTo>
-                  <a:lnTo>
-                    <a:pt x="3238038" y="2300410"/>
-                  </a:lnTo>
-                  <a:lnTo>
-                    <a:pt x="3309661" y="2282743"/>
-                  </a:lnTo>
-                  <a:lnTo>
-                    <a:pt x="3381283" y="2264812"/>
-                  </a:lnTo>
-                  <a:lnTo>
-                    <a:pt x="3452906" y="2246614"/>
-                  </a:lnTo>
-                  <a:lnTo>
-                    <a:pt x="3524528" y="2228143"/>
-                  </a:lnTo>
-                  <a:lnTo>
-                    <a:pt x="3596151" y="2209398"/>
-                  </a:lnTo>
-                  <a:lnTo>
-                    <a:pt x="3667773" y="2190372"/>
-                  </a:lnTo>
-                  <a:lnTo>
-                    <a:pt x="3739396" y="2171062"/>
-                  </a:lnTo>
-                  <a:lnTo>
-                    <a:pt x="3811018" y="2151464"/>
-                  </a:lnTo>
-                  <a:lnTo>
-                    <a:pt x="3882641" y="2131573"/>
-                  </a:lnTo>
-                  <a:lnTo>
-                    <a:pt x="3954263" y="2111386"/>
-                  </a:lnTo>
-                  <a:lnTo>
-                    <a:pt x="4025886" y="2090897"/>
-                  </a:lnTo>
-                  <a:lnTo>
-                    <a:pt x="4097508" y="2070102"/>
-                  </a:lnTo>
-                  <a:lnTo>
-                    <a:pt x="4169131" y="2048996"/>
-                  </a:lnTo>
-                  <a:lnTo>
-                    <a:pt x="4240753" y="2027576"/>
-                  </a:lnTo>
-                  <a:lnTo>
-                    <a:pt x="4312376" y="2005835"/>
-                  </a:lnTo>
-                  <a:lnTo>
-                    <a:pt x="4383998" y="1983771"/>
-                  </a:lnTo>
-                  <a:lnTo>
-                    <a:pt x="4455621" y="1961376"/>
-                  </a:lnTo>
-                  <a:lnTo>
-                    <a:pt x="4527243" y="1938648"/>
-                  </a:lnTo>
-                  <a:lnTo>
-                    <a:pt x="4598866" y="1915580"/>
-                  </a:lnTo>
-                  <a:lnTo>
-                    <a:pt x="4670489" y="1892167"/>
-                  </a:lnTo>
-                  <a:lnTo>
-                    <a:pt x="4742111" y="1868405"/>
-                  </a:lnTo>
-                  <a:lnTo>
-                    <a:pt x="4813734" y="1844289"/>
-                  </a:lnTo>
-                  <a:lnTo>
-                    <a:pt x="4885356" y="1819812"/>
-                  </a:lnTo>
-                  <a:lnTo>
-                    <a:pt x="4956979" y="1794970"/>
-                  </a:lnTo>
-                  <a:lnTo>
-                    <a:pt x="5028601" y="1769757"/>
-                  </a:lnTo>
-                  <a:lnTo>
-                    <a:pt x="5100224" y="1744167"/>
-                  </a:lnTo>
-                  <a:lnTo>
-                    <a:pt x="5171846" y="1718196"/>
-                  </a:lnTo>
-                  <a:lnTo>
-                    <a:pt x="5243469" y="1691836"/>
-                  </a:lnTo>
-                  <a:lnTo>
-                    <a:pt x="5315091" y="1665083"/>
-                  </a:lnTo>
-                </a:path>
-              </a:pathLst>
-            </a:custGeom>
-          </p:spPr>
-          <p:txBody>
-            <a:bodyPr/>
-            <a:lstStyle/>
-            <a:p/>
-          </p:txBody>
-        </p:sp>
-        <p:sp>
-          <p:nvSpPr>
             <p:cNvPr id="22" name="pl22"/>
             <p:cNvSpPr/>
             <p:nvPr/>
           </p:nvSpPr>
           <p:spPr>
             <a:xfrm>
-              <a:off x="1172049" y="4728078"/>
-              <a:ext cx="7090630" cy="806037"/>
+              <a:off x="2979167" y="2143092"/>
+              <a:ext cx="5220248" cy="957387"/>
             </a:xfrm>
             <a:custGeom>
               <a:avLst/>
               <a:pathLst>
-                <a:path w="7090630" h="806037">
+                <a:path w="5220248" h="957387">
                   <a:moveTo>
-                    <a:pt x="7090630" y="806037"/>
+                    <a:pt x="0" y="0"/>
                   </a:moveTo>
                   <a:lnTo>
-                    <a:pt x="7019007" y="804420"/>
-                  </a:lnTo>
-                  <a:lnTo>
-                    <a:pt x="6947385" y="802690"/>
-                  </a:lnTo>
-                  <a:lnTo>
-                    <a:pt x="6875762" y="800839"/>
-                  </a:lnTo>
-                  <a:lnTo>
-                    <a:pt x="6804139" y="798858"/>
-                  </a:lnTo>
-                  <a:lnTo>
-                    <a:pt x="6732517" y="796740"/>
-                  </a:lnTo>
-                  <a:lnTo>
-                    <a:pt x="6660894" y="794472"/>
-                  </a:lnTo>
-                  <a:lnTo>
-                    <a:pt x="6589272" y="792047"/>
-                  </a:lnTo>
-                  <a:lnTo>
-                    <a:pt x="6517649" y="789452"/>
-                  </a:lnTo>
-                  <a:lnTo>
-                    <a:pt x="6446027" y="786675"/>
-                  </a:lnTo>
-                  <a:lnTo>
-                    <a:pt x="6374404" y="783705"/>
-                  </a:lnTo>
-                  <a:lnTo>
-                    <a:pt x="6302782" y="780527"/>
-                  </a:lnTo>
-                  <a:lnTo>
-                    <a:pt x="6231159" y="777126"/>
-                  </a:lnTo>
-                  <a:lnTo>
-                    <a:pt x="6159537" y="773488"/>
-                  </a:lnTo>
-                  <a:lnTo>
-                    <a:pt x="6087914" y="769596"/>
-                  </a:lnTo>
-                  <a:lnTo>
-                    <a:pt x="6016292" y="765431"/>
-                  </a:lnTo>
-                  <a:lnTo>
-                    <a:pt x="5944669" y="760976"/>
-                  </a:lnTo>
-                  <a:lnTo>
-                    <a:pt x="5873047" y="756209"/>
-                  </a:lnTo>
-                  <a:lnTo>
-                    <a:pt x="5801424" y="751108"/>
-                  </a:lnTo>
-                  <a:lnTo>
-                    <a:pt x="5729802" y="745652"/>
-                  </a:lnTo>
-                  <a:lnTo>
-                    <a:pt x="5658179" y="739813"/>
-                  </a:lnTo>
-                  <a:lnTo>
-                    <a:pt x="5586557" y="733567"/>
-                  </a:lnTo>
-                  <a:lnTo>
-                    <a:pt x="5514934" y="726884"/>
-                  </a:lnTo>
-                  <a:lnTo>
-                    <a:pt x="5443311" y="719734"/>
-                  </a:lnTo>
-                  <a:lnTo>
-                    <a:pt x="5371689" y="712084"/>
-                  </a:lnTo>
-                  <a:lnTo>
-                    <a:pt x="5300066" y="703899"/>
-                  </a:lnTo>
-                  <a:lnTo>
-                    <a:pt x="5228444" y="695142"/>
-                  </a:lnTo>
-                  <a:lnTo>
-                    <a:pt x="5156821" y="685773"/>
-                  </a:lnTo>
-                  <a:lnTo>
-                    <a:pt x="5085199" y="675749"/>
-                  </a:lnTo>
-                  <a:lnTo>
-                    <a:pt x="5013576" y="665025"/>
-                  </a:lnTo>
-                  <a:lnTo>
-                    <a:pt x="4941954" y="653550"/>
-                  </a:lnTo>
-                  <a:lnTo>
-                    <a:pt x="4870331" y="641274"/>
-                  </a:lnTo>
-                  <a:lnTo>
-                    <a:pt x="4798709" y="628140"/>
-                  </a:lnTo>
-                  <a:lnTo>
-                    <a:pt x="4727086" y="614087"/>
-                  </a:lnTo>
-                  <a:lnTo>
-                    <a:pt x="4655464" y="599052"/>
-                  </a:lnTo>
-                  <a:lnTo>
-                    <a:pt x="4583841" y="582966"/>
-                  </a:lnTo>
-                  <a:lnTo>
-                    <a:pt x="4512219" y="565756"/>
-                  </a:lnTo>
-                  <a:lnTo>
-                    <a:pt x="4440596" y="547342"/>
-                  </a:lnTo>
-                  <a:lnTo>
-                    <a:pt x="4368974" y="527642"/>
-                  </a:lnTo>
-                  <a:lnTo>
-                    <a:pt x="4297351" y="506564"/>
-                  </a:lnTo>
-                  <a:lnTo>
-                    <a:pt x="4225729" y="484013"/>
-                  </a:lnTo>
-                  <a:lnTo>
-                    <a:pt x="4154106" y="459885"/>
-                  </a:lnTo>
-                  <a:lnTo>
-                    <a:pt x="4082483" y="434071"/>
-                  </a:lnTo>
-                  <a:lnTo>
-                    <a:pt x="4010861" y="406452"/>
-                  </a:lnTo>
-                  <a:lnTo>
-                    <a:pt x="3939238" y="376903"/>
-                  </a:lnTo>
-                  <a:lnTo>
-                    <a:pt x="3867616" y="345289"/>
-                  </a:lnTo>
-                  <a:lnTo>
-                    <a:pt x="3795993" y="311464"/>
-                  </a:lnTo>
-                  <a:lnTo>
-                    <a:pt x="3724371" y="275275"/>
-                  </a:lnTo>
-                  <a:lnTo>
-                    <a:pt x="3652748" y="236556"/>
-                  </a:lnTo>
-                  <a:lnTo>
-                    <a:pt x="3581126" y="195130"/>
-                  </a:lnTo>
-                  <a:lnTo>
-                    <a:pt x="3509503" y="150809"/>
-                  </a:lnTo>
-                  <a:lnTo>
-                    <a:pt x="3437881" y="103390"/>
-                  </a:lnTo>
-                  <a:lnTo>
-                    <a:pt x="3366258" y="52656"/>
-                  </a:lnTo>
-                  <a:lnTo>
-                    <a:pt x="3294636" y="0"/>
-                  </a:lnTo>
-                  <a:lnTo>
-                    <a:pt x="3223013" y="12197"/>
-                  </a:lnTo>
-                  <a:lnTo>
-                    <a:pt x="3151391" y="24215"/>
-                  </a:lnTo>
-                  <a:lnTo>
-                    <a:pt x="3079768" y="36056"/>
-                  </a:lnTo>
-                  <a:lnTo>
-                    <a:pt x="3008146" y="47722"/>
-                  </a:lnTo>
-                  <a:lnTo>
-                    <a:pt x="2936523" y="59218"/>
-                  </a:lnTo>
-                  <a:lnTo>
-                    <a:pt x="2864901" y="70544"/>
-                  </a:lnTo>
-                  <a:lnTo>
-                    <a:pt x="2793278" y="81703"/>
-                  </a:lnTo>
-                  <a:lnTo>
-                    <a:pt x="2721655" y="92699"/>
-                  </a:lnTo>
-                  <a:lnTo>
-                    <a:pt x="2650033" y="103532"/>
-                  </a:lnTo>
-                  <a:lnTo>
-                    <a:pt x="2578410" y="114207"/>
-                  </a:lnTo>
-                  <a:lnTo>
-                    <a:pt x="2506788" y="124724"/>
-                  </a:lnTo>
-                  <a:lnTo>
-                    <a:pt x="2435165" y="135086"/>
-                  </a:lnTo>
-                  <a:lnTo>
-                    <a:pt x="2363543" y="145297"/>
-                  </a:lnTo>
-                  <a:lnTo>
-                    <a:pt x="2291920" y="155356"/>
-                  </a:lnTo>
-                  <a:lnTo>
-                    <a:pt x="2220298" y="165268"/>
-                  </a:lnTo>
-                  <a:lnTo>
-                    <a:pt x="2148675" y="175034"/>
-                  </a:lnTo>
-                  <a:lnTo>
-                    <a:pt x="2077053" y="184657"/>
-                  </a:lnTo>
-                  <a:lnTo>
-                    <a:pt x="2005430" y="194138"/>
-                  </a:lnTo>
-                  <a:lnTo>
-                    <a:pt x="1933808" y="203479"/>
-                  </a:lnTo>
-                  <a:lnTo>
-                    <a:pt x="1862185" y="212683"/>
-                  </a:lnTo>
-                  <a:lnTo>
-                    <a:pt x="1790563" y="221752"/>
-                  </a:lnTo>
-                  <a:lnTo>
-                    <a:pt x="1718940" y="230687"/>
-                  </a:lnTo>
-                  <a:lnTo>
-                    <a:pt x="1647318" y="239491"/>
-                  </a:lnTo>
-                  <a:lnTo>
-                    <a:pt x="1575695" y="248165"/>
-                  </a:lnTo>
-                  <a:lnTo>
-                    <a:pt x="1504073" y="256712"/>
-                  </a:lnTo>
-                  <a:lnTo>
-                    <a:pt x="1432450" y="265133"/>
-                  </a:lnTo>
-                  <a:lnTo>
-                    <a:pt x="1360827" y="273430"/>
-                  </a:lnTo>
-                  <a:lnTo>
-                    <a:pt x="1289205" y="281605"/>
-                  </a:lnTo>
-                  <a:lnTo>
-                    <a:pt x="1217582" y="289660"/>
-                  </a:lnTo>
-                  <a:lnTo>
-                    <a:pt x="1145960" y="297596"/>
-                  </a:lnTo>
-                  <a:lnTo>
-                    <a:pt x="1074337" y="305416"/>
-                  </a:lnTo>
-                  <a:lnTo>
-                    <a:pt x="1002715" y="313120"/>
-                  </a:lnTo>
-                  <a:lnTo>
-                    <a:pt x="931092" y="320711"/>
-                  </a:lnTo>
-                  <a:lnTo>
-                    <a:pt x="859470" y="328191"/>
-                  </a:lnTo>
-                  <a:lnTo>
-                    <a:pt x="787847" y="335560"/>
-                  </a:lnTo>
-                  <a:lnTo>
-                    <a:pt x="716225" y="342822"/>
-                  </a:lnTo>
-                  <a:lnTo>
-                    <a:pt x="644602" y="349976"/>
-                  </a:lnTo>
-                  <a:lnTo>
-                    <a:pt x="572980" y="357025"/>
-                  </a:lnTo>
-                  <a:lnTo>
-                    <a:pt x="501357" y="363970"/>
-                  </a:lnTo>
-                  <a:lnTo>
-                    <a:pt x="429735" y="370813"/>
-                  </a:lnTo>
-                  <a:lnTo>
-                    <a:pt x="358112" y="377556"/>
-                  </a:lnTo>
-                  <a:lnTo>
-                    <a:pt x="286490" y="384199"/>
-                  </a:lnTo>
-                  <a:lnTo>
-                    <a:pt x="214867" y="390745"/>
-                  </a:lnTo>
-                  <a:lnTo>
-                    <a:pt x="143245" y="397194"/>
-                  </a:lnTo>
-                  <a:lnTo>
-                    <a:pt x="71622" y="403549"/>
-                  </a:lnTo>
-                  <a:lnTo>
-                    <a:pt x="0" y="409810"/>
+                    <a:pt x="14756" y="18169"/>
+                  </a:lnTo>
+                  <a:lnTo>
+                    <a:pt x="85101" y="99122"/>
+                  </a:lnTo>
+                  <a:lnTo>
+                    <a:pt x="155445" y="174785"/>
+                  </a:lnTo>
+                  <a:lnTo>
+                    <a:pt x="225790" y="245506"/>
+                  </a:lnTo>
+                  <a:lnTo>
+                    <a:pt x="296134" y="311606"/>
+                  </a:lnTo>
+                  <a:lnTo>
+                    <a:pt x="366479" y="373387"/>
+                  </a:lnTo>
+                  <a:lnTo>
+                    <a:pt x="436823" y="431131"/>
+                  </a:lnTo>
+                  <a:lnTo>
+                    <a:pt x="507168" y="485103"/>
+                  </a:lnTo>
+                  <a:lnTo>
+                    <a:pt x="577512" y="535548"/>
+                  </a:lnTo>
+                  <a:lnTo>
+                    <a:pt x="647857" y="582698"/>
+                  </a:lnTo>
+                  <a:lnTo>
+                    <a:pt x="718201" y="626767"/>
+                  </a:lnTo>
+                  <a:lnTo>
+                    <a:pt x="788546" y="667957"/>
+                  </a:lnTo>
+                  <a:lnTo>
+                    <a:pt x="858890" y="706456"/>
+                  </a:lnTo>
+                  <a:lnTo>
+                    <a:pt x="929235" y="742439"/>
+                  </a:lnTo>
+                  <a:lnTo>
+                    <a:pt x="999579" y="776071"/>
+                  </a:lnTo>
+                  <a:lnTo>
+                    <a:pt x="1069924" y="807506"/>
+                  </a:lnTo>
+                  <a:lnTo>
+                    <a:pt x="1140268" y="836887"/>
+                  </a:lnTo>
+                  <a:lnTo>
+                    <a:pt x="1210613" y="864349"/>
+                  </a:lnTo>
+                  <a:lnTo>
+                    <a:pt x="1280957" y="890016"/>
+                  </a:lnTo>
+                  <a:lnTo>
+                    <a:pt x="1351302" y="914006"/>
+                  </a:lnTo>
+                  <a:lnTo>
+                    <a:pt x="1421646" y="936429"/>
+                  </a:lnTo>
+                  <a:lnTo>
+                    <a:pt x="1491991" y="957387"/>
+                  </a:lnTo>
+                  <a:lnTo>
+                    <a:pt x="1562335" y="953506"/>
+                  </a:lnTo>
+                  <a:lnTo>
+                    <a:pt x="1632679" y="948972"/>
+                  </a:lnTo>
+                  <a:lnTo>
+                    <a:pt x="1703024" y="944370"/>
+                  </a:lnTo>
+                  <a:lnTo>
+                    <a:pt x="1773368" y="939699"/>
+                  </a:lnTo>
+                  <a:lnTo>
+                    <a:pt x="1843713" y="934959"/>
+                  </a:lnTo>
+                  <a:lnTo>
+                    <a:pt x="1914057" y="930148"/>
+                  </a:lnTo>
+                  <a:lnTo>
+                    <a:pt x="1984402" y="925265"/>
+                  </a:lnTo>
+                  <a:lnTo>
+                    <a:pt x="2054746" y="920310"/>
+                  </a:lnTo>
+                  <a:lnTo>
+                    <a:pt x="2125091" y="915280"/>
+                  </a:lnTo>
+                  <a:lnTo>
+                    <a:pt x="2195435" y="910175"/>
+                  </a:lnTo>
+                  <a:lnTo>
+                    <a:pt x="2265780" y="904994"/>
+                  </a:lnTo>
+                  <a:lnTo>
+                    <a:pt x="2336124" y="899736"/>
+                  </a:lnTo>
+                  <a:lnTo>
+                    <a:pt x="2406469" y="894399"/>
+                  </a:lnTo>
+                  <a:lnTo>
+                    <a:pt x="2476813" y="888982"/>
+                  </a:lnTo>
+                  <a:lnTo>
+                    <a:pt x="2547158" y="883485"/>
+                  </a:lnTo>
+                  <a:lnTo>
+                    <a:pt x="2617502" y="877905"/>
+                  </a:lnTo>
+                  <a:lnTo>
+                    <a:pt x="2687847" y="872242"/>
+                  </a:lnTo>
+                  <a:lnTo>
+                    <a:pt x="2758191" y="866495"/>
+                  </a:lnTo>
+                  <a:lnTo>
+                    <a:pt x="2828536" y="860662"/>
+                  </a:lnTo>
+                  <a:lnTo>
+                    <a:pt x="2898880" y="854742"/>
+                  </a:lnTo>
+                  <a:lnTo>
+                    <a:pt x="2969225" y="848733"/>
+                  </a:lnTo>
+                  <a:lnTo>
+                    <a:pt x="3039569" y="842635"/>
+                  </a:lnTo>
+                  <a:lnTo>
+                    <a:pt x="3109914" y="836445"/>
+                  </a:lnTo>
+                  <a:lnTo>
+                    <a:pt x="3180258" y="830163"/>
+                  </a:lnTo>
+                  <a:lnTo>
+                    <a:pt x="3250603" y="823788"/>
+                  </a:lnTo>
+                  <a:lnTo>
+                    <a:pt x="3320947" y="817317"/>
+                  </a:lnTo>
+                  <a:lnTo>
+                    <a:pt x="3391292" y="810750"/>
+                  </a:lnTo>
+                  <a:lnTo>
+                    <a:pt x="3461636" y="804084"/>
+                  </a:lnTo>
+                  <a:lnTo>
+                    <a:pt x="3531981" y="797319"/>
+                  </a:lnTo>
+                  <a:lnTo>
+                    <a:pt x="3602325" y="790453"/>
+                  </a:lnTo>
+                  <a:lnTo>
+                    <a:pt x="3672670" y="783485"/>
+                  </a:lnTo>
+                  <a:lnTo>
+                    <a:pt x="3743014" y="776412"/>
+                  </a:lnTo>
+                  <a:lnTo>
+                    <a:pt x="3813359" y="769234"/>
+                  </a:lnTo>
+                  <a:lnTo>
+                    <a:pt x="3883703" y="761949"/>
+                  </a:lnTo>
+                  <a:lnTo>
+                    <a:pt x="3954048" y="754555"/>
+                  </a:lnTo>
+                  <a:lnTo>
+                    <a:pt x="4024392" y="747051"/>
+                  </a:lnTo>
+                  <a:lnTo>
+                    <a:pt x="4094737" y="739434"/>
+                  </a:lnTo>
+                  <a:lnTo>
+                    <a:pt x="4165081" y="731704"/>
+                  </a:lnTo>
+                  <a:lnTo>
+                    <a:pt x="4235426" y="723858"/>
+                  </a:lnTo>
+                  <a:lnTo>
+                    <a:pt x="4305770" y="715896"/>
+                  </a:lnTo>
+                  <a:lnTo>
+                    <a:pt x="4376115" y="707814"/>
+                  </a:lnTo>
+                  <a:lnTo>
+                    <a:pt x="4446459" y="699612"/>
+                  </a:lnTo>
+                  <a:lnTo>
+                    <a:pt x="4516804" y="691287"/>
+                  </a:lnTo>
+                  <a:lnTo>
+                    <a:pt x="4587148" y="682838"/>
+                  </a:lnTo>
+                  <a:lnTo>
+                    <a:pt x="4657493" y="674263"/>
+                  </a:lnTo>
+                  <a:lnTo>
+                    <a:pt x="4727837" y="665560"/>
+                  </a:lnTo>
+                  <a:lnTo>
+                    <a:pt x="4798182" y="656727"/>
+                  </a:lnTo>
+                  <a:lnTo>
+                    <a:pt x="4868526" y="647762"/>
+                  </a:lnTo>
+                  <a:lnTo>
+                    <a:pt x="4938871" y="638663"/>
+                  </a:lnTo>
+                  <a:lnTo>
+                    <a:pt x="5009215" y="629429"/>
+                  </a:lnTo>
+                  <a:lnTo>
+                    <a:pt x="5079560" y="620056"/>
+                  </a:lnTo>
+                  <a:lnTo>
+                    <a:pt x="5149904" y="610544"/>
+                  </a:lnTo>
+                  <a:lnTo>
+                    <a:pt x="5220248" y="600889"/>
                   </a:lnTo>
                 </a:path>
               </a:pathLst>
@@ -4096,312 +3806,637 @@
           </p:nvSpPr>
           <p:spPr>
             <a:xfrm>
-              <a:off x="1172049" y="2764962"/>
-              <a:ext cx="7090630" cy="2587171"/>
+              <a:off x="1235312" y="3101065"/>
+              <a:ext cx="6964104" cy="290880"/>
             </a:xfrm>
             <a:custGeom>
               <a:avLst/>
               <a:pathLst>
-                <a:path w="7090630" h="2587171">
+                <a:path w="6964104" h="290880">
+                  <a:moveTo>
+                    <a:pt x="6964104" y="290880"/>
+                  </a:moveTo>
+                  <a:lnTo>
+                    <a:pt x="6893760" y="290296"/>
+                  </a:lnTo>
+                  <a:lnTo>
+                    <a:pt x="6823415" y="289672"/>
+                  </a:lnTo>
+                  <a:lnTo>
+                    <a:pt x="6753071" y="289004"/>
+                  </a:lnTo>
+                  <a:lnTo>
+                    <a:pt x="6682726" y="288289"/>
+                  </a:lnTo>
+                  <a:lnTo>
+                    <a:pt x="6612382" y="287524"/>
+                  </a:lnTo>
+                  <a:lnTo>
+                    <a:pt x="6542037" y="286706"/>
+                  </a:lnTo>
+                  <a:lnTo>
+                    <a:pt x="6471693" y="285831"/>
+                  </a:lnTo>
+                  <a:lnTo>
+                    <a:pt x="6401348" y="284894"/>
+                  </a:lnTo>
+                  <a:lnTo>
+                    <a:pt x="6331004" y="283892"/>
+                  </a:lnTo>
+                  <a:lnTo>
+                    <a:pt x="6260659" y="282820"/>
+                  </a:lnTo>
+                  <a:lnTo>
+                    <a:pt x="6190315" y="281673"/>
+                  </a:lnTo>
+                  <a:lnTo>
+                    <a:pt x="6119970" y="280446"/>
+                  </a:lnTo>
+                  <a:lnTo>
+                    <a:pt x="6049626" y="279133"/>
+                  </a:lnTo>
+                  <a:lnTo>
+                    <a:pt x="5979281" y="277729"/>
+                  </a:lnTo>
+                  <a:lnTo>
+                    <a:pt x="5908937" y="276226"/>
+                  </a:lnTo>
+                  <a:lnTo>
+                    <a:pt x="5838592" y="274618"/>
+                  </a:lnTo>
+                  <a:lnTo>
+                    <a:pt x="5768248" y="272898"/>
+                  </a:lnTo>
+                  <a:lnTo>
+                    <a:pt x="5697903" y="271057"/>
+                  </a:lnTo>
+                  <a:lnTo>
+                    <a:pt x="5627559" y="269088"/>
+                  </a:lnTo>
+                  <a:lnTo>
+                    <a:pt x="5557214" y="266981"/>
+                  </a:lnTo>
+                  <a:lnTo>
+                    <a:pt x="5486870" y="264727"/>
+                  </a:lnTo>
+                  <a:lnTo>
+                    <a:pt x="5416525" y="262315"/>
+                  </a:lnTo>
+                  <a:lnTo>
+                    <a:pt x="5346181" y="259735"/>
+                  </a:lnTo>
+                  <a:lnTo>
+                    <a:pt x="5275836" y="256974"/>
+                  </a:lnTo>
+                  <a:lnTo>
+                    <a:pt x="5205492" y="254020"/>
+                  </a:lnTo>
+                  <a:lnTo>
+                    <a:pt x="5135147" y="250860"/>
+                  </a:lnTo>
+                  <a:lnTo>
+                    <a:pt x="5064803" y="247479"/>
+                  </a:lnTo>
+                  <a:lnTo>
+                    <a:pt x="4994458" y="243862"/>
+                  </a:lnTo>
+                  <a:lnTo>
+                    <a:pt x="4924114" y="239991"/>
+                  </a:lnTo>
+                  <a:lnTo>
+                    <a:pt x="4853769" y="235851"/>
+                  </a:lnTo>
+                  <a:lnTo>
+                    <a:pt x="4783425" y="231420"/>
+                  </a:lnTo>
+                  <a:lnTo>
+                    <a:pt x="4713080" y="226680"/>
+                  </a:lnTo>
+                  <a:lnTo>
+                    <a:pt x="4642736" y="221609"/>
+                  </a:lnTo>
+                  <a:lnTo>
+                    <a:pt x="4572391" y="216183"/>
+                  </a:lnTo>
+                  <a:lnTo>
+                    <a:pt x="4502047" y="210378"/>
+                  </a:lnTo>
+                  <a:lnTo>
+                    <a:pt x="4431702" y="204168"/>
+                  </a:lnTo>
+                  <a:lnTo>
+                    <a:pt x="4361358" y="197523"/>
+                  </a:lnTo>
+                  <a:lnTo>
+                    <a:pt x="4291013" y="190413"/>
+                  </a:lnTo>
+                  <a:lnTo>
+                    <a:pt x="4220669" y="182807"/>
+                  </a:lnTo>
+                  <a:lnTo>
+                    <a:pt x="4150324" y="174668"/>
+                  </a:lnTo>
+                  <a:lnTo>
+                    <a:pt x="4079980" y="165961"/>
+                  </a:lnTo>
+                  <a:lnTo>
+                    <a:pt x="4009635" y="156646"/>
+                  </a:lnTo>
+                  <a:lnTo>
+                    <a:pt x="3939291" y="146679"/>
+                  </a:lnTo>
+                  <a:lnTo>
+                    <a:pt x="3868946" y="136015"/>
+                  </a:lnTo>
+                  <a:lnTo>
+                    <a:pt x="3798602" y="124606"/>
+                  </a:lnTo>
+                  <a:lnTo>
+                    <a:pt x="3728257" y="112400"/>
+                  </a:lnTo>
+                  <a:lnTo>
+                    <a:pt x="3657913" y="99340"/>
+                  </a:lnTo>
+                  <a:lnTo>
+                    <a:pt x="3587569" y="85367"/>
+                  </a:lnTo>
+                  <a:lnTo>
+                    <a:pt x="3517224" y="70418"/>
+                  </a:lnTo>
+                  <a:lnTo>
+                    <a:pt x="3446880" y="54423"/>
+                  </a:lnTo>
+                  <a:lnTo>
+                    <a:pt x="3376535" y="37311"/>
+                  </a:lnTo>
+                  <a:lnTo>
+                    <a:pt x="3306191" y="19002"/>
+                  </a:lnTo>
+                  <a:lnTo>
+                    <a:pt x="3235846" y="0"/>
+                  </a:lnTo>
+                  <a:lnTo>
+                    <a:pt x="3165502" y="4401"/>
+                  </a:lnTo>
+                  <a:lnTo>
+                    <a:pt x="3095157" y="8738"/>
+                  </a:lnTo>
+                  <a:lnTo>
+                    <a:pt x="3024813" y="13011"/>
+                  </a:lnTo>
+                  <a:lnTo>
+                    <a:pt x="2954468" y="17222"/>
+                  </a:lnTo>
+                  <a:lnTo>
+                    <a:pt x="2884124" y="21370"/>
+                  </a:lnTo>
+                  <a:lnTo>
+                    <a:pt x="2813779" y="25457"/>
+                  </a:lnTo>
+                  <a:lnTo>
+                    <a:pt x="2743435" y="29485"/>
+                  </a:lnTo>
+                  <a:lnTo>
+                    <a:pt x="2673090" y="33452"/>
+                  </a:lnTo>
+                  <a:lnTo>
+                    <a:pt x="2602746" y="37362"/>
+                  </a:lnTo>
+                  <a:lnTo>
+                    <a:pt x="2532401" y="41214"/>
+                  </a:lnTo>
+                  <a:lnTo>
+                    <a:pt x="2462057" y="45010"/>
+                  </a:lnTo>
+                  <a:lnTo>
+                    <a:pt x="2391712" y="48749"/>
+                  </a:lnTo>
+                  <a:lnTo>
+                    <a:pt x="2321368" y="52434"/>
+                  </a:lnTo>
+                  <a:lnTo>
+                    <a:pt x="2251023" y="56064"/>
+                  </a:lnTo>
+                  <a:lnTo>
+                    <a:pt x="2180679" y="59641"/>
+                  </a:lnTo>
+                  <a:lnTo>
+                    <a:pt x="2110334" y="63165"/>
+                  </a:lnTo>
+                  <a:lnTo>
+                    <a:pt x="2039990" y="66638"/>
+                  </a:lnTo>
+                  <a:lnTo>
+                    <a:pt x="1969645" y="70059"/>
+                  </a:lnTo>
+                  <a:lnTo>
+                    <a:pt x="1899301" y="73431"/>
+                  </a:lnTo>
+                  <a:lnTo>
+                    <a:pt x="1828956" y="76752"/>
+                  </a:lnTo>
+                  <a:lnTo>
+                    <a:pt x="1758612" y="80025"/>
+                  </a:lnTo>
+                  <a:lnTo>
+                    <a:pt x="1688267" y="83249"/>
+                  </a:lnTo>
+                  <a:lnTo>
+                    <a:pt x="1617923" y="86426"/>
+                  </a:lnTo>
+                  <a:lnTo>
+                    <a:pt x="1547578" y="89557"/>
+                  </a:lnTo>
+                  <a:lnTo>
+                    <a:pt x="1477234" y="92641"/>
+                  </a:lnTo>
+                  <a:lnTo>
+                    <a:pt x="1406889" y="95680"/>
+                  </a:lnTo>
+                  <a:lnTo>
+                    <a:pt x="1336545" y="98674"/>
+                  </a:lnTo>
+                  <a:lnTo>
+                    <a:pt x="1266200" y="101624"/>
+                  </a:lnTo>
+                  <a:lnTo>
+                    <a:pt x="1195856" y="104531"/>
+                  </a:lnTo>
+                  <a:lnTo>
+                    <a:pt x="1125511" y="107395"/>
+                  </a:lnTo>
+                  <a:lnTo>
+                    <a:pt x="1055167" y="110217"/>
+                  </a:lnTo>
+                  <a:lnTo>
+                    <a:pt x="984822" y="112997"/>
+                  </a:lnTo>
+                  <a:lnTo>
+                    <a:pt x="914478" y="115737"/>
+                  </a:lnTo>
+                  <a:lnTo>
+                    <a:pt x="844133" y="118436"/>
+                  </a:lnTo>
+                  <a:lnTo>
+                    <a:pt x="773789" y="121096"/>
+                  </a:lnTo>
+                  <a:lnTo>
+                    <a:pt x="703444" y="123716"/>
+                  </a:lnTo>
+                  <a:lnTo>
+                    <a:pt x="633100" y="126298"/>
+                  </a:lnTo>
+                  <a:lnTo>
+                    <a:pt x="562755" y="128842"/>
+                  </a:lnTo>
+                  <a:lnTo>
+                    <a:pt x="492411" y="131348"/>
+                  </a:lnTo>
+                  <a:lnTo>
+                    <a:pt x="422066" y="133817"/>
+                  </a:lnTo>
+                  <a:lnTo>
+                    <a:pt x="351722" y="136251"/>
+                  </a:lnTo>
+                  <a:lnTo>
+                    <a:pt x="281377" y="138648"/>
+                  </a:lnTo>
+                  <a:lnTo>
+                    <a:pt x="211033" y="141010"/>
+                  </a:lnTo>
+                  <a:lnTo>
+                    <a:pt x="140688" y="143338"/>
+                  </a:lnTo>
+                  <a:lnTo>
+                    <a:pt x="70344" y="145631"/>
+                  </a:lnTo>
+                  <a:lnTo>
+                    <a:pt x="0" y="147890"/>
+                  </a:lnTo>
+                </a:path>
+              </a:pathLst>
+            </a:custGeom>
+          </p:spPr>
+          <p:txBody>
+            <a:bodyPr/>
+            <a:lstStyle/>
+            <a:p/>
+          </p:txBody>
+        </p:sp>
+        <p:sp>
+          <p:nvSpPr>
+            <p:cNvPr id="24" name="pl24"/>
+            <p:cNvSpPr/>
+            <p:nvPr/>
+          </p:nvSpPr>
+          <p:spPr>
+            <a:xfrm>
+              <a:off x="1235312" y="2392623"/>
+              <a:ext cx="6964104" cy="933649"/>
+            </a:xfrm>
+            <a:custGeom>
+              <a:avLst/>
+              <a:pathLst>
+                <a:path w="6964104" h="933649">
                   <a:moveTo>
                     <a:pt x="0" y="0"/>
                   </a:moveTo>
                   <a:lnTo>
-                    <a:pt x="71622" y="72681"/>
-                  </a:lnTo>
-                  <a:lnTo>
-                    <a:pt x="143245" y="143471"/>
-                  </a:lnTo>
-                  <a:lnTo>
-                    <a:pt x="214867" y="212418"/>
-                  </a:lnTo>
-                  <a:lnTo>
-                    <a:pt x="286490" y="279570"/>
-                  </a:lnTo>
-                  <a:lnTo>
-                    <a:pt x="358112" y="344975"/>
-                  </a:lnTo>
-                  <a:lnTo>
-                    <a:pt x="429735" y="408677"/>
-                  </a:lnTo>
-                  <a:lnTo>
-                    <a:pt x="501357" y="470721"/>
-                  </a:lnTo>
-                  <a:lnTo>
-                    <a:pt x="572980" y="531149"/>
-                  </a:lnTo>
-                  <a:lnTo>
-                    <a:pt x="644602" y="590005"/>
-                  </a:lnTo>
-                  <a:lnTo>
-                    <a:pt x="716225" y="647329"/>
-                  </a:lnTo>
-                  <a:lnTo>
-                    <a:pt x="787847" y="703161"/>
-                  </a:lnTo>
-                  <a:lnTo>
-                    <a:pt x="859470" y="757540"/>
-                  </a:lnTo>
-                  <a:lnTo>
-                    <a:pt x="931092" y="810503"/>
-                  </a:lnTo>
-                  <a:lnTo>
-                    <a:pt x="1002715" y="862088"/>
-                  </a:lnTo>
-                  <a:lnTo>
-                    <a:pt x="1074337" y="912330"/>
-                  </a:lnTo>
-                  <a:lnTo>
-                    <a:pt x="1145960" y="961264"/>
-                  </a:lnTo>
-                  <a:lnTo>
-                    <a:pt x="1217582" y="1008924"/>
-                  </a:lnTo>
-                  <a:lnTo>
-                    <a:pt x="1289205" y="1055344"/>
-                  </a:lnTo>
-                  <a:lnTo>
-                    <a:pt x="1360827" y="1100556"/>
-                  </a:lnTo>
-                  <a:lnTo>
-                    <a:pt x="1432450" y="1144590"/>
-                  </a:lnTo>
-                  <a:lnTo>
-                    <a:pt x="1504073" y="1187479"/>
-                  </a:lnTo>
-                  <a:lnTo>
-                    <a:pt x="1575695" y="1229251"/>
-                  </a:lnTo>
-                  <a:lnTo>
-                    <a:pt x="1647318" y="1269936"/>
-                  </a:lnTo>
-                  <a:lnTo>
-                    <a:pt x="1718940" y="1309562"/>
-                  </a:lnTo>
-                  <a:lnTo>
-                    <a:pt x="1790563" y="1348156"/>
-                  </a:lnTo>
-                  <a:lnTo>
-                    <a:pt x="1862185" y="1385746"/>
-                  </a:lnTo>
-                  <a:lnTo>
-                    <a:pt x="1933808" y="1422357"/>
-                  </a:lnTo>
-                  <a:lnTo>
-                    <a:pt x="2005430" y="1458016"/>
-                  </a:lnTo>
-                  <a:lnTo>
-                    <a:pt x="2077053" y="1492746"/>
-                  </a:lnTo>
-                  <a:lnTo>
-                    <a:pt x="2148675" y="1526572"/>
-                  </a:lnTo>
-                  <a:lnTo>
-                    <a:pt x="2220298" y="1559518"/>
-                  </a:lnTo>
-                  <a:lnTo>
-                    <a:pt x="2291920" y="1591606"/>
-                  </a:lnTo>
-                  <a:lnTo>
-                    <a:pt x="2363543" y="1622859"/>
-                  </a:lnTo>
-                  <a:lnTo>
-                    <a:pt x="2435165" y="1653299"/>
-                  </a:lnTo>
-                  <a:lnTo>
-                    <a:pt x="2506788" y="1682946"/>
-                  </a:lnTo>
-                  <a:lnTo>
-                    <a:pt x="2578410" y="1711821"/>
-                  </a:lnTo>
-                  <a:lnTo>
-                    <a:pt x="2650033" y="1739945"/>
-                  </a:lnTo>
-                  <a:lnTo>
-                    <a:pt x="2721655" y="1767337"/>
-                  </a:lnTo>
-                  <a:lnTo>
-                    <a:pt x="2793278" y="1794016"/>
-                  </a:lnTo>
-                  <a:lnTo>
-                    <a:pt x="2864901" y="1820000"/>
-                  </a:lnTo>
-                  <a:lnTo>
-                    <a:pt x="2936523" y="1845308"/>
-                  </a:lnTo>
-                  <a:lnTo>
-                    <a:pt x="3008146" y="1869957"/>
-                  </a:lnTo>
-                  <a:lnTo>
-                    <a:pt x="3079768" y="1893965"/>
-                  </a:lnTo>
-                  <a:lnTo>
-                    <a:pt x="3151391" y="1917348"/>
-                  </a:lnTo>
-                  <a:lnTo>
-                    <a:pt x="3223013" y="1940122"/>
-                  </a:lnTo>
-                  <a:lnTo>
-                    <a:pt x="3294636" y="1962303"/>
-                  </a:lnTo>
-                  <a:lnTo>
-                    <a:pt x="3366258" y="1983907"/>
-                  </a:lnTo>
-                  <a:lnTo>
-                    <a:pt x="3437881" y="2004949"/>
-                  </a:lnTo>
-                  <a:lnTo>
-                    <a:pt x="3509503" y="2025443"/>
-                  </a:lnTo>
-                  <a:lnTo>
-                    <a:pt x="3581126" y="2045403"/>
-                  </a:lnTo>
-                  <a:lnTo>
-                    <a:pt x="3652748" y="2064844"/>
-                  </a:lnTo>
-                  <a:lnTo>
-                    <a:pt x="3724371" y="2083779"/>
-                  </a:lnTo>
-                  <a:lnTo>
-                    <a:pt x="3795993" y="2102221"/>
-                  </a:lnTo>
-                  <a:lnTo>
-                    <a:pt x="3867616" y="2120183"/>
-                  </a:lnTo>
-                  <a:lnTo>
-                    <a:pt x="3939238" y="2137677"/>
-                  </a:lnTo>
-                  <a:lnTo>
-                    <a:pt x="4010861" y="2154717"/>
-                  </a:lnTo>
-                  <a:lnTo>
-                    <a:pt x="4082483" y="2171312"/>
-                  </a:lnTo>
-                  <a:lnTo>
-                    <a:pt x="4154106" y="2187476"/>
-                  </a:lnTo>
-                  <a:lnTo>
-                    <a:pt x="4225729" y="2203219"/>
-                  </a:lnTo>
-                  <a:lnTo>
-                    <a:pt x="4297351" y="2218552"/>
-                  </a:lnTo>
-                  <a:lnTo>
-                    <a:pt x="4368974" y="2233486"/>
-                  </a:lnTo>
-                  <a:lnTo>
-                    <a:pt x="4440596" y="2248031"/>
-                  </a:lnTo>
-                  <a:lnTo>
-                    <a:pt x="4512219" y="2262198"/>
-                  </a:lnTo>
-                  <a:lnTo>
-                    <a:pt x="4583841" y="2275995"/>
-                  </a:lnTo>
-                  <a:lnTo>
-                    <a:pt x="4655464" y="2289434"/>
-                  </a:lnTo>
-                  <a:lnTo>
-                    <a:pt x="4727086" y="2302523"/>
-                  </a:lnTo>
-                  <a:lnTo>
-                    <a:pt x="4798709" y="2315271"/>
-                  </a:lnTo>
-                  <a:lnTo>
-                    <a:pt x="4870331" y="2327688"/>
-                  </a:lnTo>
-                  <a:lnTo>
-                    <a:pt x="4941954" y="2339781"/>
-                  </a:lnTo>
-                  <a:lnTo>
-                    <a:pt x="5013576" y="2351559"/>
-                  </a:lnTo>
-                  <a:lnTo>
-                    <a:pt x="5085199" y="2363031"/>
-                  </a:lnTo>
-                  <a:lnTo>
-                    <a:pt x="5156821" y="2374205"/>
-                  </a:lnTo>
-                  <a:lnTo>
-                    <a:pt x="5228444" y="2385087"/>
-                  </a:lnTo>
-                  <a:lnTo>
-                    <a:pt x="5300066" y="2395686"/>
-                  </a:lnTo>
-                  <a:lnTo>
-                    <a:pt x="5371689" y="2406009"/>
-                  </a:lnTo>
-                  <a:lnTo>
-                    <a:pt x="5443311" y="2416064"/>
-                  </a:lnTo>
-                  <a:lnTo>
-                    <a:pt x="5514934" y="2425857"/>
-                  </a:lnTo>
-                  <a:lnTo>
-                    <a:pt x="5586557" y="2435395"/>
-                  </a:lnTo>
-                  <a:lnTo>
-                    <a:pt x="5658179" y="2444684"/>
-                  </a:lnTo>
-                  <a:lnTo>
-                    <a:pt x="5729802" y="2453732"/>
-                  </a:lnTo>
-                  <a:lnTo>
-                    <a:pt x="5801424" y="2462545"/>
-                  </a:lnTo>
-                  <a:lnTo>
-                    <a:pt x="5873047" y="2471128"/>
-                  </a:lnTo>
-                  <a:lnTo>
-                    <a:pt x="5944669" y="2479487"/>
-                  </a:lnTo>
-                  <a:lnTo>
-                    <a:pt x="6016292" y="2487629"/>
-                  </a:lnTo>
-                  <a:lnTo>
-                    <a:pt x="6087914" y="2495559"/>
-                  </a:lnTo>
-                  <a:lnTo>
-                    <a:pt x="6159537" y="2503283"/>
-                  </a:lnTo>
-                  <a:lnTo>
-                    <a:pt x="6231159" y="2510805"/>
-                  </a:lnTo>
-                  <a:lnTo>
-                    <a:pt x="6302782" y="2518132"/>
-                  </a:lnTo>
-                  <a:lnTo>
-                    <a:pt x="6374404" y="2525268"/>
-                  </a:lnTo>
-                  <a:lnTo>
-                    <a:pt x="6446027" y="2532219"/>
-                  </a:lnTo>
-                  <a:lnTo>
-                    <a:pt x="6517649" y="2538988"/>
-                  </a:lnTo>
-                  <a:lnTo>
-                    <a:pt x="6589272" y="2545581"/>
-                  </a:lnTo>
-                  <a:lnTo>
-                    <a:pt x="6660894" y="2552003"/>
-                  </a:lnTo>
-                  <a:lnTo>
-                    <a:pt x="6732517" y="2558257"/>
-                  </a:lnTo>
-                  <a:lnTo>
-                    <a:pt x="6804139" y="2564349"/>
-                  </a:lnTo>
-                  <a:lnTo>
-                    <a:pt x="6875762" y="2570282"/>
-                  </a:lnTo>
-                  <a:lnTo>
-                    <a:pt x="6947385" y="2576061"/>
-                  </a:lnTo>
-                  <a:lnTo>
-                    <a:pt x="7019007" y="2581689"/>
-                  </a:lnTo>
-                  <a:lnTo>
-                    <a:pt x="7090630" y="2587171"/>
+                    <a:pt x="70344" y="26229"/>
+                  </a:lnTo>
+                  <a:lnTo>
+                    <a:pt x="140688" y="51775"/>
+                  </a:lnTo>
+                  <a:lnTo>
+                    <a:pt x="211033" y="76656"/>
+                  </a:lnTo>
+                  <a:lnTo>
+                    <a:pt x="281377" y="100890"/>
+                  </a:lnTo>
+                  <a:lnTo>
+                    <a:pt x="351722" y="124493"/>
+                  </a:lnTo>
+                  <a:lnTo>
+                    <a:pt x="422066" y="147481"/>
+                  </a:lnTo>
+                  <a:lnTo>
+                    <a:pt x="492411" y="169872"/>
+                  </a:lnTo>
+                  <a:lnTo>
+                    <a:pt x="562755" y="191679"/>
+                  </a:lnTo>
+                  <a:lnTo>
+                    <a:pt x="633100" y="212919"/>
+                  </a:lnTo>
+                  <a:lnTo>
+                    <a:pt x="703444" y="233606"/>
+                  </a:lnTo>
+                  <a:lnTo>
+                    <a:pt x="773789" y="253754"/>
+                  </a:lnTo>
+                  <a:lnTo>
+                    <a:pt x="844133" y="273378"/>
+                  </a:lnTo>
+                  <a:lnTo>
+                    <a:pt x="914478" y="292491"/>
+                  </a:lnTo>
+                  <a:lnTo>
+                    <a:pt x="984822" y="311107"/>
+                  </a:lnTo>
+                  <a:lnTo>
+                    <a:pt x="1055167" y="329238"/>
+                  </a:lnTo>
+                  <a:lnTo>
+                    <a:pt x="1125511" y="346897"/>
+                  </a:lnTo>
+                  <a:lnTo>
+                    <a:pt x="1195856" y="364097"/>
+                  </a:lnTo>
+                  <a:lnTo>
+                    <a:pt x="1266200" y="380849"/>
+                  </a:lnTo>
+                  <a:lnTo>
+                    <a:pt x="1336545" y="397164"/>
+                  </a:lnTo>
+                  <a:lnTo>
+                    <a:pt x="1406889" y="413055"/>
+                  </a:lnTo>
+                  <a:lnTo>
+                    <a:pt x="1477234" y="428533"/>
+                  </a:lnTo>
+                  <a:lnTo>
+                    <a:pt x="1547578" y="443607"/>
+                  </a:lnTo>
+                  <a:lnTo>
+                    <a:pt x="1617923" y="458290"/>
+                  </a:lnTo>
+                  <a:lnTo>
+                    <a:pt x="1688267" y="472590"/>
+                  </a:lnTo>
+                  <a:lnTo>
+                    <a:pt x="1758612" y="486518"/>
+                  </a:lnTo>
+                  <a:lnTo>
+                    <a:pt x="1828956" y="500083"/>
+                  </a:lnTo>
+                  <a:lnTo>
+                    <a:pt x="1899301" y="513295"/>
+                  </a:lnTo>
+                  <a:lnTo>
+                    <a:pt x="1969645" y="526163"/>
+                  </a:lnTo>
+                  <a:lnTo>
+                    <a:pt x="2039990" y="538697"/>
+                  </a:lnTo>
+                  <a:lnTo>
+                    <a:pt x="2110334" y="550904"/>
+                  </a:lnTo>
+                  <a:lnTo>
+                    <a:pt x="2180679" y="562793"/>
+                  </a:lnTo>
+                  <a:lnTo>
+                    <a:pt x="2251023" y="574373"/>
+                  </a:lnTo>
+                  <a:lnTo>
+                    <a:pt x="2321368" y="585651"/>
+                  </a:lnTo>
+                  <a:lnTo>
+                    <a:pt x="2391712" y="596636"/>
+                  </a:lnTo>
+                  <a:lnTo>
+                    <a:pt x="2462057" y="607335"/>
+                  </a:lnTo>
+                  <a:lnTo>
+                    <a:pt x="2532401" y="617756"/>
+                  </a:lnTo>
+                  <a:lnTo>
+                    <a:pt x="2602746" y="627905"/>
+                  </a:lnTo>
+                  <a:lnTo>
+                    <a:pt x="2673090" y="637790"/>
+                  </a:lnTo>
+                  <a:lnTo>
+                    <a:pt x="2743435" y="647418"/>
+                  </a:lnTo>
+                  <a:lnTo>
+                    <a:pt x="2813779" y="656795"/>
+                  </a:lnTo>
+                  <a:lnTo>
+                    <a:pt x="2884124" y="665928"/>
+                  </a:lnTo>
+                  <a:lnTo>
+                    <a:pt x="2954468" y="674823"/>
+                  </a:lnTo>
+                  <a:lnTo>
+                    <a:pt x="3024813" y="683487"/>
+                  </a:lnTo>
+                  <a:lnTo>
+                    <a:pt x="3095157" y="691925"/>
+                  </a:lnTo>
+                  <a:lnTo>
+                    <a:pt x="3165502" y="700144"/>
+                  </a:lnTo>
+                  <a:lnTo>
+                    <a:pt x="3235846" y="708149"/>
+                  </a:lnTo>
+                  <a:lnTo>
+                    <a:pt x="3306191" y="715945"/>
+                  </a:lnTo>
+                  <a:lnTo>
+                    <a:pt x="3376535" y="723539"/>
+                  </a:lnTo>
+                  <a:lnTo>
+                    <a:pt x="3446880" y="730934"/>
+                  </a:lnTo>
+                  <a:lnTo>
+                    <a:pt x="3517224" y="738138"/>
+                  </a:lnTo>
+                  <a:lnTo>
+                    <a:pt x="3587569" y="745153"/>
+                  </a:lnTo>
+                  <a:lnTo>
+                    <a:pt x="3657913" y="751987"/>
+                  </a:lnTo>
+                  <a:lnTo>
+                    <a:pt x="3728257" y="758642"/>
+                  </a:lnTo>
+                  <a:lnTo>
+                    <a:pt x="3798602" y="765124"/>
+                  </a:lnTo>
+                  <a:lnTo>
+                    <a:pt x="3868946" y="771437"/>
+                  </a:lnTo>
+                  <a:lnTo>
+                    <a:pt x="3939291" y="777586"/>
+                  </a:lnTo>
+                  <a:lnTo>
+                    <a:pt x="4009635" y="783575"/>
+                  </a:lnTo>
+                  <a:lnTo>
+                    <a:pt x="4079980" y="789408"/>
+                  </a:lnTo>
+                  <a:lnTo>
+                    <a:pt x="4150324" y="795089"/>
+                  </a:lnTo>
+                  <a:lnTo>
+                    <a:pt x="4220669" y="800623"/>
+                  </a:lnTo>
+                  <a:lnTo>
+                    <a:pt x="4291013" y="806012"/>
+                  </a:lnTo>
+                  <a:lnTo>
+                    <a:pt x="4361358" y="811261"/>
+                  </a:lnTo>
+                  <a:lnTo>
+                    <a:pt x="4431702" y="816374"/>
+                  </a:lnTo>
+                  <a:lnTo>
+                    <a:pt x="4502047" y="821353"/>
+                  </a:lnTo>
+                  <a:lnTo>
+                    <a:pt x="4572391" y="826203"/>
+                  </a:lnTo>
+                  <a:lnTo>
+                    <a:pt x="4642736" y="830926"/>
+                  </a:lnTo>
+                  <a:lnTo>
+                    <a:pt x="4713080" y="835527"/>
+                  </a:lnTo>
+                  <a:lnTo>
+                    <a:pt x="4783425" y="840007"/>
+                  </a:lnTo>
+                  <a:lnTo>
+                    <a:pt x="4853769" y="844372"/>
+                  </a:lnTo>
+                  <a:lnTo>
+                    <a:pt x="4924114" y="848622"/>
+                  </a:lnTo>
+                  <a:lnTo>
+                    <a:pt x="4994458" y="852762"/>
+                  </a:lnTo>
+                  <a:lnTo>
+                    <a:pt x="5064803" y="856794"/>
+                  </a:lnTo>
+                  <a:lnTo>
+                    <a:pt x="5135147" y="860721"/>
+                  </a:lnTo>
+                  <a:lnTo>
+                    <a:pt x="5205492" y="864546"/>
+                  </a:lnTo>
+                  <a:lnTo>
+                    <a:pt x="5275836" y="868272"/>
+                  </a:lnTo>
+                  <a:lnTo>
+                    <a:pt x="5346181" y="871900"/>
+                  </a:lnTo>
+                  <a:lnTo>
+                    <a:pt x="5416525" y="875434"/>
+                  </a:lnTo>
+                  <a:lnTo>
+                    <a:pt x="5486870" y="878876"/>
+                  </a:lnTo>
+                  <a:lnTo>
+                    <a:pt x="5557214" y="882229"/>
+                  </a:lnTo>
+                  <a:lnTo>
+                    <a:pt x="5627559" y="885494"/>
+                  </a:lnTo>
+                  <a:lnTo>
+                    <a:pt x="5697903" y="888674"/>
+                  </a:lnTo>
+                  <a:lnTo>
+                    <a:pt x="5768248" y="891771"/>
+                  </a:lnTo>
+                  <a:lnTo>
+                    <a:pt x="5838592" y="894788"/>
+                  </a:lnTo>
+                  <a:lnTo>
+                    <a:pt x="5908937" y="897727"/>
+                  </a:lnTo>
+                  <a:lnTo>
+                    <a:pt x="5979281" y="900588"/>
+                  </a:lnTo>
+                  <a:lnTo>
+                    <a:pt x="6049626" y="903376"/>
+                  </a:lnTo>
+                  <a:lnTo>
+                    <a:pt x="6119970" y="906090"/>
+                  </a:lnTo>
+                  <a:lnTo>
+                    <a:pt x="6190315" y="908734"/>
+                  </a:lnTo>
+                  <a:lnTo>
+                    <a:pt x="6260659" y="911310"/>
+                  </a:lnTo>
+                  <a:lnTo>
+                    <a:pt x="6331004" y="913818"/>
+                  </a:lnTo>
+                  <a:lnTo>
+                    <a:pt x="6401348" y="916261"/>
+                  </a:lnTo>
+                  <a:lnTo>
+                    <a:pt x="6471693" y="918640"/>
+                  </a:lnTo>
+                  <a:lnTo>
+                    <a:pt x="6542037" y="920957"/>
+                  </a:lnTo>
+                  <a:lnTo>
+                    <a:pt x="6612382" y="923215"/>
+                  </a:lnTo>
+                  <a:lnTo>
+                    <a:pt x="6682726" y="925413"/>
+                  </a:lnTo>
+                  <a:lnTo>
+                    <a:pt x="6753071" y="927554"/>
+                  </a:lnTo>
+                  <a:lnTo>
+                    <a:pt x="6823415" y="929639"/>
+                  </a:lnTo>
+                  <a:lnTo>
+                    <a:pt x="6893760" y="931670"/>
+                  </a:lnTo>
+                  <a:lnTo>
+                    <a:pt x="6964104" y="933649"/>
                   </a:lnTo>
                 </a:path>
               </a:pathLst>
@@ -4424,27 +4459,27 @@
         </p:sp>
         <p:sp>
           <p:nvSpPr>
-            <p:cNvPr id="24" name="pl24"/>
+            <p:cNvPr id="25" name="pl25"/>
             <p:cNvSpPr/>
             <p:nvPr/>
           </p:nvSpPr>
           <p:spPr>
             <a:xfrm>
-              <a:off x="817517" y="4727786"/>
-              <a:ext cx="7799693" cy="0"/>
+              <a:off x="887106" y="3100960"/>
+              <a:ext cx="7660515" cy="0"/>
             </a:xfrm>
             <a:custGeom>
               <a:avLst/>
               <a:pathLst>
-                <a:path w="7799693" h="0">
+                <a:path w="7660515" h="0">
                   <a:moveTo>
                     <a:pt x="0" y="0"/>
                   </a:moveTo>
                   <a:lnTo>
-                    <a:pt x="7799693" y="0"/>
-                  </a:lnTo>
-                  <a:lnTo>
-                    <a:pt x="7799693" y="0"/>
+                    <a:pt x="7660515" y="0"/>
+                  </a:lnTo>
+                  <a:lnTo>
+                    <a:pt x="7660515" y="0"/>
                   </a:lnTo>
                 </a:path>
               </a:pathLst>
@@ -4467,21 +4502,21 @@
         </p:sp>
         <p:sp>
           <p:nvSpPr>
-            <p:cNvPr id="25" name="pl25"/>
+            <p:cNvPr id="26" name="pl26"/>
             <p:cNvSpPr/>
             <p:nvPr/>
           </p:nvSpPr>
           <p:spPr>
             <a:xfrm>
-              <a:off x="4468386" y="2073503"/>
-              <a:ext cx="0" cy="3649639"/>
+              <a:off x="4472829" y="2143092"/>
+              <a:ext cx="0" cy="1317069"/>
             </a:xfrm>
             <a:custGeom>
               <a:avLst/>
               <a:pathLst>
-                <a:path w="0" h="3649639">
+                <a:path w="0" h="1317069">
                   <a:moveTo>
-                    <a:pt x="0" y="3649639"/>
+                    <a:pt x="0" y="1317069"/>
                   </a:moveTo>
                   <a:lnTo>
                     <a:pt x="0" y="0"/>
@@ -4510,13 +4545,13 @@
         </p:sp>
         <p:sp>
           <p:nvSpPr>
-            <p:cNvPr id="26" name="tx26"/>
+            <p:cNvPr id="27" name="tx27"/>
             <p:cNvSpPr/>
             <p:nvPr/>
           </p:nvSpPr>
           <p:spPr>
             <a:xfrm>
-              <a:off x="692708" y="5517199"/>
+              <a:off x="762297" y="3360243"/>
               <a:ext cx="62179" cy="80101"/>
             </a:xfrm>
             <a:prstGeom prst="rect">
@@ -4556,13 +4591,13 @@
         </p:sp>
         <p:sp>
           <p:nvSpPr>
-            <p:cNvPr id="27" name="tx27"/>
+            <p:cNvPr id="28" name="tx28"/>
             <p:cNvSpPr/>
             <p:nvPr/>
           </p:nvSpPr>
           <p:spPr>
             <a:xfrm>
-              <a:off x="692708" y="4687735"/>
+              <a:off x="762297" y="3060909"/>
               <a:ext cx="62179" cy="80101"/>
             </a:xfrm>
             <a:prstGeom prst="rect">
@@ -4602,13 +4637,13 @@
         </p:sp>
         <p:sp>
           <p:nvSpPr>
-            <p:cNvPr id="28" name="tx28"/>
+            <p:cNvPr id="29" name="tx29"/>
             <p:cNvSpPr/>
             <p:nvPr/>
           </p:nvSpPr>
           <p:spPr>
             <a:xfrm>
-              <a:off x="692708" y="3858272"/>
+              <a:off x="762297" y="2761575"/>
               <a:ext cx="62179" cy="80101"/>
             </a:xfrm>
             <a:prstGeom prst="rect">
@@ -4648,13 +4683,13 @@
         </p:sp>
         <p:sp>
           <p:nvSpPr>
-            <p:cNvPr id="29" name="tx29"/>
+            <p:cNvPr id="30" name="tx30"/>
             <p:cNvSpPr/>
             <p:nvPr/>
           </p:nvSpPr>
           <p:spPr>
             <a:xfrm>
-              <a:off x="692708" y="3028808"/>
+              <a:off x="762297" y="2462242"/>
               <a:ext cx="62179" cy="80101"/>
             </a:xfrm>
             <a:prstGeom prst="rect">
@@ -4694,13 +4729,13 @@
         </p:sp>
         <p:sp>
           <p:nvSpPr>
-            <p:cNvPr id="30" name="tx30"/>
+            <p:cNvPr id="31" name="tx31"/>
             <p:cNvSpPr/>
             <p:nvPr/>
           </p:nvSpPr>
           <p:spPr>
             <a:xfrm>
-              <a:off x="692708" y="2199345"/>
+              <a:off x="762297" y="2162908"/>
               <a:ext cx="62179" cy="80101"/>
             </a:xfrm>
             <a:prstGeom prst="rect">
@@ -4740,13 +4775,13 @@
         </p:sp>
         <p:sp>
           <p:nvSpPr>
-            <p:cNvPr id="31" name="tx31"/>
+            <p:cNvPr id="32" name="tx32"/>
             <p:cNvSpPr/>
             <p:nvPr/>
           </p:nvSpPr>
           <p:spPr>
             <a:xfrm>
-              <a:off x="2478335" y="5785772"/>
+              <a:off x="2516846" y="3522791"/>
               <a:ext cx="161574" cy="80101"/>
             </a:xfrm>
             <a:prstGeom prst="rect">
@@ -4786,13 +4821,13 @@
         </p:sp>
         <p:sp>
           <p:nvSpPr>
-            <p:cNvPr id="32" name="tx32"/>
+            <p:cNvPr id="33" name="tx33"/>
             <p:cNvSpPr/>
             <p:nvPr/>
           </p:nvSpPr>
           <p:spPr>
             <a:xfrm>
-              <a:off x="4582608" y="5785772"/>
+              <a:off x="4584458" y="3522791"/>
               <a:ext cx="62179" cy="80101"/>
             </a:xfrm>
             <a:prstGeom prst="rect">
@@ -4832,13 +4867,13 @@
         </p:sp>
         <p:sp>
           <p:nvSpPr>
-            <p:cNvPr id="33" name="tx33"/>
+            <p:cNvPr id="34" name="tx34"/>
             <p:cNvSpPr/>
             <p:nvPr/>
           </p:nvSpPr>
           <p:spPr>
             <a:xfrm>
-              <a:off x="6606094" y="5785772"/>
+              <a:off x="6571282" y="3522791"/>
               <a:ext cx="124358" cy="80101"/>
             </a:xfrm>
             <a:prstGeom prst="rect">
@@ -4878,13 +4913,13 @@
         </p:sp>
         <p:sp>
           <p:nvSpPr>
-            <p:cNvPr id="34" name="tx34"/>
+            <p:cNvPr id="35" name="tx35"/>
             <p:cNvSpPr/>
             <p:nvPr/>
           </p:nvSpPr>
           <p:spPr>
             <a:xfrm>
-              <a:off x="2928340" y="5925448"/>
+              <a:off x="2928340" y="3662467"/>
               <a:ext cx="3578047" cy="100218"/>
             </a:xfrm>
             <a:prstGeom prst="rect">
@@ -4924,13 +4959,13 @@
         </p:sp>
         <p:sp>
           <p:nvSpPr>
-            <p:cNvPr id="35" name="tx35"/>
+            <p:cNvPr id="36" name="tx36"/>
             <p:cNvSpPr/>
             <p:nvPr/>
           </p:nvSpPr>
           <p:spPr>
             <a:xfrm rot="-5400000">
-              <a:off x="68446" y="3848213"/>
+              <a:off x="138035" y="2751517"/>
               <a:ext cx="1016904" cy="100218"/>
             </a:xfrm>
             <a:prstGeom prst="rect">
@@ -4970,13 +5005,13 @@
         </p:sp>
         <p:sp>
           <p:nvSpPr>
-            <p:cNvPr id="36" name="tx36"/>
+            <p:cNvPr id="37" name="tx37"/>
             <p:cNvSpPr/>
             <p:nvPr/>
           </p:nvSpPr>
           <p:spPr>
             <a:xfrm>
-              <a:off x="817517" y="1896563"/>
+              <a:off x="887106" y="1966152"/>
               <a:ext cx="6321612" cy="82021"/>
             </a:xfrm>
             <a:prstGeom prst="rect">
@@ -5016,13 +5051,3602 @@
         </p:sp>
         <p:sp>
           <p:nvSpPr>
-            <p:cNvPr id="37" name="tx37"/>
+            <p:cNvPr id="38" name="tx38"/>
             <p:cNvSpPr/>
             <p:nvPr/>
           </p:nvSpPr>
           <p:spPr>
             <a:xfrm>
-              <a:off x="817517" y="1669789"/>
+              <a:off x="887106" y="1739378"/>
+              <a:ext cx="3164646" cy="120152"/>
+            </a:xfrm>
+            <a:prstGeom prst="rect">
+              <a:avLst/>
+            </a:prstGeom>
+            <a:noFill/>
+          </p:spPr>
+          <p:txBody>
+            <a:bodyPr lIns="0" rIns="0" tIns="0" bIns="0" anchorCtr="1" anchor="ctr" wrap="none"/>
+            <a:lstStyle/>
+            <a:p>
+              <a:pPr algn="l" marL="0" marR="0" indent="0">
+                <a:lnSpc>
+                  <a:spcPts val="1320"/>
+                </a:lnSpc>
+                <a:spcBef>
+                  <a:spcPts val="0"/>
+                </a:spcBef>
+                <a:spcAft>
+                  <a:spcPts val="0"/>
+                </a:spcAft>
+              </a:pPr>
+              <a:r>
+                <a:rPr sz="1320">
+                  <a:solidFill>
+                    <a:srgbClr val="000000">
+                      <a:alpha val="100000"/>
+                    </a:srgbClr>
+                  </a:solidFill>
+                  <a:latin typeface="Helvetica"/>
+                  <a:cs typeface="Helvetica"/>
+                </a:rPr>
+                <a:t>Febrile Neutropenia (Carboplatin AUC ≥ 3)</a:t>
+              </a:r>
+            </a:p>
+          </p:txBody>
+        </p:sp>
+        <p:sp>
+          <p:nvSpPr>
+            <p:cNvPr id="39" name="pl39"/>
+            <p:cNvSpPr/>
+            <p:nvPr/>
+          </p:nvSpPr>
+          <p:spPr>
+            <a:xfrm>
+              <a:off x="887106" y="5444019"/>
+              <a:ext cx="7660515" cy="0"/>
+            </a:xfrm>
+            <a:custGeom>
+              <a:avLst/>
+              <a:pathLst>
+                <a:path w="7660515" h="0">
+                  <a:moveTo>
+                    <a:pt x="0" y="0"/>
+                  </a:moveTo>
+                  <a:lnTo>
+                    <a:pt x="7660515" y="0"/>
+                  </a:lnTo>
+                  <a:lnTo>
+                    <a:pt x="7660515" y="0"/>
+                  </a:lnTo>
+                </a:path>
+              </a:pathLst>
+            </a:custGeom>
+            <a:ln w="6775" cap="flat">
+              <a:solidFill>
+                <a:srgbClr val="EBEBEB">
+                  <a:alpha val="100000"/>
+                </a:srgbClr>
+              </a:solidFill>
+              <a:prstDash val="solid"/>
+              <a:round/>
+            </a:ln>
+          </p:spPr>
+          <p:txBody>
+            <a:bodyPr/>
+            <a:lstStyle/>
+            <a:p/>
+          </p:txBody>
+        </p:sp>
+        <p:sp>
+          <p:nvSpPr>
+            <p:cNvPr id="40" name="pl40"/>
+            <p:cNvSpPr/>
+            <p:nvPr/>
+          </p:nvSpPr>
+          <p:spPr>
+            <a:xfrm>
+              <a:off x="887106" y="5144686"/>
+              <a:ext cx="7660515" cy="0"/>
+            </a:xfrm>
+            <a:custGeom>
+              <a:avLst/>
+              <a:pathLst>
+                <a:path w="7660515" h="0">
+                  <a:moveTo>
+                    <a:pt x="0" y="0"/>
+                  </a:moveTo>
+                  <a:lnTo>
+                    <a:pt x="7660515" y="0"/>
+                  </a:lnTo>
+                  <a:lnTo>
+                    <a:pt x="7660515" y="0"/>
+                  </a:lnTo>
+                </a:path>
+              </a:pathLst>
+            </a:custGeom>
+            <a:ln w="6775" cap="flat">
+              <a:solidFill>
+                <a:srgbClr val="EBEBEB">
+                  <a:alpha val="100000"/>
+                </a:srgbClr>
+              </a:solidFill>
+              <a:prstDash val="solid"/>
+              <a:round/>
+            </a:ln>
+          </p:spPr>
+          <p:txBody>
+            <a:bodyPr/>
+            <a:lstStyle/>
+            <a:p/>
+          </p:txBody>
+        </p:sp>
+        <p:sp>
+          <p:nvSpPr>
+            <p:cNvPr id="41" name="pl41"/>
+            <p:cNvSpPr/>
+            <p:nvPr/>
+          </p:nvSpPr>
+          <p:spPr>
+            <a:xfrm>
+              <a:off x="887106" y="4845352"/>
+              <a:ext cx="7660515" cy="0"/>
+            </a:xfrm>
+            <a:custGeom>
+              <a:avLst/>
+              <a:pathLst>
+                <a:path w="7660515" h="0">
+                  <a:moveTo>
+                    <a:pt x="0" y="0"/>
+                  </a:moveTo>
+                  <a:lnTo>
+                    <a:pt x="7660515" y="0"/>
+                  </a:lnTo>
+                  <a:lnTo>
+                    <a:pt x="7660515" y="0"/>
+                  </a:lnTo>
+                </a:path>
+              </a:pathLst>
+            </a:custGeom>
+            <a:ln w="6775" cap="flat">
+              <a:solidFill>
+                <a:srgbClr val="EBEBEB">
+                  <a:alpha val="100000"/>
+                </a:srgbClr>
+              </a:solidFill>
+              <a:prstDash val="solid"/>
+              <a:round/>
+            </a:ln>
+          </p:spPr>
+          <p:txBody>
+            <a:bodyPr/>
+            <a:lstStyle/>
+            <a:p/>
+          </p:txBody>
+        </p:sp>
+        <p:sp>
+          <p:nvSpPr>
+            <p:cNvPr id="42" name="pl42"/>
+            <p:cNvSpPr/>
+            <p:nvPr/>
+          </p:nvSpPr>
+          <p:spPr>
+            <a:xfrm>
+              <a:off x="887106" y="4546018"/>
+              <a:ext cx="7660515" cy="0"/>
+            </a:xfrm>
+            <a:custGeom>
+              <a:avLst/>
+              <a:pathLst>
+                <a:path w="7660515" h="0">
+                  <a:moveTo>
+                    <a:pt x="0" y="0"/>
+                  </a:moveTo>
+                  <a:lnTo>
+                    <a:pt x="7660515" y="0"/>
+                  </a:lnTo>
+                  <a:lnTo>
+                    <a:pt x="7660515" y="0"/>
+                  </a:lnTo>
+                </a:path>
+              </a:pathLst>
+            </a:custGeom>
+            <a:ln w="6775" cap="flat">
+              <a:solidFill>
+                <a:srgbClr val="EBEBEB">
+                  <a:alpha val="100000"/>
+                </a:srgbClr>
+              </a:solidFill>
+              <a:prstDash val="solid"/>
+              <a:round/>
+            </a:ln>
+          </p:spPr>
+          <p:txBody>
+            <a:bodyPr/>
+            <a:lstStyle/>
+            <a:p/>
+          </p:txBody>
+        </p:sp>
+        <p:sp>
+          <p:nvSpPr>
+            <p:cNvPr id="43" name="pl43"/>
+            <p:cNvSpPr/>
+            <p:nvPr/>
+          </p:nvSpPr>
+          <p:spPr>
+            <a:xfrm>
+              <a:off x="983303" y="4336484"/>
+              <a:ext cx="0" cy="1317069"/>
+            </a:xfrm>
+            <a:custGeom>
+              <a:avLst/>
+              <a:pathLst>
+                <a:path w="0" h="1317069">
+                  <a:moveTo>
+                    <a:pt x="0" y="1317069"/>
+                  </a:moveTo>
+                  <a:lnTo>
+                    <a:pt x="0" y="0"/>
+                  </a:lnTo>
+                  <a:lnTo>
+                    <a:pt x="0" y="0"/>
+                  </a:lnTo>
+                </a:path>
+              </a:pathLst>
+            </a:custGeom>
+            <a:ln w="6775" cap="flat">
+              <a:solidFill>
+                <a:srgbClr val="EBEBEB">
+                  <a:alpha val="100000"/>
+                </a:srgbClr>
+              </a:solidFill>
+              <a:prstDash val="solid"/>
+              <a:round/>
+            </a:ln>
+          </p:spPr>
+          <p:txBody>
+            <a:bodyPr/>
+            <a:lstStyle/>
+            <a:p/>
+          </p:txBody>
+        </p:sp>
+        <p:sp>
+          <p:nvSpPr>
+            <p:cNvPr id="44" name="pl44"/>
+            <p:cNvSpPr/>
+            <p:nvPr/>
+          </p:nvSpPr>
+          <p:spPr>
+            <a:xfrm>
+              <a:off x="1790468" y="4336484"/>
+              <a:ext cx="0" cy="1317069"/>
+            </a:xfrm>
+            <a:custGeom>
+              <a:avLst/>
+              <a:pathLst>
+                <a:path w="0" h="1317069">
+                  <a:moveTo>
+                    <a:pt x="0" y="1317069"/>
+                  </a:moveTo>
+                  <a:lnTo>
+                    <a:pt x="0" y="0"/>
+                  </a:lnTo>
+                  <a:lnTo>
+                    <a:pt x="0" y="0"/>
+                  </a:lnTo>
+                </a:path>
+              </a:pathLst>
+            </a:custGeom>
+            <a:ln w="6775" cap="flat">
+              <a:solidFill>
+                <a:srgbClr val="EBEBEB">
+                  <a:alpha val="100000"/>
+                </a:srgbClr>
+              </a:solidFill>
+              <a:prstDash val="solid"/>
+              <a:round/>
+            </a:ln>
+          </p:spPr>
+          <p:txBody>
+            <a:bodyPr/>
+            <a:lstStyle/>
+            <a:p/>
+          </p:txBody>
+        </p:sp>
+        <p:sp>
+          <p:nvSpPr>
+            <p:cNvPr id="45" name="pl45"/>
+            <p:cNvSpPr/>
+            <p:nvPr/>
+          </p:nvSpPr>
+          <p:spPr>
+            <a:xfrm>
+              <a:off x="2597634" y="4336484"/>
+              <a:ext cx="0" cy="1317069"/>
+            </a:xfrm>
+            <a:custGeom>
+              <a:avLst/>
+              <a:pathLst>
+                <a:path w="0" h="1317069">
+                  <a:moveTo>
+                    <a:pt x="0" y="1317069"/>
+                  </a:moveTo>
+                  <a:lnTo>
+                    <a:pt x="0" y="0"/>
+                  </a:lnTo>
+                  <a:lnTo>
+                    <a:pt x="0" y="0"/>
+                  </a:lnTo>
+                </a:path>
+              </a:pathLst>
+            </a:custGeom>
+            <a:ln w="6775" cap="flat">
+              <a:solidFill>
+                <a:srgbClr val="EBEBEB">
+                  <a:alpha val="100000"/>
+                </a:srgbClr>
+              </a:solidFill>
+              <a:prstDash val="solid"/>
+              <a:round/>
+            </a:ln>
+          </p:spPr>
+          <p:txBody>
+            <a:bodyPr/>
+            <a:lstStyle/>
+            <a:p/>
+          </p:txBody>
+        </p:sp>
+        <p:sp>
+          <p:nvSpPr>
+            <p:cNvPr id="46" name="pl46"/>
+            <p:cNvSpPr/>
+            <p:nvPr/>
+          </p:nvSpPr>
+          <p:spPr>
+            <a:xfrm>
+              <a:off x="3404799" y="4336484"/>
+              <a:ext cx="0" cy="1317069"/>
+            </a:xfrm>
+            <a:custGeom>
+              <a:avLst/>
+              <a:pathLst>
+                <a:path w="0" h="1317069">
+                  <a:moveTo>
+                    <a:pt x="0" y="1317069"/>
+                  </a:moveTo>
+                  <a:lnTo>
+                    <a:pt x="0" y="0"/>
+                  </a:lnTo>
+                  <a:lnTo>
+                    <a:pt x="0" y="0"/>
+                  </a:lnTo>
+                </a:path>
+              </a:pathLst>
+            </a:custGeom>
+            <a:ln w="6775" cap="flat">
+              <a:solidFill>
+                <a:srgbClr val="EBEBEB">
+                  <a:alpha val="100000"/>
+                </a:srgbClr>
+              </a:solidFill>
+              <a:prstDash val="solid"/>
+              <a:round/>
+            </a:ln>
+          </p:spPr>
+          <p:txBody>
+            <a:bodyPr/>
+            <a:lstStyle/>
+            <a:p/>
+          </p:txBody>
+        </p:sp>
+        <p:sp>
+          <p:nvSpPr>
+            <p:cNvPr id="47" name="pl47"/>
+            <p:cNvSpPr/>
+            <p:nvPr/>
+          </p:nvSpPr>
+          <p:spPr>
+            <a:xfrm>
+              <a:off x="4211965" y="4336484"/>
+              <a:ext cx="0" cy="1317069"/>
+            </a:xfrm>
+            <a:custGeom>
+              <a:avLst/>
+              <a:pathLst>
+                <a:path w="0" h="1317069">
+                  <a:moveTo>
+                    <a:pt x="0" y="1317069"/>
+                  </a:moveTo>
+                  <a:lnTo>
+                    <a:pt x="0" y="0"/>
+                  </a:lnTo>
+                  <a:lnTo>
+                    <a:pt x="0" y="0"/>
+                  </a:lnTo>
+                </a:path>
+              </a:pathLst>
+            </a:custGeom>
+            <a:ln w="6775" cap="flat">
+              <a:solidFill>
+                <a:srgbClr val="EBEBEB">
+                  <a:alpha val="100000"/>
+                </a:srgbClr>
+              </a:solidFill>
+              <a:prstDash val="solid"/>
+              <a:round/>
+            </a:ln>
+          </p:spPr>
+          <p:txBody>
+            <a:bodyPr/>
+            <a:lstStyle/>
+            <a:p/>
+          </p:txBody>
+        </p:sp>
+        <p:sp>
+          <p:nvSpPr>
+            <p:cNvPr id="48" name="pl48"/>
+            <p:cNvSpPr/>
+            <p:nvPr/>
+          </p:nvSpPr>
+          <p:spPr>
+            <a:xfrm>
+              <a:off x="5019130" y="4336484"/>
+              <a:ext cx="0" cy="1317069"/>
+            </a:xfrm>
+            <a:custGeom>
+              <a:avLst/>
+              <a:pathLst>
+                <a:path w="0" h="1317069">
+                  <a:moveTo>
+                    <a:pt x="0" y="1317069"/>
+                  </a:moveTo>
+                  <a:lnTo>
+                    <a:pt x="0" y="0"/>
+                  </a:lnTo>
+                  <a:lnTo>
+                    <a:pt x="0" y="0"/>
+                  </a:lnTo>
+                </a:path>
+              </a:pathLst>
+            </a:custGeom>
+            <a:ln w="6775" cap="flat">
+              <a:solidFill>
+                <a:srgbClr val="EBEBEB">
+                  <a:alpha val="100000"/>
+                </a:srgbClr>
+              </a:solidFill>
+              <a:prstDash val="solid"/>
+              <a:round/>
+            </a:ln>
+          </p:spPr>
+          <p:txBody>
+            <a:bodyPr/>
+            <a:lstStyle/>
+            <a:p/>
+          </p:txBody>
+        </p:sp>
+        <p:sp>
+          <p:nvSpPr>
+            <p:cNvPr id="49" name="pl49"/>
+            <p:cNvSpPr/>
+            <p:nvPr/>
+          </p:nvSpPr>
+          <p:spPr>
+            <a:xfrm>
+              <a:off x="5826296" y="4336484"/>
+              <a:ext cx="0" cy="1317069"/>
+            </a:xfrm>
+            <a:custGeom>
+              <a:avLst/>
+              <a:pathLst>
+                <a:path w="0" h="1317069">
+                  <a:moveTo>
+                    <a:pt x="0" y="1317069"/>
+                  </a:moveTo>
+                  <a:lnTo>
+                    <a:pt x="0" y="0"/>
+                  </a:lnTo>
+                  <a:lnTo>
+                    <a:pt x="0" y="0"/>
+                  </a:lnTo>
+                </a:path>
+              </a:pathLst>
+            </a:custGeom>
+            <a:ln w="6775" cap="flat">
+              <a:solidFill>
+                <a:srgbClr val="EBEBEB">
+                  <a:alpha val="100000"/>
+                </a:srgbClr>
+              </a:solidFill>
+              <a:prstDash val="solid"/>
+              <a:round/>
+            </a:ln>
+          </p:spPr>
+          <p:txBody>
+            <a:bodyPr/>
+            <a:lstStyle/>
+            <a:p/>
+          </p:txBody>
+        </p:sp>
+        <p:sp>
+          <p:nvSpPr>
+            <p:cNvPr id="50" name="pl50"/>
+            <p:cNvSpPr/>
+            <p:nvPr/>
+          </p:nvSpPr>
+          <p:spPr>
+            <a:xfrm>
+              <a:off x="6633461" y="4336484"/>
+              <a:ext cx="0" cy="1317069"/>
+            </a:xfrm>
+            <a:custGeom>
+              <a:avLst/>
+              <a:pathLst>
+                <a:path w="0" h="1317069">
+                  <a:moveTo>
+                    <a:pt x="0" y="1317069"/>
+                  </a:moveTo>
+                  <a:lnTo>
+                    <a:pt x="0" y="0"/>
+                  </a:lnTo>
+                  <a:lnTo>
+                    <a:pt x="0" y="0"/>
+                  </a:lnTo>
+                </a:path>
+              </a:pathLst>
+            </a:custGeom>
+            <a:ln w="6775" cap="flat">
+              <a:solidFill>
+                <a:srgbClr val="EBEBEB">
+                  <a:alpha val="100000"/>
+                </a:srgbClr>
+              </a:solidFill>
+              <a:prstDash val="solid"/>
+              <a:round/>
+            </a:ln>
+          </p:spPr>
+          <p:txBody>
+            <a:bodyPr/>
+            <a:lstStyle/>
+            <a:p/>
+          </p:txBody>
+        </p:sp>
+        <p:sp>
+          <p:nvSpPr>
+            <p:cNvPr id="51" name="pl51"/>
+            <p:cNvSpPr/>
+            <p:nvPr/>
+          </p:nvSpPr>
+          <p:spPr>
+            <a:xfrm>
+              <a:off x="7440627" y="4336484"/>
+              <a:ext cx="0" cy="1317069"/>
+            </a:xfrm>
+            <a:custGeom>
+              <a:avLst/>
+              <a:pathLst>
+                <a:path w="0" h="1317069">
+                  <a:moveTo>
+                    <a:pt x="0" y="1317069"/>
+                  </a:moveTo>
+                  <a:lnTo>
+                    <a:pt x="0" y="0"/>
+                  </a:lnTo>
+                  <a:lnTo>
+                    <a:pt x="0" y="0"/>
+                  </a:lnTo>
+                </a:path>
+              </a:pathLst>
+            </a:custGeom>
+            <a:ln w="6775" cap="flat">
+              <a:solidFill>
+                <a:srgbClr val="EBEBEB">
+                  <a:alpha val="100000"/>
+                </a:srgbClr>
+              </a:solidFill>
+              <a:prstDash val="solid"/>
+              <a:round/>
+            </a:ln>
+          </p:spPr>
+          <p:txBody>
+            <a:bodyPr/>
+            <a:lstStyle/>
+            <a:p/>
+          </p:txBody>
+        </p:sp>
+        <p:sp>
+          <p:nvSpPr>
+            <p:cNvPr id="52" name="pl52"/>
+            <p:cNvSpPr/>
+            <p:nvPr/>
+          </p:nvSpPr>
+          <p:spPr>
+            <a:xfrm>
+              <a:off x="8247792" y="4336484"/>
+              <a:ext cx="0" cy="1317069"/>
+            </a:xfrm>
+            <a:custGeom>
+              <a:avLst/>
+              <a:pathLst>
+                <a:path w="0" h="1317069">
+                  <a:moveTo>
+                    <a:pt x="0" y="1317069"/>
+                  </a:moveTo>
+                  <a:lnTo>
+                    <a:pt x="0" y="0"/>
+                  </a:lnTo>
+                  <a:lnTo>
+                    <a:pt x="0" y="0"/>
+                  </a:lnTo>
+                </a:path>
+              </a:pathLst>
+            </a:custGeom>
+            <a:ln w="6775" cap="flat">
+              <a:solidFill>
+                <a:srgbClr val="EBEBEB">
+                  <a:alpha val="100000"/>
+                </a:srgbClr>
+              </a:solidFill>
+              <a:prstDash val="solid"/>
+              <a:round/>
+            </a:ln>
+          </p:spPr>
+          <p:txBody>
+            <a:bodyPr/>
+            <a:lstStyle/>
+            <a:p/>
+          </p:txBody>
+        </p:sp>
+        <p:sp>
+          <p:nvSpPr>
+            <p:cNvPr id="53" name="pl53"/>
+            <p:cNvSpPr/>
+            <p:nvPr/>
+          </p:nvSpPr>
+          <p:spPr>
+            <a:xfrm>
+              <a:off x="887106" y="5593686"/>
+              <a:ext cx="7660515" cy="0"/>
+            </a:xfrm>
+            <a:custGeom>
+              <a:avLst/>
+              <a:pathLst>
+                <a:path w="7660515" h="0">
+                  <a:moveTo>
+                    <a:pt x="0" y="0"/>
+                  </a:moveTo>
+                  <a:lnTo>
+                    <a:pt x="7660515" y="0"/>
+                  </a:lnTo>
+                  <a:lnTo>
+                    <a:pt x="7660515" y="0"/>
+                  </a:lnTo>
+                </a:path>
+              </a:pathLst>
+            </a:custGeom>
+            <a:ln w="13550" cap="flat">
+              <a:solidFill>
+                <a:srgbClr val="EBEBEB">
+                  <a:alpha val="100000"/>
+                </a:srgbClr>
+              </a:solidFill>
+              <a:prstDash val="solid"/>
+              <a:round/>
+            </a:ln>
+          </p:spPr>
+          <p:txBody>
+            <a:bodyPr/>
+            <a:lstStyle/>
+            <a:p/>
+          </p:txBody>
+        </p:sp>
+        <p:sp>
+          <p:nvSpPr>
+            <p:cNvPr id="54" name="pl54"/>
+            <p:cNvSpPr/>
+            <p:nvPr/>
+          </p:nvSpPr>
+          <p:spPr>
+            <a:xfrm>
+              <a:off x="887106" y="5294352"/>
+              <a:ext cx="7660515" cy="0"/>
+            </a:xfrm>
+            <a:custGeom>
+              <a:avLst/>
+              <a:pathLst>
+                <a:path w="7660515" h="0">
+                  <a:moveTo>
+                    <a:pt x="0" y="0"/>
+                  </a:moveTo>
+                  <a:lnTo>
+                    <a:pt x="7660515" y="0"/>
+                  </a:lnTo>
+                  <a:lnTo>
+                    <a:pt x="7660515" y="0"/>
+                  </a:lnTo>
+                </a:path>
+              </a:pathLst>
+            </a:custGeom>
+            <a:ln w="13550" cap="flat">
+              <a:solidFill>
+                <a:srgbClr val="EBEBEB">
+                  <a:alpha val="100000"/>
+                </a:srgbClr>
+              </a:solidFill>
+              <a:prstDash val="solid"/>
+              <a:round/>
+            </a:ln>
+          </p:spPr>
+          <p:txBody>
+            <a:bodyPr/>
+            <a:lstStyle/>
+            <a:p/>
+          </p:txBody>
+        </p:sp>
+        <p:sp>
+          <p:nvSpPr>
+            <p:cNvPr id="55" name="pl55"/>
+            <p:cNvSpPr/>
+            <p:nvPr/>
+          </p:nvSpPr>
+          <p:spPr>
+            <a:xfrm>
+              <a:off x="887106" y="4995019"/>
+              <a:ext cx="7660515" cy="0"/>
+            </a:xfrm>
+            <a:custGeom>
+              <a:avLst/>
+              <a:pathLst>
+                <a:path w="7660515" h="0">
+                  <a:moveTo>
+                    <a:pt x="0" y="0"/>
+                  </a:moveTo>
+                  <a:lnTo>
+                    <a:pt x="7660515" y="0"/>
+                  </a:lnTo>
+                  <a:lnTo>
+                    <a:pt x="7660515" y="0"/>
+                  </a:lnTo>
+                </a:path>
+              </a:pathLst>
+            </a:custGeom>
+            <a:ln w="13550" cap="flat">
+              <a:solidFill>
+                <a:srgbClr val="EBEBEB">
+                  <a:alpha val="100000"/>
+                </a:srgbClr>
+              </a:solidFill>
+              <a:prstDash val="solid"/>
+              <a:round/>
+            </a:ln>
+          </p:spPr>
+          <p:txBody>
+            <a:bodyPr/>
+            <a:lstStyle/>
+            <a:p/>
+          </p:txBody>
+        </p:sp>
+        <p:sp>
+          <p:nvSpPr>
+            <p:cNvPr id="56" name="pl56"/>
+            <p:cNvSpPr/>
+            <p:nvPr/>
+          </p:nvSpPr>
+          <p:spPr>
+            <a:xfrm>
+              <a:off x="887106" y="4695685"/>
+              <a:ext cx="7660515" cy="0"/>
+            </a:xfrm>
+            <a:custGeom>
+              <a:avLst/>
+              <a:pathLst>
+                <a:path w="7660515" h="0">
+                  <a:moveTo>
+                    <a:pt x="0" y="0"/>
+                  </a:moveTo>
+                  <a:lnTo>
+                    <a:pt x="7660515" y="0"/>
+                  </a:lnTo>
+                  <a:lnTo>
+                    <a:pt x="7660515" y="0"/>
+                  </a:lnTo>
+                </a:path>
+              </a:pathLst>
+            </a:custGeom>
+            <a:ln w="13550" cap="flat">
+              <a:solidFill>
+                <a:srgbClr val="EBEBEB">
+                  <a:alpha val="100000"/>
+                </a:srgbClr>
+              </a:solidFill>
+              <a:prstDash val="solid"/>
+              <a:round/>
+            </a:ln>
+          </p:spPr>
+          <p:txBody>
+            <a:bodyPr/>
+            <a:lstStyle/>
+            <a:p/>
+          </p:txBody>
+        </p:sp>
+        <p:sp>
+          <p:nvSpPr>
+            <p:cNvPr id="57" name="pl57"/>
+            <p:cNvSpPr/>
+            <p:nvPr/>
+          </p:nvSpPr>
+          <p:spPr>
+            <a:xfrm>
+              <a:off x="887106" y="4396351"/>
+              <a:ext cx="7660515" cy="0"/>
+            </a:xfrm>
+            <a:custGeom>
+              <a:avLst/>
+              <a:pathLst>
+                <a:path w="7660515" h="0">
+                  <a:moveTo>
+                    <a:pt x="0" y="0"/>
+                  </a:moveTo>
+                  <a:lnTo>
+                    <a:pt x="7660515" y="0"/>
+                  </a:lnTo>
+                  <a:lnTo>
+                    <a:pt x="7660515" y="0"/>
+                  </a:lnTo>
+                </a:path>
+              </a:pathLst>
+            </a:custGeom>
+            <a:ln w="13550" cap="flat">
+              <a:solidFill>
+                <a:srgbClr val="EBEBEB">
+                  <a:alpha val="100000"/>
+                </a:srgbClr>
+              </a:solidFill>
+              <a:prstDash val="solid"/>
+              <a:round/>
+            </a:ln>
+          </p:spPr>
+          <p:txBody>
+            <a:bodyPr/>
+            <a:lstStyle/>
+            <a:p/>
+          </p:txBody>
+        </p:sp>
+        <p:sp>
+          <p:nvSpPr>
+            <p:cNvPr id="58" name="pl58"/>
+            <p:cNvSpPr/>
+            <p:nvPr/>
+          </p:nvSpPr>
+          <p:spPr>
+            <a:xfrm>
+              <a:off x="1386885" y="4336484"/>
+              <a:ext cx="0" cy="1317069"/>
+            </a:xfrm>
+            <a:custGeom>
+              <a:avLst/>
+              <a:pathLst>
+                <a:path w="0" h="1317069">
+                  <a:moveTo>
+                    <a:pt x="0" y="1317069"/>
+                  </a:moveTo>
+                  <a:lnTo>
+                    <a:pt x="0" y="0"/>
+                  </a:lnTo>
+                  <a:lnTo>
+                    <a:pt x="0" y="0"/>
+                  </a:lnTo>
+                </a:path>
+              </a:pathLst>
+            </a:custGeom>
+            <a:ln w="13550" cap="flat">
+              <a:solidFill>
+                <a:srgbClr val="EBEBEB">
+                  <a:alpha val="100000"/>
+                </a:srgbClr>
+              </a:solidFill>
+              <a:prstDash val="solid"/>
+              <a:round/>
+            </a:ln>
+          </p:spPr>
+          <p:txBody>
+            <a:bodyPr/>
+            <a:lstStyle/>
+            <a:p/>
+          </p:txBody>
+        </p:sp>
+        <p:sp>
+          <p:nvSpPr>
+            <p:cNvPr id="59" name="pl59"/>
+            <p:cNvSpPr/>
+            <p:nvPr/>
+          </p:nvSpPr>
+          <p:spPr>
+            <a:xfrm>
+              <a:off x="2194051" y="4336484"/>
+              <a:ext cx="0" cy="1317069"/>
+            </a:xfrm>
+            <a:custGeom>
+              <a:avLst/>
+              <a:pathLst>
+                <a:path w="0" h="1317069">
+                  <a:moveTo>
+                    <a:pt x="0" y="1317069"/>
+                  </a:moveTo>
+                  <a:lnTo>
+                    <a:pt x="0" y="0"/>
+                  </a:lnTo>
+                  <a:lnTo>
+                    <a:pt x="0" y="0"/>
+                  </a:lnTo>
+                </a:path>
+              </a:pathLst>
+            </a:custGeom>
+            <a:ln w="13550" cap="flat">
+              <a:solidFill>
+                <a:srgbClr val="EBEBEB">
+                  <a:alpha val="100000"/>
+                </a:srgbClr>
+              </a:solidFill>
+              <a:prstDash val="solid"/>
+              <a:round/>
+            </a:ln>
+          </p:spPr>
+          <p:txBody>
+            <a:bodyPr/>
+            <a:lstStyle/>
+            <a:p/>
+          </p:txBody>
+        </p:sp>
+        <p:sp>
+          <p:nvSpPr>
+            <p:cNvPr id="60" name="pl60"/>
+            <p:cNvSpPr/>
+            <p:nvPr/>
+          </p:nvSpPr>
+          <p:spPr>
+            <a:xfrm>
+              <a:off x="3001216" y="4336484"/>
+              <a:ext cx="0" cy="1317069"/>
+            </a:xfrm>
+            <a:custGeom>
+              <a:avLst/>
+              <a:pathLst>
+                <a:path w="0" h="1317069">
+                  <a:moveTo>
+                    <a:pt x="0" y="1317069"/>
+                  </a:moveTo>
+                  <a:lnTo>
+                    <a:pt x="0" y="0"/>
+                  </a:lnTo>
+                  <a:lnTo>
+                    <a:pt x="0" y="0"/>
+                  </a:lnTo>
+                </a:path>
+              </a:pathLst>
+            </a:custGeom>
+            <a:ln w="13550" cap="flat">
+              <a:solidFill>
+                <a:srgbClr val="EBEBEB">
+                  <a:alpha val="100000"/>
+                </a:srgbClr>
+              </a:solidFill>
+              <a:prstDash val="solid"/>
+              <a:round/>
+            </a:ln>
+          </p:spPr>
+          <p:txBody>
+            <a:bodyPr/>
+            <a:lstStyle/>
+            <a:p/>
+          </p:txBody>
+        </p:sp>
+        <p:sp>
+          <p:nvSpPr>
+            <p:cNvPr id="61" name="pl61"/>
+            <p:cNvSpPr/>
+            <p:nvPr/>
+          </p:nvSpPr>
+          <p:spPr>
+            <a:xfrm>
+              <a:off x="3808382" y="4336484"/>
+              <a:ext cx="0" cy="1317069"/>
+            </a:xfrm>
+            <a:custGeom>
+              <a:avLst/>
+              <a:pathLst>
+                <a:path w="0" h="1317069">
+                  <a:moveTo>
+                    <a:pt x="0" y="1317069"/>
+                  </a:moveTo>
+                  <a:lnTo>
+                    <a:pt x="0" y="0"/>
+                  </a:lnTo>
+                  <a:lnTo>
+                    <a:pt x="0" y="0"/>
+                  </a:lnTo>
+                </a:path>
+              </a:pathLst>
+            </a:custGeom>
+            <a:ln w="13550" cap="flat">
+              <a:solidFill>
+                <a:srgbClr val="EBEBEB">
+                  <a:alpha val="100000"/>
+                </a:srgbClr>
+              </a:solidFill>
+              <a:prstDash val="solid"/>
+              <a:round/>
+            </a:ln>
+          </p:spPr>
+          <p:txBody>
+            <a:bodyPr/>
+            <a:lstStyle/>
+            <a:p/>
+          </p:txBody>
+        </p:sp>
+        <p:sp>
+          <p:nvSpPr>
+            <p:cNvPr id="62" name="pl62"/>
+            <p:cNvSpPr/>
+            <p:nvPr/>
+          </p:nvSpPr>
+          <p:spPr>
+            <a:xfrm>
+              <a:off x="4615547" y="4336484"/>
+              <a:ext cx="0" cy="1317069"/>
+            </a:xfrm>
+            <a:custGeom>
+              <a:avLst/>
+              <a:pathLst>
+                <a:path w="0" h="1317069">
+                  <a:moveTo>
+                    <a:pt x="0" y="1317069"/>
+                  </a:moveTo>
+                  <a:lnTo>
+                    <a:pt x="0" y="0"/>
+                  </a:lnTo>
+                  <a:lnTo>
+                    <a:pt x="0" y="0"/>
+                  </a:lnTo>
+                </a:path>
+              </a:pathLst>
+            </a:custGeom>
+            <a:ln w="13550" cap="flat">
+              <a:solidFill>
+                <a:srgbClr val="EBEBEB">
+                  <a:alpha val="100000"/>
+                </a:srgbClr>
+              </a:solidFill>
+              <a:prstDash val="solid"/>
+              <a:round/>
+            </a:ln>
+          </p:spPr>
+          <p:txBody>
+            <a:bodyPr/>
+            <a:lstStyle/>
+            <a:p/>
+          </p:txBody>
+        </p:sp>
+        <p:sp>
+          <p:nvSpPr>
+            <p:cNvPr id="63" name="pl63"/>
+            <p:cNvSpPr/>
+            <p:nvPr/>
+          </p:nvSpPr>
+          <p:spPr>
+            <a:xfrm>
+              <a:off x="5422713" y="4336484"/>
+              <a:ext cx="0" cy="1317069"/>
+            </a:xfrm>
+            <a:custGeom>
+              <a:avLst/>
+              <a:pathLst>
+                <a:path w="0" h="1317069">
+                  <a:moveTo>
+                    <a:pt x="0" y="1317069"/>
+                  </a:moveTo>
+                  <a:lnTo>
+                    <a:pt x="0" y="0"/>
+                  </a:lnTo>
+                  <a:lnTo>
+                    <a:pt x="0" y="0"/>
+                  </a:lnTo>
+                </a:path>
+              </a:pathLst>
+            </a:custGeom>
+            <a:ln w="13550" cap="flat">
+              <a:solidFill>
+                <a:srgbClr val="EBEBEB">
+                  <a:alpha val="100000"/>
+                </a:srgbClr>
+              </a:solidFill>
+              <a:prstDash val="solid"/>
+              <a:round/>
+            </a:ln>
+          </p:spPr>
+          <p:txBody>
+            <a:bodyPr/>
+            <a:lstStyle/>
+            <a:p/>
+          </p:txBody>
+        </p:sp>
+        <p:sp>
+          <p:nvSpPr>
+            <p:cNvPr id="64" name="pl64"/>
+            <p:cNvSpPr/>
+            <p:nvPr/>
+          </p:nvSpPr>
+          <p:spPr>
+            <a:xfrm>
+              <a:off x="6229878" y="4336484"/>
+              <a:ext cx="0" cy="1317069"/>
+            </a:xfrm>
+            <a:custGeom>
+              <a:avLst/>
+              <a:pathLst>
+                <a:path w="0" h="1317069">
+                  <a:moveTo>
+                    <a:pt x="0" y="1317069"/>
+                  </a:moveTo>
+                  <a:lnTo>
+                    <a:pt x="0" y="0"/>
+                  </a:lnTo>
+                  <a:lnTo>
+                    <a:pt x="0" y="0"/>
+                  </a:lnTo>
+                </a:path>
+              </a:pathLst>
+            </a:custGeom>
+            <a:ln w="13550" cap="flat">
+              <a:solidFill>
+                <a:srgbClr val="EBEBEB">
+                  <a:alpha val="100000"/>
+                </a:srgbClr>
+              </a:solidFill>
+              <a:prstDash val="solid"/>
+              <a:round/>
+            </a:ln>
+          </p:spPr>
+          <p:txBody>
+            <a:bodyPr/>
+            <a:lstStyle/>
+            <a:p/>
+          </p:txBody>
+        </p:sp>
+        <p:sp>
+          <p:nvSpPr>
+            <p:cNvPr id="65" name="pl65"/>
+            <p:cNvSpPr/>
+            <p:nvPr/>
+          </p:nvSpPr>
+          <p:spPr>
+            <a:xfrm>
+              <a:off x="7037044" y="4336484"/>
+              <a:ext cx="0" cy="1317069"/>
+            </a:xfrm>
+            <a:custGeom>
+              <a:avLst/>
+              <a:pathLst>
+                <a:path w="0" h="1317069">
+                  <a:moveTo>
+                    <a:pt x="0" y="1317069"/>
+                  </a:moveTo>
+                  <a:lnTo>
+                    <a:pt x="0" y="0"/>
+                  </a:lnTo>
+                  <a:lnTo>
+                    <a:pt x="0" y="0"/>
+                  </a:lnTo>
+                </a:path>
+              </a:pathLst>
+            </a:custGeom>
+            <a:ln w="13550" cap="flat">
+              <a:solidFill>
+                <a:srgbClr val="EBEBEB">
+                  <a:alpha val="100000"/>
+                </a:srgbClr>
+              </a:solidFill>
+              <a:prstDash val="solid"/>
+              <a:round/>
+            </a:ln>
+          </p:spPr>
+          <p:txBody>
+            <a:bodyPr/>
+            <a:lstStyle/>
+            <a:p/>
+          </p:txBody>
+        </p:sp>
+        <p:sp>
+          <p:nvSpPr>
+            <p:cNvPr id="66" name="pl66"/>
+            <p:cNvSpPr/>
+            <p:nvPr/>
+          </p:nvSpPr>
+          <p:spPr>
+            <a:xfrm>
+              <a:off x="7844209" y="4336484"/>
+              <a:ext cx="0" cy="1317069"/>
+            </a:xfrm>
+            <a:custGeom>
+              <a:avLst/>
+              <a:pathLst>
+                <a:path w="0" h="1317069">
+                  <a:moveTo>
+                    <a:pt x="0" y="1317069"/>
+                  </a:moveTo>
+                  <a:lnTo>
+                    <a:pt x="0" y="0"/>
+                  </a:lnTo>
+                  <a:lnTo>
+                    <a:pt x="0" y="0"/>
+                  </a:lnTo>
+                </a:path>
+              </a:pathLst>
+            </a:custGeom>
+            <a:ln w="13550" cap="flat">
+              <a:solidFill>
+                <a:srgbClr val="EBEBEB">
+                  <a:alpha val="100000"/>
+                </a:srgbClr>
+              </a:solidFill>
+              <a:prstDash val="solid"/>
+              <a:round/>
+            </a:ln>
+          </p:spPr>
+          <p:txBody>
+            <a:bodyPr/>
+            <a:lstStyle/>
+            <a:p/>
+          </p:txBody>
+        </p:sp>
+        <p:sp>
+          <p:nvSpPr>
+            <p:cNvPr id="67" name="pg67"/>
+            <p:cNvSpPr/>
+            <p:nvPr/>
+          </p:nvSpPr>
+          <p:spPr>
+            <a:xfrm>
+              <a:off x="1235312" y="4336484"/>
+              <a:ext cx="6964104" cy="1248853"/>
+            </a:xfrm>
+            <a:custGeom>
+              <a:avLst/>
+              <a:pathLst>
+                <a:path w="6964104" h="1248853">
+                  <a:moveTo>
+                    <a:pt x="1743855" y="0"/>
+                  </a:moveTo>
+                  <a:lnTo>
+                    <a:pt x="1758612" y="18169"/>
+                  </a:lnTo>
+                  <a:lnTo>
+                    <a:pt x="1828956" y="99122"/>
+                  </a:lnTo>
+                  <a:lnTo>
+                    <a:pt x="1899301" y="174785"/>
+                  </a:lnTo>
+                  <a:lnTo>
+                    <a:pt x="1969645" y="245506"/>
+                  </a:lnTo>
+                  <a:lnTo>
+                    <a:pt x="2039990" y="311606"/>
+                  </a:lnTo>
+                  <a:lnTo>
+                    <a:pt x="2110334" y="373387"/>
+                  </a:lnTo>
+                  <a:lnTo>
+                    <a:pt x="2180679" y="431131"/>
+                  </a:lnTo>
+                  <a:lnTo>
+                    <a:pt x="2251023" y="485103"/>
+                  </a:lnTo>
+                  <a:lnTo>
+                    <a:pt x="2321368" y="535548"/>
+                  </a:lnTo>
+                  <a:lnTo>
+                    <a:pt x="2391712" y="582698"/>
+                  </a:lnTo>
+                  <a:lnTo>
+                    <a:pt x="2462057" y="626767"/>
+                  </a:lnTo>
+                  <a:lnTo>
+                    <a:pt x="2532401" y="667957"/>
+                  </a:lnTo>
+                  <a:lnTo>
+                    <a:pt x="2602746" y="706456"/>
+                  </a:lnTo>
+                  <a:lnTo>
+                    <a:pt x="2673090" y="742439"/>
+                  </a:lnTo>
+                  <a:lnTo>
+                    <a:pt x="2743435" y="776071"/>
+                  </a:lnTo>
+                  <a:lnTo>
+                    <a:pt x="2813779" y="807506"/>
+                  </a:lnTo>
+                  <a:lnTo>
+                    <a:pt x="2884124" y="836887"/>
+                  </a:lnTo>
+                  <a:lnTo>
+                    <a:pt x="2954468" y="864349"/>
+                  </a:lnTo>
+                  <a:lnTo>
+                    <a:pt x="3024813" y="890016"/>
+                  </a:lnTo>
+                  <a:lnTo>
+                    <a:pt x="3095157" y="914006"/>
+                  </a:lnTo>
+                  <a:lnTo>
+                    <a:pt x="3165502" y="936429"/>
+                  </a:lnTo>
+                  <a:lnTo>
+                    <a:pt x="3235846" y="957387"/>
+                  </a:lnTo>
+                  <a:lnTo>
+                    <a:pt x="3306191" y="953506"/>
+                  </a:lnTo>
+                  <a:lnTo>
+                    <a:pt x="3376535" y="948972"/>
+                  </a:lnTo>
+                  <a:lnTo>
+                    <a:pt x="3446880" y="944370"/>
+                  </a:lnTo>
+                  <a:lnTo>
+                    <a:pt x="3517224" y="939699"/>
+                  </a:lnTo>
+                  <a:lnTo>
+                    <a:pt x="3587569" y="934959"/>
+                  </a:lnTo>
+                  <a:lnTo>
+                    <a:pt x="3657913" y="930148"/>
+                  </a:lnTo>
+                  <a:lnTo>
+                    <a:pt x="3728257" y="925265"/>
+                  </a:lnTo>
+                  <a:lnTo>
+                    <a:pt x="3798602" y="920310"/>
+                  </a:lnTo>
+                  <a:lnTo>
+                    <a:pt x="3868946" y="915280"/>
+                  </a:lnTo>
+                  <a:lnTo>
+                    <a:pt x="3939291" y="910175"/>
+                  </a:lnTo>
+                  <a:lnTo>
+                    <a:pt x="4009635" y="904994"/>
+                  </a:lnTo>
+                  <a:lnTo>
+                    <a:pt x="4079980" y="899736"/>
+                  </a:lnTo>
+                  <a:lnTo>
+                    <a:pt x="4150324" y="894399"/>
+                  </a:lnTo>
+                  <a:lnTo>
+                    <a:pt x="4220669" y="888982"/>
+                  </a:lnTo>
+                  <a:lnTo>
+                    <a:pt x="4291013" y="883485"/>
+                  </a:lnTo>
+                  <a:lnTo>
+                    <a:pt x="4361358" y="877905"/>
+                  </a:lnTo>
+                  <a:lnTo>
+                    <a:pt x="4431702" y="872242"/>
+                  </a:lnTo>
+                  <a:lnTo>
+                    <a:pt x="4502047" y="866495"/>
+                  </a:lnTo>
+                  <a:lnTo>
+                    <a:pt x="4572391" y="860662"/>
+                  </a:lnTo>
+                  <a:lnTo>
+                    <a:pt x="4642736" y="854742"/>
+                  </a:lnTo>
+                  <a:lnTo>
+                    <a:pt x="4713080" y="848733"/>
+                  </a:lnTo>
+                  <a:lnTo>
+                    <a:pt x="4783425" y="842635"/>
+                  </a:lnTo>
+                  <a:lnTo>
+                    <a:pt x="4853769" y="836445"/>
+                  </a:lnTo>
+                  <a:lnTo>
+                    <a:pt x="4924114" y="830163"/>
+                  </a:lnTo>
+                  <a:lnTo>
+                    <a:pt x="4994458" y="823788"/>
+                  </a:lnTo>
+                  <a:lnTo>
+                    <a:pt x="5064803" y="817317"/>
+                  </a:lnTo>
+                  <a:lnTo>
+                    <a:pt x="5135147" y="810750"/>
+                  </a:lnTo>
+                  <a:lnTo>
+                    <a:pt x="5205492" y="804084"/>
+                  </a:lnTo>
+                  <a:lnTo>
+                    <a:pt x="5275836" y="797319"/>
+                  </a:lnTo>
+                  <a:lnTo>
+                    <a:pt x="5346181" y="790453"/>
+                  </a:lnTo>
+                  <a:lnTo>
+                    <a:pt x="5416525" y="783485"/>
+                  </a:lnTo>
+                  <a:lnTo>
+                    <a:pt x="5486870" y="776412"/>
+                  </a:lnTo>
+                  <a:lnTo>
+                    <a:pt x="5557214" y="769234"/>
+                  </a:lnTo>
+                  <a:lnTo>
+                    <a:pt x="5627559" y="761949"/>
+                  </a:lnTo>
+                  <a:lnTo>
+                    <a:pt x="5697903" y="754555"/>
+                  </a:lnTo>
+                  <a:lnTo>
+                    <a:pt x="5768248" y="747051"/>
+                  </a:lnTo>
+                  <a:lnTo>
+                    <a:pt x="5838592" y="739434"/>
+                  </a:lnTo>
+                  <a:lnTo>
+                    <a:pt x="5908937" y="731704"/>
+                  </a:lnTo>
+                  <a:lnTo>
+                    <a:pt x="5979281" y="723858"/>
+                  </a:lnTo>
+                  <a:lnTo>
+                    <a:pt x="6049626" y="715896"/>
+                  </a:lnTo>
+                  <a:lnTo>
+                    <a:pt x="6119970" y="707814"/>
+                  </a:lnTo>
+                  <a:lnTo>
+                    <a:pt x="6190315" y="699612"/>
+                  </a:lnTo>
+                  <a:lnTo>
+                    <a:pt x="6260659" y="691287"/>
+                  </a:lnTo>
+                  <a:lnTo>
+                    <a:pt x="6331004" y="682838"/>
+                  </a:lnTo>
+                  <a:lnTo>
+                    <a:pt x="6401348" y="674263"/>
+                  </a:lnTo>
+                  <a:lnTo>
+                    <a:pt x="6471693" y="665560"/>
+                  </a:lnTo>
+                  <a:lnTo>
+                    <a:pt x="6542037" y="656727"/>
+                  </a:lnTo>
+                  <a:lnTo>
+                    <a:pt x="6612382" y="647762"/>
+                  </a:lnTo>
+                  <a:lnTo>
+                    <a:pt x="6682726" y="638663"/>
+                  </a:lnTo>
+                  <a:lnTo>
+                    <a:pt x="6753071" y="629429"/>
+                  </a:lnTo>
+                  <a:lnTo>
+                    <a:pt x="6823415" y="620056"/>
+                  </a:lnTo>
+                  <a:lnTo>
+                    <a:pt x="6893760" y="610544"/>
+                  </a:lnTo>
+                  <a:lnTo>
+                    <a:pt x="6964104" y="600889"/>
+                  </a:lnTo>
+                  <a:lnTo>
+                    <a:pt x="6964104" y="1248853"/>
+                  </a:lnTo>
+                  <a:lnTo>
+                    <a:pt x="6893760" y="1248270"/>
+                  </a:lnTo>
+                  <a:lnTo>
+                    <a:pt x="6823415" y="1247645"/>
+                  </a:lnTo>
+                  <a:lnTo>
+                    <a:pt x="6753071" y="1246977"/>
+                  </a:lnTo>
+                  <a:lnTo>
+                    <a:pt x="6682726" y="1246263"/>
+                  </a:lnTo>
+                  <a:lnTo>
+                    <a:pt x="6612382" y="1245498"/>
+                  </a:lnTo>
+                  <a:lnTo>
+                    <a:pt x="6542037" y="1244680"/>
+                  </a:lnTo>
+                  <a:lnTo>
+                    <a:pt x="6471693" y="1243805"/>
+                  </a:lnTo>
+                  <a:lnTo>
+                    <a:pt x="6401348" y="1242868"/>
+                  </a:lnTo>
+                  <a:lnTo>
+                    <a:pt x="6331004" y="1241866"/>
+                  </a:lnTo>
+                  <a:lnTo>
+                    <a:pt x="6260659" y="1240794"/>
+                  </a:lnTo>
+                  <a:lnTo>
+                    <a:pt x="6190315" y="1239647"/>
+                  </a:lnTo>
+                  <a:lnTo>
+                    <a:pt x="6119970" y="1238420"/>
+                  </a:lnTo>
+                  <a:lnTo>
+                    <a:pt x="6049626" y="1237107"/>
+                  </a:lnTo>
+                  <a:lnTo>
+                    <a:pt x="5979281" y="1235702"/>
+                  </a:lnTo>
+                  <a:lnTo>
+                    <a:pt x="5908937" y="1234200"/>
+                  </a:lnTo>
+                  <a:lnTo>
+                    <a:pt x="5838592" y="1232592"/>
+                  </a:lnTo>
+                  <a:lnTo>
+                    <a:pt x="5768248" y="1230871"/>
+                  </a:lnTo>
+                  <a:lnTo>
+                    <a:pt x="5697903" y="1229031"/>
+                  </a:lnTo>
+                  <a:lnTo>
+                    <a:pt x="5627559" y="1227062"/>
+                  </a:lnTo>
+                  <a:lnTo>
+                    <a:pt x="5557214" y="1224955"/>
+                  </a:lnTo>
+                  <a:lnTo>
+                    <a:pt x="5486870" y="1222700"/>
+                  </a:lnTo>
+                  <a:lnTo>
+                    <a:pt x="5416525" y="1220289"/>
+                  </a:lnTo>
+                  <a:lnTo>
+                    <a:pt x="5346181" y="1217708"/>
+                  </a:lnTo>
+                  <a:lnTo>
+                    <a:pt x="5275836" y="1214948"/>
+                  </a:lnTo>
+                  <a:lnTo>
+                    <a:pt x="5205492" y="1211994"/>
+                  </a:lnTo>
+                  <a:lnTo>
+                    <a:pt x="5135147" y="1208834"/>
+                  </a:lnTo>
+                  <a:lnTo>
+                    <a:pt x="5064803" y="1205453"/>
+                  </a:lnTo>
+                  <a:lnTo>
+                    <a:pt x="4994458" y="1201835"/>
+                  </a:lnTo>
+                  <a:lnTo>
+                    <a:pt x="4924114" y="1197965"/>
+                  </a:lnTo>
+                  <a:lnTo>
+                    <a:pt x="4853769" y="1193824"/>
+                  </a:lnTo>
+                  <a:lnTo>
+                    <a:pt x="4783425" y="1189394"/>
+                  </a:lnTo>
+                  <a:lnTo>
+                    <a:pt x="4713080" y="1184654"/>
+                  </a:lnTo>
+                  <a:lnTo>
+                    <a:pt x="4642736" y="1179583"/>
+                  </a:lnTo>
+                  <a:lnTo>
+                    <a:pt x="4572391" y="1174157"/>
+                  </a:lnTo>
+                  <a:lnTo>
+                    <a:pt x="4502047" y="1168352"/>
+                  </a:lnTo>
+                  <a:lnTo>
+                    <a:pt x="4431702" y="1162141"/>
+                  </a:lnTo>
+                  <a:lnTo>
+                    <a:pt x="4361358" y="1155496"/>
+                  </a:lnTo>
+                  <a:lnTo>
+                    <a:pt x="4291013" y="1148387"/>
+                  </a:lnTo>
+                  <a:lnTo>
+                    <a:pt x="4220669" y="1140780"/>
+                  </a:lnTo>
+                  <a:lnTo>
+                    <a:pt x="4150324" y="1132642"/>
+                  </a:lnTo>
+                  <a:lnTo>
+                    <a:pt x="4079980" y="1123935"/>
+                  </a:lnTo>
+                  <a:lnTo>
+                    <a:pt x="4009635" y="1114619"/>
+                  </a:lnTo>
+                  <a:lnTo>
+                    <a:pt x="3939291" y="1104653"/>
+                  </a:lnTo>
+                  <a:lnTo>
+                    <a:pt x="3868946" y="1093989"/>
+                  </a:lnTo>
+                  <a:lnTo>
+                    <a:pt x="3798602" y="1082580"/>
+                  </a:lnTo>
+                  <a:lnTo>
+                    <a:pt x="3728257" y="1070373"/>
+                  </a:lnTo>
+                  <a:lnTo>
+                    <a:pt x="3657913" y="1057314"/>
+                  </a:lnTo>
+                  <a:lnTo>
+                    <a:pt x="3587569" y="1043341"/>
+                  </a:lnTo>
+                  <a:lnTo>
+                    <a:pt x="3517224" y="1028391"/>
+                  </a:lnTo>
+                  <a:lnTo>
+                    <a:pt x="3446880" y="1012397"/>
+                  </a:lnTo>
+                  <a:lnTo>
+                    <a:pt x="3376535" y="995284"/>
+                  </a:lnTo>
+                  <a:lnTo>
+                    <a:pt x="3306191" y="976976"/>
+                  </a:lnTo>
+                  <a:lnTo>
+                    <a:pt x="3235846" y="957973"/>
+                  </a:lnTo>
+                  <a:lnTo>
+                    <a:pt x="3165502" y="962375"/>
+                  </a:lnTo>
+                  <a:lnTo>
+                    <a:pt x="3095157" y="966712"/>
+                  </a:lnTo>
+                  <a:lnTo>
+                    <a:pt x="3024813" y="970985"/>
+                  </a:lnTo>
+                  <a:lnTo>
+                    <a:pt x="2954468" y="975195"/>
+                  </a:lnTo>
+                  <a:lnTo>
+                    <a:pt x="2884124" y="979344"/>
+                  </a:lnTo>
+                  <a:lnTo>
+                    <a:pt x="2813779" y="983431"/>
+                  </a:lnTo>
+                  <a:lnTo>
+                    <a:pt x="2743435" y="987458"/>
+                  </a:lnTo>
+                  <a:lnTo>
+                    <a:pt x="2673090" y="991426"/>
+                  </a:lnTo>
+                  <a:lnTo>
+                    <a:pt x="2602746" y="995336"/>
+                  </a:lnTo>
+                  <a:lnTo>
+                    <a:pt x="2532401" y="999188"/>
+                  </a:lnTo>
+                  <a:lnTo>
+                    <a:pt x="2462057" y="1002983"/>
+                  </a:lnTo>
+                  <a:lnTo>
+                    <a:pt x="2391712" y="1006723"/>
+                  </a:lnTo>
+                  <a:lnTo>
+                    <a:pt x="2321368" y="1010408"/>
+                  </a:lnTo>
+                  <a:lnTo>
+                    <a:pt x="2251023" y="1014038"/>
+                  </a:lnTo>
+                  <a:lnTo>
+                    <a:pt x="2180679" y="1017615"/>
+                  </a:lnTo>
+                  <a:lnTo>
+                    <a:pt x="2110334" y="1021139"/>
+                  </a:lnTo>
+                  <a:lnTo>
+                    <a:pt x="2039990" y="1024612"/>
+                  </a:lnTo>
+                  <a:lnTo>
+                    <a:pt x="1969645" y="1028033"/>
+                  </a:lnTo>
+                  <a:lnTo>
+                    <a:pt x="1899301" y="1031404"/>
+                  </a:lnTo>
+                  <a:lnTo>
+                    <a:pt x="1828956" y="1034726"/>
+                  </a:lnTo>
+                  <a:lnTo>
+                    <a:pt x="1758612" y="1037998"/>
+                  </a:lnTo>
+                  <a:lnTo>
+                    <a:pt x="1688267" y="1041223"/>
+                  </a:lnTo>
+                  <a:lnTo>
+                    <a:pt x="1617923" y="1044400"/>
+                  </a:lnTo>
+                  <a:lnTo>
+                    <a:pt x="1547578" y="1047530"/>
+                  </a:lnTo>
+                  <a:lnTo>
+                    <a:pt x="1477234" y="1050615"/>
+                  </a:lnTo>
+                  <a:lnTo>
+                    <a:pt x="1406889" y="1053654"/>
+                  </a:lnTo>
+                  <a:lnTo>
+                    <a:pt x="1336545" y="1056648"/>
+                  </a:lnTo>
+                  <a:lnTo>
+                    <a:pt x="1266200" y="1059598"/>
+                  </a:lnTo>
+                  <a:lnTo>
+                    <a:pt x="1195856" y="1062505"/>
+                  </a:lnTo>
+                  <a:lnTo>
+                    <a:pt x="1125511" y="1065369"/>
+                  </a:lnTo>
+                  <a:lnTo>
+                    <a:pt x="1055167" y="1068191"/>
+                  </a:lnTo>
+                  <a:lnTo>
+                    <a:pt x="984822" y="1070971"/>
+                  </a:lnTo>
+                  <a:lnTo>
+                    <a:pt x="914478" y="1073711"/>
+                  </a:lnTo>
+                  <a:lnTo>
+                    <a:pt x="844133" y="1076410"/>
+                  </a:lnTo>
+                  <a:lnTo>
+                    <a:pt x="773789" y="1079069"/>
+                  </a:lnTo>
+                  <a:lnTo>
+                    <a:pt x="703444" y="1081690"/>
+                  </a:lnTo>
+                  <a:lnTo>
+                    <a:pt x="633100" y="1084271"/>
+                  </a:lnTo>
+                  <a:lnTo>
+                    <a:pt x="562755" y="1086815"/>
+                  </a:lnTo>
+                  <a:lnTo>
+                    <a:pt x="492411" y="1089322"/>
+                  </a:lnTo>
+                  <a:lnTo>
+                    <a:pt x="422066" y="1091791"/>
+                  </a:lnTo>
+                  <a:lnTo>
+                    <a:pt x="351722" y="1094224"/>
+                  </a:lnTo>
+                  <a:lnTo>
+                    <a:pt x="281377" y="1096622"/>
+                  </a:lnTo>
+                  <a:lnTo>
+                    <a:pt x="211033" y="1098984"/>
+                  </a:lnTo>
+                  <a:lnTo>
+                    <a:pt x="140688" y="1101311"/>
+                  </a:lnTo>
+                  <a:lnTo>
+                    <a:pt x="70344" y="1103605"/>
+                  </a:lnTo>
+                  <a:lnTo>
+                    <a:pt x="0" y="1105864"/>
+                  </a:lnTo>
+                  <a:close/>
+                </a:path>
+              </a:pathLst>
+            </a:custGeom>
+            <a:solidFill>
+              <a:srgbClr val="FF8C00">
+                <a:alpha val="20000"/>
+              </a:srgbClr>
+            </a:solidFill>
+          </p:spPr>
+          <p:txBody>
+            <a:bodyPr/>
+            <a:lstStyle/>
+            <a:p/>
+          </p:txBody>
+        </p:sp>
+        <p:sp>
+          <p:nvSpPr>
+            <p:cNvPr id="68" name="pl68"/>
+            <p:cNvSpPr/>
+            <p:nvPr/>
+          </p:nvSpPr>
+          <p:spPr>
+            <a:xfrm>
+              <a:off x="2979167" y="4336484"/>
+              <a:ext cx="5220248" cy="957387"/>
+            </a:xfrm>
+            <a:custGeom>
+              <a:avLst/>
+              <a:pathLst>
+                <a:path w="5220248" h="957387">
+                  <a:moveTo>
+                    <a:pt x="0" y="0"/>
+                  </a:moveTo>
+                  <a:lnTo>
+                    <a:pt x="14756" y="18169"/>
+                  </a:lnTo>
+                  <a:lnTo>
+                    <a:pt x="85101" y="99122"/>
+                  </a:lnTo>
+                  <a:lnTo>
+                    <a:pt x="155445" y="174785"/>
+                  </a:lnTo>
+                  <a:lnTo>
+                    <a:pt x="225790" y="245506"/>
+                  </a:lnTo>
+                  <a:lnTo>
+                    <a:pt x="296134" y="311606"/>
+                  </a:lnTo>
+                  <a:lnTo>
+                    <a:pt x="366479" y="373387"/>
+                  </a:lnTo>
+                  <a:lnTo>
+                    <a:pt x="436823" y="431131"/>
+                  </a:lnTo>
+                  <a:lnTo>
+                    <a:pt x="507168" y="485103"/>
+                  </a:lnTo>
+                  <a:lnTo>
+                    <a:pt x="577512" y="535548"/>
+                  </a:lnTo>
+                  <a:lnTo>
+                    <a:pt x="647857" y="582698"/>
+                  </a:lnTo>
+                  <a:lnTo>
+                    <a:pt x="718201" y="626767"/>
+                  </a:lnTo>
+                  <a:lnTo>
+                    <a:pt x="788546" y="667957"/>
+                  </a:lnTo>
+                  <a:lnTo>
+                    <a:pt x="858890" y="706456"/>
+                  </a:lnTo>
+                  <a:lnTo>
+                    <a:pt x="929235" y="742439"/>
+                  </a:lnTo>
+                  <a:lnTo>
+                    <a:pt x="999579" y="776071"/>
+                  </a:lnTo>
+                  <a:lnTo>
+                    <a:pt x="1069924" y="807506"/>
+                  </a:lnTo>
+                  <a:lnTo>
+                    <a:pt x="1140268" y="836887"/>
+                  </a:lnTo>
+                  <a:lnTo>
+                    <a:pt x="1210613" y="864349"/>
+                  </a:lnTo>
+                  <a:lnTo>
+                    <a:pt x="1280957" y="890016"/>
+                  </a:lnTo>
+                  <a:lnTo>
+                    <a:pt x="1351302" y="914006"/>
+                  </a:lnTo>
+                  <a:lnTo>
+                    <a:pt x="1421646" y="936429"/>
+                  </a:lnTo>
+                  <a:lnTo>
+                    <a:pt x="1491991" y="957387"/>
+                  </a:lnTo>
+                  <a:lnTo>
+                    <a:pt x="1562335" y="953506"/>
+                  </a:lnTo>
+                  <a:lnTo>
+                    <a:pt x="1632679" y="948972"/>
+                  </a:lnTo>
+                  <a:lnTo>
+                    <a:pt x="1703024" y="944370"/>
+                  </a:lnTo>
+                  <a:lnTo>
+                    <a:pt x="1773368" y="939699"/>
+                  </a:lnTo>
+                  <a:lnTo>
+                    <a:pt x="1843713" y="934959"/>
+                  </a:lnTo>
+                  <a:lnTo>
+                    <a:pt x="1914057" y="930148"/>
+                  </a:lnTo>
+                  <a:lnTo>
+                    <a:pt x="1984402" y="925265"/>
+                  </a:lnTo>
+                  <a:lnTo>
+                    <a:pt x="2054746" y="920310"/>
+                  </a:lnTo>
+                  <a:lnTo>
+                    <a:pt x="2125091" y="915280"/>
+                  </a:lnTo>
+                  <a:lnTo>
+                    <a:pt x="2195435" y="910175"/>
+                  </a:lnTo>
+                  <a:lnTo>
+                    <a:pt x="2265780" y="904994"/>
+                  </a:lnTo>
+                  <a:lnTo>
+                    <a:pt x="2336124" y="899736"/>
+                  </a:lnTo>
+                  <a:lnTo>
+                    <a:pt x="2406469" y="894399"/>
+                  </a:lnTo>
+                  <a:lnTo>
+                    <a:pt x="2476813" y="888982"/>
+                  </a:lnTo>
+                  <a:lnTo>
+                    <a:pt x="2547158" y="883485"/>
+                  </a:lnTo>
+                  <a:lnTo>
+                    <a:pt x="2617502" y="877905"/>
+                  </a:lnTo>
+                  <a:lnTo>
+                    <a:pt x="2687847" y="872242"/>
+                  </a:lnTo>
+                  <a:lnTo>
+                    <a:pt x="2758191" y="866495"/>
+                  </a:lnTo>
+                  <a:lnTo>
+                    <a:pt x="2828536" y="860662"/>
+                  </a:lnTo>
+                  <a:lnTo>
+                    <a:pt x="2898880" y="854742"/>
+                  </a:lnTo>
+                  <a:lnTo>
+                    <a:pt x="2969225" y="848733"/>
+                  </a:lnTo>
+                  <a:lnTo>
+                    <a:pt x="3039569" y="842635"/>
+                  </a:lnTo>
+                  <a:lnTo>
+                    <a:pt x="3109914" y="836445"/>
+                  </a:lnTo>
+                  <a:lnTo>
+                    <a:pt x="3180258" y="830163"/>
+                  </a:lnTo>
+                  <a:lnTo>
+                    <a:pt x="3250603" y="823788"/>
+                  </a:lnTo>
+                  <a:lnTo>
+                    <a:pt x="3320947" y="817317"/>
+                  </a:lnTo>
+                  <a:lnTo>
+                    <a:pt x="3391292" y="810750"/>
+                  </a:lnTo>
+                  <a:lnTo>
+                    <a:pt x="3461636" y="804084"/>
+                  </a:lnTo>
+                  <a:lnTo>
+                    <a:pt x="3531981" y="797319"/>
+                  </a:lnTo>
+                  <a:lnTo>
+                    <a:pt x="3602325" y="790453"/>
+                  </a:lnTo>
+                  <a:lnTo>
+                    <a:pt x="3672670" y="783485"/>
+                  </a:lnTo>
+                  <a:lnTo>
+                    <a:pt x="3743014" y="776412"/>
+                  </a:lnTo>
+                  <a:lnTo>
+                    <a:pt x="3813359" y="769234"/>
+                  </a:lnTo>
+                  <a:lnTo>
+                    <a:pt x="3883703" y="761949"/>
+                  </a:lnTo>
+                  <a:lnTo>
+                    <a:pt x="3954048" y="754555"/>
+                  </a:lnTo>
+                  <a:lnTo>
+                    <a:pt x="4024392" y="747051"/>
+                  </a:lnTo>
+                  <a:lnTo>
+                    <a:pt x="4094737" y="739434"/>
+                  </a:lnTo>
+                  <a:lnTo>
+                    <a:pt x="4165081" y="731704"/>
+                  </a:lnTo>
+                  <a:lnTo>
+                    <a:pt x="4235426" y="723858"/>
+                  </a:lnTo>
+                  <a:lnTo>
+                    <a:pt x="4305770" y="715896"/>
+                  </a:lnTo>
+                  <a:lnTo>
+                    <a:pt x="4376115" y="707814"/>
+                  </a:lnTo>
+                  <a:lnTo>
+                    <a:pt x="4446459" y="699612"/>
+                  </a:lnTo>
+                  <a:lnTo>
+                    <a:pt x="4516804" y="691287"/>
+                  </a:lnTo>
+                  <a:lnTo>
+                    <a:pt x="4587148" y="682838"/>
+                  </a:lnTo>
+                  <a:lnTo>
+                    <a:pt x="4657493" y="674263"/>
+                  </a:lnTo>
+                  <a:lnTo>
+                    <a:pt x="4727837" y="665560"/>
+                  </a:lnTo>
+                  <a:lnTo>
+                    <a:pt x="4798182" y="656727"/>
+                  </a:lnTo>
+                  <a:lnTo>
+                    <a:pt x="4868526" y="647762"/>
+                  </a:lnTo>
+                  <a:lnTo>
+                    <a:pt x="4938871" y="638663"/>
+                  </a:lnTo>
+                  <a:lnTo>
+                    <a:pt x="5009215" y="629429"/>
+                  </a:lnTo>
+                  <a:lnTo>
+                    <a:pt x="5079560" y="620056"/>
+                  </a:lnTo>
+                  <a:lnTo>
+                    <a:pt x="5149904" y="610544"/>
+                  </a:lnTo>
+                  <a:lnTo>
+                    <a:pt x="5220248" y="600889"/>
+                  </a:lnTo>
+                </a:path>
+              </a:pathLst>
+            </a:custGeom>
+          </p:spPr>
+          <p:txBody>
+            <a:bodyPr/>
+            <a:lstStyle/>
+            <a:p/>
+          </p:txBody>
+        </p:sp>
+        <p:sp>
+          <p:nvSpPr>
+            <p:cNvPr id="69" name="pl69"/>
+            <p:cNvSpPr/>
+            <p:nvPr/>
+          </p:nvSpPr>
+          <p:spPr>
+            <a:xfrm>
+              <a:off x="1235312" y="5294458"/>
+              <a:ext cx="6964104" cy="290880"/>
+            </a:xfrm>
+            <a:custGeom>
+              <a:avLst/>
+              <a:pathLst>
+                <a:path w="6964104" h="290880">
+                  <a:moveTo>
+                    <a:pt x="6964104" y="290880"/>
+                  </a:moveTo>
+                  <a:lnTo>
+                    <a:pt x="6893760" y="290296"/>
+                  </a:lnTo>
+                  <a:lnTo>
+                    <a:pt x="6823415" y="289672"/>
+                  </a:lnTo>
+                  <a:lnTo>
+                    <a:pt x="6753071" y="289004"/>
+                  </a:lnTo>
+                  <a:lnTo>
+                    <a:pt x="6682726" y="288289"/>
+                  </a:lnTo>
+                  <a:lnTo>
+                    <a:pt x="6612382" y="287524"/>
+                  </a:lnTo>
+                  <a:lnTo>
+                    <a:pt x="6542037" y="286706"/>
+                  </a:lnTo>
+                  <a:lnTo>
+                    <a:pt x="6471693" y="285831"/>
+                  </a:lnTo>
+                  <a:lnTo>
+                    <a:pt x="6401348" y="284894"/>
+                  </a:lnTo>
+                  <a:lnTo>
+                    <a:pt x="6331004" y="283892"/>
+                  </a:lnTo>
+                  <a:lnTo>
+                    <a:pt x="6260659" y="282820"/>
+                  </a:lnTo>
+                  <a:lnTo>
+                    <a:pt x="6190315" y="281673"/>
+                  </a:lnTo>
+                  <a:lnTo>
+                    <a:pt x="6119970" y="280446"/>
+                  </a:lnTo>
+                  <a:lnTo>
+                    <a:pt x="6049626" y="279133"/>
+                  </a:lnTo>
+                  <a:lnTo>
+                    <a:pt x="5979281" y="277729"/>
+                  </a:lnTo>
+                  <a:lnTo>
+                    <a:pt x="5908937" y="276226"/>
+                  </a:lnTo>
+                  <a:lnTo>
+                    <a:pt x="5838592" y="274618"/>
+                  </a:lnTo>
+                  <a:lnTo>
+                    <a:pt x="5768248" y="272898"/>
+                  </a:lnTo>
+                  <a:lnTo>
+                    <a:pt x="5697903" y="271057"/>
+                  </a:lnTo>
+                  <a:lnTo>
+                    <a:pt x="5627559" y="269088"/>
+                  </a:lnTo>
+                  <a:lnTo>
+                    <a:pt x="5557214" y="266981"/>
+                  </a:lnTo>
+                  <a:lnTo>
+                    <a:pt x="5486870" y="264727"/>
+                  </a:lnTo>
+                  <a:lnTo>
+                    <a:pt x="5416525" y="262315"/>
+                  </a:lnTo>
+                  <a:lnTo>
+                    <a:pt x="5346181" y="259735"/>
+                  </a:lnTo>
+                  <a:lnTo>
+                    <a:pt x="5275836" y="256974"/>
+                  </a:lnTo>
+                  <a:lnTo>
+                    <a:pt x="5205492" y="254020"/>
+                  </a:lnTo>
+                  <a:lnTo>
+                    <a:pt x="5135147" y="250860"/>
+                  </a:lnTo>
+                  <a:lnTo>
+                    <a:pt x="5064803" y="247479"/>
+                  </a:lnTo>
+                  <a:lnTo>
+                    <a:pt x="4994458" y="243862"/>
+                  </a:lnTo>
+                  <a:lnTo>
+                    <a:pt x="4924114" y="239991"/>
+                  </a:lnTo>
+                  <a:lnTo>
+                    <a:pt x="4853769" y="235851"/>
+                  </a:lnTo>
+                  <a:lnTo>
+                    <a:pt x="4783425" y="231420"/>
+                  </a:lnTo>
+                  <a:lnTo>
+                    <a:pt x="4713080" y="226680"/>
+                  </a:lnTo>
+                  <a:lnTo>
+                    <a:pt x="4642736" y="221609"/>
+                  </a:lnTo>
+                  <a:lnTo>
+                    <a:pt x="4572391" y="216183"/>
+                  </a:lnTo>
+                  <a:lnTo>
+                    <a:pt x="4502047" y="210378"/>
+                  </a:lnTo>
+                  <a:lnTo>
+                    <a:pt x="4431702" y="204168"/>
+                  </a:lnTo>
+                  <a:lnTo>
+                    <a:pt x="4361358" y="197523"/>
+                  </a:lnTo>
+                  <a:lnTo>
+                    <a:pt x="4291013" y="190413"/>
+                  </a:lnTo>
+                  <a:lnTo>
+                    <a:pt x="4220669" y="182807"/>
+                  </a:lnTo>
+                  <a:lnTo>
+                    <a:pt x="4150324" y="174668"/>
+                  </a:lnTo>
+                  <a:lnTo>
+                    <a:pt x="4079980" y="165961"/>
+                  </a:lnTo>
+                  <a:lnTo>
+                    <a:pt x="4009635" y="156646"/>
+                  </a:lnTo>
+                  <a:lnTo>
+                    <a:pt x="3939291" y="146679"/>
+                  </a:lnTo>
+                  <a:lnTo>
+                    <a:pt x="3868946" y="136015"/>
+                  </a:lnTo>
+                  <a:lnTo>
+                    <a:pt x="3798602" y="124606"/>
+                  </a:lnTo>
+                  <a:lnTo>
+                    <a:pt x="3728257" y="112400"/>
+                  </a:lnTo>
+                  <a:lnTo>
+                    <a:pt x="3657913" y="99340"/>
+                  </a:lnTo>
+                  <a:lnTo>
+                    <a:pt x="3587569" y="85367"/>
+                  </a:lnTo>
+                  <a:lnTo>
+                    <a:pt x="3517224" y="70418"/>
+                  </a:lnTo>
+                  <a:lnTo>
+                    <a:pt x="3446880" y="54423"/>
+                  </a:lnTo>
+                  <a:lnTo>
+                    <a:pt x="3376535" y="37311"/>
+                  </a:lnTo>
+                  <a:lnTo>
+                    <a:pt x="3306191" y="19002"/>
+                  </a:lnTo>
+                  <a:lnTo>
+                    <a:pt x="3235846" y="0"/>
+                  </a:lnTo>
+                  <a:lnTo>
+                    <a:pt x="3165502" y="4401"/>
+                  </a:lnTo>
+                  <a:lnTo>
+                    <a:pt x="3095157" y="8738"/>
+                  </a:lnTo>
+                  <a:lnTo>
+                    <a:pt x="3024813" y="13011"/>
+                  </a:lnTo>
+                  <a:lnTo>
+                    <a:pt x="2954468" y="17222"/>
+                  </a:lnTo>
+                  <a:lnTo>
+                    <a:pt x="2884124" y="21370"/>
+                  </a:lnTo>
+                  <a:lnTo>
+                    <a:pt x="2813779" y="25457"/>
+                  </a:lnTo>
+                  <a:lnTo>
+                    <a:pt x="2743435" y="29485"/>
+                  </a:lnTo>
+                  <a:lnTo>
+                    <a:pt x="2673090" y="33452"/>
+                  </a:lnTo>
+                  <a:lnTo>
+                    <a:pt x="2602746" y="37362"/>
+                  </a:lnTo>
+                  <a:lnTo>
+                    <a:pt x="2532401" y="41214"/>
+                  </a:lnTo>
+                  <a:lnTo>
+                    <a:pt x="2462057" y="45010"/>
+                  </a:lnTo>
+                  <a:lnTo>
+                    <a:pt x="2391712" y="48749"/>
+                  </a:lnTo>
+                  <a:lnTo>
+                    <a:pt x="2321368" y="52434"/>
+                  </a:lnTo>
+                  <a:lnTo>
+                    <a:pt x="2251023" y="56064"/>
+                  </a:lnTo>
+                  <a:lnTo>
+                    <a:pt x="2180679" y="59641"/>
+                  </a:lnTo>
+                  <a:lnTo>
+                    <a:pt x="2110334" y="63165"/>
+                  </a:lnTo>
+                  <a:lnTo>
+                    <a:pt x="2039990" y="66638"/>
+                  </a:lnTo>
+                  <a:lnTo>
+                    <a:pt x="1969645" y="70059"/>
+                  </a:lnTo>
+                  <a:lnTo>
+                    <a:pt x="1899301" y="73431"/>
+                  </a:lnTo>
+                  <a:lnTo>
+                    <a:pt x="1828956" y="76752"/>
+                  </a:lnTo>
+                  <a:lnTo>
+                    <a:pt x="1758612" y="80025"/>
+                  </a:lnTo>
+                  <a:lnTo>
+                    <a:pt x="1688267" y="83249"/>
+                  </a:lnTo>
+                  <a:lnTo>
+                    <a:pt x="1617923" y="86426"/>
+                  </a:lnTo>
+                  <a:lnTo>
+                    <a:pt x="1547578" y="89557"/>
+                  </a:lnTo>
+                  <a:lnTo>
+                    <a:pt x="1477234" y="92641"/>
+                  </a:lnTo>
+                  <a:lnTo>
+                    <a:pt x="1406889" y="95680"/>
+                  </a:lnTo>
+                  <a:lnTo>
+                    <a:pt x="1336545" y="98674"/>
+                  </a:lnTo>
+                  <a:lnTo>
+                    <a:pt x="1266200" y="101624"/>
+                  </a:lnTo>
+                  <a:lnTo>
+                    <a:pt x="1195856" y="104531"/>
+                  </a:lnTo>
+                  <a:lnTo>
+                    <a:pt x="1125511" y="107395"/>
+                  </a:lnTo>
+                  <a:lnTo>
+                    <a:pt x="1055167" y="110217"/>
+                  </a:lnTo>
+                  <a:lnTo>
+                    <a:pt x="984822" y="112997"/>
+                  </a:lnTo>
+                  <a:lnTo>
+                    <a:pt x="914478" y="115737"/>
+                  </a:lnTo>
+                  <a:lnTo>
+                    <a:pt x="844133" y="118436"/>
+                  </a:lnTo>
+                  <a:lnTo>
+                    <a:pt x="773789" y="121096"/>
+                  </a:lnTo>
+                  <a:lnTo>
+                    <a:pt x="703444" y="123716"/>
+                  </a:lnTo>
+                  <a:lnTo>
+                    <a:pt x="633100" y="126298"/>
+                  </a:lnTo>
+                  <a:lnTo>
+                    <a:pt x="562755" y="128842"/>
+                  </a:lnTo>
+                  <a:lnTo>
+                    <a:pt x="492411" y="131348"/>
+                  </a:lnTo>
+                  <a:lnTo>
+                    <a:pt x="422066" y="133817"/>
+                  </a:lnTo>
+                  <a:lnTo>
+                    <a:pt x="351722" y="136251"/>
+                  </a:lnTo>
+                  <a:lnTo>
+                    <a:pt x="281377" y="138648"/>
+                  </a:lnTo>
+                  <a:lnTo>
+                    <a:pt x="211033" y="141010"/>
+                  </a:lnTo>
+                  <a:lnTo>
+                    <a:pt x="140688" y="143338"/>
+                  </a:lnTo>
+                  <a:lnTo>
+                    <a:pt x="70344" y="145631"/>
+                  </a:lnTo>
+                  <a:lnTo>
+                    <a:pt x="0" y="147890"/>
+                  </a:lnTo>
+                </a:path>
+              </a:pathLst>
+            </a:custGeom>
+          </p:spPr>
+          <p:txBody>
+            <a:bodyPr/>
+            <a:lstStyle/>
+            <a:p/>
+          </p:txBody>
+        </p:sp>
+        <p:sp>
+          <p:nvSpPr>
+            <p:cNvPr id="70" name="pl70"/>
+            <p:cNvSpPr/>
+            <p:nvPr/>
+          </p:nvSpPr>
+          <p:spPr>
+            <a:xfrm>
+              <a:off x="1235312" y="4586016"/>
+              <a:ext cx="6964104" cy="933649"/>
+            </a:xfrm>
+            <a:custGeom>
+              <a:avLst/>
+              <a:pathLst>
+                <a:path w="6964104" h="933649">
+                  <a:moveTo>
+                    <a:pt x="0" y="0"/>
+                  </a:moveTo>
+                  <a:lnTo>
+                    <a:pt x="70344" y="26229"/>
+                  </a:lnTo>
+                  <a:lnTo>
+                    <a:pt x="140688" y="51775"/>
+                  </a:lnTo>
+                  <a:lnTo>
+                    <a:pt x="211033" y="76656"/>
+                  </a:lnTo>
+                  <a:lnTo>
+                    <a:pt x="281377" y="100890"/>
+                  </a:lnTo>
+                  <a:lnTo>
+                    <a:pt x="351722" y="124493"/>
+                  </a:lnTo>
+                  <a:lnTo>
+                    <a:pt x="422066" y="147481"/>
+                  </a:lnTo>
+                  <a:lnTo>
+                    <a:pt x="492411" y="169872"/>
+                  </a:lnTo>
+                  <a:lnTo>
+                    <a:pt x="562755" y="191679"/>
+                  </a:lnTo>
+                  <a:lnTo>
+                    <a:pt x="633100" y="212919"/>
+                  </a:lnTo>
+                  <a:lnTo>
+                    <a:pt x="703444" y="233606"/>
+                  </a:lnTo>
+                  <a:lnTo>
+                    <a:pt x="773789" y="253754"/>
+                  </a:lnTo>
+                  <a:lnTo>
+                    <a:pt x="844133" y="273378"/>
+                  </a:lnTo>
+                  <a:lnTo>
+                    <a:pt x="914478" y="292491"/>
+                  </a:lnTo>
+                  <a:lnTo>
+                    <a:pt x="984822" y="311107"/>
+                  </a:lnTo>
+                  <a:lnTo>
+                    <a:pt x="1055167" y="329238"/>
+                  </a:lnTo>
+                  <a:lnTo>
+                    <a:pt x="1125511" y="346897"/>
+                  </a:lnTo>
+                  <a:lnTo>
+                    <a:pt x="1195856" y="364097"/>
+                  </a:lnTo>
+                  <a:lnTo>
+                    <a:pt x="1266200" y="380849"/>
+                  </a:lnTo>
+                  <a:lnTo>
+                    <a:pt x="1336545" y="397164"/>
+                  </a:lnTo>
+                  <a:lnTo>
+                    <a:pt x="1406889" y="413055"/>
+                  </a:lnTo>
+                  <a:lnTo>
+                    <a:pt x="1477234" y="428533"/>
+                  </a:lnTo>
+                  <a:lnTo>
+                    <a:pt x="1547578" y="443607"/>
+                  </a:lnTo>
+                  <a:lnTo>
+                    <a:pt x="1617923" y="458290"/>
+                  </a:lnTo>
+                  <a:lnTo>
+                    <a:pt x="1688267" y="472590"/>
+                  </a:lnTo>
+                  <a:lnTo>
+                    <a:pt x="1758612" y="486518"/>
+                  </a:lnTo>
+                  <a:lnTo>
+                    <a:pt x="1828956" y="500083"/>
+                  </a:lnTo>
+                  <a:lnTo>
+                    <a:pt x="1899301" y="513295"/>
+                  </a:lnTo>
+                  <a:lnTo>
+                    <a:pt x="1969645" y="526163"/>
+                  </a:lnTo>
+                  <a:lnTo>
+                    <a:pt x="2039990" y="538697"/>
+                  </a:lnTo>
+                  <a:lnTo>
+                    <a:pt x="2110334" y="550904"/>
+                  </a:lnTo>
+                  <a:lnTo>
+                    <a:pt x="2180679" y="562793"/>
+                  </a:lnTo>
+                  <a:lnTo>
+                    <a:pt x="2251023" y="574373"/>
+                  </a:lnTo>
+                  <a:lnTo>
+                    <a:pt x="2321368" y="585651"/>
+                  </a:lnTo>
+                  <a:lnTo>
+                    <a:pt x="2391712" y="596636"/>
+                  </a:lnTo>
+                  <a:lnTo>
+                    <a:pt x="2462057" y="607335"/>
+                  </a:lnTo>
+                  <a:lnTo>
+                    <a:pt x="2532401" y="617756"/>
+                  </a:lnTo>
+                  <a:lnTo>
+                    <a:pt x="2602746" y="627905"/>
+                  </a:lnTo>
+                  <a:lnTo>
+                    <a:pt x="2673090" y="637790"/>
+                  </a:lnTo>
+                  <a:lnTo>
+                    <a:pt x="2743435" y="647418"/>
+                  </a:lnTo>
+                  <a:lnTo>
+                    <a:pt x="2813779" y="656795"/>
+                  </a:lnTo>
+                  <a:lnTo>
+                    <a:pt x="2884124" y="665928"/>
+                  </a:lnTo>
+                  <a:lnTo>
+                    <a:pt x="2954468" y="674823"/>
+                  </a:lnTo>
+                  <a:lnTo>
+                    <a:pt x="3024813" y="683487"/>
+                  </a:lnTo>
+                  <a:lnTo>
+                    <a:pt x="3095157" y="691925"/>
+                  </a:lnTo>
+                  <a:lnTo>
+                    <a:pt x="3165502" y="700144"/>
+                  </a:lnTo>
+                  <a:lnTo>
+                    <a:pt x="3235846" y="708149"/>
+                  </a:lnTo>
+                  <a:lnTo>
+                    <a:pt x="3306191" y="715945"/>
+                  </a:lnTo>
+                  <a:lnTo>
+                    <a:pt x="3376535" y="723539"/>
+                  </a:lnTo>
+                  <a:lnTo>
+                    <a:pt x="3446880" y="730934"/>
+                  </a:lnTo>
+                  <a:lnTo>
+                    <a:pt x="3517224" y="738138"/>
+                  </a:lnTo>
+                  <a:lnTo>
+                    <a:pt x="3587569" y="745153"/>
+                  </a:lnTo>
+                  <a:lnTo>
+                    <a:pt x="3657913" y="751987"/>
+                  </a:lnTo>
+                  <a:lnTo>
+                    <a:pt x="3728257" y="758642"/>
+                  </a:lnTo>
+                  <a:lnTo>
+                    <a:pt x="3798602" y="765124"/>
+                  </a:lnTo>
+                  <a:lnTo>
+                    <a:pt x="3868946" y="771437"/>
+                  </a:lnTo>
+                  <a:lnTo>
+                    <a:pt x="3939291" y="777586"/>
+                  </a:lnTo>
+                  <a:lnTo>
+                    <a:pt x="4009635" y="783575"/>
+                  </a:lnTo>
+                  <a:lnTo>
+                    <a:pt x="4079980" y="789408"/>
+                  </a:lnTo>
+                  <a:lnTo>
+                    <a:pt x="4150324" y="795089"/>
+                  </a:lnTo>
+                  <a:lnTo>
+                    <a:pt x="4220669" y="800623"/>
+                  </a:lnTo>
+                  <a:lnTo>
+                    <a:pt x="4291013" y="806012"/>
+                  </a:lnTo>
+                  <a:lnTo>
+                    <a:pt x="4361358" y="811261"/>
+                  </a:lnTo>
+                  <a:lnTo>
+                    <a:pt x="4431702" y="816374"/>
+                  </a:lnTo>
+                  <a:lnTo>
+                    <a:pt x="4502047" y="821353"/>
+                  </a:lnTo>
+                  <a:lnTo>
+                    <a:pt x="4572391" y="826203"/>
+                  </a:lnTo>
+                  <a:lnTo>
+                    <a:pt x="4642736" y="830926"/>
+                  </a:lnTo>
+                  <a:lnTo>
+                    <a:pt x="4713080" y="835527"/>
+                  </a:lnTo>
+                  <a:lnTo>
+                    <a:pt x="4783425" y="840007"/>
+                  </a:lnTo>
+                  <a:lnTo>
+                    <a:pt x="4853769" y="844372"/>
+                  </a:lnTo>
+                  <a:lnTo>
+                    <a:pt x="4924114" y="848622"/>
+                  </a:lnTo>
+                  <a:lnTo>
+                    <a:pt x="4994458" y="852762"/>
+                  </a:lnTo>
+                  <a:lnTo>
+                    <a:pt x="5064803" y="856794"/>
+                  </a:lnTo>
+                  <a:lnTo>
+                    <a:pt x="5135147" y="860721"/>
+                  </a:lnTo>
+                  <a:lnTo>
+                    <a:pt x="5205492" y="864546"/>
+                  </a:lnTo>
+                  <a:lnTo>
+                    <a:pt x="5275836" y="868272"/>
+                  </a:lnTo>
+                  <a:lnTo>
+                    <a:pt x="5346181" y="871900"/>
+                  </a:lnTo>
+                  <a:lnTo>
+                    <a:pt x="5416525" y="875434"/>
+                  </a:lnTo>
+                  <a:lnTo>
+                    <a:pt x="5486870" y="878876"/>
+                  </a:lnTo>
+                  <a:lnTo>
+                    <a:pt x="5557214" y="882229"/>
+                  </a:lnTo>
+                  <a:lnTo>
+                    <a:pt x="5627559" y="885494"/>
+                  </a:lnTo>
+                  <a:lnTo>
+                    <a:pt x="5697903" y="888674"/>
+                  </a:lnTo>
+                  <a:lnTo>
+                    <a:pt x="5768248" y="891771"/>
+                  </a:lnTo>
+                  <a:lnTo>
+                    <a:pt x="5838592" y="894788"/>
+                  </a:lnTo>
+                  <a:lnTo>
+                    <a:pt x="5908937" y="897727"/>
+                  </a:lnTo>
+                  <a:lnTo>
+                    <a:pt x="5979281" y="900588"/>
+                  </a:lnTo>
+                  <a:lnTo>
+                    <a:pt x="6049626" y="903376"/>
+                  </a:lnTo>
+                  <a:lnTo>
+                    <a:pt x="6119970" y="906090"/>
+                  </a:lnTo>
+                  <a:lnTo>
+                    <a:pt x="6190315" y="908734"/>
+                  </a:lnTo>
+                  <a:lnTo>
+                    <a:pt x="6260659" y="911310"/>
+                  </a:lnTo>
+                  <a:lnTo>
+                    <a:pt x="6331004" y="913818"/>
+                  </a:lnTo>
+                  <a:lnTo>
+                    <a:pt x="6401348" y="916261"/>
+                  </a:lnTo>
+                  <a:lnTo>
+                    <a:pt x="6471693" y="918640"/>
+                  </a:lnTo>
+                  <a:lnTo>
+                    <a:pt x="6542037" y="920957"/>
+                  </a:lnTo>
+                  <a:lnTo>
+                    <a:pt x="6612382" y="923215"/>
+                  </a:lnTo>
+                  <a:lnTo>
+                    <a:pt x="6682726" y="925413"/>
+                  </a:lnTo>
+                  <a:lnTo>
+                    <a:pt x="6753071" y="927554"/>
+                  </a:lnTo>
+                  <a:lnTo>
+                    <a:pt x="6823415" y="929639"/>
+                  </a:lnTo>
+                  <a:lnTo>
+                    <a:pt x="6893760" y="931670"/>
+                  </a:lnTo>
+                  <a:lnTo>
+                    <a:pt x="6964104" y="933649"/>
+                  </a:lnTo>
+                </a:path>
+              </a:pathLst>
+            </a:custGeom>
+            <a:ln w="27101" cap="flat">
+              <a:solidFill>
+                <a:srgbClr val="FF8C00">
+                  <a:alpha val="100000"/>
+                </a:srgbClr>
+              </a:solidFill>
+              <a:prstDash val="solid"/>
+              <a:round/>
+            </a:ln>
+          </p:spPr>
+          <p:txBody>
+            <a:bodyPr/>
+            <a:lstStyle/>
+            <a:p/>
+          </p:txBody>
+        </p:sp>
+        <p:sp>
+          <p:nvSpPr>
+            <p:cNvPr id="71" name="pl71"/>
+            <p:cNvSpPr/>
+            <p:nvPr/>
+          </p:nvSpPr>
+          <p:spPr>
+            <a:xfrm>
+              <a:off x="887106" y="5294352"/>
+              <a:ext cx="7660515" cy="0"/>
+            </a:xfrm>
+            <a:custGeom>
+              <a:avLst/>
+              <a:pathLst>
+                <a:path w="7660515" h="0">
+                  <a:moveTo>
+                    <a:pt x="0" y="0"/>
+                  </a:moveTo>
+                  <a:lnTo>
+                    <a:pt x="7660515" y="0"/>
+                  </a:lnTo>
+                  <a:lnTo>
+                    <a:pt x="7660515" y="0"/>
+                  </a:lnTo>
+                </a:path>
+              </a:pathLst>
+            </a:custGeom>
+            <a:ln w="13550" cap="flat">
+              <a:solidFill>
+                <a:srgbClr val="7F7F7F">
+                  <a:alpha val="100000"/>
+                </a:srgbClr>
+              </a:solidFill>
+              <a:prstDash val="dash"/>
+              <a:round/>
+            </a:ln>
+          </p:spPr>
+          <p:txBody>
+            <a:bodyPr/>
+            <a:lstStyle/>
+            <a:p/>
+          </p:txBody>
+        </p:sp>
+        <p:sp>
+          <p:nvSpPr>
+            <p:cNvPr id="72" name="pl72"/>
+            <p:cNvSpPr/>
+            <p:nvPr/>
+          </p:nvSpPr>
+          <p:spPr>
+            <a:xfrm>
+              <a:off x="4472829" y="4336484"/>
+              <a:ext cx="0" cy="1317069"/>
+            </a:xfrm>
+            <a:custGeom>
+              <a:avLst/>
+              <a:pathLst>
+                <a:path w="0" h="1317069">
+                  <a:moveTo>
+                    <a:pt x="0" y="1317069"/>
+                  </a:moveTo>
+                  <a:lnTo>
+                    <a:pt x="0" y="0"/>
+                  </a:lnTo>
+                  <a:lnTo>
+                    <a:pt x="0" y="0"/>
+                  </a:lnTo>
+                </a:path>
+              </a:pathLst>
+            </a:custGeom>
+            <a:ln w="13550" cap="flat">
+              <a:solidFill>
+                <a:srgbClr val="666666">
+                  <a:alpha val="100000"/>
+                </a:srgbClr>
+              </a:solidFill>
+              <a:prstDash val="dot"/>
+              <a:round/>
+            </a:ln>
+          </p:spPr>
+          <p:txBody>
+            <a:bodyPr/>
+            <a:lstStyle/>
+            <a:p/>
+          </p:txBody>
+        </p:sp>
+        <p:sp>
+          <p:nvSpPr>
+            <p:cNvPr id="73" name="tx73"/>
+            <p:cNvSpPr/>
+            <p:nvPr/>
+          </p:nvSpPr>
+          <p:spPr>
+            <a:xfrm>
+              <a:off x="762297" y="5553636"/>
+              <a:ext cx="62179" cy="80101"/>
+            </a:xfrm>
+            <a:prstGeom prst="rect">
+              <a:avLst/>
+            </a:prstGeom>
+            <a:noFill/>
+          </p:spPr>
+          <p:txBody>
+            <a:bodyPr lIns="0" rIns="0" tIns="0" bIns="0" anchorCtr="1" anchor="ctr" wrap="none"/>
+            <a:lstStyle/>
+            <a:p>
+              <a:pPr algn="l" marL="0" marR="0" indent="0">
+                <a:lnSpc>
+                  <a:spcPts val="880"/>
+                </a:lnSpc>
+                <a:spcBef>
+                  <a:spcPts val="0"/>
+                </a:spcBef>
+                <a:spcAft>
+                  <a:spcPts val="0"/>
+                </a:spcAft>
+              </a:pPr>
+              <a:r>
+                <a:rPr sz="880">
+                  <a:solidFill>
+                    <a:srgbClr val="4D4D4D">
+                      <a:alpha val="100000"/>
+                    </a:srgbClr>
+                  </a:solidFill>
+                  <a:latin typeface="Helvetica"/>
+                  <a:cs typeface="Helvetica"/>
+                </a:rPr>
+                <a:t>0</a:t>
+              </a:r>
+            </a:p>
+          </p:txBody>
+        </p:sp>
+        <p:sp>
+          <p:nvSpPr>
+            <p:cNvPr id="74" name="tx74"/>
+            <p:cNvSpPr/>
+            <p:nvPr/>
+          </p:nvSpPr>
+          <p:spPr>
+            <a:xfrm>
+              <a:off x="762297" y="5254302"/>
+              <a:ext cx="62179" cy="80101"/>
+            </a:xfrm>
+            <a:prstGeom prst="rect">
+              <a:avLst/>
+            </a:prstGeom>
+            <a:noFill/>
+          </p:spPr>
+          <p:txBody>
+            <a:bodyPr lIns="0" rIns="0" tIns="0" bIns="0" anchorCtr="1" anchor="ctr" wrap="none"/>
+            <a:lstStyle/>
+            <a:p>
+              <a:pPr algn="l" marL="0" marR="0" indent="0">
+                <a:lnSpc>
+                  <a:spcPts val="880"/>
+                </a:lnSpc>
+                <a:spcBef>
+                  <a:spcPts val="0"/>
+                </a:spcBef>
+                <a:spcAft>
+                  <a:spcPts val="0"/>
+                </a:spcAft>
+              </a:pPr>
+              <a:r>
+                <a:rPr sz="880">
+                  <a:solidFill>
+                    <a:srgbClr val="4D4D4D">
+                      <a:alpha val="100000"/>
+                    </a:srgbClr>
+                  </a:solidFill>
+                  <a:latin typeface="Helvetica"/>
+                  <a:cs typeface="Helvetica"/>
+                </a:rPr>
+                <a:t>1</a:t>
+              </a:r>
+            </a:p>
+          </p:txBody>
+        </p:sp>
+        <p:sp>
+          <p:nvSpPr>
+            <p:cNvPr id="75" name="tx75"/>
+            <p:cNvSpPr/>
+            <p:nvPr/>
+          </p:nvSpPr>
+          <p:spPr>
+            <a:xfrm>
+              <a:off x="762297" y="4954968"/>
+              <a:ext cx="62179" cy="80101"/>
+            </a:xfrm>
+            <a:prstGeom prst="rect">
+              <a:avLst/>
+            </a:prstGeom>
+            <a:noFill/>
+          </p:spPr>
+          <p:txBody>
+            <a:bodyPr lIns="0" rIns="0" tIns="0" bIns="0" anchorCtr="1" anchor="ctr" wrap="none"/>
+            <a:lstStyle/>
+            <a:p>
+              <a:pPr algn="l" marL="0" marR="0" indent="0">
+                <a:lnSpc>
+                  <a:spcPts val="880"/>
+                </a:lnSpc>
+                <a:spcBef>
+                  <a:spcPts val="0"/>
+                </a:spcBef>
+                <a:spcAft>
+                  <a:spcPts val="0"/>
+                </a:spcAft>
+              </a:pPr>
+              <a:r>
+                <a:rPr sz="880">
+                  <a:solidFill>
+                    <a:srgbClr val="4D4D4D">
+                      <a:alpha val="100000"/>
+                    </a:srgbClr>
+                  </a:solidFill>
+                  <a:latin typeface="Helvetica"/>
+                  <a:cs typeface="Helvetica"/>
+                </a:rPr>
+                <a:t>2</a:t>
+              </a:r>
+            </a:p>
+          </p:txBody>
+        </p:sp>
+        <p:sp>
+          <p:nvSpPr>
+            <p:cNvPr id="76" name="tx76"/>
+            <p:cNvSpPr/>
+            <p:nvPr/>
+          </p:nvSpPr>
+          <p:spPr>
+            <a:xfrm>
+              <a:off x="762297" y="4655634"/>
+              <a:ext cx="62179" cy="80101"/>
+            </a:xfrm>
+            <a:prstGeom prst="rect">
+              <a:avLst/>
+            </a:prstGeom>
+            <a:noFill/>
+          </p:spPr>
+          <p:txBody>
+            <a:bodyPr lIns="0" rIns="0" tIns="0" bIns="0" anchorCtr="1" anchor="ctr" wrap="none"/>
+            <a:lstStyle/>
+            <a:p>
+              <a:pPr algn="l" marL="0" marR="0" indent="0">
+                <a:lnSpc>
+                  <a:spcPts val="880"/>
+                </a:lnSpc>
+                <a:spcBef>
+                  <a:spcPts val="0"/>
+                </a:spcBef>
+                <a:spcAft>
+                  <a:spcPts val="0"/>
+                </a:spcAft>
+              </a:pPr>
+              <a:r>
+                <a:rPr sz="880">
+                  <a:solidFill>
+                    <a:srgbClr val="4D4D4D">
+                      <a:alpha val="100000"/>
+                    </a:srgbClr>
+                  </a:solidFill>
+                  <a:latin typeface="Helvetica"/>
+                  <a:cs typeface="Helvetica"/>
+                </a:rPr>
+                <a:t>3</a:t>
+              </a:r>
+            </a:p>
+          </p:txBody>
+        </p:sp>
+        <p:sp>
+          <p:nvSpPr>
+            <p:cNvPr id="77" name="tx77"/>
+            <p:cNvSpPr/>
+            <p:nvPr/>
+          </p:nvSpPr>
+          <p:spPr>
+            <a:xfrm>
+              <a:off x="762297" y="4356300"/>
+              <a:ext cx="62179" cy="80101"/>
+            </a:xfrm>
+            <a:prstGeom prst="rect">
+              <a:avLst/>
+            </a:prstGeom>
+            <a:noFill/>
+          </p:spPr>
+          <p:txBody>
+            <a:bodyPr lIns="0" rIns="0" tIns="0" bIns="0" anchorCtr="1" anchor="ctr" wrap="none"/>
+            <a:lstStyle/>
+            <a:p>
+              <a:pPr algn="l" marL="0" marR="0" indent="0">
+                <a:lnSpc>
+                  <a:spcPts val="880"/>
+                </a:lnSpc>
+                <a:spcBef>
+                  <a:spcPts val="0"/>
+                </a:spcBef>
+                <a:spcAft>
+                  <a:spcPts val="0"/>
+                </a:spcAft>
+              </a:pPr>
+              <a:r>
+                <a:rPr sz="880">
+                  <a:solidFill>
+                    <a:srgbClr val="4D4D4D">
+                      <a:alpha val="100000"/>
+                    </a:srgbClr>
+                  </a:solidFill>
+                  <a:latin typeface="Helvetica"/>
+                  <a:cs typeface="Helvetica"/>
+                </a:rPr>
+                <a:t>4</a:t>
+              </a:r>
+            </a:p>
+          </p:txBody>
+        </p:sp>
+        <p:sp>
+          <p:nvSpPr>
+            <p:cNvPr id="78" name="tx78"/>
+            <p:cNvSpPr/>
+            <p:nvPr/>
+          </p:nvSpPr>
+          <p:spPr>
+            <a:xfrm>
+              <a:off x="1306098" y="5716183"/>
+              <a:ext cx="161574" cy="80101"/>
+            </a:xfrm>
+            <a:prstGeom prst="rect">
+              <a:avLst/>
+            </a:prstGeom>
+            <a:noFill/>
+          </p:spPr>
+          <p:txBody>
+            <a:bodyPr lIns="0" rIns="0" tIns="0" bIns="0" anchorCtr="1" anchor="ctr" wrap="none"/>
+            <a:lstStyle/>
+            <a:p>
+              <a:pPr algn="l" marL="0" marR="0" indent="0">
+                <a:lnSpc>
+                  <a:spcPts val="880"/>
+                </a:lnSpc>
+                <a:spcBef>
+                  <a:spcPts val="0"/>
+                </a:spcBef>
+                <a:spcAft>
+                  <a:spcPts val="0"/>
+                </a:spcAft>
+              </a:pPr>
+              <a:r>
+                <a:rPr sz="880">
+                  <a:solidFill>
+                    <a:srgbClr val="4D4D4D">
+                      <a:alpha val="100000"/>
+                    </a:srgbClr>
+                  </a:solidFill>
+                  <a:latin typeface="Helvetica"/>
+                  <a:cs typeface="Helvetica"/>
+                </a:rPr>
+                <a:t>-40</a:t>
+              </a:r>
+            </a:p>
+          </p:txBody>
+        </p:sp>
+        <p:sp>
+          <p:nvSpPr>
+            <p:cNvPr id="79" name="tx79"/>
+            <p:cNvSpPr/>
+            <p:nvPr/>
+          </p:nvSpPr>
+          <p:spPr>
+            <a:xfrm>
+              <a:off x="2113264" y="5716183"/>
+              <a:ext cx="161574" cy="80101"/>
+            </a:xfrm>
+            <a:prstGeom prst="rect">
+              <a:avLst/>
+            </a:prstGeom>
+            <a:noFill/>
+          </p:spPr>
+          <p:txBody>
+            <a:bodyPr lIns="0" rIns="0" tIns="0" bIns="0" anchorCtr="1" anchor="ctr" wrap="none"/>
+            <a:lstStyle/>
+            <a:p>
+              <a:pPr algn="l" marL="0" marR="0" indent="0">
+                <a:lnSpc>
+                  <a:spcPts val="880"/>
+                </a:lnSpc>
+                <a:spcBef>
+                  <a:spcPts val="0"/>
+                </a:spcBef>
+                <a:spcAft>
+                  <a:spcPts val="0"/>
+                </a:spcAft>
+              </a:pPr>
+              <a:r>
+                <a:rPr sz="880">
+                  <a:solidFill>
+                    <a:srgbClr val="4D4D4D">
+                      <a:alpha val="100000"/>
+                    </a:srgbClr>
+                  </a:solidFill>
+                  <a:latin typeface="Helvetica"/>
+                  <a:cs typeface="Helvetica"/>
+                </a:rPr>
+                <a:t>-30</a:t>
+              </a:r>
+            </a:p>
+          </p:txBody>
+        </p:sp>
+        <p:sp>
+          <p:nvSpPr>
+            <p:cNvPr id="80" name="tx80"/>
+            <p:cNvSpPr/>
+            <p:nvPr/>
+          </p:nvSpPr>
+          <p:spPr>
+            <a:xfrm>
+              <a:off x="2920429" y="5716183"/>
+              <a:ext cx="161574" cy="80101"/>
+            </a:xfrm>
+            <a:prstGeom prst="rect">
+              <a:avLst/>
+            </a:prstGeom>
+            <a:noFill/>
+          </p:spPr>
+          <p:txBody>
+            <a:bodyPr lIns="0" rIns="0" tIns="0" bIns="0" anchorCtr="1" anchor="ctr" wrap="none"/>
+            <a:lstStyle/>
+            <a:p>
+              <a:pPr algn="l" marL="0" marR="0" indent="0">
+                <a:lnSpc>
+                  <a:spcPts val="880"/>
+                </a:lnSpc>
+                <a:spcBef>
+                  <a:spcPts val="0"/>
+                </a:spcBef>
+                <a:spcAft>
+                  <a:spcPts val="0"/>
+                </a:spcAft>
+              </a:pPr>
+              <a:r>
+                <a:rPr sz="880">
+                  <a:solidFill>
+                    <a:srgbClr val="4D4D4D">
+                      <a:alpha val="100000"/>
+                    </a:srgbClr>
+                  </a:solidFill>
+                  <a:latin typeface="Helvetica"/>
+                  <a:cs typeface="Helvetica"/>
+                </a:rPr>
+                <a:t>-20</a:t>
+              </a:r>
+            </a:p>
+          </p:txBody>
+        </p:sp>
+        <p:sp>
+          <p:nvSpPr>
+            <p:cNvPr id="81" name="tx81"/>
+            <p:cNvSpPr/>
+            <p:nvPr/>
+          </p:nvSpPr>
+          <p:spPr>
+            <a:xfrm>
+              <a:off x="3727595" y="5716183"/>
+              <a:ext cx="161574" cy="80101"/>
+            </a:xfrm>
+            <a:prstGeom prst="rect">
+              <a:avLst/>
+            </a:prstGeom>
+            <a:noFill/>
+          </p:spPr>
+          <p:txBody>
+            <a:bodyPr lIns="0" rIns="0" tIns="0" bIns="0" anchorCtr="1" anchor="ctr" wrap="none"/>
+            <a:lstStyle/>
+            <a:p>
+              <a:pPr algn="l" marL="0" marR="0" indent="0">
+                <a:lnSpc>
+                  <a:spcPts val="880"/>
+                </a:lnSpc>
+                <a:spcBef>
+                  <a:spcPts val="0"/>
+                </a:spcBef>
+                <a:spcAft>
+                  <a:spcPts val="0"/>
+                </a:spcAft>
+              </a:pPr>
+              <a:r>
+                <a:rPr sz="880">
+                  <a:solidFill>
+                    <a:srgbClr val="4D4D4D">
+                      <a:alpha val="100000"/>
+                    </a:srgbClr>
+                  </a:solidFill>
+                  <a:latin typeface="Helvetica"/>
+                  <a:cs typeface="Helvetica"/>
+                </a:rPr>
+                <a:t>-10</a:t>
+              </a:r>
+            </a:p>
+          </p:txBody>
+        </p:sp>
+        <p:sp>
+          <p:nvSpPr>
+            <p:cNvPr id="82" name="tx82"/>
+            <p:cNvSpPr/>
+            <p:nvPr/>
+          </p:nvSpPr>
+          <p:spPr>
+            <a:xfrm>
+              <a:off x="4584458" y="5716183"/>
+              <a:ext cx="62179" cy="80101"/>
+            </a:xfrm>
+            <a:prstGeom prst="rect">
+              <a:avLst/>
+            </a:prstGeom>
+            <a:noFill/>
+          </p:spPr>
+          <p:txBody>
+            <a:bodyPr lIns="0" rIns="0" tIns="0" bIns="0" anchorCtr="1" anchor="ctr" wrap="none"/>
+            <a:lstStyle/>
+            <a:p>
+              <a:pPr algn="l" marL="0" marR="0" indent="0">
+                <a:lnSpc>
+                  <a:spcPts val="880"/>
+                </a:lnSpc>
+                <a:spcBef>
+                  <a:spcPts val="0"/>
+                </a:spcBef>
+                <a:spcAft>
+                  <a:spcPts val="0"/>
+                </a:spcAft>
+              </a:pPr>
+              <a:r>
+                <a:rPr sz="880">
+                  <a:solidFill>
+                    <a:srgbClr val="4D4D4D">
+                      <a:alpha val="100000"/>
+                    </a:srgbClr>
+                  </a:solidFill>
+                  <a:latin typeface="Helvetica"/>
+                  <a:cs typeface="Helvetica"/>
+                </a:rPr>
+                <a:t>0</a:t>
+              </a:r>
+            </a:p>
+          </p:txBody>
+        </p:sp>
+        <p:sp>
+          <p:nvSpPr>
+            <p:cNvPr id="83" name="tx83"/>
+            <p:cNvSpPr/>
+            <p:nvPr/>
+          </p:nvSpPr>
+          <p:spPr>
+            <a:xfrm>
+              <a:off x="5360534" y="5716183"/>
+              <a:ext cx="124358" cy="80101"/>
+            </a:xfrm>
+            <a:prstGeom prst="rect">
+              <a:avLst/>
+            </a:prstGeom>
+            <a:noFill/>
+          </p:spPr>
+          <p:txBody>
+            <a:bodyPr lIns="0" rIns="0" tIns="0" bIns="0" anchorCtr="1" anchor="ctr" wrap="none"/>
+            <a:lstStyle/>
+            <a:p>
+              <a:pPr algn="l" marL="0" marR="0" indent="0">
+                <a:lnSpc>
+                  <a:spcPts val="880"/>
+                </a:lnSpc>
+                <a:spcBef>
+                  <a:spcPts val="0"/>
+                </a:spcBef>
+                <a:spcAft>
+                  <a:spcPts val="0"/>
+                </a:spcAft>
+              </a:pPr>
+              <a:r>
+                <a:rPr sz="880">
+                  <a:solidFill>
+                    <a:srgbClr val="4D4D4D">
+                      <a:alpha val="100000"/>
+                    </a:srgbClr>
+                  </a:solidFill>
+                  <a:latin typeface="Helvetica"/>
+                  <a:cs typeface="Helvetica"/>
+                </a:rPr>
+                <a:t>10</a:t>
+              </a:r>
+            </a:p>
+          </p:txBody>
+        </p:sp>
+        <p:sp>
+          <p:nvSpPr>
+            <p:cNvPr id="84" name="tx84"/>
+            <p:cNvSpPr/>
+            <p:nvPr/>
+          </p:nvSpPr>
+          <p:spPr>
+            <a:xfrm>
+              <a:off x="6167699" y="5716183"/>
+              <a:ext cx="124358" cy="80101"/>
+            </a:xfrm>
+            <a:prstGeom prst="rect">
+              <a:avLst/>
+            </a:prstGeom>
+            <a:noFill/>
+          </p:spPr>
+          <p:txBody>
+            <a:bodyPr lIns="0" rIns="0" tIns="0" bIns="0" anchorCtr="1" anchor="ctr" wrap="none"/>
+            <a:lstStyle/>
+            <a:p>
+              <a:pPr algn="l" marL="0" marR="0" indent="0">
+                <a:lnSpc>
+                  <a:spcPts val="880"/>
+                </a:lnSpc>
+                <a:spcBef>
+                  <a:spcPts val="0"/>
+                </a:spcBef>
+                <a:spcAft>
+                  <a:spcPts val="0"/>
+                </a:spcAft>
+              </a:pPr>
+              <a:r>
+                <a:rPr sz="880">
+                  <a:solidFill>
+                    <a:srgbClr val="4D4D4D">
+                      <a:alpha val="100000"/>
+                    </a:srgbClr>
+                  </a:solidFill>
+                  <a:latin typeface="Helvetica"/>
+                  <a:cs typeface="Helvetica"/>
+                </a:rPr>
+                <a:t>20</a:t>
+              </a:r>
+            </a:p>
+          </p:txBody>
+        </p:sp>
+        <p:sp>
+          <p:nvSpPr>
+            <p:cNvPr id="85" name="tx85"/>
+            <p:cNvSpPr/>
+            <p:nvPr/>
+          </p:nvSpPr>
+          <p:spPr>
+            <a:xfrm>
+              <a:off x="6974865" y="5716183"/>
+              <a:ext cx="124358" cy="80101"/>
+            </a:xfrm>
+            <a:prstGeom prst="rect">
+              <a:avLst/>
+            </a:prstGeom>
+            <a:noFill/>
+          </p:spPr>
+          <p:txBody>
+            <a:bodyPr lIns="0" rIns="0" tIns="0" bIns="0" anchorCtr="1" anchor="ctr" wrap="none"/>
+            <a:lstStyle/>
+            <a:p>
+              <a:pPr algn="l" marL="0" marR="0" indent="0">
+                <a:lnSpc>
+                  <a:spcPts val="880"/>
+                </a:lnSpc>
+                <a:spcBef>
+                  <a:spcPts val="0"/>
+                </a:spcBef>
+                <a:spcAft>
+                  <a:spcPts val="0"/>
+                </a:spcAft>
+              </a:pPr>
+              <a:r>
+                <a:rPr sz="880">
+                  <a:solidFill>
+                    <a:srgbClr val="4D4D4D">
+                      <a:alpha val="100000"/>
+                    </a:srgbClr>
+                  </a:solidFill>
+                  <a:latin typeface="Helvetica"/>
+                  <a:cs typeface="Helvetica"/>
+                </a:rPr>
+                <a:t>30</a:t>
+              </a:r>
+            </a:p>
+          </p:txBody>
+        </p:sp>
+        <p:sp>
+          <p:nvSpPr>
+            <p:cNvPr id="86" name="tx86"/>
+            <p:cNvSpPr/>
+            <p:nvPr/>
+          </p:nvSpPr>
+          <p:spPr>
+            <a:xfrm>
+              <a:off x="7782030" y="5716183"/>
+              <a:ext cx="124358" cy="80101"/>
+            </a:xfrm>
+            <a:prstGeom prst="rect">
+              <a:avLst/>
+            </a:prstGeom>
+            <a:noFill/>
+          </p:spPr>
+          <p:txBody>
+            <a:bodyPr lIns="0" rIns="0" tIns="0" bIns="0" anchorCtr="1" anchor="ctr" wrap="none"/>
+            <a:lstStyle/>
+            <a:p>
+              <a:pPr algn="l" marL="0" marR="0" indent="0">
+                <a:lnSpc>
+                  <a:spcPts val="880"/>
+                </a:lnSpc>
+                <a:spcBef>
+                  <a:spcPts val="0"/>
+                </a:spcBef>
+                <a:spcAft>
+                  <a:spcPts val="0"/>
+                </a:spcAft>
+              </a:pPr>
+              <a:r>
+                <a:rPr sz="880">
+                  <a:solidFill>
+                    <a:srgbClr val="4D4D4D">
+                      <a:alpha val="100000"/>
+                    </a:srgbClr>
+                  </a:solidFill>
+                  <a:latin typeface="Helvetica"/>
+                  <a:cs typeface="Helvetica"/>
+                </a:rPr>
+                <a:t>40</a:t>
+              </a:r>
+            </a:p>
+          </p:txBody>
+        </p:sp>
+        <p:sp>
+          <p:nvSpPr>
+            <p:cNvPr id="87" name="tx87"/>
+            <p:cNvSpPr/>
+            <p:nvPr/>
+          </p:nvSpPr>
+          <p:spPr>
+            <a:xfrm>
+              <a:off x="2928340" y="5855859"/>
+              <a:ext cx="3578047" cy="100218"/>
+            </a:xfrm>
+            <a:prstGeom prst="rect">
+              <a:avLst/>
+            </a:prstGeom>
+            <a:noFill/>
+          </p:spPr>
+          <p:txBody>
+            <a:bodyPr lIns="0" rIns="0" tIns="0" bIns="0" anchorCtr="1" anchor="ctr" wrap="none"/>
+            <a:lstStyle/>
+            <a:p>
+              <a:pPr algn="l" marL="0" marR="0" indent="0">
+                <a:lnSpc>
+                  <a:spcPts val="1100"/>
+                </a:lnSpc>
+                <a:spcBef>
+                  <a:spcPts val="0"/>
+                </a:spcBef>
+                <a:spcAft>
+                  <a:spcPts val="0"/>
+                </a:spcAft>
+              </a:pPr>
+              <a:r>
+                <a:rPr sz="1100">
+                  <a:solidFill>
+                    <a:srgbClr val="000000">
+                      <a:alpha val="100000"/>
+                    </a:srgbClr>
+                  </a:solidFill>
+                  <a:latin typeface="Helvetica"/>
+                  <a:cs typeface="Helvetica"/>
+                </a:rPr>
+                <a:t>eGFR difference (%): 100 × (CKD-EPI Cr-Cys − CG) / CG</a:t>
+              </a:r>
+            </a:p>
+          </p:txBody>
+        </p:sp>
+        <p:sp>
+          <p:nvSpPr>
+            <p:cNvPr id="88" name="tx88"/>
+            <p:cNvSpPr/>
+            <p:nvPr/>
+          </p:nvSpPr>
+          <p:spPr>
+            <a:xfrm rot="-5400000">
+              <a:off x="138035" y="4944909"/>
+              <a:ext cx="1016904" cy="100218"/>
+            </a:xfrm>
+            <a:prstGeom prst="rect">
+              <a:avLst/>
+            </a:prstGeom>
+            <a:noFill/>
+          </p:spPr>
+          <p:txBody>
+            <a:bodyPr lIns="0" rIns="0" tIns="0" bIns="0" anchorCtr="1" anchor="ctr" wrap="none"/>
+            <a:lstStyle/>
+            <a:p>
+              <a:pPr algn="l" marL="0" marR="0" indent="0">
+                <a:lnSpc>
+                  <a:spcPts val="1100"/>
+                </a:lnSpc>
+                <a:spcBef>
+                  <a:spcPts val="0"/>
+                </a:spcBef>
+                <a:spcAft>
+                  <a:spcPts val="0"/>
+                </a:spcAft>
+              </a:pPr>
+              <a:r>
+                <a:rPr sz="1100">
+                  <a:solidFill>
+                    <a:srgbClr val="000000">
+                      <a:alpha val="100000"/>
+                    </a:srgbClr>
+                  </a:solidFill>
+                  <a:latin typeface="Helvetica"/>
+                  <a:cs typeface="Helvetica"/>
+                </a:rPr>
+                <a:t>subHR (95% CI)</a:t>
+              </a:r>
+            </a:p>
+          </p:txBody>
+        </p:sp>
+        <p:sp>
+          <p:nvSpPr>
+            <p:cNvPr id="89" name="tx89"/>
+            <p:cNvSpPr/>
+            <p:nvPr/>
+          </p:nvSpPr>
+          <p:spPr>
+            <a:xfrm>
+              <a:off x="887106" y="4159544"/>
+              <a:ext cx="6321612" cy="82021"/>
+            </a:xfrm>
+            <a:prstGeom prst="rect">
+              <a:avLst/>
+            </a:prstGeom>
+            <a:noFill/>
+          </p:spPr>
+          <p:txBody>
+            <a:bodyPr lIns="0" rIns="0" tIns="0" bIns="0" anchorCtr="1" anchor="ctr" wrap="none"/>
+            <a:lstStyle/>
+            <a:p>
+              <a:pPr algn="l" marL="0" marR="0" indent="0">
+                <a:lnSpc>
+                  <a:spcPts val="900"/>
+                </a:lnSpc>
+                <a:spcBef>
+                  <a:spcPts val="0"/>
+                </a:spcBef>
+                <a:spcAft>
+                  <a:spcPts val="0"/>
+                </a:spcAft>
+              </a:pPr>
+              <a:r>
+                <a:rPr sz="900">
+                  <a:solidFill>
+                    <a:srgbClr val="404040">
+                      <a:alpha val="100000"/>
+                    </a:srgbClr>
+                  </a:solidFill>
+                  <a:latin typeface="Helvetica"/>
+                  <a:cs typeface="Helvetica"/>
+                </a:rPr>
+                <a:t>subHR per 10 % decline: 1.35 (0.84-2.17), p = 0.210  |  per IQR decline (Δ = 29.5 %): 2.44 (0.61-9.87)  |  IQR: [-15.6, 13.9] %</a:t>
+              </a:r>
+            </a:p>
+          </p:txBody>
+        </p:sp>
+        <p:sp>
+          <p:nvSpPr>
+            <p:cNvPr id="90" name="tx90"/>
+            <p:cNvSpPr/>
+            <p:nvPr/>
+          </p:nvSpPr>
+          <p:spPr>
+            <a:xfrm>
+              <a:off x="887106" y="3932770"/>
               <a:ext cx="3164646" cy="120152"/>
             </a:xfrm>
             <a:prstGeom prst="rect">
